--- a/slides/output/Career_Canvas_Meeting_1_Creativity_Across_DECA_Areas.pptx
+++ b/slides/output/Career_Canvas_Meeting_1_Creativity_Across_DECA_Areas.pptx
@@ -2,24 +2,24 @@
 <file path=ppt/presentation.xml><?xml version="1.0" encoding="utf-8"?>
 <p:presentation xmlns:p="http://schemas.openxmlformats.org/presentationml/2006/main">
   <p:sldMasterIdLst>
-    <p:sldMasterId xmlns:r="http://schemas.openxmlformats.org/officeDocument/2006/relationships" id="2147483648" r:id="Re379bad81ef542d1"/>
+    <p:sldMasterId xmlns:r="http://schemas.openxmlformats.org/officeDocument/2006/relationships" id="2147483648" r:id="Rce40949948a34d12"/>
   </p:sldMasterIdLst>
   <p:notesMasterIdLst>
-    <p:notesMasterId xmlns:r="http://schemas.openxmlformats.org/officeDocument/2006/relationships" r:id="R4affcc4b7c1d4b4f"/>
+    <p:notesMasterId xmlns:r="http://schemas.openxmlformats.org/officeDocument/2006/relationships" r:id="Rcf168a74051f4484"/>
   </p:notesMasterIdLst>
   <p:sldIdLst>
-    <p:sldId xmlns:r="http://schemas.openxmlformats.org/officeDocument/2006/relationships" id="256" r:id="R86b346972b8d4e41"/>
-    <p:sldId xmlns:r="http://schemas.openxmlformats.org/officeDocument/2006/relationships" id="257" r:id="Raa058f86b7584d26"/>
-    <p:sldId xmlns:r="http://schemas.openxmlformats.org/officeDocument/2006/relationships" id="258" r:id="R62a5869129af4af1"/>
-    <p:sldId xmlns:r="http://schemas.openxmlformats.org/officeDocument/2006/relationships" id="259" r:id="Rf41fd0983f9e44a9"/>
-    <p:sldId xmlns:r="http://schemas.openxmlformats.org/officeDocument/2006/relationships" id="260" r:id="R7032d999210c4666"/>
-    <p:sldId xmlns:r="http://schemas.openxmlformats.org/officeDocument/2006/relationships" id="261" r:id="R3186534acb8c403a"/>
-    <p:sldId xmlns:r="http://schemas.openxmlformats.org/officeDocument/2006/relationships" id="262" r:id="R92f13658652f4c54"/>
-    <p:sldId xmlns:r="http://schemas.openxmlformats.org/officeDocument/2006/relationships" id="263" r:id="R19591ffe319549df"/>
-    <p:sldId xmlns:r="http://schemas.openxmlformats.org/officeDocument/2006/relationships" id="264" r:id="Rca495b3deb9b496d"/>
-    <p:sldId xmlns:r="http://schemas.openxmlformats.org/officeDocument/2006/relationships" id="265" r:id="R15d2fb1ed7ce4824"/>
-    <p:sldId xmlns:r="http://schemas.openxmlformats.org/officeDocument/2006/relationships" id="266" r:id="R9aa4d04258694142"/>
-    <p:sldId xmlns:r="http://schemas.openxmlformats.org/officeDocument/2006/relationships" id="267" r:id="R52b8c8b261df470f"/>
+    <p:sldId xmlns:r="http://schemas.openxmlformats.org/officeDocument/2006/relationships" id="256" r:id="R8234b6ceeb3a4401"/>
+    <p:sldId xmlns:r="http://schemas.openxmlformats.org/officeDocument/2006/relationships" id="257" r:id="Rc3bf541ab5e8423a"/>
+    <p:sldId xmlns:r="http://schemas.openxmlformats.org/officeDocument/2006/relationships" id="258" r:id="R8e217e3e5c6b4b0d"/>
+    <p:sldId xmlns:r="http://schemas.openxmlformats.org/officeDocument/2006/relationships" id="259" r:id="R054abd30f13c4964"/>
+    <p:sldId xmlns:r="http://schemas.openxmlformats.org/officeDocument/2006/relationships" id="260" r:id="Rc3d0a55bf2824df1"/>
+    <p:sldId xmlns:r="http://schemas.openxmlformats.org/officeDocument/2006/relationships" id="261" r:id="R11626ba1679942e7"/>
+    <p:sldId xmlns:r="http://schemas.openxmlformats.org/officeDocument/2006/relationships" id="262" r:id="R6e95a6a38fe74694"/>
+    <p:sldId xmlns:r="http://schemas.openxmlformats.org/officeDocument/2006/relationships" id="263" r:id="Rf888806585e0439c"/>
+    <p:sldId xmlns:r="http://schemas.openxmlformats.org/officeDocument/2006/relationships" id="264" r:id="Re55de35a760f460f"/>
+    <p:sldId xmlns:r="http://schemas.openxmlformats.org/officeDocument/2006/relationships" id="265" r:id="Rc58e69c1a1884040"/>
+    <p:sldId xmlns:r="http://schemas.openxmlformats.org/officeDocument/2006/relationships" id="266" r:id="R801ad4839bb1491e"/>
+    <p:sldId xmlns:r="http://schemas.openxmlformats.org/officeDocument/2006/relationships" id="267" r:id="R453d70410a1440fd"/>
   </p:sldIdLst>
   <p:sldSz cx="12192000" cy="6858000"/>
   <p:notesSz cx="6858000" cy="9144000"/>
@@ -453,7 +453,22 @@
           <a:lstStyle xmlns:a="http://schemas.openxmlformats.org/drawingml/2006/main"/>
           <a:p xmlns:a="http://schemas.openxmlformats.org/drawingml/2006/main">
             <a:r>
-              <a:t>Do not open with a lecture. Ask where they used creativity today without making art, take two answers, and go straight to the anchor slide.</a:t>
+              <a:t>The chart is the Future of Jobs 2025 core-skills ranking; creative thinking is fourth. Do not open with a lecture. Ask where they used creativity today without making art, take two answers, and go straight to the anchor slide.</a:t>
+            </a:r>
+          </a:p>
+          <a:p xmlns:a="http://schemas.openxmlformats.org/drawingml/2006/main">
+            <a:r>
+              <a:t/>
+            </a:r>
+          </a:p>
+          <a:p xmlns:a="http://schemas.openxmlformats.org/drawingml/2006/main">
+            <a:r>
+              <a:t>Sources:</a:t>
+            </a:r>
+          </a:p>
+          <a:p xmlns:a="http://schemas.openxmlformats.org/drawingml/2006/main">
+            <a:r>
+              <a:t>- https://www.weforum.org/publications/the-future-of-jobs-report-2025/in-full/3-skills-outlook/</a:t>
             </a:r>
           </a:p>
         </p:txBody>
@@ -1441,7 +1456,7 @@
   </p:cSld>
   <p:clrMap bg1="lt1" tx1="dk1" bg2="lt2" tx2="dk2" accent1="accent1" accent2="accent2" accent3="accent3" accent4="accent4" accent5="accent5" accent6="accent6" hlink="hlink" folHlink="folHlink"/>
   <p:sldLayoutIdLst>
-    <p:sldLayoutId xmlns:r="http://schemas.openxmlformats.org/officeDocument/2006/relationships" id="2147483649" r:id="R1ab5b79d1c7b4f10"/>
+    <p:sldLayoutId xmlns:r="http://schemas.openxmlformats.org/officeDocument/2006/relationships" id="2147483649" r:id="R840e096a23624e41"/>
   </p:sldLayoutIdLst>
   <p:txStyles>
     <p:titleStyle>
@@ -1987,57 +2002,176 @@
       <p:grpSpPr>
         <a:xfrm xmlns:a="http://schemas.openxmlformats.org/drawingml/2006/main"/>
       </p:grpSpPr>
-      <p:pic>
-        <p:nvPicPr>
-          <p:cNvPr id="9" name=""/>
-          <p:cNvPicPr>
-            <a:picLocks xmlns:a="http://schemas.openxmlformats.org/drawingml/2006/main" noChangeAspect="1"/>
-          </p:cNvPicPr>
-          <p:nvPr/>
-        </p:nvPicPr>
-        <p:blipFill>
-          <a:blip xmlns:r="http://schemas.openxmlformats.org/officeDocument/2006/relationships" xmlns:a="http://schemas.openxmlformats.org/drawingml/2006/main" r:embed="R75ddfb1d5c9342cb"/>
-          <a:srcRect xmlns:a="http://schemas.openxmlformats.org/drawingml/2006/main" l="0" t="27" r="0" b="27"/>
-          <a:stretch xmlns:a="http://schemas.openxmlformats.org/drawingml/2006/main">
-            <a:fillRect l="0" t="0" r="0" b="0"/>
-          </a:stretch>
-        </p:blipFill>
-        <p:spPr>
-          <a:xfrm xmlns:a="http://schemas.openxmlformats.org/drawingml/2006/main">
-            <a:off x="0" y="0"/>
-            <a:ext cx="12192000" cy="6858000"/>
-          </a:xfrm>
-          <a:prstGeom xmlns:a="http://schemas.openxmlformats.org/drawingml/2006/main" prst="rect">
-            <a:avLst/>
-          </a:prstGeom>
-        </p:spPr>
-      </p:pic>
+      <p:sp>
+        <p:nvSpPr>
+          <p:cNvPr id="53" name="">
+            <a:extLst xmlns:a="http://schemas.openxmlformats.org/drawingml/2006/main">
+              <a:ext uri="{FF2B5EF4-FFF2-40B4-BE49-F238E27FC236}">
+                <a16:creationId xmlns:a16="http://schemas.microsoft.com/office/drawing/2014/main" id="{8DFF3734-5990-4270-B80B-F7B2F94502C4}"/>
+              </a:ext>
+            </a:extLst>
+          </p:cNvPr>
+          <p:cNvSpPr>
+            <a:spLocks xmlns:a="http://schemas.openxmlformats.org/drawingml/2006/main" noGrp="1"/>
+          </p:cNvSpPr>
+          <p:nvPr/>
+        </p:nvSpPr>
+        <p:spPr>
+          <a:xfrm xmlns:a="http://schemas.openxmlformats.org/drawingml/2006/main">
+            <a:off x="6667500" y="0"/>
+            <a:ext cx="5524500" cy="6858000"/>
+          </a:xfrm>
+          <a:prstGeom xmlns:a="http://schemas.openxmlformats.org/drawingml/2006/main" prst="rect">
+            <a:avLst/>
+          </a:prstGeom>
+          <a:solidFill xmlns:a="http://schemas.openxmlformats.org/drawingml/2006/main">
+            <a:srgbClr val="0F1A2B"/>
+          </a:solidFill>
+          <a:ln xmlns:a="http://schemas.openxmlformats.org/drawingml/2006/main" w="0">
+            <a:noFill/>
+          </a:ln>
+        </p:spPr>
+      </p:sp>
       <p:sp>
         <p:nvSpPr>
           <p:cNvPr id="2" name="">
             <a:extLst xmlns:a="http://schemas.openxmlformats.org/drawingml/2006/main">
               <a:ext uri="{FF2B5EF4-FFF2-40B4-BE49-F238E27FC236}">
-                <a16:creationId xmlns:a16="http://schemas.microsoft.com/office/drawing/2014/main" id="{080979C3-DAC1-4DBE-BE31-2B8A0AB2EC75}"/>
-              </a:ext>
-            </a:extLst>
-          </p:cNvPr>
-          <p:cNvSpPr>
-            <a:spLocks xmlns:a="http://schemas.openxmlformats.org/drawingml/2006/main" noGrp="1"/>
-          </p:cNvSpPr>
-          <p:nvPr/>
-        </p:nvSpPr>
-        <p:spPr>
-          <a:xfrm xmlns:a="http://schemas.openxmlformats.org/drawingml/2006/main">
-            <a:off x="0" y="0"/>
-            <a:ext cx="5524500" cy="6858000"/>
-          </a:xfrm>
-          <a:prstGeom xmlns:a="http://schemas.openxmlformats.org/drawingml/2006/main" prst="rect">
-            <a:avLst/>
+                <a16:creationId xmlns:a16="http://schemas.microsoft.com/office/drawing/2014/main" id="{E788F787-3F24-43AB-8690-C7785474F2E7}"/>
+              </a:ext>
+            </a:extLst>
+          </p:cNvPr>
+          <p:cNvSpPr>
+            <a:spLocks xmlns:a="http://schemas.openxmlformats.org/drawingml/2006/main" noGrp="1"/>
+          </p:cNvSpPr>
+          <p:nvPr/>
+        </p:nvSpPr>
+        <p:spPr>
+          <a:xfrm xmlns:a="http://schemas.openxmlformats.org/drawingml/2006/main">
+            <a:off x="7124700" y="704850"/>
+            <a:ext cx="4476750" cy="228600"/>
+          </a:xfrm>
+          <a:prstGeom xmlns:a="http://schemas.openxmlformats.org/drawingml/2006/main" prst="rect">
+            <a:avLst/>
+          </a:prstGeom>
+          <a:noFill xmlns:a="http://schemas.openxmlformats.org/drawingml/2006/main"/>
+          <a:ln xmlns:a="http://schemas.openxmlformats.org/drawingml/2006/main" w="0">
+            <a:noFill/>
+          </a:ln>
+        </p:spPr>
+        <p:txBody>
+          <a:bodyPr xmlns:a="http://schemas.openxmlformats.org/drawingml/2006/main" anchor="t">
+            <a:noAutofit/>
+          </a:bodyPr>
+          <a:lstStyle xmlns:a="http://schemas.openxmlformats.org/drawingml/2006/main"/>
+          <a:p xmlns:a="http://schemas.openxmlformats.org/drawingml/2006/main">
+            <a:pPr algn="l">
+              <a:defRPr sz="975" b="1">
+                <a:solidFill>
+                  <a:srgbClr val="D1CFC9"/>
+                </a:solidFill>
+                <a:latin typeface="Helvetica Neue"/>
+                <a:ea typeface="Helvetica Neue"/>
+                <a:cs typeface="Helvetica Neue"/>
+              </a:defRPr>
+            </a:pPr>
+            <a:r>
+              <a:rPr sz="975" b="1">
+                <a:solidFill>
+                  <a:srgbClr val="D1CFC9"/>
+                </a:solidFill>
+                <a:latin typeface="Helvetica Neue"/>
+                <a:ea typeface="Helvetica Neue"/>
+                <a:cs typeface="Helvetica Neue"/>
+              </a:rPr>
+              <a:t>CORE SKILLS EMPLOYERS NEED IN 2025</a:t>
+            </a:r>
+          </a:p>
+        </p:txBody>
+      </p:sp>
+      <p:sp>
+        <p:nvSpPr>
+          <p:cNvPr id="3" name="">
+            <a:extLst xmlns:a="http://schemas.openxmlformats.org/drawingml/2006/main">
+              <a:ext uri="{FF2B5EF4-FFF2-40B4-BE49-F238E27FC236}">
+                <a16:creationId xmlns:a16="http://schemas.microsoft.com/office/drawing/2014/main" id="{CBE7706F-4F00-4B41-9120-6FF8A2281581}"/>
+              </a:ext>
+            </a:extLst>
+          </p:cNvPr>
+          <p:cNvSpPr>
+            <a:spLocks xmlns:a="http://schemas.openxmlformats.org/drawingml/2006/main" noGrp="1"/>
+          </p:cNvSpPr>
+          <p:nvPr/>
+        </p:nvSpPr>
+        <p:spPr>
+          <a:xfrm xmlns:a="http://schemas.openxmlformats.org/drawingml/2006/main">
+            <a:off x="7124700" y="971550"/>
+            <a:ext cx="4476750" cy="228600"/>
+          </a:xfrm>
+          <a:prstGeom xmlns:a="http://schemas.openxmlformats.org/drawingml/2006/main" prst="rect">
+            <a:avLst/>
+          </a:prstGeom>
+          <a:noFill xmlns:a="http://schemas.openxmlformats.org/drawingml/2006/main"/>
+          <a:ln xmlns:a="http://schemas.openxmlformats.org/drawingml/2006/main" w="0">
+            <a:noFill/>
+          </a:ln>
+        </p:spPr>
+        <p:txBody>
+          <a:bodyPr xmlns:a="http://schemas.openxmlformats.org/drawingml/2006/main" anchor="t">
+            <a:noAutofit/>
+          </a:bodyPr>
+          <a:lstStyle xmlns:a="http://schemas.openxmlformats.org/drawingml/2006/main"/>
+          <a:p xmlns:a="http://schemas.openxmlformats.org/drawingml/2006/main">
+            <a:pPr algn="l">
+              <a:defRPr sz="900" b="0">
+                <a:solidFill>
+                  <a:srgbClr val="BDC4D4"/>
+                </a:solidFill>
+                <a:latin typeface="Helvetica Neue"/>
+                <a:ea typeface="Helvetica Neue"/>
+                <a:cs typeface="Helvetica Neue"/>
+              </a:defRPr>
+            </a:pPr>
+            <a:r>
+              <a:rPr sz="900" b="0">
+                <a:solidFill>
+                  <a:srgbClr val="BDC4D4"/>
+                </a:solidFill>
+                <a:latin typeface="Helvetica Neue"/>
+                <a:ea typeface="Helvetica Neue"/>
+                <a:cs typeface="Helvetica Neue"/>
+              </a:rPr>
+              <a:t>Ranked by share of employers calling the skill essential</a:t>
+            </a:r>
+          </a:p>
+        </p:txBody>
+      </p:sp>
+      <p:sp>
+        <p:nvSpPr>
+          <p:cNvPr id="4" name="">
+            <a:extLst xmlns:a="http://schemas.openxmlformats.org/drawingml/2006/main">
+              <a:ext uri="{FF2B5EF4-FFF2-40B4-BE49-F238E27FC236}">
+                <a16:creationId xmlns:a16="http://schemas.microsoft.com/office/drawing/2014/main" id="{B19E0DCD-EFFA-45E3-8E0E-2B26A44ECDA7}"/>
+              </a:ext>
+            </a:extLst>
+          </p:cNvPr>
+          <p:cNvSpPr>
+            <a:spLocks xmlns:a="http://schemas.openxmlformats.org/drawingml/2006/main" noGrp="1"/>
+          </p:cNvSpPr>
+          <p:nvPr/>
+        </p:nvSpPr>
+        <p:spPr>
+          <a:xfrm xmlns:a="http://schemas.openxmlformats.org/drawingml/2006/main">
+            <a:off x="7124700" y="1314450"/>
+            <a:ext cx="4610100" cy="3810000"/>
+          </a:xfrm>
+          <a:prstGeom xmlns:a="http://schemas.openxmlformats.org/drawingml/2006/main" prst="roundRect">
+            <a:avLst>
+              <a:gd name="adj" fmla="val 2000"/>
+            </a:avLst>
           </a:prstGeom>
           <a:solidFill xmlns:a="http://schemas.openxmlformats.org/drawingml/2006/main">
-            <a:srgbClr val="FFFFFF">
-              <a:alpha val="90980"/>
-            </a:srgbClr>
+            <a:srgbClr val="FFFFFF"/>
           </a:solidFill>
           <a:ln xmlns:a="http://schemas.openxmlformats.org/drawingml/2006/main" w="0">
             <a:noFill/>
@@ -2046,22 +2180,109 @@
       </p:sp>
       <p:sp>
         <p:nvSpPr>
-          <p:cNvPr id="3" name="">
-            <a:extLst xmlns:a="http://schemas.openxmlformats.org/drawingml/2006/main">
-              <a:ext uri="{FF2B5EF4-FFF2-40B4-BE49-F238E27FC236}">
-                <a16:creationId xmlns:a16="http://schemas.microsoft.com/office/drawing/2014/main" id="{5F52E322-3050-4460-8F6B-12CBCB977EAF}"/>
-              </a:ext>
-            </a:extLst>
-          </p:cNvPr>
-          <p:cNvSpPr>
-            <a:spLocks xmlns:a="http://schemas.openxmlformats.org/drawingml/2006/main" noGrp="1"/>
-          </p:cNvSpPr>
-          <p:nvPr/>
-        </p:nvSpPr>
-        <p:spPr>
-          <a:xfrm xmlns:a="http://schemas.openxmlformats.org/drawingml/2006/main">
-            <a:off x="685800" y="552450"/>
-            <a:ext cx="2857500" cy="247650"/>
+          <p:cNvPr id="5" name="">
+            <a:extLst xmlns:a="http://schemas.openxmlformats.org/drawingml/2006/main">
+              <a:ext uri="{FF2B5EF4-FFF2-40B4-BE49-F238E27FC236}">
+                <a16:creationId xmlns:a16="http://schemas.microsoft.com/office/drawing/2014/main" id="{A28A6401-1FB1-4708-9EB4-63BCA57FE624}"/>
+              </a:ext>
+            </a:extLst>
+          </p:cNvPr>
+          <p:cNvSpPr>
+            <a:spLocks xmlns:a="http://schemas.openxmlformats.org/drawingml/2006/main" noGrp="1"/>
+          </p:cNvSpPr>
+          <p:nvPr/>
+        </p:nvSpPr>
+        <p:spPr>
+          <a:xfrm xmlns:a="http://schemas.openxmlformats.org/drawingml/2006/main">
+            <a:off x="7353300" y="1524000"/>
+            <a:ext cx="247650" cy="228600"/>
+          </a:xfrm>
+          <a:prstGeom xmlns:a="http://schemas.openxmlformats.org/drawingml/2006/main" prst="roundRect">
+            <a:avLst>
+              <a:gd name="adj" fmla="val 33333"/>
+            </a:avLst>
+          </a:prstGeom>
+          <a:noFill xmlns:a="http://schemas.openxmlformats.org/drawingml/2006/main"/>
+          <a:ln xmlns:a="http://schemas.openxmlformats.org/drawingml/2006/main" w="0">
+            <a:noFill/>
+          </a:ln>
+        </p:spPr>
+      </p:sp>
+      <p:sp>
+        <p:nvSpPr>
+          <p:cNvPr id="6" name="">
+            <a:extLst xmlns:a="http://schemas.openxmlformats.org/drawingml/2006/main">
+              <a:ext uri="{FF2B5EF4-FFF2-40B4-BE49-F238E27FC236}">
+                <a16:creationId xmlns:a16="http://schemas.microsoft.com/office/drawing/2014/main" id="{DDBFCB7B-0550-41D0-BD37-82347E4662F6}"/>
+              </a:ext>
+            </a:extLst>
+          </p:cNvPr>
+          <p:cNvSpPr>
+            <a:spLocks xmlns:a="http://schemas.openxmlformats.org/drawingml/2006/main" noGrp="1"/>
+          </p:cNvSpPr>
+          <p:nvPr/>
+        </p:nvSpPr>
+        <p:spPr>
+          <a:xfrm xmlns:a="http://schemas.openxmlformats.org/drawingml/2006/main">
+            <a:off x="7353300" y="1562100"/>
+            <a:ext cx="247650" cy="190500"/>
+          </a:xfrm>
+          <a:prstGeom xmlns:a="http://schemas.openxmlformats.org/drawingml/2006/main" prst="rect">
+            <a:avLst/>
+          </a:prstGeom>
+          <a:noFill xmlns:a="http://schemas.openxmlformats.org/drawingml/2006/main"/>
+          <a:ln xmlns:a="http://schemas.openxmlformats.org/drawingml/2006/main" w="0">
+            <a:noFill/>
+          </a:ln>
+        </p:spPr>
+        <p:txBody>
+          <a:bodyPr xmlns:a="http://schemas.openxmlformats.org/drawingml/2006/main" anchor="t">
+            <a:noAutofit/>
+          </a:bodyPr>
+          <a:lstStyle xmlns:a="http://schemas.openxmlformats.org/drawingml/2006/main"/>
+          <a:p xmlns:a="http://schemas.openxmlformats.org/drawingml/2006/main">
+            <a:pPr algn="ctr">
+              <a:defRPr sz="975" b="1">
+                <a:solidFill>
+                  <a:srgbClr val="52677D"/>
+                </a:solidFill>
+                <a:latin typeface="Helvetica Neue"/>
+                <a:ea typeface="Helvetica Neue"/>
+                <a:cs typeface="Helvetica Neue"/>
+              </a:defRPr>
+            </a:pPr>
+            <a:r>
+              <a:rPr sz="975" b="1">
+                <a:solidFill>
+                  <a:srgbClr val="52677D"/>
+                </a:solidFill>
+                <a:latin typeface="Helvetica Neue"/>
+                <a:ea typeface="Helvetica Neue"/>
+                <a:cs typeface="Helvetica Neue"/>
+              </a:rPr>
+              <a:t>1</a:t>
+            </a:r>
+          </a:p>
+        </p:txBody>
+      </p:sp>
+      <p:sp>
+        <p:nvSpPr>
+          <p:cNvPr id="7" name="">
+            <a:extLst xmlns:a="http://schemas.openxmlformats.org/drawingml/2006/main">
+              <a:ext uri="{FF2B5EF4-FFF2-40B4-BE49-F238E27FC236}">
+                <a16:creationId xmlns:a16="http://schemas.microsoft.com/office/drawing/2014/main" id="{99632D66-CF54-41BB-9058-CAB0F8B540D4}"/>
+              </a:ext>
+            </a:extLst>
+          </p:cNvPr>
+          <p:cNvSpPr>
+            <a:spLocks xmlns:a="http://schemas.openxmlformats.org/drawingml/2006/main" noGrp="1"/>
+          </p:cNvSpPr>
+          <p:nvPr/>
+        </p:nvSpPr>
+        <p:spPr>
+          <a:xfrm xmlns:a="http://schemas.openxmlformats.org/drawingml/2006/main">
+            <a:off x="7696200" y="1533525"/>
+            <a:ext cx="1866900" cy="247650"/>
           </a:xfrm>
           <a:prstGeom xmlns:a="http://schemas.openxmlformats.org/drawingml/2006/main" prst="rect">
             <a:avLst/>
@@ -2078,47 +2299,47 @@
           <a:lstStyle xmlns:a="http://schemas.openxmlformats.org/drawingml/2006/main"/>
           <a:p xmlns:a="http://schemas.openxmlformats.org/drawingml/2006/main">
             <a:pPr algn="l">
-              <a:defRPr sz="1200" b="1">
-                <a:solidFill>
-                  <a:srgbClr val="2563EB"/>
-                </a:solidFill>
-                <a:latin typeface="Helvetica Neue"/>
-                <a:ea typeface="Helvetica Neue"/>
-                <a:cs typeface="Helvetica Neue"/>
-              </a:defRPr>
-            </a:pPr>
-            <a:r>
-              <a:rPr sz="1200" b="1">
-                <a:solidFill>
-                  <a:srgbClr val="2563EB"/>
-                </a:solidFill>
-                <a:latin typeface="Helvetica Neue"/>
-                <a:ea typeface="Helvetica Neue"/>
-                <a:cs typeface="Helvetica Neue"/>
-              </a:rPr>
-              <a:t>CAREER CANVAS</a:t>
-            </a:r>
-          </a:p>
-        </p:txBody>
-      </p:sp>
-      <p:sp>
-        <p:nvSpPr>
-          <p:cNvPr id="4" name="">
-            <a:extLst xmlns:a="http://schemas.openxmlformats.org/drawingml/2006/main">
-              <a:ext uri="{FF2B5EF4-FFF2-40B4-BE49-F238E27FC236}">
-                <a16:creationId xmlns:a16="http://schemas.microsoft.com/office/drawing/2014/main" id="{C87E37D9-7C81-4D69-8EAE-3852B3D6C879}"/>
-              </a:ext>
-            </a:extLst>
-          </p:cNvPr>
-          <p:cNvSpPr>
-            <a:spLocks xmlns:a="http://schemas.openxmlformats.org/drawingml/2006/main" noGrp="1"/>
-          </p:cNvSpPr>
-          <p:nvPr/>
-        </p:nvSpPr>
-        <p:spPr>
-          <a:xfrm xmlns:a="http://schemas.openxmlformats.org/drawingml/2006/main">
-            <a:off x="685800" y="914400"/>
-            <a:ext cx="685800" cy="76200"/>
+              <a:defRPr sz="900" b="0">
+                <a:solidFill>
+                  <a:srgbClr val="52677D"/>
+                </a:solidFill>
+                <a:latin typeface="Helvetica Neue"/>
+                <a:ea typeface="Helvetica Neue"/>
+                <a:cs typeface="Helvetica Neue"/>
+              </a:defRPr>
+            </a:pPr>
+            <a:r>
+              <a:rPr sz="900" b="0">
+                <a:solidFill>
+                  <a:srgbClr val="52677D"/>
+                </a:solidFill>
+                <a:latin typeface="Helvetica Neue"/>
+                <a:ea typeface="Helvetica Neue"/>
+                <a:cs typeface="Helvetica Neue"/>
+              </a:rPr>
+              <a:t>Analytical thinking</a:t>
+            </a:r>
+          </a:p>
+        </p:txBody>
+      </p:sp>
+      <p:sp>
+        <p:nvSpPr>
+          <p:cNvPr id="8" name="">
+            <a:extLst xmlns:a="http://schemas.openxmlformats.org/drawingml/2006/main">
+              <a:ext uri="{FF2B5EF4-FFF2-40B4-BE49-F238E27FC236}">
+                <a16:creationId xmlns:a16="http://schemas.microsoft.com/office/drawing/2014/main" id="{2540251A-D784-4B20-AAD6-06DB2C2F7F17}"/>
+              </a:ext>
+            </a:extLst>
+          </p:cNvPr>
+          <p:cNvSpPr>
+            <a:spLocks xmlns:a="http://schemas.openxmlformats.org/drawingml/2006/main" noGrp="1"/>
+          </p:cNvSpPr>
+          <p:nvPr/>
+        </p:nvSpPr>
+        <p:spPr>
+          <a:xfrm xmlns:a="http://schemas.openxmlformats.org/drawingml/2006/main">
+            <a:off x="9639300" y="1590675"/>
+            <a:ext cx="1981200" cy="95250"/>
           </a:xfrm>
           <a:prstGeom xmlns:a="http://schemas.openxmlformats.org/drawingml/2006/main" prst="roundRect">
             <a:avLst>
@@ -2126,7 +2347,7 @@
             </a:avLst>
           </a:prstGeom>
           <a:solidFill xmlns:a="http://schemas.openxmlformats.org/drawingml/2006/main">
-            <a:srgbClr val="FFD43B"/>
+            <a:srgbClr val="BDC4D4"/>
           </a:solidFill>
           <a:ln xmlns:a="http://schemas.openxmlformats.org/drawingml/2006/main" w="0">
             <a:noFill/>
@@ -2135,22 +2356,109 @@
       </p:sp>
       <p:sp>
         <p:nvSpPr>
-          <p:cNvPr id="5" name="">
-            <a:extLst xmlns:a="http://schemas.openxmlformats.org/drawingml/2006/main">
-              <a:ext uri="{FF2B5EF4-FFF2-40B4-BE49-F238E27FC236}">
-                <a16:creationId xmlns:a16="http://schemas.microsoft.com/office/drawing/2014/main" id="{17FF1ABE-61BF-4ED6-A534-CFAC7087AF7F}"/>
-              </a:ext>
-            </a:extLst>
-          </p:cNvPr>
-          <p:cNvSpPr>
-            <a:spLocks xmlns:a="http://schemas.openxmlformats.org/drawingml/2006/main" noGrp="1"/>
-          </p:cNvSpPr>
-          <p:nvPr/>
-        </p:nvSpPr>
-        <p:spPr>
-          <a:xfrm xmlns:a="http://schemas.openxmlformats.org/drawingml/2006/main">
-            <a:off x="685800" y="1447800"/>
-            <a:ext cx="4762500" cy="1771650"/>
+          <p:cNvPr id="9" name="">
+            <a:extLst xmlns:a="http://schemas.openxmlformats.org/drawingml/2006/main">
+              <a:ext uri="{FF2B5EF4-FFF2-40B4-BE49-F238E27FC236}">
+                <a16:creationId xmlns:a16="http://schemas.microsoft.com/office/drawing/2014/main" id="{A8A1BFC5-B83C-4EFB-B9C2-FBDB219B49C7}"/>
+              </a:ext>
+            </a:extLst>
+          </p:cNvPr>
+          <p:cNvSpPr>
+            <a:spLocks xmlns:a="http://schemas.openxmlformats.org/drawingml/2006/main" noGrp="1"/>
+          </p:cNvSpPr>
+          <p:nvPr/>
+        </p:nvSpPr>
+        <p:spPr>
+          <a:xfrm xmlns:a="http://schemas.openxmlformats.org/drawingml/2006/main">
+            <a:off x="7353300" y="1866900"/>
+            <a:ext cx="247650" cy="228600"/>
+          </a:xfrm>
+          <a:prstGeom xmlns:a="http://schemas.openxmlformats.org/drawingml/2006/main" prst="roundRect">
+            <a:avLst>
+              <a:gd name="adj" fmla="val 33333"/>
+            </a:avLst>
+          </a:prstGeom>
+          <a:noFill xmlns:a="http://schemas.openxmlformats.org/drawingml/2006/main"/>
+          <a:ln xmlns:a="http://schemas.openxmlformats.org/drawingml/2006/main" w="0">
+            <a:noFill/>
+          </a:ln>
+        </p:spPr>
+      </p:sp>
+      <p:sp>
+        <p:nvSpPr>
+          <p:cNvPr id="10" name="">
+            <a:extLst xmlns:a="http://schemas.openxmlformats.org/drawingml/2006/main">
+              <a:ext uri="{FF2B5EF4-FFF2-40B4-BE49-F238E27FC236}">
+                <a16:creationId xmlns:a16="http://schemas.microsoft.com/office/drawing/2014/main" id="{A7CDC562-CFAB-4019-8F2C-C1510C525B66}"/>
+              </a:ext>
+            </a:extLst>
+          </p:cNvPr>
+          <p:cNvSpPr>
+            <a:spLocks xmlns:a="http://schemas.openxmlformats.org/drawingml/2006/main" noGrp="1"/>
+          </p:cNvSpPr>
+          <p:nvPr/>
+        </p:nvSpPr>
+        <p:spPr>
+          <a:xfrm xmlns:a="http://schemas.openxmlformats.org/drawingml/2006/main">
+            <a:off x="7353300" y="1905000"/>
+            <a:ext cx="247650" cy="190500"/>
+          </a:xfrm>
+          <a:prstGeom xmlns:a="http://schemas.openxmlformats.org/drawingml/2006/main" prst="rect">
+            <a:avLst/>
+          </a:prstGeom>
+          <a:noFill xmlns:a="http://schemas.openxmlformats.org/drawingml/2006/main"/>
+          <a:ln xmlns:a="http://schemas.openxmlformats.org/drawingml/2006/main" w="0">
+            <a:noFill/>
+          </a:ln>
+        </p:spPr>
+        <p:txBody>
+          <a:bodyPr xmlns:a="http://schemas.openxmlformats.org/drawingml/2006/main" anchor="t">
+            <a:noAutofit/>
+          </a:bodyPr>
+          <a:lstStyle xmlns:a="http://schemas.openxmlformats.org/drawingml/2006/main"/>
+          <a:p xmlns:a="http://schemas.openxmlformats.org/drawingml/2006/main">
+            <a:pPr algn="ctr">
+              <a:defRPr sz="975" b="1">
+                <a:solidFill>
+                  <a:srgbClr val="52677D"/>
+                </a:solidFill>
+                <a:latin typeface="Helvetica Neue"/>
+                <a:ea typeface="Helvetica Neue"/>
+                <a:cs typeface="Helvetica Neue"/>
+              </a:defRPr>
+            </a:pPr>
+            <a:r>
+              <a:rPr sz="975" b="1">
+                <a:solidFill>
+                  <a:srgbClr val="52677D"/>
+                </a:solidFill>
+                <a:latin typeface="Helvetica Neue"/>
+                <a:ea typeface="Helvetica Neue"/>
+                <a:cs typeface="Helvetica Neue"/>
+              </a:rPr>
+              <a:t>2</a:t>
+            </a:r>
+          </a:p>
+        </p:txBody>
+      </p:sp>
+      <p:sp>
+        <p:nvSpPr>
+          <p:cNvPr id="11" name="">
+            <a:extLst xmlns:a="http://schemas.openxmlformats.org/drawingml/2006/main">
+              <a:ext uri="{FF2B5EF4-FFF2-40B4-BE49-F238E27FC236}">
+                <a16:creationId xmlns:a16="http://schemas.microsoft.com/office/drawing/2014/main" id="{931C13E6-0DB3-410E-8DE1-3219A988D862}"/>
+              </a:ext>
+            </a:extLst>
+          </p:cNvPr>
+          <p:cNvSpPr>
+            <a:spLocks xmlns:a="http://schemas.openxmlformats.org/drawingml/2006/main" noGrp="1"/>
+          </p:cNvSpPr>
+          <p:nvPr/>
+        </p:nvSpPr>
+        <p:spPr>
+          <a:xfrm xmlns:a="http://schemas.openxmlformats.org/drawingml/2006/main">
+            <a:off x="7696200" y="1876425"/>
+            <a:ext cx="1866900" cy="247650"/>
           </a:xfrm>
           <a:prstGeom xmlns:a="http://schemas.openxmlformats.org/drawingml/2006/main" prst="rect">
             <a:avLst/>
@@ -2167,70 +2475,344 @@
           <a:lstStyle xmlns:a="http://schemas.openxmlformats.org/drawingml/2006/main"/>
           <a:p xmlns:a="http://schemas.openxmlformats.org/drawingml/2006/main">
             <a:pPr algn="l">
-              <a:defRPr sz="4050" b="1">
-                <a:solidFill>
-                  <a:srgbClr val="092454"/>
-                </a:solidFill>
-                <a:latin typeface="Helvetica Neue"/>
-                <a:ea typeface="Helvetica Neue"/>
-                <a:cs typeface="Helvetica Neue"/>
-              </a:defRPr>
-            </a:pPr>
-            <a:r>
-              <a:rPr sz="4050" b="1">
-                <a:solidFill>
-                  <a:srgbClr val="092454"/>
-                </a:solidFill>
-                <a:latin typeface="Helvetica Neue"/>
-                <a:ea typeface="Helvetica Neue"/>
-                <a:cs typeface="Helvetica Neue"/>
-              </a:rPr>
-              <a:t>Creativity across</a:t>
-            </a:r>
-          </a:p>
+              <a:defRPr sz="900" b="0">
+                <a:solidFill>
+                  <a:srgbClr val="52677D"/>
+                </a:solidFill>
+                <a:latin typeface="Helvetica Neue"/>
+                <a:ea typeface="Helvetica Neue"/>
+                <a:cs typeface="Helvetica Neue"/>
+              </a:defRPr>
+            </a:pPr>
+            <a:r>
+              <a:rPr sz="900" b="0">
+                <a:solidFill>
+                  <a:srgbClr val="52677D"/>
+                </a:solidFill>
+                <a:latin typeface="Helvetica Neue"/>
+                <a:ea typeface="Helvetica Neue"/>
+                <a:cs typeface="Helvetica Neue"/>
+              </a:rPr>
+              <a:t>Resilience, flexibility, agility</a:t>
+            </a:r>
+          </a:p>
+        </p:txBody>
+      </p:sp>
+      <p:sp>
+        <p:nvSpPr>
+          <p:cNvPr id="12" name="">
+            <a:extLst xmlns:a="http://schemas.openxmlformats.org/drawingml/2006/main">
+              <a:ext uri="{FF2B5EF4-FFF2-40B4-BE49-F238E27FC236}">
+                <a16:creationId xmlns:a16="http://schemas.microsoft.com/office/drawing/2014/main" id="{FB7005DA-F43B-45A3-A652-AE6BADD377C7}"/>
+              </a:ext>
+            </a:extLst>
+          </p:cNvPr>
+          <p:cNvSpPr>
+            <a:spLocks xmlns:a="http://schemas.openxmlformats.org/drawingml/2006/main" noGrp="1"/>
+          </p:cNvSpPr>
+          <p:nvPr/>
+        </p:nvSpPr>
+        <p:spPr>
+          <a:xfrm xmlns:a="http://schemas.openxmlformats.org/drawingml/2006/main">
+            <a:off x="9639300" y="1933575"/>
+            <a:ext cx="1781175" cy="95250"/>
+          </a:xfrm>
+          <a:prstGeom xmlns:a="http://schemas.openxmlformats.org/drawingml/2006/main" prst="roundRect">
+            <a:avLst>
+              <a:gd name="adj" fmla="val 50000"/>
+            </a:avLst>
+          </a:prstGeom>
+          <a:solidFill xmlns:a="http://schemas.openxmlformats.org/drawingml/2006/main">
+            <a:srgbClr val="BDC4D4"/>
+          </a:solidFill>
+          <a:ln xmlns:a="http://schemas.openxmlformats.org/drawingml/2006/main" w="0">
+            <a:noFill/>
+          </a:ln>
+        </p:spPr>
+      </p:sp>
+      <p:sp>
+        <p:nvSpPr>
+          <p:cNvPr id="13" name="">
+            <a:extLst xmlns:a="http://schemas.openxmlformats.org/drawingml/2006/main">
+              <a:ext uri="{FF2B5EF4-FFF2-40B4-BE49-F238E27FC236}">
+                <a16:creationId xmlns:a16="http://schemas.microsoft.com/office/drawing/2014/main" id="{DAC0D5DA-2117-42B0-B4C3-751149F0B6D3}"/>
+              </a:ext>
+            </a:extLst>
+          </p:cNvPr>
+          <p:cNvSpPr>
+            <a:spLocks xmlns:a="http://schemas.openxmlformats.org/drawingml/2006/main" noGrp="1"/>
+          </p:cNvSpPr>
+          <p:nvPr/>
+        </p:nvSpPr>
+        <p:spPr>
+          <a:xfrm xmlns:a="http://schemas.openxmlformats.org/drawingml/2006/main">
+            <a:off x="7353300" y="2209800"/>
+            <a:ext cx="247650" cy="228600"/>
+          </a:xfrm>
+          <a:prstGeom xmlns:a="http://schemas.openxmlformats.org/drawingml/2006/main" prst="roundRect">
+            <a:avLst>
+              <a:gd name="adj" fmla="val 33333"/>
+            </a:avLst>
+          </a:prstGeom>
+          <a:noFill xmlns:a="http://schemas.openxmlformats.org/drawingml/2006/main"/>
+          <a:ln xmlns:a="http://schemas.openxmlformats.org/drawingml/2006/main" w="0">
+            <a:noFill/>
+          </a:ln>
+        </p:spPr>
+      </p:sp>
+      <p:sp>
+        <p:nvSpPr>
+          <p:cNvPr id="14" name="">
+            <a:extLst xmlns:a="http://schemas.openxmlformats.org/drawingml/2006/main">
+              <a:ext uri="{FF2B5EF4-FFF2-40B4-BE49-F238E27FC236}">
+                <a16:creationId xmlns:a16="http://schemas.microsoft.com/office/drawing/2014/main" id="{564E5B9B-8683-4CCB-9E86-69B9A83CBAC0}"/>
+              </a:ext>
+            </a:extLst>
+          </p:cNvPr>
+          <p:cNvSpPr>
+            <a:spLocks xmlns:a="http://schemas.openxmlformats.org/drawingml/2006/main" noGrp="1"/>
+          </p:cNvSpPr>
+          <p:nvPr/>
+        </p:nvSpPr>
+        <p:spPr>
+          <a:xfrm xmlns:a="http://schemas.openxmlformats.org/drawingml/2006/main">
+            <a:off x="7353300" y="2247900"/>
+            <a:ext cx="247650" cy="190500"/>
+          </a:xfrm>
+          <a:prstGeom xmlns:a="http://schemas.openxmlformats.org/drawingml/2006/main" prst="rect">
+            <a:avLst/>
+          </a:prstGeom>
+          <a:noFill xmlns:a="http://schemas.openxmlformats.org/drawingml/2006/main"/>
+          <a:ln xmlns:a="http://schemas.openxmlformats.org/drawingml/2006/main" w="0">
+            <a:noFill/>
+          </a:ln>
+        </p:spPr>
+        <p:txBody>
+          <a:bodyPr xmlns:a="http://schemas.openxmlformats.org/drawingml/2006/main" anchor="t">
+            <a:noAutofit/>
+          </a:bodyPr>
+          <a:lstStyle xmlns:a="http://schemas.openxmlformats.org/drawingml/2006/main"/>
+          <a:p xmlns:a="http://schemas.openxmlformats.org/drawingml/2006/main">
+            <a:pPr algn="ctr">
+              <a:defRPr sz="975" b="1">
+                <a:solidFill>
+                  <a:srgbClr val="52677D"/>
+                </a:solidFill>
+                <a:latin typeface="Helvetica Neue"/>
+                <a:ea typeface="Helvetica Neue"/>
+                <a:cs typeface="Helvetica Neue"/>
+              </a:defRPr>
+            </a:pPr>
+            <a:r>
+              <a:rPr sz="975" b="1">
+                <a:solidFill>
+                  <a:srgbClr val="52677D"/>
+                </a:solidFill>
+                <a:latin typeface="Helvetica Neue"/>
+                <a:ea typeface="Helvetica Neue"/>
+                <a:cs typeface="Helvetica Neue"/>
+              </a:rPr>
+              <a:t>3</a:t>
+            </a:r>
+          </a:p>
+        </p:txBody>
+      </p:sp>
+      <p:sp>
+        <p:nvSpPr>
+          <p:cNvPr id="15" name="">
+            <a:extLst xmlns:a="http://schemas.openxmlformats.org/drawingml/2006/main">
+              <a:ext uri="{FF2B5EF4-FFF2-40B4-BE49-F238E27FC236}">
+                <a16:creationId xmlns:a16="http://schemas.microsoft.com/office/drawing/2014/main" id="{D6A7AE87-1818-401E-AD90-0E179F43D530}"/>
+              </a:ext>
+            </a:extLst>
+          </p:cNvPr>
+          <p:cNvSpPr>
+            <a:spLocks xmlns:a="http://schemas.openxmlformats.org/drawingml/2006/main" noGrp="1"/>
+          </p:cNvSpPr>
+          <p:nvPr/>
+        </p:nvSpPr>
+        <p:spPr>
+          <a:xfrm xmlns:a="http://schemas.openxmlformats.org/drawingml/2006/main">
+            <a:off x="7696200" y="2219325"/>
+            <a:ext cx="1866900" cy="247650"/>
+          </a:xfrm>
+          <a:prstGeom xmlns:a="http://schemas.openxmlformats.org/drawingml/2006/main" prst="rect">
+            <a:avLst/>
+          </a:prstGeom>
+          <a:noFill xmlns:a="http://schemas.openxmlformats.org/drawingml/2006/main"/>
+          <a:ln xmlns:a="http://schemas.openxmlformats.org/drawingml/2006/main" w="0">
+            <a:noFill/>
+          </a:ln>
+        </p:spPr>
+        <p:txBody>
+          <a:bodyPr xmlns:a="http://schemas.openxmlformats.org/drawingml/2006/main" anchor="t">
+            <a:noAutofit/>
+          </a:bodyPr>
+          <a:lstStyle xmlns:a="http://schemas.openxmlformats.org/drawingml/2006/main"/>
           <a:p xmlns:a="http://schemas.openxmlformats.org/drawingml/2006/main">
             <a:pPr algn="l">
-              <a:defRPr sz="4050" b="1">
-                <a:solidFill>
-                  <a:srgbClr val="092454"/>
-                </a:solidFill>
-                <a:latin typeface="Helvetica Neue"/>
-                <a:ea typeface="Helvetica Neue"/>
-                <a:cs typeface="Helvetica Neue"/>
-              </a:defRPr>
-            </a:pPr>
-            <a:r>
-              <a:rPr sz="4050" b="1">
-                <a:solidFill>
-                  <a:srgbClr val="092454"/>
-                </a:solidFill>
-                <a:latin typeface="Helvetica Neue"/>
-                <a:ea typeface="Helvetica Neue"/>
-                <a:cs typeface="Helvetica Neue"/>
-              </a:rPr>
-              <a:t>business</a:t>
-            </a:r>
-          </a:p>
-        </p:txBody>
-      </p:sp>
-      <p:sp>
-        <p:nvSpPr>
-          <p:cNvPr id="6" name="">
-            <a:extLst xmlns:a="http://schemas.openxmlformats.org/drawingml/2006/main">
-              <a:ext uri="{FF2B5EF4-FFF2-40B4-BE49-F238E27FC236}">
-                <a16:creationId xmlns:a16="http://schemas.microsoft.com/office/drawing/2014/main" id="{AB190D2D-1123-4771-AC9B-08A48CBE9DAB}"/>
-              </a:ext>
-            </a:extLst>
-          </p:cNvPr>
-          <p:cNvSpPr>
-            <a:spLocks xmlns:a="http://schemas.openxmlformats.org/drawingml/2006/main" noGrp="1"/>
-          </p:cNvSpPr>
-          <p:nvPr/>
-        </p:nvSpPr>
-        <p:spPr>
-          <a:xfrm xmlns:a="http://schemas.openxmlformats.org/drawingml/2006/main">
-            <a:off x="685800" y="3429000"/>
-            <a:ext cx="4476750" cy="1047750"/>
+              <a:defRPr sz="900" b="0">
+                <a:solidFill>
+                  <a:srgbClr val="52677D"/>
+                </a:solidFill>
+                <a:latin typeface="Helvetica Neue"/>
+                <a:ea typeface="Helvetica Neue"/>
+                <a:cs typeface="Helvetica Neue"/>
+              </a:defRPr>
+            </a:pPr>
+            <a:r>
+              <a:rPr sz="900" b="0">
+                <a:solidFill>
+                  <a:srgbClr val="52677D"/>
+                </a:solidFill>
+                <a:latin typeface="Helvetica Neue"/>
+                <a:ea typeface="Helvetica Neue"/>
+                <a:cs typeface="Helvetica Neue"/>
+              </a:rPr>
+              <a:t>Leadership and social influence</a:t>
+            </a:r>
+          </a:p>
+        </p:txBody>
+      </p:sp>
+      <p:sp>
+        <p:nvSpPr>
+          <p:cNvPr id="16" name="">
+            <a:extLst xmlns:a="http://schemas.openxmlformats.org/drawingml/2006/main">
+              <a:ext uri="{FF2B5EF4-FFF2-40B4-BE49-F238E27FC236}">
+                <a16:creationId xmlns:a16="http://schemas.microsoft.com/office/drawing/2014/main" id="{FE7C8589-4F67-453D-97FD-19F7CC298F31}"/>
+              </a:ext>
+            </a:extLst>
+          </p:cNvPr>
+          <p:cNvSpPr>
+            <a:spLocks xmlns:a="http://schemas.openxmlformats.org/drawingml/2006/main" noGrp="1"/>
+          </p:cNvSpPr>
+          <p:nvPr/>
+        </p:nvSpPr>
+        <p:spPr>
+          <a:xfrm xmlns:a="http://schemas.openxmlformats.org/drawingml/2006/main">
+            <a:off x="9639300" y="2276475"/>
+            <a:ext cx="1581150" cy="95250"/>
+          </a:xfrm>
+          <a:prstGeom xmlns:a="http://schemas.openxmlformats.org/drawingml/2006/main" prst="roundRect">
+            <a:avLst>
+              <a:gd name="adj" fmla="val 50000"/>
+            </a:avLst>
+          </a:prstGeom>
+          <a:solidFill xmlns:a="http://schemas.openxmlformats.org/drawingml/2006/main">
+            <a:srgbClr val="BDC4D4"/>
+          </a:solidFill>
+          <a:ln xmlns:a="http://schemas.openxmlformats.org/drawingml/2006/main" w="0">
+            <a:noFill/>
+          </a:ln>
+        </p:spPr>
+      </p:sp>
+      <p:sp>
+        <p:nvSpPr>
+          <p:cNvPr id="17" name="">
+            <a:extLst xmlns:a="http://schemas.openxmlformats.org/drawingml/2006/main">
+              <a:ext uri="{FF2B5EF4-FFF2-40B4-BE49-F238E27FC236}">
+                <a16:creationId xmlns:a16="http://schemas.microsoft.com/office/drawing/2014/main" id="{4270FE6B-3797-46FB-9044-B93229A21B16}"/>
+              </a:ext>
+            </a:extLst>
+          </p:cNvPr>
+          <p:cNvSpPr>
+            <a:spLocks xmlns:a="http://schemas.openxmlformats.org/drawingml/2006/main" noGrp="1"/>
+          </p:cNvSpPr>
+          <p:nvPr/>
+        </p:nvSpPr>
+        <p:spPr>
+          <a:xfrm xmlns:a="http://schemas.openxmlformats.org/drawingml/2006/main">
+            <a:off x="7353300" y="2552700"/>
+            <a:ext cx="247650" cy="228600"/>
+          </a:xfrm>
+          <a:prstGeom xmlns:a="http://schemas.openxmlformats.org/drawingml/2006/main" prst="roundRect">
+            <a:avLst>
+              <a:gd name="adj" fmla="val 33333"/>
+            </a:avLst>
+          </a:prstGeom>
+          <a:solidFill xmlns:a="http://schemas.openxmlformats.org/drawingml/2006/main">
+            <a:srgbClr val="D1CFC9"/>
+          </a:solidFill>
+          <a:ln xmlns:a="http://schemas.openxmlformats.org/drawingml/2006/main" w="0">
+            <a:noFill/>
+          </a:ln>
+        </p:spPr>
+      </p:sp>
+      <p:sp>
+        <p:nvSpPr>
+          <p:cNvPr id="18" name="">
+            <a:extLst xmlns:a="http://schemas.openxmlformats.org/drawingml/2006/main">
+              <a:ext uri="{FF2B5EF4-FFF2-40B4-BE49-F238E27FC236}">
+                <a16:creationId xmlns:a16="http://schemas.microsoft.com/office/drawing/2014/main" id="{FC4B8FB6-5E31-4869-B87D-87AF9AB17635}"/>
+              </a:ext>
+            </a:extLst>
+          </p:cNvPr>
+          <p:cNvSpPr>
+            <a:spLocks xmlns:a="http://schemas.openxmlformats.org/drawingml/2006/main" noGrp="1"/>
+          </p:cNvSpPr>
+          <p:nvPr/>
+        </p:nvSpPr>
+        <p:spPr>
+          <a:xfrm xmlns:a="http://schemas.openxmlformats.org/drawingml/2006/main">
+            <a:off x="7353300" y="2590800"/>
+            <a:ext cx="247650" cy="190500"/>
+          </a:xfrm>
+          <a:prstGeom xmlns:a="http://schemas.openxmlformats.org/drawingml/2006/main" prst="rect">
+            <a:avLst/>
+          </a:prstGeom>
+          <a:noFill xmlns:a="http://schemas.openxmlformats.org/drawingml/2006/main"/>
+          <a:ln xmlns:a="http://schemas.openxmlformats.org/drawingml/2006/main" w="0">
+            <a:noFill/>
+          </a:ln>
+        </p:spPr>
+        <p:txBody>
+          <a:bodyPr xmlns:a="http://schemas.openxmlformats.org/drawingml/2006/main" anchor="t">
+            <a:noAutofit/>
+          </a:bodyPr>
+          <a:lstStyle xmlns:a="http://schemas.openxmlformats.org/drawingml/2006/main"/>
+          <a:p xmlns:a="http://schemas.openxmlformats.org/drawingml/2006/main">
+            <a:pPr algn="ctr">
+              <a:defRPr sz="975" b="1">
+                <a:solidFill>
+                  <a:srgbClr val="1C2E4A"/>
+                </a:solidFill>
+                <a:latin typeface="Helvetica Neue"/>
+                <a:ea typeface="Helvetica Neue"/>
+                <a:cs typeface="Helvetica Neue"/>
+              </a:defRPr>
+            </a:pPr>
+            <a:r>
+              <a:rPr sz="975" b="1">
+                <a:solidFill>
+                  <a:srgbClr val="1C2E4A"/>
+                </a:solidFill>
+                <a:latin typeface="Helvetica Neue"/>
+                <a:ea typeface="Helvetica Neue"/>
+                <a:cs typeface="Helvetica Neue"/>
+              </a:rPr>
+              <a:t>4</a:t>
+            </a:r>
+          </a:p>
+        </p:txBody>
+      </p:sp>
+      <p:sp>
+        <p:nvSpPr>
+          <p:cNvPr id="19" name="">
+            <a:extLst xmlns:a="http://schemas.openxmlformats.org/drawingml/2006/main">
+              <a:ext uri="{FF2B5EF4-FFF2-40B4-BE49-F238E27FC236}">
+                <a16:creationId xmlns:a16="http://schemas.microsoft.com/office/drawing/2014/main" id="{049A7C5A-5AD6-49AC-A724-1A7BC470A873}"/>
+              </a:ext>
+            </a:extLst>
+          </p:cNvPr>
+          <p:cNvSpPr>
+            <a:spLocks xmlns:a="http://schemas.openxmlformats.org/drawingml/2006/main" noGrp="1"/>
+          </p:cNvSpPr>
+          <p:nvPr/>
+        </p:nvSpPr>
+        <p:spPr>
+          <a:xfrm xmlns:a="http://schemas.openxmlformats.org/drawingml/2006/main">
+            <a:off x="7696200" y="2562225"/>
+            <a:ext cx="1866900" cy="247650"/>
           </a:xfrm>
           <a:prstGeom xmlns:a="http://schemas.openxmlformats.org/drawingml/2006/main" prst="rect">
             <a:avLst/>
@@ -2247,47 +2829,166 @@
           <a:lstStyle xmlns:a="http://schemas.openxmlformats.org/drawingml/2006/main"/>
           <a:p xmlns:a="http://schemas.openxmlformats.org/drawingml/2006/main">
             <a:pPr algn="l">
-              <a:defRPr sz="1650" b="0">
-                <a:solidFill>
-                  <a:srgbClr val="61718A"/>
-                </a:solidFill>
-                <a:latin typeface="Helvetica Neue"/>
-                <a:ea typeface="Helvetica Neue"/>
-                <a:cs typeface="Helvetica Neue"/>
-              </a:defRPr>
-            </a:pPr>
-            <a:r>
-              <a:rPr sz="1650" b="0">
-                <a:solidFill>
-                  <a:srgbClr val="61718A"/>
-                </a:solidFill>
-                <a:latin typeface="Helvetica Neue"/>
-                <a:ea typeface="Helvetica Neue"/>
-                <a:cs typeface="Helvetica Neue"/>
-              </a:rPr>
-              <a:t>Five timed rounds, five DECA career areas, one idea you build and defend</a:t>
-            </a:r>
-          </a:p>
-        </p:txBody>
-      </p:sp>
-      <p:sp>
-        <p:nvSpPr>
-          <p:cNvPr id="7" name="">
-            <a:extLst xmlns:a="http://schemas.openxmlformats.org/drawingml/2006/main">
-              <a:ext uri="{FF2B5EF4-FFF2-40B4-BE49-F238E27FC236}">
-                <a16:creationId xmlns:a16="http://schemas.microsoft.com/office/drawing/2014/main" id="{B6F8FBC0-0F64-407D-9BD3-D733B3FAC6BF}"/>
-              </a:ext>
-            </a:extLst>
-          </p:cNvPr>
-          <p:cNvSpPr>
-            <a:spLocks xmlns:a="http://schemas.openxmlformats.org/drawingml/2006/main" noGrp="1"/>
-          </p:cNvSpPr>
-          <p:nvPr/>
-        </p:nvSpPr>
-        <p:spPr>
-          <a:xfrm xmlns:a="http://schemas.openxmlformats.org/drawingml/2006/main">
-            <a:off x="685800" y="5429250"/>
-            <a:ext cx="2095500" cy="285750"/>
+              <a:defRPr sz="975" b="1">
+                <a:solidFill>
+                  <a:srgbClr val="1C2E4A"/>
+                </a:solidFill>
+                <a:latin typeface="Helvetica Neue"/>
+                <a:ea typeface="Helvetica Neue"/>
+                <a:cs typeface="Helvetica Neue"/>
+              </a:defRPr>
+            </a:pPr>
+            <a:r>
+              <a:rPr sz="975" b="1">
+                <a:solidFill>
+                  <a:srgbClr val="1C2E4A"/>
+                </a:solidFill>
+                <a:latin typeface="Helvetica Neue"/>
+                <a:ea typeface="Helvetica Neue"/>
+                <a:cs typeface="Helvetica Neue"/>
+              </a:rPr>
+              <a:t>Creative thinking</a:t>
+            </a:r>
+          </a:p>
+        </p:txBody>
+      </p:sp>
+      <p:sp>
+        <p:nvSpPr>
+          <p:cNvPr id="20" name="">
+            <a:extLst xmlns:a="http://schemas.openxmlformats.org/drawingml/2006/main">
+              <a:ext uri="{FF2B5EF4-FFF2-40B4-BE49-F238E27FC236}">
+                <a16:creationId xmlns:a16="http://schemas.microsoft.com/office/drawing/2014/main" id="{8791CCAC-68A2-4C5E-93AD-8C3A5CD913E0}"/>
+              </a:ext>
+            </a:extLst>
+          </p:cNvPr>
+          <p:cNvSpPr>
+            <a:spLocks xmlns:a="http://schemas.openxmlformats.org/drawingml/2006/main" noGrp="1"/>
+          </p:cNvSpPr>
+          <p:nvPr/>
+        </p:nvSpPr>
+        <p:spPr>
+          <a:xfrm xmlns:a="http://schemas.openxmlformats.org/drawingml/2006/main">
+            <a:off x="9639300" y="2619375"/>
+            <a:ext cx="1390650" cy="95250"/>
+          </a:xfrm>
+          <a:prstGeom xmlns:a="http://schemas.openxmlformats.org/drawingml/2006/main" prst="roundRect">
+            <a:avLst>
+              <a:gd name="adj" fmla="val 50000"/>
+            </a:avLst>
+          </a:prstGeom>
+          <a:solidFill xmlns:a="http://schemas.openxmlformats.org/drawingml/2006/main">
+            <a:srgbClr val="1C2E4A"/>
+          </a:solidFill>
+          <a:ln xmlns:a="http://schemas.openxmlformats.org/drawingml/2006/main" w="0">
+            <a:noFill/>
+          </a:ln>
+        </p:spPr>
+      </p:sp>
+      <p:sp>
+        <p:nvSpPr>
+          <p:cNvPr id="21" name="">
+            <a:extLst xmlns:a="http://schemas.openxmlformats.org/drawingml/2006/main">
+              <a:ext uri="{FF2B5EF4-FFF2-40B4-BE49-F238E27FC236}">
+                <a16:creationId xmlns:a16="http://schemas.microsoft.com/office/drawing/2014/main" id="{C2B8013D-6225-48FD-9B98-944C75CE6B25}"/>
+              </a:ext>
+            </a:extLst>
+          </p:cNvPr>
+          <p:cNvSpPr>
+            <a:spLocks xmlns:a="http://schemas.openxmlformats.org/drawingml/2006/main" noGrp="1"/>
+          </p:cNvSpPr>
+          <p:nvPr/>
+        </p:nvSpPr>
+        <p:spPr>
+          <a:xfrm xmlns:a="http://schemas.openxmlformats.org/drawingml/2006/main">
+            <a:off x="7353300" y="2895600"/>
+            <a:ext cx="247650" cy="228600"/>
+          </a:xfrm>
+          <a:prstGeom xmlns:a="http://schemas.openxmlformats.org/drawingml/2006/main" prst="roundRect">
+            <a:avLst>
+              <a:gd name="adj" fmla="val 33333"/>
+            </a:avLst>
+          </a:prstGeom>
+          <a:noFill xmlns:a="http://schemas.openxmlformats.org/drawingml/2006/main"/>
+          <a:ln xmlns:a="http://schemas.openxmlformats.org/drawingml/2006/main" w="0">
+            <a:noFill/>
+          </a:ln>
+        </p:spPr>
+      </p:sp>
+      <p:sp>
+        <p:nvSpPr>
+          <p:cNvPr id="22" name="">
+            <a:extLst xmlns:a="http://schemas.openxmlformats.org/drawingml/2006/main">
+              <a:ext uri="{FF2B5EF4-FFF2-40B4-BE49-F238E27FC236}">
+                <a16:creationId xmlns:a16="http://schemas.microsoft.com/office/drawing/2014/main" id="{C88D734D-AC6B-45EA-B88E-E7FFF7BD2389}"/>
+              </a:ext>
+            </a:extLst>
+          </p:cNvPr>
+          <p:cNvSpPr>
+            <a:spLocks xmlns:a="http://schemas.openxmlformats.org/drawingml/2006/main" noGrp="1"/>
+          </p:cNvSpPr>
+          <p:nvPr/>
+        </p:nvSpPr>
+        <p:spPr>
+          <a:xfrm xmlns:a="http://schemas.openxmlformats.org/drawingml/2006/main">
+            <a:off x="7353300" y="2933700"/>
+            <a:ext cx="247650" cy="190500"/>
+          </a:xfrm>
+          <a:prstGeom xmlns:a="http://schemas.openxmlformats.org/drawingml/2006/main" prst="rect">
+            <a:avLst/>
+          </a:prstGeom>
+          <a:noFill xmlns:a="http://schemas.openxmlformats.org/drawingml/2006/main"/>
+          <a:ln xmlns:a="http://schemas.openxmlformats.org/drawingml/2006/main" w="0">
+            <a:noFill/>
+          </a:ln>
+        </p:spPr>
+        <p:txBody>
+          <a:bodyPr xmlns:a="http://schemas.openxmlformats.org/drawingml/2006/main" anchor="t">
+            <a:noAutofit/>
+          </a:bodyPr>
+          <a:lstStyle xmlns:a="http://schemas.openxmlformats.org/drawingml/2006/main"/>
+          <a:p xmlns:a="http://schemas.openxmlformats.org/drawingml/2006/main">
+            <a:pPr algn="ctr">
+              <a:defRPr sz="975" b="1">
+                <a:solidFill>
+                  <a:srgbClr val="52677D"/>
+                </a:solidFill>
+                <a:latin typeface="Helvetica Neue"/>
+                <a:ea typeface="Helvetica Neue"/>
+                <a:cs typeface="Helvetica Neue"/>
+              </a:defRPr>
+            </a:pPr>
+            <a:r>
+              <a:rPr sz="975" b="1">
+                <a:solidFill>
+                  <a:srgbClr val="52677D"/>
+                </a:solidFill>
+                <a:latin typeface="Helvetica Neue"/>
+                <a:ea typeface="Helvetica Neue"/>
+                <a:cs typeface="Helvetica Neue"/>
+              </a:rPr>
+              <a:t>5</a:t>
+            </a:r>
+          </a:p>
+        </p:txBody>
+      </p:sp>
+      <p:sp>
+        <p:nvSpPr>
+          <p:cNvPr id="23" name="">
+            <a:extLst xmlns:a="http://schemas.openxmlformats.org/drawingml/2006/main">
+              <a:ext uri="{FF2B5EF4-FFF2-40B4-BE49-F238E27FC236}">
+                <a16:creationId xmlns:a16="http://schemas.microsoft.com/office/drawing/2014/main" id="{BF5F01AD-1456-48D2-ADBF-63E3CCAF8583}"/>
+              </a:ext>
+            </a:extLst>
+          </p:cNvPr>
+          <p:cNvSpPr>
+            <a:spLocks xmlns:a="http://schemas.openxmlformats.org/drawingml/2006/main" noGrp="1"/>
+          </p:cNvSpPr>
+          <p:nvPr/>
+        </p:nvSpPr>
+        <p:spPr>
+          <a:xfrm xmlns:a="http://schemas.openxmlformats.org/drawingml/2006/main">
+            <a:off x="7696200" y="2905125"/>
+            <a:ext cx="1866900" cy="247650"/>
           </a:xfrm>
           <a:prstGeom xmlns:a="http://schemas.openxmlformats.org/drawingml/2006/main" prst="rect">
             <a:avLst/>
@@ -2304,47 +3005,959 @@
           <a:lstStyle xmlns:a="http://schemas.openxmlformats.org/drawingml/2006/main"/>
           <a:p xmlns:a="http://schemas.openxmlformats.org/drawingml/2006/main">
             <a:pPr algn="l">
-              <a:defRPr sz="1350" b="1">
-                <a:solidFill>
-                  <a:srgbClr val="092454"/>
-                </a:solidFill>
-                <a:latin typeface="Helvetica Neue"/>
-                <a:ea typeface="Helvetica Neue"/>
-                <a:cs typeface="Helvetica Neue"/>
-              </a:defRPr>
-            </a:pPr>
-            <a:r>
-              <a:rPr sz="1350" b="1">
-                <a:solidFill>
-                  <a:srgbClr val="092454"/>
-                </a:solidFill>
-                <a:latin typeface="Helvetica Neue"/>
-                <a:ea typeface="Helvetica Neue"/>
-                <a:cs typeface="Helvetica Neue"/>
-              </a:rPr>
-              <a:t>Meeting 1</a:t>
-            </a:r>
-          </a:p>
-        </p:txBody>
-      </p:sp>
-      <p:sp>
-        <p:nvSpPr>
-          <p:cNvPr id="8" name="">
-            <a:extLst xmlns:a="http://schemas.openxmlformats.org/drawingml/2006/main">
-              <a:ext uri="{FF2B5EF4-FFF2-40B4-BE49-F238E27FC236}">
-                <a16:creationId xmlns:a16="http://schemas.microsoft.com/office/drawing/2014/main" id="{6A08D742-8866-44D2-9684-A97ED0BCEC8A}"/>
-              </a:ext>
-            </a:extLst>
-          </p:cNvPr>
-          <p:cNvSpPr>
-            <a:spLocks xmlns:a="http://schemas.openxmlformats.org/drawingml/2006/main" noGrp="1"/>
-          </p:cNvSpPr>
-          <p:nvPr/>
-        </p:nvSpPr>
-        <p:spPr>
-          <a:xfrm xmlns:a="http://schemas.openxmlformats.org/drawingml/2006/main">
-            <a:off x="685800" y="5810250"/>
-            <a:ext cx="3333750" cy="476250"/>
+              <a:defRPr sz="900" b="0">
+                <a:solidFill>
+                  <a:srgbClr val="52677D"/>
+                </a:solidFill>
+                <a:latin typeface="Helvetica Neue"/>
+                <a:ea typeface="Helvetica Neue"/>
+                <a:cs typeface="Helvetica Neue"/>
+              </a:defRPr>
+            </a:pPr>
+            <a:r>
+              <a:rPr sz="900" b="0">
+                <a:solidFill>
+                  <a:srgbClr val="52677D"/>
+                </a:solidFill>
+                <a:latin typeface="Helvetica Neue"/>
+                <a:ea typeface="Helvetica Neue"/>
+                <a:cs typeface="Helvetica Neue"/>
+              </a:rPr>
+              <a:t>Motivation and self-awareness</a:t>
+            </a:r>
+          </a:p>
+        </p:txBody>
+      </p:sp>
+      <p:sp>
+        <p:nvSpPr>
+          <p:cNvPr id="24" name="">
+            <a:extLst xmlns:a="http://schemas.openxmlformats.org/drawingml/2006/main">
+              <a:ext uri="{FF2B5EF4-FFF2-40B4-BE49-F238E27FC236}">
+                <a16:creationId xmlns:a16="http://schemas.microsoft.com/office/drawing/2014/main" id="{B3D5F188-DB6C-453F-A60B-B51AC6AD5398}"/>
+              </a:ext>
+            </a:extLst>
+          </p:cNvPr>
+          <p:cNvSpPr>
+            <a:spLocks xmlns:a="http://schemas.openxmlformats.org/drawingml/2006/main" noGrp="1"/>
+          </p:cNvSpPr>
+          <p:nvPr/>
+        </p:nvSpPr>
+        <p:spPr>
+          <a:xfrm xmlns:a="http://schemas.openxmlformats.org/drawingml/2006/main">
+            <a:off x="9639300" y="2962275"/>
+            <a:ext cx="1190625" cy="95250"/>
+          </a:xfrm>
+          <a:prstGeom xmlns:a="http://schemas.openxmlformats.org/drawingml/2006/main" prst="roundRect">
+            <a:avLst>
+              <a:gd name="adj" fmla="val 50000"/>
+            </a:avLst>
+          </a:prstGeom>
+          <a:solidFill xmlns:a="http://schemas.openxmlformats.org/drawingml/2006/main">
+            <a:srgbClr val="BDC4D4"/>
+          </a:solidFill>
+          <a:ln xmlns:a="http://schemas.openxmlformats.org/drawingml/2006/main" w="0">
+            <a:noFill/>
+          </a:ln>
+        </p:spPr>
+      </p:sp>
+      <p:sp>
+        <p:nvSpPr>
+          <p:cNvPr id="25" name="">
+            <a:extLst xmlns:a="http://schemas.openxmlformats.org/drawingml/2006/main">
+              <a:ext uri="{FF2B5EF4-FFF2-40B4-BE49-F238E27FC236}">
+                <a16:creationId xmlns:a16="http://schemas.microsoft.com/office/drawing/2014/main" id="{86A038AF-89FA-4B01-A447-805F70151415}"/>
+              </a:ext>
+            </a:extLst>
+          </p:cNvPr>
+          <p:cNvSpPr>
+            <a:spLocks xmlns:a="http://schemas.openxmlformats.org/drawingml/2006/main" noGrp="1"/>
+          </p:cNvSpPr>
+          <p:nvPr/>
+        </p:nvSpPr>
+        <p:spPr>
+          <a:xfrm xmlns:a="http://schemas.openxmlformats.org/drawingml/2006/main">
+            <a:off x="7353300" y="3238500"/>
+            <a:ext cx="247650" cy="228600"/>
+          </a:xfrm>
+          <a:prstGeom xmlns:a="http://schemas.openxmlformats.org/drawingml/2006/main" prst="roundRect">
+            <a:avLst>
+              <a:gd name="adj" fmla="val 33333"/>
+            </a:avLst>
+          </a:prstGeom>
+          <a:noFill xmlns:a="http://schemas.openxmlformats.org/drawingml/2006/main"/>
+          <a:ln xmlns:a="http://schemas.openxmlformats.org/drawingml/2006/main" w="0">
+            <a:noFill/>
+          </a:ln>
+        </p:spPr>
+      </p:sp>
+      <p:sp>
+        <p:nvSpPr>
+          <p:cNvPr id="26" name="">
+            <a:extLst xmlns:a="http://schemas.openxmlformats.org/drawingml/2006/main">
+              <a:ext uri="{FF2B5EF4-FFF2-40B4-BE49-F238E27FC236}">
+                <a16:creationId xmlns:a16="http://schemas.microsoft.com/office/drawing/2014/main" id="{B0115A05-FD27-4E99-BA91-4D6297CD58E4}"/>
+              </a:ext>
+            </a:extLst>
+          </p:cNvPr>
+          <p:cNvSpPr>
+            <a:spLocks xmlns:a="http://schemas.openxmlformats.org/drawingml/2006/main" noGrp="1"/>
+          </p:cNvSpPr>
+          <p:nvPr/>
+        </p:nvSpPr>
+        <p:spPr>
+          <a:xfrm xmlns:a="http://schemas.openxmlformats.org/drawingml/2006/main">
+            <a:off x="7353300" y="3276600"/>
+            <a:ext cx="247650" cy="190500"/>
+          </a:xfrm>
+          <a:prstGeom xmlns:a="http://schemas.openxmlformats.org/drawingml/2006/main" prst="rect">
+            <a:avLst/>
+          </a:prstGeom>
+          <a:noFill xmlns:a="http://schemas.openxmlformats.org/drawingml/2006/main"/>
+          <a:ln xmlns:a="http://schemas.openxmlformats.org/drawingml/2006/main" w="0">
+            <a:noFill/>
+          </a:ln>
+        </p:spPr>
+        <p:txBody>
+          <a:bodyPr xmlns:a="http://schemas.openxmlformats.org/drawingml/2006/main" anchor="t">
+            <a:noAutofit/>
+          </a:bodyPr>
+          <a:lstStyle xmlns:a="http://schemas.openxmlformats.org/drawingml/2006/main"/>
+          <a:p xmlns:a="http://schemas.openxmlformats.org/drawingml/2006/main">
+            <a:pPr algn="ctr">
+              <a:defRPr sz="975" b="1">
+                <a:solidFill>
+                  <a:srgbClr val="52677D"/>
+                </a:solidFill>
+                <a:latin typeface="Helvetica Neue"/>
+                <a:ea typeface="Helvetica Neue"/>
+                <a:cs typeface="Helvetica Neue"/>
+              </a:defRPr>
+            </a:pPr>
+            <a:r>
+              <a:rPr sz="975" b="1">
+                <a:solidFill>
+                  <a:srgbClr val="52677D"/>
+                </a:solidFill>
+                <a:latin typeface="Helvetica Neue"/>
+                <a:ea typeface="Helvetica Neue"/>
+                <a:cs typeface="Helvetica Neue"/>
+              </a:rPr>
+              <a:t>6</a:t>
+            </a:r>
+          </a:p>
+        </p:txBody>
+      </p:sp>
+      <p:sp>
+        <p:nvSpPr>
+          <p:cNvPr id="27" name="">
+            <a:extLst xmlns:a="http://schemas.openxmlformats.org/drawingml/2006/main">
+              <a:ext uri="{FF2B5EF4-FFF2-40B4-BE49-F238E27FC236}">
+                <a16:creationId xmlns:a16="http://schemas.microsoft.com/office/drawing/2014/main" id="{CCB97703-4A3D-4C36-9F1F-045E40C59548}"/>
+              </a:ext>
+            </a:extLst>
+          </p:cNvPr>
+          <p:cNvSpPr>
+            <a:spLocks xmlns:a="http://schemas.openxmlformats.org/drawingml/2006/main" noGrp="1"/>
+          </p:cNvSpPr>
+          <p:nvPr/>
+        </p:nvSpPr>
+        <p:spPr>
+          <a:xfrm xmlns:a="http://schemas.openxmlformats.org/drawingml/2006/main">
+            <a:off x="7696200" y="3248025"/>
+            <a:ext cx="1866900" cy="247650"/>
+          </a:xfrm>
+          <a:prstGeom xmlns:a="http://schemas.openxmlformats.org/drawingml/2006/main" prst="rect">
+            <a:avLst/>
+          </a:prstGeom>
+          <a:noFill xmlns:a="http://schemas.openxmlformats.org/drawingml/2006/main"/>
+          <a:ln xmlns:a="http://schemas.openxmlformats.org/drawingml/2006/main" w="0">
+            <a:noFill/>
+          </a:ln>
+        </p:spPr>
+        <p:txBody>
+          <a:bodyPr xmlns:a="http://schemas.openxmlformats.org/drawingml/2006/main" anchor="t">
+            <a:noAutofit/>
+          </a:bodyPr>
+          <a:lstStyle xmlns:a="http://schemas.openxmlformats.org/drawingml/2006/main"/>
+          <a:p xmlns:a="http://schemas.openxmlformats.org/drawingml/2006/main">
+            <a:pPr algn="l">
+              <a:defRPr sz="900" b="0">
+                <a:solidFill>
+                  <a:srgbClr val="52677D"/>
+                </a:solidFill>
+                <a:latin typeface="Helvetica Neue"/>
+                <a:ea typeface="Helvetica Neue"/>
+                <a:cs typeface="Helvetica Neue"/>
+              </a:defRPr>
+            </a:pPr>
+            <a:r>
+              <a:rPr sz="900" b="0">
+                <a:solidFill>
+                  <a:srgbClr val="52677D"/>
+                </a:solidFill>
+                <a:latin typeface="Helvetica Neue"/>
+                <a:ea typeface="Helvetica Neue"/>
+                <a:cs typeface="Helvetica Neue"/>
+              </a:rPr>
+              <a:t>Technological literacy</a:t>
+            </a:r>
+          </a:p>
+        </p:txBody>
+      </p:sp>
+      <p:sp>
+        <p:nvSpPr>
+          <p:cNvPr id="28" name="">
+            <a:extLst xmlns:a="http://schemas.openxmlformats.org/drawingml/2006/main">
+              <a:ext uri="{FF2B5EF4-FFF2-40B4-BE49-F238E27FC236}">
+                <a16:creationId xmlns:a16="http://schemas.microsoft.com/office/drawing/2014/main" id="{5F63EC54-02B7-40CC-B7F2-E3262D6201C2}"/>
+              </a:ext>
+            </a:extLst>
+          </p:cNvPr>
+          <p:cNvSpPr>
+            <a:spLocks xmlns:a="http://schemas.openxmlformats.org/drawingml/2006/main" noGrp="1"/>
+          </p:cNvSpPr>
+          <p:nvPr/>
+        </p:nvSpPr>
+        <p:spPr>
+          <a:xfrm xmlns:a="http://schemas.openxmlformats.org/drawingml/2006/main">
+            <a:off x="9639300" y="3305175"/>
+            <a:ext cx="990600" cy="95250"/>
+          </a:xfrm>
+          <a:prstGeom xmlns:a="http://schemas.openxmlformats.org/drawingml/2006/main" prst="roundRect">
+            <a:avLst>
+              <a:gd name="adj" fmla="val 50000"/>
+            </a:avLst>
+          </a:prstGeom>
+          <a:solidFill xmlns:a="http://schemas.openxmlformats.org/drawingml/2006/main">
+            <a:srgbClr val="BDC4D4"/>
+          </a:solidFill>
+          <a:ln xmlns:a="http://schemas.openxmlformats.org/drawingml/2006/main" w="0">
+            <a:noFill/>
+          </a:ln>
+        </p:spPr>
+      </p:sp>
+      <p:sp>
+        <p:nvSpPr>
+          <p:cNvPr id="29" name="">
+            <a:extLst xmlns:a="http://schemas.openxmlformats.org/drawingml/2006/main">
+              <a:ext uri="{FF2B5EF4-FFF2-40B4-BE49-F238E27FC236}">
+                <a16:creationId xmlns:a16="http://schemas.microsoft.com/office/drawing/2014/main" id="{60275CC4-57A7-4C32-9967-A0EB880BDDDE}"/>
+              </a:ext>
+            </a:extLst>
+          </p:cNvPr>
+          <p:cNvSpPr>
+            <a:spLocks xmlns:a="http://schemas.openxmlformats.org/drawingml/2006/main" noGrp="1"/>
+          </p:cNvSpPr>
+          <p:nvPr/>
+        </p:nvSpPr>
+        <p:spPr>
+          <a:xfrm xmlns:a="http://schemas.openxmlformats.org/drawingml/2006/main">
+            <a:off x="7353300" y="3581400"/>
+            <a:ext cx="247650" cy="228600"/>
+          </a:xfrm>
+          <a:prstGeom xmlns:a="http://schemas.openxmlformats.org/drawingml/2006/main" prst="roundRect">
+            <a:avLst>
+              <a:gd name="adj" fmla="val 33333"/>
+            </a:avLst>
+          </a:prstGeom>
+          <a:noFill xmlns:a="http://schemas.openxmlformats.org/drawingml/2006/main"/>
+          <a:ln xmlns:a="http://schemas.openxmlformats.org/drawingml/2006/main" w="0">
+            <a:noFill/>
+          </a:ln>
+        </p:spPr>
+      </p:sp>
+      <p:sp>
+        <p:nvSpPr>
+          <p:cNvPr id="30" name="">
+            <a:extLst xmlns:a="http://schemas.openxmlformats.org/drawingml/2006/main">
+              <a:ext uri="{FF2B5EF4-FFF2-40B4-BE49-F238E27FC236}">
+                <a16:creationId xmlns:a16="http://schemas.microsoft.com/office/drawing/2014/main" id="{A26A2213-D449-4645-9DA2-761BB702E28C}"/>
+              </a:ext>
+            </a:extLst>
+          </p:cNvPr>
+          <p:cNvSpPr>
+            <a:spLocks xmlns:a="http://schemas.openxmlformats.org/drawingml/2006/main" noGrp="1"/>
+          </p:cNvSpPr>
+          <p:nvPr/>
+        </p:nvSpPr>
+        <p:spPr>
+          <a:xfrm xmlns:a="http://schemas.openxmlformats.org/drawingml/2006/main">
+            <a:off x="7353300" y="3619500"/>
+            <a:ext cx="247650" cy="190500"/>
+          </a:xfrm>
+          <a:prstGeom xmlns:a="http://schemas.openxmlformats.org/drawingml/2006/main" prst="rect">
+            <a:avLst/>
+          </a:prstGeom>
+          <a:noFill xmlns:a="http://schemas.openxmlformats.org/drawingml/2006/main"/>
+          <a:ln xmlns:a="http://schemas.openxmlformats.org/drawingml/2006/main" w="0">
+            <a:noFill/>
+          </a:ln>
+        </p:spPr>
+        <p:txBody>
+          <a:bodyPr xmlns:a="http://schemas.openxmlformats.org/drawingml/2006/main" anchor="t">
+            <a:noAutofit/>
+          </a:bodyPr>
+          <a:lstStyle xmlns:a="http://schemas.openxmlformats.org/drawingml/2006/main"/>
+          <a:p xmlns:a="http://schemas.openxmlformats.org/drawingml/2006/main">
+            <a:pPr algn="ctr">
+              <a:defRPr sz="975" b="1">
+                <a:solidFill>
+                  <a:srgbClr val="52677D"/>
+                </a:solidFill>
+                <a:latin typeface="Helvetica Neue"/>
+                <a:ea typeface="Helvetica Neue"/>
+                <a:cs typeface="Helvetica Neue"/>
+              </a:defRPr>
+            </a:pPr>
+            <a:r>
+              <a:rPr sz="975" b="1">
+                <a:solidFill>
+                  <a:srgbClr val="52677D"/>
+                </a:solidFill>
+                <a:latin typeface="Helvetica Neue"/>
+                <a:ea typeface="Helvetica Neue"/>
+                <a:cs typeface="Helvetica Neue"/>
+              </a:rPr>
+              <a:t>7</a:t>
+            </a:r>
+          </a:p>
+        </p:txBody>
+      </p:sp>
+      <p:sp>
+        <p:nvSpPr>
+          <p:cNvPr id="31" name="">
+            <a:extLst xmlns:a="http://schemas.openxmlformats.org/drawingml/2006/main">
+              <a:ext uri="{FF2B5EF4-FFF2-40B4-BE49-F238E27FC236}">
+                <a16:creationId xmlns:a16="http://schemas.microsoft.com/office/drawing/2014/main" id="{8146BE38-0023-40C1-9B3D-EF67AEBFDFF2}"/>
+              </a:ext>
+            </a:extLst>
+          </p:cNvPr>
+          <p:cNvSpPr>
+            <a:spLocks xmlns:a="http://schemas.openxmlformats.org/drawingml/2006/main" noGrp="1"/>
+          </p:cNvSpPr>
+          <p:nvPr/>
+        </p:nvSpPr>
+        <p:spPr>
+          <a:xfrm xmlns:a="http://schemas.openxmlformats.org/drawingml/2006/main">
+            <a:off x="7696200" y="3590925"/>
+            <a:ext cx="1866900" cy="247650"/>
+          </a:xfrm>
+          <a:prstGeom xmlns:a="http://schemas.openxmlformats.org/drawingml/2006/main" prst="rect">
+            <a:avLst/>
+          </a:prstGeom>
+          <a:noFill xmlns:a="http://schemas.openxmlformats.org/drawingml/2006/main"/>
+          <a:ln xmlns:a="http://schemas.openxmlformats.org/drawingml/2006/main" w="0">
+            <a:noFill/>
+          </a:ln>
+        </p:spPr>
+        <p:txBody>
+          <a:bodyPr xmlns:a="http://schemas.openxmlformats.org/drawingml/2006/main" anchor="t">
+            <a:noAutofit/>
+          </a:bodyPr>
+          <a:lstStyle xmlns:a="http://schemas.openxmlformats.org/drawingml/2006/main"/>
+          <a:p xmlns:a="http://schemas.openxmlformats.org/drawingml/2006/main">
+            <a:pPr algn="l">
+              <a:defRPr sz="900" b="0">
+                <a:solidFill>
+                  <a:srgbClr val="52677D"/>
+                </a:solidFill>
+                <a:latin typeface="Helvetica Neue"/>
+                <a:ea typeface="Helvetica Neue"/>
+                <a:cs typeface="Helvetica Neue"/>
+              </a:defRPr>
+            </a:pPr>
+            <a:r>
+              <a:rPr sz="900" b="0">
+                <a:solidFill>
+                  <a:srgbClr val="52677D"/>
+                </a:solidFill>
+                <a:latin typeface="Helvetica Neue"/>
+                <a:ea typeface="Helvetica Neue"/>
+                <a:cs typeface="Helvetica Neue"/>
+              </a:rPr>
+              <a:t>Empathy and active listening</a:t>
+            </a:r>
+          </a:p>
+        </p:txBody>
+      </p:sp>
+      <p:sp>
+        <p:nvSpPr>
+          <p:cNvPr id="32" name="">
+            <a:extLst xmlns:a="http://schemas.openxmlformats.org/drawingml/2006/main">
+              <a:ext uri="{FF2B5EF4-FFF2-40B4-BE49-F238E27FC236}">
+                <a16:creationId xmlns:a16="http://schemas.microsoft.com/office/drawing/2014/main" id="{EBC9C8FF-DE88-421E-A32B-234E04FEDBA0}"/>
+              </a:ext>
+            </a:extLst>
+          </p:cNvPr>
+          <p:cNvSpPr>
+            <a:spLocks xmlns:a="http://schemas.openxmlformats.org/drawingml/2006/main" noGrp="1"/>
+          </p:cNvSpPr>
+          <p:nvPr/>
+        </p:nvSpPr>
+        <p:spPr>
+          <a:xfrm xmlns:a="http://schemas.openxmlformats.org/drawingml/2006/main">
+            <a:off x="9639300" y="3648075"/>
+            <a:ext cx="790575" cy="95250"/>
+          </a:xfrm>
+          <a:prstGeom xmlns:a="http://schemas.openxmlformats.org/drawingml/2006/main" prst="roundRect">
+            <a:avLst>
+              <a:gd name="adj" fmla="val 50000"/>
+            </a:avLst>
+          </a:prstGeom>
+          <a:solidFill xmlns:a="http://schemas.openxmlformats.org/drawingml/2006/main">
+            <a:srgbClr val="BDC4D4"/>
+          </a:solidFill>
+          <a:ln xmlns:a="http://schemas.openxmlformats.org/drawingml/2006/main" w="0">
+            <a:noFill/>
+          </a:ln>
+        </p:spPr>
+      </p:sp>
+      <p:sp>
+        <p:nvSpPr>
+          <p:cNvPr id="33" name="">
+            <a:extLst xmlns:a="http://schemas.openxmlformats.org/drawingml/2006/main">
+              <a:ext uri="{FF2B5EF4-FFF2-40B4-BE49-F238E27FC236}">
+                <a16:creationId xmlns:a16="http://schemas.microsoft.com/office/drawing/2014/main" id="{2DBE6F4A-21E4-42FF-BB38-3E9EEA7A280C}"/>
+              </a:ext>
+            </a:extLst>
+          </p:cNvPr>
+          <p:cNvSpPr>
+            <a:spLocks xmlns:a="http://schemas.openxmlformats.org/drawingml/2006/main" noGrp="1"/>
+          </p:cNvSpPr>
+          <p:nvPr/>
+        </p:nvSpPr>
+        <p:spPr>
+          <a:xfrm xmlns:a="http://schemas.openxmlformats.org/drawingml/2006/main">
+            <a:off x="7353300" y="3924300"/>
+            <a:ext cx="247650" cy="228600"/>
+          </a:xfrm>
+          <a:prstGeom xmlns:a="http://schemas.openxmlformats.org/drawingml/2006/main" prst="roundRect">
+            <a:avLst>
+              <a:gd name="adj" fmla="val 33333"/>
+            </a:avLst>
+          </a:prstGeom>
+          <a:noFill xmlns:a="http://schemas.openxmlformats.org/drawingml/2006/main"/>
+          <a:ln xmlns:a="http://schemas.openxmlformats.org/drawingml/2006/main" w="0">
+            <a:noFill/>
+          </a:ln>
+        </p:spPr>
+      </p:sp>
+      <p:sp>
+        <p:nvSpPr>
+          <p:cNvPr id="34" name="">
+            <a:extLst xmlns:a="http://schemas.openxmlformats.org/drawingml/2006/main">
+              <a:ext uri="{FF2B5EF4-FFF2-40B4-BE49-F238E27FC236}">
+                <a16:creationId xmlns:a16="http://schemas.microsoft.com/office/drawing/2014/main" id="{03CAF375-B179-455A-A83F-3276B1C758D7}"/>
+              </a:ext>
+            </a:extLst>
+          </p:cNvPr>
+          <p:cNvSpPr>
+            <a:spLocks xmlns:a="http://schemas.openxmlformats.org/drawingml/2006/main" noGrp="1"/>
+          </p:cNvSpPr>
+          <p:nvPr/>
+        </p:nvSpPr>
+        <p:spPr>
+          <a:xfrm xmlns:a="http://schemas.openxmlformats.org/drawingml/2006/main">
+            <a:off x="7353300" y="3962400"/>
+            <a:ext cx="247650" cy="190500"/>
+          </a:xfrm>
+          <a:prstGeom xmlns:a="http://schemas.openxmlformats.org/drawingml/2006/main" prst="rect">
+            <a:avLst/>
+          </a:prstGeom>
+          <a:noFill xmlns:a="http://schemas.openxmlformats.org/drawingml/2006/main"/>
+          <a:ln xmlns:a="http://schemas.openxmlformats.org/drawingml/2006/main" w="0">
+            <a:noFill/>
+          </a:ln>
+        </p:spPr>
+        <p:txBody>
+          <a:bodyPr xmlns:a="http://schemas.openxmlformats.org/drawingml/2006/main" anchor="t">
+            <a:noAutofit/>
+          </a:bodyPr>
+          <a:lstStyle xmlns:a="http://schemas.openxmlformats.org/drawingml/2006/main"/>
+          <a:p xmlns:a="http://schemas.openxmlformats.org/drawingml/2006/main">
+            <a:pPr algn="ctr">
+              <a:defRPr sz="975" b="1">
+                <a:solidFill>
+                  <a:srgbClr val="52677D"/>
+                </a:solidFill>
+                <a:latin typeface="Helvetica Neue"/>
+                <a:ea typeface="Helvetica Neue"/>
+                <a:cs typeface="Helvetica Neue"/>
+              </a:defRPr>
+            </a:pPr>
+            <a:r>
+              <a:rPr sz="975" b="1">
+                <a:solidFill>
+                  <a:srgbClr val="52677D"/>
+                </a:solidFill>
+                <a:latin typeface="Helvetica Neue"/>
+                <a:ea typeface="Helvetica Neue"/>
+                <a:cs typeface="Helvetica Neue"/>
+              </a:rPr>
+              <a:t>8</a:t>
+            </a:r>
+          </a:p>
+        </p:txBody>
+      </p:sp>
+      <p:sp>
+        <p:nvSpPr>
+          <p:cNvPr id="35" name="">
+            <a:extLst xmlns:a="http://schemas.openxmlformats.org/drawingml/2006/main">
+              <a:ext uri="{FF2B5EF4-FFF2-40B4-BE49-F238E27FC236}">
+                <a16:creationId xmlns:a16="http://schemas.microsoft.com/office/drawing/2014/main" id="{5FE993FA-5214-4348-B7AE-2DF260E5425F}"/>
+              </a:ext>
+            </a:extLst>
+          </p:cNvPr>
+          <p:cNvSpPr>
+            <a:spLocks xmlns:a="http://schemas.openxmlformats.org/drawingml/2006/main" noGrp="1"/>
+          </p:cNvSpPr>
+          <p:nvPr/>
+        </p:nvSpPr>
+        <p:spPr>
+          <a:xfrm xmlns:a="http://schemas.openxmlformats.org/drawingml/2006/main">
+            <a:off x="7696200" y="3933825"/>
+            <a:ext cx="1866900" cy="247650"/>
+          </a:xfrm>
+          <a:prstGeom xmlns:a="http://schemas.openxmlformats.org/drawingml/2006/main" prst="rect">
+            <a:avLst/>
+          </a:prstGeom>
+          <a:noFill xmlns:a="http://schemas.openxmlformats.org/drawingml/2006/main"/>
+          <a:ln xmlns:a="http://schemas.openxmlformats.org/drawingml/2006/main" w="0">
+            <a:noFill/>
+          </a:ln>
+        </p:spPr>
+        <p:txBody>
+          <a:bodyPr xmlns:a="http://schemas.openxmlformats.org/drawingml/2006/main" anchor="t">
+            <a:noAutofit/>
+          </a:bodyPr>
+          <a:lstStyle xmlns:a="http://schemas.openxmlformats.org/drawingml/2006/main"/>
+          <a:p xmlns:a="http://schemas.openxmlformats.org/drawingml/2006/main">
+            <a:pPr algn="l">
+              <a:defRPr sz="900" b="0">
+                <a:solidFill>
+                  <a:srgbClr val="52677D"/>
+                </a:solidFill>
+                <a:latin typeface="Helvetica Neue"/>
+                <a:ea typeface="Helvetica Neue"/>
+                <a:cs typeface="Helvetica Neue"/>
+              </a:defRPr>
+            </a:pPr>
+            <a:r>
+              <a:rPr sz="900" b="0">
+                <a:solidFill>
+                  <a:srgbClr val="52677D"/>
+                </a:solidFill>
+                <a:latin typeface="Helvetica Neue"/>
+                <a:ea typeface="Helvetica Neue"/>
+                <a:cs typeface="Helvetica Neue"/>
+              </a:rPr>
+              <a:t>Curiosity and lifelong learning</a:t>
+            </a:r>
+          </a:p>
+        </p:txBody>
+      </p:sp>
+      <p:sp>
+        <p:nvSpPr>
+          <p:cNvPr id="36" name="">
+            <a:extLst xmlns:a="http://schemas.openxmlformats.org/drawingml/2006/main">
+              <a:ext uri="{FF2B5EF4-FFF2-40B4-BE49-F238E27FC236}">
+                <a16:creationId xmlns:a16="http://schemas.microsoft.com/office/drawing/2014/main" id="{A21AF428-3EA6-4A6D-BD3F-39DEC141E7BF}"/>
+              </a:ext>
+            </a:extLst>
+          </p:cNvPr>
+          <p:cNvSpPr>
+            <a:spLocks xmlns:a="http://schemas.openxmlformats.org/drawingml/2006/main" noGrp="1"/>
+          </p:cNvSpPr>
+          <p:nvPr/>
+        </p:nvSpPr>
+        <p:spPr>
+          <a:xfrm xmlns:a="http://schemas.openxmlformats.org/drawingml/2006/main">
+            <a:off x="9639300" y="3990975"/>
+            <a:ext cx="590550" cy="95250"/>
+          </a:xfrm>
+          <a:prstGeom xmlns:a="http://schemas.openxmlformats.org/drawingml/2006/main" prst="roundRect">
+            <a:avLst>
+              <a:gd name="adj" fmla="val 50000"/>
+            </a:avLst>
+          </a:prstGeom>
+          <a:solidFill xmlns:a="http://schemas.openxmlformats.org/drawingml/2006/main">
+            <a:srgbClr val="BDC4D4"/>
+          </a:solidFill>
+          <a:ln xmlns:a="http://schemas.openxmlformats.org/drawingml/2006/main" w="0">
+            <a:noFill/>
+          </a:ln>
+        </p:spPr>
+      </p:sp>
+      <p:sp>
+        <p:nvSpPr>
+          <p:cNvPr id="37" name="">
+            <a:extLst xmlns:a="http://schemas.openxmlformats.org/drawingml/2006/main">
+              <a:ext uri="{FF2B5EF4-FFF2-40B4-BE49-F238E27FC236}">
+                <a16:creationId xmlns:a16="http://schemas.microsoft.com/office/drawing/2014/main" id="{BA13C7E0-EDDA-44D7-8251-C091EA7B59ED}"/>
+              </a:ext>
+            </a:extLst>
+          </p:cNvPr>
+          <p:cNvSpPr>
+            <a:spLocks xmlns:a="http://schemas.openxmlformats.org/drawingml/2006/main" noGrp="1"/>
+          </p:cNvSpPr>
+          <p:nvPr/>
+        </p:nvSpPr>
+        <p:spPr>
+          <a:xfrm xmlns:a="http://schemas.openxmlformats.org/drawingml/2006/main">
+            <a:off x="7353300" y="4267200"/>
+            <a:ext cx="247650" cy="228600"/>
+          </a:xfrm>
+          <a:prstGeom xmlns:a="http://schemas.openxmlformats.org/drawingml/2006/main" prst="roundRect">
+            <a:avLst>
+              <a:gd name="adj" fmla="val 33333"/>
+            </a:avLst>
+          </a:prstGeom>
+          <a:noFill xmlns:a="http://schemas.openxmlformats.org/drawingml/2006/main"/>
+          <a:ln xmlns:a="http://schemas.openxmlformats.org/drawingml/2006/main" w="0">
+            <a:noFill/>
+          </a:ln>
+        </p:spPr>
+      </p:sp>
+      <p:sp>
+        <p:nvSpPr>
+          <p:cNvPr id="38" name="">
+            <a:extLst xmlns:a="http://schemas.openxmlformats.org/drawingml/2006/main">
+              <a:ext uri="{FF2B5EF4-FFF2-40B4-BE49-F238E27FC236}">
+                <a16:creationId xmlns:a16="http://schemas.microsoft.com/office/drawing/2014/main" id="{CFBE19A6-2CF7-42C7-91DD-E35D9F711EAD}"/>
+              </a:ext>
+            </a:extLst>
+          </p:cNvPr>
+          <p:cNvSpPr>
+            <a:spLocks xmlns:a="http://schemas.openxmlformats.org/drawingml/2006/main" noGrp="1"/>
+          </p:cNvSpPr>
+          <p:nvPr/>
+        </p:nvSpPr>
+        <p:spPr>
+          <a:xfrm xmlns:a="http://schemas.openxmlformats.org/drawingml/2006/main">
+            <a:off x="7353300" y="4305300"/>
+            <a:ext cx="247650" cy="190500"/>
+          </a:xfrm>
+          <a:prstGeom xmlns:a="http://schemas.openxmlformats.org/drawingml/2006/main" prst="rect">
+            <a:avLst/>
+          </a:prstGeom>
+          <a:noFill xmlns:a="http://schemas.openxmlformats.org/drawingml/2006/main"/>
+          <a:ln xmlns:a="http://schemas.openxmlformats.org/drawingml/2006/main" w="0">
+            <a:noFill/>
+          </a:ln>
+        </p:spPr>
+        <p:txBody>
+          <a:bodyPr xmlns:a="http://schemas.openxmlformats.org/drawingml/2006/main" anchor="t">
+            <a:noAutofit/>
+          </a:bodyPr>
+          <a:lstStyle xmlns:a="http://schemas.openxmlformats.org/drawingml/2006/main"/>
+          <a:p xmlns:a="http://schemas.openxmlformats.org/drawingml/2006/main">
+            <a:pPr algn="ctr">
+              <a:defRPr sz="975" b="1">
+                <a:solidFill>
+                  <a:srgbClr val="52677D"/>
+                </a:solidFill>
+                <a:latin typeface="Helvetica Neue"/>
+                <a:ea typeface="Helvetica Neue"/>
+                <a:cs typeface="Helvetica Neue"/>
+              </a:defRPr>
+            </a:pPr>
+            <a:r>
+              <a:rPr sz="975" b="1">
+                <a:solidFill>
+                  <a:srgbClr val="52677D"/>
+                </a:solidFill>
+                <a:latin typeface="Helvetica Neue"/>
+                <a:ea typeface="Helvetica Neue"/>
+                <a:cs typeface="Helvetica Neue"/>
+              </a:rPr>
+              <a:t>9</a:t>
+            </a:r>
+          </a:p>
+        </p:txBody>
+      </p:sp>
+      <p:sp>
+        <p:nvSpPr>
+          <p:cNvPr id="39" name="">
+            <a:extLst xmlns:a="http://schemas.openxmlformats.org/drawingml/2006/main">
+              <a:ext uri="{FF2B5EF4-FFF2-40B4-BE49-F238E27FC236}">
+                <a16:creationId xmlns:a16="http://schemas.microsoft.com/office/drawing/2014/main" id="{6EBE3CFB-8CDC-4A0B-8A47-F647A74A66C0}"/>
+              </a:ext>
+            </a:extLst>
+          </p:cNvPr>
+          <p:cNvSpPr>
+            <a:spLocks xmlns:a="http://schemas.openxmlformats.org/drawingml/2006/main" noGrp="1"/>
+          </p:cNvSpPr>
+          <p:nvPr/>
+        </p:nvSpPr>
+        <p:spPr>
+          <a:xfrm xmlns:a="http://schemas.openxmlformats.org/drawingml/2006/main">
+            <a:off x="7696200" y="4276725"/>
+            <a:ext cx="1866900" cy="247650"/>
+          </a:xfrm>
+          <a:prstGeom xmlns:a="http://schemas.openxmlformats.org/drawingml/2006/main" prst="rect">
+            <a:avLst/>
+          </a:prstGeom>
+          <a:noFill xmlns:a="http://schemas.openxmlformats.org/drawingml/2006/main"/>
+          <a:ln xmlns:a="http://schemas.openxmlformats.org/drawingml/2006/main" w="0">
+            <a:noFill/>
+          </a:ln>
+        </p:spPr>
+        <p:txBody>
+          <a:bodyPr xmlns:a="http://schemas.openxmlformats.org/drawingml/2006/main" anchor="t">
+            <a:noAutofit/>
+          </a:bodyPr>
+          <a:lstStyle xmlns:a="http://schemas.openxmlformats.org/drawingml/2006/main"/>
+          <a:p xmlns:a="http://schemas.openxmlformats.org/drawingml/2006/main">
+            <a:pPr algn="l">
+              <a:defRPr sz="900" b="0">
+                <a:solidFill>
+                  <a:srgbClr val="52677D"/>
+                </a:solidFill>
+                <a:latin typeface="Helvetica Neue"/>
+                <a:ea typeface="Helvetica Neue"/>
+                <a:cs typeface="Helvetica Neue"/>
+              </a:defRPr>
+            </a:pPr>
+            <a:r>
+              <a:rPr sz="900" b="0">
+                <a:solidFill>
+                  <a:srgbClr val="52677D"/>
+                </a:solidFill>
+                <a:latin typeface="Helvetica Neue"/>
+                <a:ea typeface="Helvetica Neue"/>
+                <a:cs typeface="Helvetica Neue"/>
+              </a:rPr>
+              <a:t>Talent management</a:t>
+            </a:r>
+          </a:p>
+        </p:txBody>
+      </p:sp>
+      <p:sp>
+        <p:nvSpPr>
+          <p:cNvPr id="40" name="">
+            <a:extLst xmlns:a="http://schemas.openxmlformats.org/drawingml/2006/main">
+              <a:ext uri="{FF2B5EF4-FFF2-40B4-BE49-F238E27FC236}">
+                <a16:creationId xmlns:a16="http://schemas.microsoft.com/office/drawing/2014/main" id="{FA3755CB-6ADC-4E60-97A4-FC9253BBA7E1}"/>
+              </a:ext>
+            </a:extLst>
+          </p:cNvPr>
+          <p:cNvSpPr>
+            <a:spLocks xmlns:a="http://schemas.openxmlformats.org/drawingml/2006/main" noGrp="1"/>
+          </p:cNvSpPr>
+          <p:nvPr/>
+        </p:nvSpPr>
+        <p:spPr>
+          <a:xfrm xmlns:a="http://schemas.openxmlformats.org/drawingml/2006/main">
+            <a:off x="9639300" y="4333875"/>
+            <a:ext cx="400050" cy="95250"/>
+          </a:xfrm>
+          <a:prstGeom xmlns:a="http://schemas.openxmlformats.org/drawingml/2006/main" prst="roundRect">
+            <a:avLst>
+              <a:gd name="adj" fmla="val 50000"/>
+            </a:avLst>
+          </a:prstGeom>
+          <a:solidFill xmlns:a="http://schemas.openxmlformats.org/drawingml/2006/main">
+            <a:srgbClr val="BDC4D4"/>
+          </a:solidFill>
+          <a:ln xmlns:a="http://schemas.openxmlformats.org/drawingml/2006/main" w="0">
+            <a:noFill/>
+          </a:ln>
+        </p:spPr>
+      </p:sp>
+      <p:sp>
+        <p:nvSpPr>
+          <p:cNvPr id="41" name="">
+            <a:extLst xmlns:a="http://schemas.openxmlformats.org/drawingml/2006/main">
+              <a:ext uri="{FF2B5EF4-FFF2-40B4-BE49-F238E27FC236}">
+                <a16:creationId xmlns:a16="http://schemas.microsoft.com/office/drawing/2014/main" id="{882ACB8D-D298-4384-9608-FB55C0416178}"/>
+              </a:ext>
+            </a:extLst>
+          </p:cNvPr>
+          <p:cNvSpPr>
+            <a:spLocks xmlns:a="http://schemas.openxmlformats.org/drawingml/2006/main" noGrp="1"/>
+          </p:cNvSpPr>
+          <p:nvPr/>
+        </p:nvSpPr>
+        <p:spPr>
+          <a:xfrm xmlns:a="http://schemas.openxmlformats.org/drawingml/2006/main">
+            <a:off x="7353300" y="4610100"/>
+            <a:ext cx="247650" cy="228600"/>
+          </a:xfrm>
+          <a:prstGeom xmlns:a="http://schemas.openxmlformats.org/drawingml/2006/main" prst="roundRect">
+            <a:avLst>
+              <a:gd name="adj" fmla="val 33333"/>
+            </a:avLst>
+          </a:prstGeom>
+          <a:noFill xmlns:a="http://schemas.openxmlformats.org/drawingml/2006/main"/>
+          <a:ln xmlns:a="http://schemas.openxmlformats.org/drawingml/2006/main" w="0">
+            <a:noFill/>
+          </a:ln>
+        </p:spPr>
+      </p:sp>
+      <p:sp>
+        <p:nvSpPr>
+          <p:cNvPr id="42" name="">
+            <a:extLst xmlns:a="http://schemas.openxmlformats.org/drawingml/2006/main">
+              <a:ext uri="{FF2B5EF4-FFF2-40B4-BE49-F238E27FC236}">
+                <a16:creationId xmlns:a16="http://schemas.microsoft.com/office/drawing/2014/main" id="{B66E46F5-04C6-4795-8F56-44DB6D3E93AE}"/>
+              </a:ext>
+            </a:extLst>
+          </p:cNvPr>
+          <p:cNvSpPr>
+            <a:spLocks xmlns:a="http://schemas.openxmlformats.org/drawingml/2006/main" noGrp="1"/>
+          </p:cNvSpPr>
+          <p:nvPr/>
+        </p:nvSpPr>
+        <p:spPr>
+          <a:xfrm xmlns:a="http://schemas.openxmlformats.org/drawingml/2006/main">
+            <a:off x="7353300" y="4648200"/>
+            <a:ext cx="247650" cy="190500"/>
+          </a:xfrm>
+          <a:prstGeom xmlns:a="http://schemas.openxmlformats.org/drawingml/2006/main" prst="rect">
+            <a:avLst/>
+          </a:prstGeom>
+          <a:noFill xmlns:a="http://schemas.openxmlformats.org/drawingml/2006/main"/>
+          <a:ln xmlns:a="http://schemas.openxmlformats.org/drawingml/2006/main" w="0">
+            <a:noFill/>
+          </a:ln>
+        </p:spPr>
+        <p:txBody>
+          <a:bodyPr xmlns:a="http://schemas.openxmlformats.org/drawingml/2006/main" anchor="t">
+            <a:noAutofit/>
+          </a:bodyPr>
+          <a:lstStyle xmlns:a="http://schemas.openxmlformats.org/drawingml/2006/main"/>
+          <a:p xmlns:a="http://schemas.openxmlformats.org/drawingml/2006/main">
+            <a:pPr algn="ctr">
+              <a:defRPr sz="975" b="1">
+                <a:solidFill>
+                  <a:srgbClr val="52677D"/>
+                </a:solidFill>
+                <a:latin typeface="Helvetica Neue"/>
+                <a:ea typeface="Helvetica Neue"/>
+                <a:cs typeface="Helvetica Neue"/>
+              </a:defRPr>
+            </a:pPr>
+            <a:r>
+              <a:rPr sz="975" b="1">
+                <a:solidFill>
+                  <a:srgbClr val="52677D"/>
+                </a:solidFill>
+                <a:latin typeface="Helvetica Neue"/>
+                <a:ea typeface="Helvetica Neue"/>
+                <a:cs typeface="Helvetica Neue"/>
+              </a:rPr>
+              <a:t>10</a:t>
+            </a:r>
+          </a:p>
+        </p:txBody>
+      </p:sp>
+      <p:sp>
+        <p:nvSpPr>
+          <p:cNvPr id="43" name="">
+            <a:extLst xmlns:a="http://schemas.openxmlformats.org/drawingml/2006/main">
+              <a:ext uri="{FF2B5EF4-FFF2-40B4-BE49-F238E27FC236}">
+                <a16:creationId xmlns:a16="http://schemas.microsoft.com/office/drawing/2014/main" id="{73C31347-B4A6-4448-ADFB-6ADA8E0EF124}"/>
+              </a:ext>
+            </a:extLst>
+          </p:cNvPr>
+          <p:cNvSpPr>
+            <a:spLocks xmlns:a="http://schemas.openxmlformats.org/drawingml/2006/main" noGrp="1"/>
+          </p:cNvSpPr>
+          <p:nvPr/>
+        </p:nvSpPr>
+        <p:spPr>
+          <a:xfrm xmlns:a="http://schemas.openxmlformats.org/drawingml/2006/main">
+            <a:off x="7696200" y="4619625"/>
+            <a:ext cx="1866900" cy="247650"/>
+          </a:xfrm>
+          <a:prstGeom xmlns:a="http://schemas.openxmlformats.org/drawingml/2006/main" prst="rect">
+            <a:avLst/>
+          </a:prstGeom>
+          <a:noFill xmlns:a="http://schemas.openxmlformats.org/drawingml/2006/main"/>
+          <a:ln xmlns:a="http://schemas.openxmlformats.org/drawingml/2006/main" w="0">
+            <a:noFill/>
+          </a:ln>
+        </p:spPr>
+        <p:txBody>
+          <a:bodyPr xmlns:a="http://schemas.openxmlformats.org/drawingml/2006/main" anchor="t">
+            <a:noAutofit/>
+          </a:bodyPr>
+          <a:lstStyle xmlns:a="http://schemas.openxmlformats.org/drawingml/2006/main"/>
+          <a:p xmlns:a="http://schemas.openxmlformats.org/drawingml/2006/main">
+            <a:pPr algn="l">
+              <a:defRPr sz="900" b="0">
+                <a:solidFill>
+                  <a:srgbClr val="52677D"/>
+                </a:solidFill>
+                <a:latin typeface="Helvetica Neue"/>
+                <a:ea typeface="Helvetica Neue"/>
+                <a:cs typeface="Helvetica Neue"/>
+              </a:defRPr>
+            </a:pPr>
+            <a:r>
+              <a:rPr sz="900" b="0">
+                <a:solidFill>
+                  <a:srgbClr val="52677D"/>
+                </a:solidFill>
+                <a:latin typeface="Helvetica Neue"/>
+                <a:ea typeface="Helvetica Neue"/>
+                <a:cs typeface="Helvetica Neue"/>
+              </a:rPr>
+              <a:t>Service orientation</a:t>
+            </a:r>
+          </a:p>
+        </p:txBody>
+      </p:sp>
+      <p:sp>
+        <p:nvSpPr>
+          <p:cNvPr id="44" name="">
+            <a:extLst xmlns:a="http://schemas.openxmlformats.org/drawingml/2006/main">
+              <a:ext uri="{FF2B5EF4-FFF2-40B4-BE49-F238E27FC236}">
+                <a16:creationId xmlns:a16="http://schemas.microsoft.com/office/drawing/2014/main" id="{0C90AF96-15D7-4238-A91B-B37BAB5C22AA}"/>
+              </a:ext>
+            </a:extLst>
+          </p:cNvPr>
+          <p:cNvSpPr>
+            <a:spLocks xmlns:a="http://schemas.openxmlformats.org/drawingml/2006/main" noGrp="1"/>
+          </p:cNvSpPr>
+          <p:nvPr/>
+        </p:nvSpPr>
+        <p:spPr>
+          <a:xfrm xmlns:a="http://schemas.openxmlformats.org/drawingml/2006/main">
+            <a:off x="9639300" y="4676775"/>
+            <a:ext cx="200025" cy="95250"/>
+          </a:xfrm>
+          <a:prstGeom xmlns:a="http://schemas.openxmlformats.org/drawingml/2006/main" prst="roundRect">
+            <a:avLst>
+              <a:gd name="adj" fmla="val 50000"/>
+            </a:avLst>
+          </a:prstGeom>
+          <a:solidFill xmlns:a="http://schemas.openxmlformats.org/drawingml/2006/main">
+            <a:srgbClr val="BDC4D4"/>
+          </a:solidFill>
+          <a:ln xmlns:a="http://schemas.openxmlformats.org/drawingml/2006/main" w="0">
+            <a:noFill/>
+          </a:ln>
+        </p:spPr>
+      </p:sp>
+      <p:sp>
+        <p:nvSpPr>
+          <p:cNvPr id="45" name="">
+            <a:extLst xmlns:a="http://schemas.openxmlformats.org/drawingml/2006/main">
+              <a:ext uri="{FF2B5EF4-FFF2-40B4-BE49-F238E27FC236}">
+                <a16:creationId xmlns:a16="http://schemas.microsoft.com/office/drawing/2014/main" id="{9D4F8519-8CFD-4870-BD53-2134A0BAEBB4}"/>
+              </a:ext>
+            </a:extLst>
+          </p:cNvPr>
+          <p:cNvSpPr>
+            <a:spLocks xmlns:a="http://schemas.openxmlformats.org/drawingml/2006/main" noGrp="1"/>
+          </p:cNvSpPr>
+          <p:nvPr/>
+        </p:nvSpPr>
+        <p:spPr>
+          <a:xfrm xmlns:a="http://schemas.openxmlformats.org/drawingml/2006/main">
+            <a:off x="7124700" y="5295900"/>
+            <a:ext cx="4476750" cy="571500"/>
           </a:xfrm>
           <a:prstGeom xmlns:a="http://schemas.openxmlformats.org/drawingml/2006/main" prst="rect">
             <a:avLst/>
@@ -2363,7 +3976,7 @@
             <a:pPr algn="l">
               <a:defRPr sz="1050" b="0">
                 <a:solidFill>
-                  <a:srgbClr val="61718A"/>
+                  <a:srgbClr val="BDC4D4"/>
                 </a:solidFill>
                 <a:latin typeface="Helvetica Neue"/>
                 <a:ea typeface="Helvetica Neue"/>
@@ -2373,20 +3986,20 @@
             <a:r>
               <a:rPr sz="1050" b="0">
                 <a:solidFill>
-                  <a:srgbClr val="61718A"/>
-                </a:solidFill>
-                <a:latin typeface="Helvetica Neue"/>
-                <a:ea typeface="Helvetica Neue"/>
-                <a:cs typeface="Helvetica Neue"/>
-              </a:rPr>
-              <a:t>Designed by Jada Lin and Olivia Zheng</a:t>
+                  <a:srgbClr val="BDC4D4"/>
+                </a:solidFill>
+                <a:latin typeface="Helvetica Neue"/>
+                <a:ea typeface="Helvetica Neue"/>
+                <a:cs typeface="Helvetica Neue"/>
+              </a:rPr>
+              <a:t>Seven in 10 companies call analytical thinking essential.</a:t>
             </a:r>
           </a:p>
           <a:p xmlns:a="http://schemas.openxmlformats.org/drawingml/2006/main">
             <a:pPr algn="l">
               <a:defRPr sz="1050" b="0">
                 <a:solidFill>
-                  <a:srgbClr val="61718A"/>
+                  <a:srgbClr val="BDC4D4"/>
                 </a:solidFill>
                 <a:latin typeface="Helvetica Neue"/>
                 <a:ea typeface="Helvetica Neue"/>
@@ -2396,7 +4009,450 @@
             <a:r>
               <a:rPr sz="1050" b="0">
                 <a:solidFill>
-                  <a:srgbClr val="61718A"/>
+                  <a:srgbClr val="BDC4D4"/>
+                </a:solidFill>
+                <a:latin typeface="Helvetica Neue"/>
+                <a:ea typeface="Helvetica Neue"/>
+                <a:cs typeface="Helvetica Neue"/>
+              </a:rPr>
+              <a:t>Creative thinking ranks fourth.</a:t>
+            </a:r>
+          </a:p>
+        </p:txBody>
+      </p:sp>
+      <p:sp>
+        <p:nvSpPr>
+          <p:cNvPr id="46" name="">
+            <a:extLst xmlns:a="http://schemas.openxmlformats.org/drawingml/2006/main">
+              <a:ext uri="{FF2B5EF4-FFF2-40B4-BE49-F238E27FC236}">
+                <a16:creationId xmlns:a16="http://schemas.microsoft.com/office/drawing/2014/main" id="{E45EAF13-EF85-4BD4-8FF1-7E28F97DC65A}"/>
+              </a:ext>
+            </a:extLst>
+          </p:cNvPr>
+          <p:cNvSpPr>
+            <a:spLocks xmlns:a="http://schemas.openxmlformats.org/drawingml/2006/main" noGrp="1"/>
+          </p:cNvSpPr>
+          <p:nvPr/>
+        </p:nvSpPr>
+        <p:spPr>
+          <a:xfrm xmlns:a="http://schemas.openxmlformats.org/drawingml/2006/main">
+            <a:off x="7124700" y="5962650"/>
+            <a:ext cx="4476750" cy="476250"/>
+          </a:xfrm>
+          <a:prstGeom xmlns:a="http://schemas.openxmlformats.org/drawingml/2006/main" prst="rect">
+            <a:avLst/>
+          </a:prstGeom>
+          <a:noFill xmlns:a="http://schemas.openxmlformats.org/drawingml/2006/main"/>
+          <a:ln xmlns:a="http://schemas.openxmlformats.org/drawingml/2006/main" w="0">
+            <a:noFill/>
+          </a:ln>
+        </p:spPr>
+        <p:txBody>
+          <a:bodyPr xmlns:a="http://schemas.openxmlformats.org/drawingml/2006/main" anchor="t">
+            <a:noAutofit/>
+          </a:bodyPr>
+          <a:lstStyle xmlns:a="http://schemas.openxmlformats.org/drawingml/2006/main"/>
+          <a:p xmlns:a="http://schemas.openxmlformats.org/drawingml/2006/main">
+            <a:pPr algn="l">
+              <a:defRPr sz="825" b="0">
+                <a:solidFill>
+                  <a:srgbClr val="52677D"/>
+                </a:solidFill>
+                <a:latin typeface="Helvetica Neue"/>
+                <a:ea typeface="Helvetica Neue"/>
+                <a:cs typeface="Helvetica Neue"/>
+              </a:defRPr>
+            </a:pPr>
+            <a:r>
+              <a:rPr sz="825" b="0">
+                <a:solidFill>
+                  <a:srgbClr val="52677D"/>
+                </a:solidFill>
+                <a:latin typeface="Helvetica Neue"/>
+                <a:ea typeface="Helvetica Neue"/>
+                <a:cs typeface="Helvetica Neue"/>
+              </a:rPr>
+              <a:t>World Economic Forum, Future of Jobs Report 2025.</a:t>
+            </a:r>
+          </a:p>
+          <a:p xmlns:a="http://schemas.openxmlformats.org/drawingml/2006/main">
+            <a:pPr algn="l">
+              <a:defRPr sz="825" b="0">
+                <a:solidFill>
+                  <a:srgbClr val="52677D"/>
+                </a:solidFill>
+                <a:latin typeface="Helvetica Neue"/>
+                <a:ea typeface="Helvetica Neue"/>
+                <a:cs typeface="Helvetica Neue"/>
+              </a:defRPr>
+            </a:pPr>
+            <a:r>
+              <a:rPr sz="825" b="0">
+                <a:solidFill>
+                  <a:srgbClr val="52677D"/>
+                </a:solidFill>
+                <a:latin typeface="Helvetica Neue"/>
+                <a:ea typeface="Helvetica Neue"/>
+                <a:cs typeface="Helvetica Neue"/>
+              </a:rPr>
+              <a:t>Survey of over 1,000 employers across 55 economies.</a:t>
+            </a:r>
+          </a:p>
+        </p:txBody>
+      </p:sp>
+      <p:sp>
+        <p:nvSpPr>
+          <p:cNvPr id="47" name="">
+            <a:extLst xmlns:a="http://schemas.openxmlformats.org/drawingml/2006/main">
+              <a:ext uri="{FF2B5EF4-FFF2-40B4-BE49-F238E27FC236}">
+                <a16:creationId xmlns:a16="http://schemas.microsoft.com/office/drawing/2014/main" id="{B3313A1A-7433-44E2-96BA-DFB164FC6176}"/>
+              </a:ext>
+            </a:extLst>
+          </p:cNvPr>
+          <p:cNvSpPr>
+            <a:spLocks xmlns:a="http://schemas.openxmlformats.org/drawingml/2006/main" noGrp="1"/>
+          </p:cNvSpPr>
+          <p:nvPr/>
+        </p:nvSpPr>
+        <p:spPr>
+          <a:xfrm xmlns:a="http://schemas.openxmlformats.org/drawingml/2006/main">
+            <a:off x="685800" y="552450"/>
+            <a:ext cx="2857500" cy="247650"/>
+          </a:xfrm>
+          <a:prstGeom xmlns:a="http://schemas.openxmlformats.org/drawingml/2006/main" prst="rect">
+            <a:avLst/>
+          </a:prstGeom>
+          <a:noFill xmlns:a="http://schemas.openxmlformats.org/drawingml/2006/main"/>
+          <a:ln xmlns:a="http://schemas.openxmlformats.org/drawingml/2006/main" w="0">
+            <a:noFill/>
+          </a:ln>
+        </p:spPr>
+        <p:txBody>
+          <a:bodyPr xmlns:a="http://schemas.openxmlformats.org/drawingml/2006/main" anchor="t">
+            <a:noAutofit/>
+          </a:bodyPr>
+          <a:lstStyle xmlns:a="http://schemas.openxmlformats.org/drawingml/2006/main"/>
+          <a:p xmlns:a="http://schemas.openxmlformats.org/drawingml/2006/main">
+            <a:pPr algn="l">
+              <a:defRPr sz="1125" b="1">
+                <a:solidFill>
+                  <a:srgbClr val="52677D"/>
+                </a:solidFill>
+                <a:latin typeface="Helvetica Neue"/>
+                <a:ea typeface="Helvetica Neue"/>
+                <a:cs typeface="Helvetica Neue"/>
+              </a:defRPr>
+            </a:pPr>
+            <a:r>
+              <a:rPr sz="1125" b="1">
+                <a:solidFill>
+                  <a:srgbClr val="52677D"/>
+                </a:solidFill>
+                <a:latin typeface="Helvetica Neue"/>
+                <a:ea typeface="Helvetica Neue"/>
+                <a:cs typeface="Helvetica Neue"/>
+              </a:rPr>
+              <a:t>CAREER CANVAS</a:t>
+            </a:r>
+          </a:p>
+        </p:txBody>
+      </p:sp>
+      <p:sp>
+        <p:nvSpPr>
+          <p:cNvPr id="48" name="">
+            <a:extLst xmlns:a="http://schemas.openxmlformats.org/drawingml/2006/main">
+              <a:ext uri="{FF2B5EF4-FFF2-40B4-BE49-F238E27FC236}">
+                <a16:creationId xmlns:a16="http://schemas.microsoft.com/office/drawing/2014/main" id="{D0B2A83E-F5A7-49EE-B2C8-DA914910F77E}"/>
+              </a:ext>
+            </a:extLst>
+          </p:cNvPr>
+          <p:cNvSpPr>
+            <a:spLocks xmlns:a="http://schemas.openxmlformats.org/drawingml/2006/main" noGrp="1"/>
+          </p:cNvSpPr>
+          <p:nvPr/>
+        </p:nvSpPr>
+        <p:spPr>
+          <a:xfrm xmlns:a="http://schemas.openxmlformats.org/drawingml/2006/main">
+            <a:off x="685800" y="914400"/>
+            <a:ext cx="685800" cy="76200"/>
+          </a:xfrm>
+          <a:prstGeom xmlns:a="http://schemas.openxmlformats.org/drawingml/2006/main" prst="roundRect">
+            <a:avLst>
+              <a:gd name="adj" fmla="val 50000"/>
+            </a:avLst>
+          </a:prstGeom>
+          <a:solidFill xmlns:a="http://schemas.openxmlformats.org/drawingml/2006/main">
+            <a:srgbClr val="1C2E4A"/>
+          </a:solidFill>
+          <a:ln xmlns:a="http://schemas.openxmlformats.org/drawingml/2006/main" w="0">
+            <a:noFill/>
+          </a:ln>
+        </p:spPr>
+      </p:sp>
+      <p:sp>
+        <p:nvSpPr>
+          <p:cNvPr id="49" name="">
+            <a:extLst xmlns:a="http://schemas.openxmlformats.org/drawingml/2006/main">
+              <a:ext uri="{FF2B5EF4-FFF2-40B4-BE49-F238E27FC236}">
+                <a16:creationId xmlns:a16="http://schemas.microsoft.com/office/drawing/2014/main" id="{0A9920CC-535D-46C0-A448-56212B14F273}"/>
+              </a:ext>
+            </a:extLst>
+          </p:cNvPr>
+          <p:cNvSpPr>
+            <a:spLocks xmlns:a="http://schemas.openxmlformats.org/drawingml/2006/main" noGrp="1"/>
+          </p:cNvSpPr>
+          <p:nvPr/>
+        </p:nvSpPr>
+        <p:spPr>
+          <a:xfrm xmlns:a="http://schemas.openxmlformats.org/drawingml/2006/main">
+            <a:off x="685800" y="1447800"/>
+            <a:ext cx="4953000" cy="1809750"/>
+          </a:xfrm>
+          <a:prstGeom xmlns:a="http://schemas.openxmlformats.org/drawingml/2006/main" prst="rect">
+            <a:avLst/>
+          </a:prstGeom>
+          <a:noFill xmlns:a="http://schemas.openxmlformats.org/drawingml/2006/main"/>
+          <a:ln xmlns:a="http://schemas.openxmlformats.org/drawingml/2006/main" w="0">
+            <a:noFill/>
+          </a:ln>
+        </p:spPr>
+        <p:txBody>
+          <a:bodyPr xmlns:a="http://schemas.openxmlformats.org/drawingml/2006/main" anchor="t">
+            <a:noAutofit/>
+          </a:bodyPr>
+          <a:lstStyle xmlns:a="http://schemas.openxmlformats.org/drawingml/2006/main"/>
+          <a:p xmlns:a="http://schemas.openxmlformats.org/drawingml/2006/main">
+            <a:pPr algn="l">
+              <a:defRPr sz="3900" b="1">
+                <a:solidFill>
+                  <a:srgbClr val="1C2E4A"/>
+                </a:solidFill>
+                <a:latin typeface="Helvetica Neue"/>
+                <a:ea typeface="Helvetica Neue"/>
+                <a:cs typeface="Helvetica Neue"/>
+              </a:defRPr>
+            </a:pPr>
+            <a:r>
+              <a:rPr sz="3900" b="1">
+                <a:solidFill>
+                  <a:srgbClr val="1C2E4A"/>
+                </a:solidFill>
+                <a:latin typeface="Helvetica Neue"/>
+                <a:ea typeface="Helvetica Neue"/>
+                <a:cs typeface="Helvetica Neue"/>
+              </a:rPr>
+              <a:t>Creativity across</a:t>
+            </a:r>
+          </a:p>
+          <a:p xmlns:a="http://schemas.openxmlformats.org/drawingml/2006/main">
+            <a:pPr algn="l">
+              <a:defRPr sz="3900" b="1">
+                <a:solidFill>
+                  <a:srgbClr val="1C2E4A"/>
+                </a:solidFill>
+                <a:latin typeface="Helvetica Neue"/>
+                <a:ea typeface="Helvetica Neue"/>
+                <a:cs typeface="Helvetica Neue"/>
+              </a:defRPr>
+            </a:pPr>
+            <a:r>
+              <a:rPr sz="3900" b="1">
+                <a:solidFill>
+                  <a:srgbClr val="1C2E4A"/>
+                </a:solidFill>
+                <a:latin typeface="Helvetica Neue"/>
+                <a:ea typeface="Helvetica Neue"/>
+                <a:cs typeface="Helvetica Neue"/>
+              </a:rPr>
+              <a:t>business</a:t>
+            </a:r>
+          </a:p>
+        </p:txBody>
+      </p:sp>
+      <p:sp>
+        <p:nvSpPr>
+          <p:cNvPr id="50" name="">
+            <a:extLst xmlns:a="http://schemas.openxmlformats.org/drawingml/2006/main">
+              <a:ext uri="{FF2B5EF4-FFF2-40B4-BE49-F238E27FC236}">
+                <a16:creationId xmlns:a16="http://schemas.microsoft.com/office/drawing/2014/main" id="{214A8677-5788-4D72-82FB-E502CA28A70E}"/>
+              </a:ext>
+            </a:extLst>
+          </p:cNvPr>
+          <p:cNvSpPr>
+            <a:spLocks xmlns:a="http://schemas.openxmlformats.org/drawingml/2006/main" noGrp="1"/>
+          </p:cNvSpPr>
+          <p:nvPr/>
+        </p:nvSpPr>
+        <p:spPr>
+          <a:xfrm xmlns:a="http://schemas.openxmlformats.org/drawingml/2006/main">
+            <a:off x="685800" y="3467100"/>
+            <a:ext cx="4762500" cy="1143000"/>
+          </a:xfrm>
+          <a:prstGeom xmlns:a="http://schemas.openxmlformats.org/drawingml/2006/main" prst="rect">
+            <a:avLst/>
+          </a:prstGeom>
+          <a:noFill xmlns:a="http://schemas.openxmlformats.org/drawingml/2006/main"/>
+          <a:ln xmlns:a="http://schemas.openxmlformats.org/drawingml/2006/main" w="0">
+            <a:noFill/>
+          </a:ln>
+        </p:spPr>
+        <p:txBody>
+          <a:bodyPr xmlns:a="http://schemas.openxmlformats.org/drawingml/2006/main" anchor="t">
+            <a:noAutofit/>
+          </a:bodyPr>
+          <a:lstStyle xmlns:a="http://schemas.openxmlformats.org/drawingml/2006/main"/>
+          <a:p xmlns:a="http://schemas.openxmlformats.org/drawingml/2006/main">
+            <a:pPr algn="l">
+              <a:defRPr sz="1575" b="0">
+                <a:solidFill>
+                  <a:srgbClr val="52677D"/>
+                </a:solidFill>
+                <a:latin typeface="Helvetica Neue"/>
+                <a:ea typeface="Helvetica Neue"/>
+                <a:cs typeface="Helvetica Neue"/>
+              </a:defRPr>
+            </a:pPr>
+            <a:r>
+              <a:rPr sz="1575" b="0">
+                <a:solidFill>
+                  <a:srgbClr val="52677D"/>
+                </a:solidFill>
+                <a:latin typeface="Helvetica Neue"/>
+                <a:ea typeface="Helvetica Neue"/>
+                <a:cs typeface="Helvetica Neue"/>
+              </a:rPr>
+              <a:t>Five timed rounds, five DECA career areas, one idea you build and defend</a:t>
+            </a:r>
+          </a:p>
+        </p:txBody>
+      </p:sp>
+      <p:sp>
+        <p:nvSpPr>
+          <p:cNvPr id="51" name="">
+            <a:extLst xmlns:a="http://schemas.openxmlformats.org/drawingml/2006/main">
+              <a:ext uri="{FF2B5EF4-FFF2-40B4-BE49-F238E27FC236}">
+                <a16:creationId xmlns:a16="http://schemas.microsoft.com/office/drawing/2014/main" id="{5D93AC37-67E7-4546-92D6-EB89A871101B}"/>
+              </a:ext>
+            </a:extLst>
+          </p:cNvPr>
+          <p:cNvSpPr>
+            <a:spLocks xmlns:a="http://schemas.openxmlformats.org/drawingml/2006/main" noGrp="1"/>
+          </p:cNvSpPr>
+          <p:nvPr/>
+        </p:nvSpPr>
+        <p:spPr>
+          <a:xfrm xmlns:a="http://schemas.openxmlformats.org/drawingml/2006/main">
+            <a:off x="685800" y="5391150"/>
+            <a:ext cx="2095500" cy="285750"/>
+          </a:xfrm>
+          <a:prstGeom xmlns:a="http://schemas.openxmlformats.org/drawingml/2006/main" prst="rect">
+            <a:avLst/>
+          </a:prstGeom>
+          <a:noFill xmlns:a="http://schemas.openxmlformats.org/drawingml/2006/main"/>
+          <a:ln xmlns:a="http://schemas.openxmlformats.org/drawingml/2006/main" w="0">
+            <a:noFill/>
+          </a:ln>
+        </p:spPr>
+        <p:txBody>
+          <a:bodyPr xmlns:a="http://schemas.openxmlformats.org/drawingml/2006/main" anchor="t">
+            <a:noAutofit/>
+          </a:bodyPr>
+          <a:lstStyle xmlns:a="http://schemas.openxmlformats.org/drawingml/2006/main"/>
+          <a:p xmlns:a="http://schemas.openxmlformats.org/drawingml/2006/main">
+            <a:pPr algn="l">
+              <a:defRPr sz="1275" b="1">
+                <a:solidFill>
+                  <a:srgbClr val="1C2E4A"/>
+                </a:solidFill>
+                <a:latin typeface="Helvetica Neue"/>
+                <a:ea typeface="Helvetica Neue"/>
+                <a:cs typeface="Helvetica Neue"/>
+              </a:defRPr>
+            </a:pPr>
+            <a:r>
+              <a:rPr sz="1275" b="1">
+                <a:solidFill>
+                  <a:srgbClr val="1C2E4A"/>
+                </a:solidFill>
+                <a:latin typeface="Helvetica Neue"/>
+                <a:ea typeface="Helvetica Neue"/>
+                <a:cs typeface="Helvetica Neue"/>
+              </a:rPr>
+              <a:t>Meeting 1</a:t>
+            </a:r>
+          </a:p>
+        </p:txBody>
+      </p:sp>
+      <p:sp>
+        <p:nvSpPr>
+          <p:cNvPr id="52" name="">
+            <a:extLst xmlns:a="http://schemas.openxmlformats.org/drawingml/2006/main">
+              <a:ext uri="{FF2B5EF4-FFF2-40B4-BE49-F238E27FC236}">
+                <a16:creationId xmlns:a16="http://schemas.microsoft.com/office/drawing/2014/main" id="{22C839E3-1810-4DAB-845F-211FDB029714}"/>
+              </a:ext>
+            </a:extLst>
+          </p:cNvPr>
+          <p:cNvSpPr>
+            <a:spLocks xmlns:a="http://schemas.openxmlformats.org/drawingml/2006/main" noGrp="1"/>
+          </p:cNvSpPr>
+          <p:nvPr/>
+        </p:nvSpPr>
+        <p:spPr>
+          <a:xfrm xmlns:a="http://schemas.openxmlformats.org/drawingml/2006/main">
+            <a:off x="685800" y="5772150"/>
+            <a:ext cx="3619500" cy="476250"/>
+          </a:xfrm>
+          <a:prstGeom xmlns:a="http://schemas.openxmlformats.org/drawingml/2006/main" prst="rect">
+            <a:avLst/>
+          </a:prstGeom>
+          <a:noFill xmlns:a="http://schemas.openxmlformats.org/drawingml/2006/main"/>
+          <a:ln xmlns:a="http://schemas.openxmlformats.org/drawingml/2006/main" w="0">
+            <a:noFill/>
+          </a:ln>
+        </p:spPr>
+        <p:txBody>
+          <a:bodyPr xmlns:a="http://schemas.openxmlformats.org/drawingml/2006/main" anchor="t">
+            <a:noAutofit/>
+          </a:bodyPr>
+          <a:lstStyle xmlns:a="http://schemas.openxmlformats.org/drawingml/2006/main"/>
+          <a:p xmlns:a="http://schemas.openxmlformats.org/drawingml/2006/main">
+            <a:pPr algn="l">
+              <a:defRPr sz="975" b="0">
+                <a:solidFill>
+                  <a:srgbClr val="52677D"/>
+                </a:solidFill>
+                <a:latin typeface="Helvetica Neue"/>
+                <a:ea typeface="Helvetica Neue"/>
+                <a:cs typeface="Helvetica Neue"/>
+              </a:defRPr>
+            </a:pPr>
+            <a:r>
+              <a:rPr sz="975" b="0">
+                <a:solidFill>
+                  <a:srgbClr val="52677D"/>
+                </a:solidFill>
+                <a:latin typeface="Helvetica Neue"/>
+                <a:ea typeface="Helvetica Neue"/>
+                <a:cs typeface="Helvetica Neue"/>
+              </a:rPr>
+              <a:t>Designed by Jada Lin and Olivia Zheng</a:t>
+            </a:r>
+          </a:p>
+          <a:p xmlns:a="http://schemas.openxmlformats.org/drawingml/2006/main">
+            <a:pPr algn="l">
+              <a:defRPr sz="975" b="0">
+                <a:solidFill>
+                  <a:srgbClr val="52677D"/>
+                </a:solidFill>
+                <a:latin typeface="Helvetica Neue"/>
+                <a:ea typeface="Helvetica Neue"/>
+                <a:cs typeface="Helvetica Neue"/>
+              </a:defRPr>
+            </a:pPr>
+            <a:r>
+              <a:rPr sz="975" b="0">
+                <a:solidFill>
+                  <a:srgbClr val="52677D"/>
                 </a:solidFill>
                 <a:latin typeface="Helvetica Neue"/>
                 <a:ea typeface="Helvetica Neue"/>
@@ -2410,7 +4466,7 @@
     </p:spTree>
     <p:extLst>
       <p:ext uri="{BB962C8B-B14F-4D97-AF65-F5344CB8AC3E}">
-        <p14:creationId xmlns:p14="http://schemas.microsoft.com/office/powerpoint/2010/main" val="308619068"/>
+        <p14:creationId xmlns:p14="http://schemas.microsoft.com/office/powerpoint/2010/main" val="1970177335"/>
       </p:ext>
     </p:extLst>
   </p:cSld>
@@ -2423,7 +4479,7 @@
     <p:bg>
       <p:bgPr>
         <a:solidFill xmlns:a="http://schemas.openxmlformats.org/drawingml/2006/main">
-          <a:srgbClr val="092454"/>
+          <a:srgbClr val="1C2E4A"/>
         </a:solidFill>
       </p:bgPr>
     </p:bg>
@@ -2441,7 +4497,7 @@
           <p:cNvPr id="20" name="">
             <a:extLst xmlns:a="http://schemas.openxmlformats.org/drawingml/2006/main">
               <a:ext uri="{FF2B5EF4-FFF2-40B4-BE49-F238E27FC236}">
-                <a16:creationId xmlns:a16="http://schemas.microsoft.com/office/drawing/2014/main" id="{2E82FDD3-05EC-42E6-9CB6-3AA8649A93D5}"/>
+                <a16:creationId xmlns:a16="http://schemas.microsoft.com/office/drawing/2014/main" id="{7E948261-FF25-49CF-8FE3-415BE7474465}"/>
               </a:ext>
             </a:extLst>
           </p:cNvPr>
@@ -2472,7 +4528,7 @@
             <a:pPr algn="l">
               <a:defRPr sz="1125" b="1">
                 <a:solidFill>
-                  <a:srgbClr val="FFD43B"/>
+                  <a:srgbClr val="D1CFC9"/>
                 </a:solidFill>
                 <a:latin typeface="Helvetica Neue"/>
                 <a:ea typeface="Helvetica Neue"/>
@@ -2482,7 +4538,7 @@
             <a:r>
               <a:rPr sz="1125" b="1">
                 <a:solidFill>
-                  <a:srgbClr val="FFD43B"/>
+                  <a:srgbClr val="D1CFC9"/>
                 </a:solidFill>
                 <a:latin typeface="Helvetica Neue"/>
                 <a:ea typeface="Helvetica Neue"/>
@@ -2498,7 +4554,7 @@
           <p:cNvPr id="2" name="">
             <a:extLst xmlns:a="http://schemas.openxmlformats.org/drawingml/2006/main">
               <a:ext uri="{FF2B5EF4-FFF2-40B4-BE49-F238E27FC236}">
-                <a16:creationId xmlns:a16="http://schemas.microsoft.com/office/drawing/2014/main" id="{E4066185-0EBE-4355-B34D-299CA58B255E}"/>
+                <a16:creationId xmlns:a16="http://schemas.microsoft.com/office/drawing/2014/main" id="{C0E3E983-8D50-40C1-BE30-59530FF71CCE}"/>
               </a:ext>
             </a:extLst>
           </p:cNvPr>
@@ -2555,7 +4611,7 @@
           <p:cNvPr id="3" name="">
             <a:extLst xmlns:a="http://schemas.openxmlformats.org/drawingml/2006/main">
               <a:ext uri="{FF2B5EF4-FFF2-40B4-BE49-F238E27FC236}">
-                <a16:creationId xmlns:a16="http://schemas.microsoft.com/office/drawing/2014/main" id="{8C76691C-5828-404A-A7B8-189F9395849B}"/>
+                <a16:creationId xmlns:a16="http://schemas.microsoft.com/office/drawing/2014/main" id="{5191DFE7-E4DE-4BDE-936F-11FDF7D75A4D}"/>
               </a:ext>
             </a:extLst>
           </p:cNvPr>
@@ -2575,7 +4631,7 @@
             </a:avLst>
           </a:prstGeom>
           <a:solidFill xmlns:a="http://schemas.openxmlformats.org/drawingml/2006/main">
-            <a:srgbClr val="FFD43B"/>
+            <a:srgbClr val="D1CFC9"/>
           </a:solidFill>
           <a:ln xmlns:a="http://schemas.openxmlformats.org/drawingml/2006/main" w="0">
             <a:noFill/>
@@ -2587,7 +4643,7 @@
           <p:cNvPr id="4" name="">
             <a:extLst xmlns:a="http://schemas.openxmlformats.org/drawingml/2006/main">
               <a:ext uri="{FF2B5EF4-FFF2-40B4-BE49-F238E27FC236}">
-                <a16:creationId xmlns:a16="http://schemas.microsoft.com/office/drawing/2014/main" id="{82A77E83-BAC5-4C30-BABE-5BCF5E54068F}"/>
+                <a16:creationId xmlns:a16="http://schemas.microsoft.com/office/drawing/2014/main" id="{05C55654-0AB4-4BC9-90C1-201BF88FD299}"/>
               </a:ext>
             </a:extLst>
           </p:cNvPr>
@@ -2618,7 +4674,7 @@
             <a:pPr algn="ctr">
               <a:defRPr sz="1275" b="1">
                 <a:solidFill>
-                  <a:srgbClr val="092454"/>
+                  <a:srgbClr val="1C2E4A"/>
                 </a:solidFill>
                 <a:latin typeface="Helvetica Neue"/>
                 <a:ea typeface="Helvetica Neue"/>
@@ -2628,7 +4684,7 @@
             <a:r>
               <a:rPr sz="1275" b="1">
                 <a:solidFill>
-                  <a:srgbClr val="092454"/>
+                  <a:srgbClr val="1C2E4A"/>
                 </a:solidFill>
                 <a:latin typeface="Helvetica Neue"/>
                 <a:ea typeface="Helvetica Neue"/>
@@ -2644,7 +4700,7 @@
           <p:cNvPr id="5" name="">
             <a:extLst xmlns:a="http://schemas.openxmlformats.org/drawingml/2006/main">
               <a:ext uri="{FF2B5EF4-FFF2-40B4-BE49-F238E27FC236}">
-                <a16:creationId xmlns:a16="http://schemas.microsoft.com/office/drawing/2014/main" id="{9D34B4DB-5AFA-415E-A035-D3BF89F2A9E1}"/>
+                <a16:creationId xmlns:a16="http://schemas.microsoft.com/office/drawing/2014/main" id="{80DD32CD-0C26-4CB2-B7A6-B2BFFFBA3959}"/>
               </a:ext>
             </a:extLst>
           </p:cNvPr>
@@ -2675,7 +4731,7 @@
             <a:pPr algn="l">
               <a:defRPr sz="1950" b="1">
                 <a:solidFill>
-                  <a:srgbClr val="FFD43B"/>
+                  <a:srgbClr val="D1CFC9"/>
                 </a:solidFill>
                 <a:latin typeface="Helvetica Neue"/>
                 <a:ea typeface="Helvetica Neue"/>
@@ -2685,7 +4741,7 @@
             <a:r>
               <a:rPr sz="1950" b="1">
                 <a:solidFill>
-                  <a:srgbClr val="FFD43B"/>
+                  <a:srgbClr val="D1CFC9"/>
                 </a:solidFill>
                 <a:latin typeface="Helvetica Neue"/>
                 <a:ea typeface="Helvetica Neue"/>
@@ -2701,7 +4757,7 @@
           <p:cNvPr id="6" name="">
             <a:extLst xmlns:a="http://schemas.openxmlformats.org/drawingml/2006/main">
               <a:ext uri="{FF2B5EF4-FFF2-40B4-BE49-F238E27FC236}">
-                <a16:creationId xmlns:a16="http://schemas.microsoft.com/office/drawing/2014/main" id="{D3F37A2F-F799-4932-A520-3F0FBB92A6C5}"/>
+                <a16:creationId xmlns:a16="http://schemas.microsoft.com/office/drawing/2014/main" id="{0C2903E3-017F-4D8E-A900-6C3FDAD4AA4F}"/>
               </a:ext>
             </a:extLst>
           </p:cNvPr>
@@ -2758,7 +4814,7 @@
           <p:cNvPr id="7" name="">
             <a:extLst xmlns:a="http://schemas.openxmlformats.org/drawingml/2006/main">
               <a:ext uri="{FF2B5EF4-FFF2-40B4-BE49-F238E27FC236}">
-                <a16:creationId xmlns:a16="http://schemas.microsoft.com/office/drawing/2014/main" id="{9E567C0C-621A-4986-8DEC-E1E85FF5D28B}"/>
+                <a16:creationId xmlns:a16="http://schemas.microsoft.com/office/drawing/2014/main" id="{A501208F-0F5A-42AF-B0BB-AB862D7D1773}"/>
               </a:ext>
             </a:extLst>
           </p:cNvPr>
@@ -2789,7 +4845,7 @@
             <a:pPr algn="l">
               <a:defRPr sz="1950" b="1">
                 <a:solidFill>
-                  <a:srgbClr val="FFD43B"/>
+                  <a:srgbClr val="D1CFC9"/>
                 </a:solidFill>
                 <a:latin typeface="Helvetica Neue"/>
                 <a:ea typeface="Helvetica Neue"/>
@@ -2799,7 +4855,7 @@
             <a:r>
               <a:rPr sz="1950" b="1">
                 <a:solidFill>
-                  <a:srgbClr val="FFD43B"/>
+                  <a:srgbClr val="D1CFC9"/>
                 </a:solidFill>
                 <a:latin typeface="Helvetica Neue"/>
                 <a:ea typeface="Helvetica Neue"/>
@@ -2815,7 +4871,7 @@
           <p:cNvPr id="8" name="">
             <a:extLst xmlns:a="http://schemas.openxmlformats.org/drawingml/2006/main">
               <a:ext uri="{FF2B5EF4-FFF2-40B4-BE49-F238E27FC236}">
-                <a16:creationId xmlns:a16="http://schemas.microsoft.com/office/drawing/2014/main" id="{85743C66-EBD5-44FC-A460-65E81CD261C8}"/>
+                <a16:creationId xmlns:a16="http://schemas.microsoft.com/office/drawing/2014/main" id="{11111A4A-FC20-4378-BDAD-6F91C8A903D3}"/>
               </a:ext>
             </a:extLst>
           </p:cNvPr>
@@ -2872,7 +4928,7 @@
           <p:cNvPr id="9" name="">
             <a:extLst xmlns:a="http://schemas.openxmlformats.org/drawingml/2006/main">
               <a:ext uri="{FF2B5EF4-FFF2-40B4-BE49-F238E27FC236}">
-                <a16:creationId xmlns:a16="http://schemas.microsoft.com/office/drawing/2014/main" id="{F64A2BB7-1100-44F5-BEBB-7BCC77A78431}"/>
+                <a16:creationId xmlns:a16="http://schemas.microsoft.com/office/drawing/2014/main" id="{D5A2FC9A-6A2D-4243-A474-F67FA5D6C37A}"/>
               </a:ext>
             </a:extLst>
           </p:cNvPr>
@@ -2903,7 +4959,7 @@
             <a:pPr algn="l">
               <a:defRPr sz="1950" b="1">
                 <a:solidFill>
-                  <a:srgbClr val="FFD43B"/>
+                  <a:srgbClr val="D1CFC9"/>
                 </a:solidFill>
                 <a:latin typeface="Helvetica Neue"/>
                 <a:ea typeface="Helvetica Neue"/>
@@ -2913,7 +4969,7 @@
             <a:r>
               <a:rPr sz="1950" b="1">
                 <a:solidFill>
-                  <a:srgbClr val="FFD43B"/>
+                  <a:srgbClr val="D1CFC9"/>
                 </a:solidFill>
                 <a:latin typeface="Helvetica Neue"/>
                 <a:ea typeface="Helvetica Neue"/>
@@ -2929,7 +4985,7 @@
           <p:cNvPr id="10" name="">
             <a:extLst xmlns:a="http://schemas.openxmlformats.org/drawingml/2006/main">
               <a:ext uri="{FF2B5EF4-FFF2-40B4-BE49-F238E27FC236}">
-                <a16:creationId xmlns:a16="http://schemas.microsoft.com/office/drawing/2014/main" id="{C2FAE21D-5A01-44F4-A21E-AA40F6072FFB}"/>
+                <a16:creationId xmlns:a16="http://schemas.microsoft.com/office/drawing/2014/main" id="{4B250F4C-38E6-4BCC-9355-64D2697312A1}"/>
               </a:ext>
             </a:extLst>
           </p:cNvPr>
@@ -2986,7 +5042,7 @@
           <p:cNvPr id="11" name="">
             <a:extLst xmlns:a="http://schemas.openxmlformats.org/drawingml/2006/main">
               <a:ext uri="{FF2B5EF4-FFF2-40B4-BE49-F238E27FC236}">
-                <a16:creationId xmlns:a16="http://schemas.microsoft.com/office/drawing/2014/main" id="{1AA12A1C-769F-4D4F-90CE-0A32ECF38FEF}"/>
+                <a16:creationId xmlns:a16="http://schemas.microsoft.com/office/drawing/2014/main" id="{BB2925DF-9997-4FA1-874F-A040B7EC23BA}"/>
               </a:ext>
             </a:extLst>
           </p:cNvPr>
@@ -3017,7 +5073,7 @@
             <a:pPr algn="l">
               <a:defRPr sz="1950" b="1">
                 <a:solidFill>
-                  <a:srgbClr val="FFD43B"/>
+                  <a:srgbClr val="D1CFC9"/>
                 </a:solidFill>
                 <a:latin typeface="Helvetica Neue"/>
                 <a:ea typeface="Helvetica Neue"/>
@@ -3027,7 +5083,7 @@
             <a:r>
               <a:rPr sz="1950" b="1">
                 <a:solidFill>
-                  <a:srgbClr val="FFD43B"/>
+                  <a:srgbClr val="D1CFC9"/>
                 </a:solidFill>
                 <a:latin typeface="Helvetica Neue"/>
                 <a:ea typeface="Helvetica Neue"/>
@@ -3043,7 +5099,7 @@
           <p:cNvPr id="12" name="">
             <a:extLst xmlns:a="http://schemas.openxmlformats.org/drawingml/2006/main">
               <a:ext uri="{FF2B5EF4-FFF2-40B4-BE49-F238E27FC236}">
-                <a16:creationId xmlns:a16="http://schemas.microsoft.com/office/drawing/2014/main" id="{86654DD0-0B36-447C-80C8-85A49573DA89}"/>
+                <a16:creationId xmlns:a16="http://schemas.microsoft.com/office/drawing/2014/main" id="{B3394A44-E4A9-49ED-8402-5ACDDFADD7D9}"/>
               </a:ext>
             </a:extLst>
           </p:cNvPr>
@@ -3100,7 +5156,7 @@
           <p:cNvPr id="13" name="">
             <a:extLst xmlns:a="http://schemas.openxmlformats.org/drawingml/2006/main">
               <a:ext uri="{FF2B5EF4-FFF2-40B4-BE49-F238E27FC236}">
-                <a16:creationId xmlns:a16="http://schemas.microsoft.com/office/drawing/2014/main" id="{0089F912-B76C-4B86-B49B-202C7C73B342}"/>
+                <a16:creationId xmlns:a16="http://schemas.microsoft.com/office/drawing/2014/main" id="{8B4703EE-E3D9-4F43-852B-08FE2449CD7A}"/>
               </a:ext>
             </a:extLst>
           </p:cNvPr>
@@ -3120,7 +5176,7 @@
             </a:avLst>
           </a:prstGeom>
           <a:solidFill xmlns:a="http://schemas.openxmlformats.org/drawingml/2006/main">
-            <a:srgbClr val="FFD43B"/>
+            <a:srgbClr val="D1CFC9"/>
           </a:solidFill>
           <a:ln xmlns:a="http://schemas.openxmlformats.org/drawingml/2006/main" w="0">
             <a:noFill/>
@@ -3132,7 +5188,7 @@
           <p:cNvPr id="14" name="">
             <a:extLst xmlns:a="http://schemas.openxmlformats.org/drawingml/2006/main">
               <a:ext uri="{FF2B5EF4-FFF2-40B4-BE49-F238E27FC236}">
-                <a16:creationId xmlns:a16="http://schemas.microsoft.com/office/drawing/2014/main" id="{2AAAAEEC-81A1-44D4-8B73-6DD613B69D88}"/>
+                <a16:creationId xmlns:a16="http://schemas.microsoft.com/office/drawing/2014/main" id="{25C08F84-2BA8-4C5A-B354-38AE9F10E4D2}"/>
               </a:ext>
             </a:extLst>
           </p:cNvPr>
@@ -3163,7 +5219,7 @@
             <a:pPr algn="ctr">
               <a:defRPr sz="1050" b="1">
                 <a:solidFill>
-                  <a:srgbClr val="092454"/>
+                  <a:srgbClr val="1C2E4A"/>
                 </a:solidFill>
                 <a:latin typeface="Helvetica Neue"/>
                 <a:ea typeface="Helvetica Neue"/>
@@ -3173,7 +5229,7 @@
             <a:r>
               <a:rPr sz="1050" b="1">
                 <a:solidFill>
-                  <a:srgbClr val="092454"/>
+                  <a:srgbClr val="1C2E4A"/>
                 </a:solidFill>
                 <a:latin typeface="Helvetica Neue"/>
                 <a:ea typeface="Helvetica Neue"/>
@@ -3189,7 +5245,7 @@
           <p:cNvPr id="15" name="">
             <a:extLst xmlns:a="http://schemas.openxmlformats.org/drawingml/2006/main">
               <a:ext uri="{FF2B5EF4-FFF2-40B4-BE49-F238E27FC236}">
-                <a16:creationId xmlns:a16="http://schemas.microsoft.com/office/drawing/2014/main" id="{0C4CCD28-821B-4B45-BB8E-B2A64A2828D0}"/>
+                <a16:creationId xmlns:a16="http://schemas.microsoft.com/office/drawing/2014/main" id="{7B0313AE-E0A6-4547-A7AE-3BE6D0620B99}"/>
               </a:ext>
             </a:extLst>
           </p:cNvPr>
@@ -3220,7 +5276,7 @@
             <a:pPr algn="ctr">
               <a:defRPr sz="2250" b="1">
                 <a:solidFill>
-                  <a:srgbClr val="092454"/>
+                  <a:srgbClr val="1C2E4A"/>
                 </a:solidFill>
                 <a:latin typeface="Helvetica Neue"/>
                 <a:ea typeface="Helvetica Neue"/>
@@ -3230,7 +5286,7 @@
             <a:r>
               <a:rPr sz="2250" b="1">
                 <a:solidFill>
-                  <a:srgbClr val="092454"/>
+                  <a:srgbClr val="1C2E4A"/>
                 </a:solidFill>
                 <a:latin typeface="Helvetica Neue"/>
                 <a:ea typeface="Helvetica Neue"/>
@@ -3243,7 +5299,7 @@
             <a:pPr algn="ctr">
               <a:defRPr sz="2250" b="1">
                 <a:solidFill>
-                  <a:srgbClr val="092454"/>
+                  <a:srgbClr val="1C2E4A"/>
                 </a:solidFill>
                 <a:latin typeface="Helvetica Neue"/>
                 <a:ea typeface="Helvetica Neue"/>
@@ -3253,7 +5309,7 @@
             <a:r>
               <a:rPr sz="2250" b="1">
                 <a:solidFill>
-                  <a:srgbClr val="092454"/>
+                  <a:srgbClr val="1C2E4A"/>
                 </a:solidFill>
                 <a:latin typeface="Helvetica Neue"/>
                 <a:ea typeface="Helvetica Neue"/>
@@ -3266,7 +5322,7 @@
             <a:pPr algn="ctr">
               <a:defRPr sz="2250" b="1">
                 <a:solidFill>
-                  <a:srgbClr val="092454"/>
+                  <a:srgbClr val="1C2E4A"/>
                 </a:solidFill>
                 <a:latin typeface="Helvetica Neue"/>
                 <a:ea typeface="Helvetica Neue"/>
@@ -3276,7 +5332,7 @@
             <a:r>
               <a:rPr sz="2250" b="1">
                 <a:solidFill>
-                  <a:srgbClr val="092454"/>
+                  <a:srgbClr val="1C2E4A"/>
                 </a:solidFill>
                 <a:latin typeface="Helvetica Neue"/>
                 <a:ea typeface="Helvetica Neue"/>
@@ -3292,7 +5348,7 @@
           <p:cNvPr id="16" name="">
             <a:extLst xmlns:a="http://schemas.openxmlformats.org/drawingml/2006/main">
               <a:ext uri="{FF2B5EF4-FFF2-40B4-BE49-F238E27FC236}">
-                <a16:creationId xmlns:a16="http://schemas.microsoft.com/office/drawing/2014/main" id="{E9EB603F-B142-422E-9B05-8F44F5D13524}"/>
+                <a16:creationId xmlns:a16="http://schemas.microsoft.com/office/drawing/2014/main" id="{0C37630F-B70A-42E4-92CD-C9BFC8525A70}"/>
               </a:ext>
             </a:extLst>
           </p:cNvPr>
@@ -3323,7 +5379,7 @@
             <a:pPr algn="ctr">
               <a:defRPr sz="1125" b="0">
                 <a:solidFill>
-                  <a:srgbClr val="092454"/>
+                  <a:srgbClr val="1C2E4A"/>
                 </a:solidFill>
                 <a:latin typeface="Helvetica Neue"/>
                 <a:ea typeface="Helvetica Neue"/>
@@ -3333,7 +5389,7 @@
             <a:r>
               <a:rPr sz="1125" b="0">
                 <a:solidFill>
-                  <a:srgbClr val="092454"/>
+                  <a:srgbClr val="1C2E4A"/>
                 </a:solidFill>
                 <a:latin typeface="Helvetica Neue"/>
                 <a:ea typeface="Helvetica Neue"/>
@@ -3349,7 +5405,7 @@
           <p:cNvPr id="17" name="">
             <a:extLst xmlns:a="http://schemas.openxmlformats.org/drawingml/2006/main">
               <a:ext uri="{FF2B5EF4-FFF2-40B4-BE49-F238E27FC236}">
-                <a16:creationId xmlns:a16="http://schemas.microsoft.com/office/drawing/2014/main" id="{E70EF8E7-EB90-4476-8C41-450A7846B542}"/>
+                <a16:creationId xmlns:a16="http://schemas.microsoft.com/office/drawing/2014/main" id="{3B5B1DE1-42A2-4FA0-9B14-D29B5F962296}"/>
               </a:ext>
             </a:extLst>
           </p:cNvPr>
@@ -3367,7 +5423,7 @@
             <a:avLst/>
           </a:prstGeom>
           <a:solidFill xmlns:a="http://schemas.openxmlformats.org/drawingml/2006/main">
-            <a:srgbClr val="31507E"/>
+            <a:srgbClr val="52677D"/>
           </a:solidFill>
           <a:ln xmlns:a="http://schemas.openxmlformats.org/drawingml/2006/main" w="0">
             <a:noFill/>
@@ -3379,7 +5435,7 @@
           <p:cNvPr id="18" name="">
             <a:extLst xmlns:a="http://schemas.openxmlformats.org/drawingml/2006/main">
               <a:ext uri="{FF2B5EF4-FFF2-40B4-BE49-F238E27FC236}">
-                <a16:creationId xmlns:a16="http://schemas.microsoft.com/office/drawing/2014/main" id="{48683CA0-F340-499E-9732-820441E4714B}"/>
+                <a16:creationId xmlns:a16="http://schemas.microsoft.com/office/drawing/2014/main" id="{5106A261-4146-4840-8FCA-B32EF8FADEF9}"/>
               </a:ext>
             </a:extLst>
           </p:cNvPr>
@@ -3410,7 +5466,7 @@
             <a:pPr algn="l">
               <a:defRPr sz="750" b="0">
                 <a:solidFill>
-                  <a:srgbClr val="BFE6FF"/>
+                  <a:srgbClr val="BDC4D4"/>
                 </a:solidFill>
                 <a:latin typeface="Helvetica Neue"/>
                 <a:ea typeface="Helvetica Neue"/>
@@ -3420,7 +5476,7 @@
             <a:r>
               <a:rPr sz="750" b="0">
                 <a:solidFill>
-                  <a:srgbClr val="BFE6FF"/>
+                  <a:srgbClr val="BDC4D4"/>
                 </a:solidFill>
                 <a:latin typeface="Helvetica Neue"/>
                 <a:ea typeface="Helvetica Neue"/>
@@ -3436,7 +5492,7 @@
           <p:cNvPr id="19" name="">
             <a:extLst xmlns:a="http://schemas.openxmlformats.org/drawingml/2006/main">
               <a:ext uri="{FF2B5EF4-FFF2-40B4-BE49-F238E27FC236}">
-                <a16:creationId xmlns:a16="http://schemas.microsoft.com/office/drawing/2014/main" id="{28E15213-AAF7-464E-B2B9-E9EF10756FEB}"/>
+                <a16:creationId xmlns:a16="http://schemas.microsoft.com/office/drawing/2014/main" id="{6494BE89-D44F-4883-B61E-C6CB0F7D6F7B}"/>
               </a:ext>
             </a:extLst>
           </p:cNvPr>
@@ -3467,7 +5523,7 @@
             <a:pPr algn="r">
               <a:defRPr sz="825" b="1">
                 <a:solidFill>
-                  <a:srgbClr val="FFD43B"/>
+                  <a:srgbClr val="D1CFC9"/>
                 </a:solidFill>
                 <a:latin typeface="Helvetica Neue"/>
                 <a:ea typeface="Helvetica Neue"/>
@@ -3477,7 +5533,7 @@
             <a:r>
               <a:rPr sz="825" b="1">
                 <a:solidFill>
-                  <a:srgbClr val="FFD43B"/>
+                  <a:srgbClr val="D1CFC9"/>
                 </a:solidFill>
                 <a:latin typeface="Helvetica Neue"/>
                 <a:ea typeface="Helvetica Neue"/>
@@ -3491,7 +5547,7 @@
     </p:spTree>
     <p:extLst>
       <p:ext uri="{BB962C8B-B14F-4D97-AF65-F5344CB8AC3E}">
-        <p14:creationId xmlns:p14="http://schemas.microsoft.com/office/powerpoint/2010/main" val="541026034"/>
+        <p14:creationId xmlns:p14="http://schemas.microsoft.com/office/powerpoint/2010/main" val="688242526"/>
       </p:ext>
     </p:extLst>
   </p:cSld>
@@ -3522,7 +5578,7 @@
           <p:cNvPr id="15" name="">
             <a:extLst xmlns:a="http://schemas.openxmlformats.org/drawingml/2006/main">
               <a:ext uri="{FF2B5EF4-FFF2-40B4-BE49-F238E27FC236}">
-                <a16:creationId xmlns:a16="http://schemas.microsoft.com/office/drawing/2014/main" id="{CB785613-3E28-403D-8AD0-3BA2CD9F67E0}"/>
+                <a16:creationId xmlns:a16="http://schemas.microsoft.com/office/drawing/2014/main" id="{339746B3-FB01-496F-90F7-C0B201A4205C}"/>
               </a:ext>
             </a:extLst>
           </p:cNvPr>
@@ -3553,7 +5609,7 @@
             <a:pPr algn="l">
               <a:defRPr sz="1125" b="1">
                 <a:solidFill>
-                  <a:srgbClr val="2563EB"/>
+                  <a:srgbClr val="52677D"/>
                 </a:solidFill>
                 <a:latin typeface="Helvetica Neue"/>
                 <a:ea typeface="Helvetica Neue"/>
@@ -3563,7 +5619,7 @@
             <a:r>
               <a:rPr sz="1125" b="1">
                 <a:solidFill>
-                  <a:srgbClr val="2563EB"/>
+                  <a:srgbClr val="52677D"/>
                 </a:solidFill>
                 <a:latin typeface="Helvetica Neue"/>
                 <a:ea typeface="Helvetica Neue"/>
@@ -3579,7 +5635,7 @@
           <p:cNvPr id="2" name="">
             <a:extLst xmlns:a="http://schemas.openxmlformats.org/drawingml/2006/main">
               <a:ext uri="{FF2B5EF4-FFF2-40B4-BE49-F238E27FC236}">
-                <a16:creationId xmlns:a16="http://schemas.microsoft.com/office/drawing/2014/main" id="{32BE56B7-1F03-4445-B869-6A9542C16A1E}"/>
+                <a16:creationId xmlns:a16="http://schemas.microsoft.com/office/drawing/2014/main" id="{CA080C49-FCAE-4EF2-9AED-3D58B516AC2F}"/>
               </a:ext>
             </a:extLst>
           </p:cNvPr>
@@ -3610,7 +5666,7 @@
             <a:pPr algn="l">
               <a:defRPr sz="2550" b="1">
                 <a:solidFill>
-                  <a:srgbClr val="092454"/>
+                  <a:srgbClr val="1C2E4A"/>
                 </a:solidFill>
                 <a:latin typeface="Helvetica Neue"/>
                 <a:ea typeface="Helvetica Neue"/>
@@ -3620,7 +5676,7 @@
             <a:r>
               <a:rPr sz="2550" b="1">
                 <a:solidFill>
-                  <a:srgbClr val="092454"/>
+                  <a:srgbClr val="1C2E4A"/>
                 </a:solidFill>
                 <a:latin typeface="Helvetica Neue"/>
                 <a:ea typeface="Helvetica Neue"/>
@@ -3636,7 +5692,7 @@
           <p:cNvPr id="3" name="">
             <a:extLst xmlns:a="http://schemas.openxmlformats.org/drawingml/2006/main">
               <a:ext uri="{FF2B5EF4-FFF2-40B4-BE49-F238E27FC236}">
-                <a16:creationId xmlns:a16="http://schemas.microsoft.com/office/drawing/2014/main" id="{737D6356-B460-4FA7-99D6-2DD59D597980}"/>
+                <a16:creationId xmlns:a16="http://schemas.microsoft.com/office/drawing/2014/main" id="{8D481A95-196F-442C-8852-34AF7B46C4F2}"/>
               </a:ext>
             </a:extLst>
           </p:cNvPr>
@@ -3656,7 +5712,7 @@
             </a:avLst>
           </a:prstGeom>
           <a:solidFill xmlns:a="http://schemas.openxmlformats.org/drawingml/2006/main">
-            <a:srgbClr val="EEF7FF"/>
+            <a:srgbClr val="D1CFC9"/>
           </a:solidFill>
           <a:ln xmlns:a="http://schemas.openxmlformats.org/drawingml/2006/main" w="0">
             <a:noFill/>
@@ -3668,7 +5724,7 @@
           <p:cNvPr id="4" name="">
             <a:extLst xmlns:a="http://schemas.openxmlformats.org/drawingml/2006/main">
               <a:ext uri="{FF2B5EF4-FFF2-40B4-BE49-F238E27FC236}">
-                <a16:creationId xmlns:a16="http://schemas.microsoft.com/office/drawing/2014/main" id="{5C2DBD88-528E-48F3-9DCB-FC36AE9F9873}"/>
+                <a16:creationId xmlns:a16="http://schemas.microsoft.com/office/drawing/2014/main" id="{2E345709-4123-4511-ACFE-A406E238CA79}"/>
               </a:ext>
             </a:extLst>
           </p:cNvPr>
@@ -3699,7 +5755,7 @@
             <a:pPr algn="l">
               <a:defRPr sz="1125" b="1">
                 <a:solidFill>
-                  <a:srgbClr val="2563EB"/>
+                  <a:srgbClr val="52677D"/>
                 </a:solidFill>
                 <a:latin typeface="Helvetica Neue"/>
                 <a:ea typeface="Helvetica Neue"/>
@@ -3709,7 +5765,7 @@
             <a:r>
               <a:rPr sz="1125" b="1">
                 <a:solidFill>
-                  <a:srgbClr val="2563EB"/>
+                  <a:srgbClr val="52677D"/>
                 </a:solidFill>
                 <a:latin typeface="Helvetica Neue"/>
                 <a:ea typeface="Helvetica Neue"/>
@@ -3725,7 +5781,7 @@
           <p:cNvPr id="5" name="">
             <a:extLst xmlns:a="http://schemas.openxmlformats.org/drawingml/2006/main">
               <a:ext uri="{FF2B5EF4-FFF2-40B4-BE49-F238E27FC236}">
-                <a16:creationId xmlns:a16="http://schemas.microsoft.com/office/drawing/2014/main" id="{EB66298F-C9E4-4DB1-89C8-1FFB8C3E79ED}"/>
+                <a16:creationId xmlns:a16="http://schemas.microsoft.com/office/drawing/2014/main" id="{F45109C0-7A80-45ED-8379-94312D363DCF}"/>
               </a:ext>
             </a:extLst>
           </p:cNvPr>
@@ -3756,7 +5812,7 @@
             <a:pPr algn="l">
               <a:defRPr sz="1800" b="1">
                 <a:solidFill>
-                  <a:srgbClr val="092454"/>
+                  <a:srgbClr val="1C2E4A"/>
                 </a:solidFill>
                 <a:latin typeface="Helvetica Neue"/>
                 <a:ea typeface="Helvetica Neue"/>
@@ -3766,7 +5822,7 @@
             <a:r>
               <a:rPr sz="1800" b="1">
                 <a:solidFill>
-                  <a:srgbClr val="092454"/>
+                  <a:srgbClr val="1C2E4A"/>
                 </a:solidFill>
                 <a:latin typeface="Helvetica Neue"/>
                 <a:ea typeface="Helvetica Neue"/>
@@ -3782,7 +5838,7 @@
           <p:cNvPr id="6" name="">
             <a:extLst xmlns:a="http://schemas.openxmlformats.org/drawingml/2006/main">
               <a:ext uri="{FF2B5EF4-FFF2-40B4-BE49-F238E27FC236}">
-                <a16:creationId xmlns:a16="http://schemas.microsoft.com/office/drawing/2014/main" id="{28637B2E-36BA-4F9C-A914-361B1A921317}"/>
+                <a16:creationId xmlns:a16="http://schemas.microsoft.com/office/drawing/2014/main" id="{B1A32692-A0B0-4073-89C4-053A00CC20D7}"/>
               </a:ext>
             </a:extLst>
           </p:cNvPr>
@@ -3813,7 +5869,7 @@
             <a:pPr algn="l">
               <a:defRPr sz="1800" b="1">
                 <a:solidFill>
-                  <a:srgbClr val="092454"/>
+                  <a:srgbClr val="1C2E4A"/>
                 </a:solidFill>
                 <a:latin typeface="Helvetica Neue"/>
                 <a:ea typeface="Helvetica Neue"/>
@@ -3823,7 +5879,7 @@
             <a:r>
               <a:rPr sz="1800" b="1">
                 <a:solidFill>
-                  <a:srgbClr val="092454"/>
+                  <a:srgbClr val="1C2E4A"/>
                 </a:solidFill>
                 <a:latin typeface="Helvetica Neue"/>
                 <a:ea typeface="Helvetica Neue"/>
@@ -3839,7 +5895,7 @@
           <p:cNvPr id="7" name="">
             <a:extLst xmlns:a="http://schemas.openxmlformats.org/drawingml/2006/main">
               <a:ext uri="{FF2B5EF4-FFF2-40B4-BE49-F238E27FC236}">
-                <a16:creationId xmlns:a16="http://schemas.microsoft.com/office/drawing/2014/main" id="{E70C3F3E-93A2-4150-B05A-98982301B2DA}"/>
+                <a16:creationId xmlns:a16="http://schemas.microsoft.com/office/drawing/2014/main" id="{690B3373-377A-4FB0-8753-30D068C7687E}"/>
               </a:ext>
             </a:extLst>
           </p:cNvPr>
@@ -3870,7 +5926,7 @@
             <a:pPr algn="l">
               <a:defRPr sz="1800" b="1">
                 <a:solidFill>
-                  <a:srgbClr val="092454"/>
+                  <a:srgbClr val="1C2E4A"/>
                 </a:solidFill>
                 <a:latin typeface="Helvetica Neue"/>
                 <a:ea typeface="Helvetica Neue"/>
@@ -3880,7 +5936,7 @@
             <a:r>
               <a:rPr sz="1800" b="1">
                 <a:solidFill>
-                  <a:srgbClr val="092454"/>
+                  <a:srgbClr val="1C2E4A"/>
                 </a:solidFill>
                 <a:latin typeface="Helvetica Neue"/>
                 <a:ea typeface="Helvetica Neue"/>
@@ -3896,7 +5952,7 @@
           <p:cNvPr id="8" name="">
             <a:extLst xmlns:a="http://schemas.openxmlformats.org/drawingml/2006/main">
               <a:ext uri="{FF2B5EF4-FFF2-40B4-BE49-F238E27FC236}">
-                <a16:creationId xmlns:a16="http://schemas.microsoft.com/office/drawing/2014/main" id="{0F0596C0-00DD-46C1-B9F2-55063B9F6BDC}"/>
+                <a16:creationId xmlns:a16="http://schemas.microsoft.com/office/drawing/2014/main" id="{62F10359-6343-4906-9322-E118138D6DDF}"/>
               </a:ext>
             </a:extLst>
           </p:cNvPr>
@@ -3916,7 +5972,7 @@
             </a:avLst>
           </a:prstGeom>
           <a:solidFill xmlns:a="http://schemas.openxmlformats.org/drawingml/2006/main">
-            <a:srgbClr val="FFD43B"/>
+            <a:srgbClr val="D1CFC9"/>
           </a:solidFill>
           <a:ln xmlns:a="http://schemas.openxmlformats.org/drawingml/2006/main" w="0">
             <a:noFill/>
@@ -3928,7 +5984,7 @@
           <p:cNvPr id="9" name="">
             <a:extLst xmlns:a="http://schemas.openxmlformats.org/drawingml/2006/main">
               <a:ext uri="{FF2B5EF4-FFF2-40B4-BE49-F238E27FC236}">
-                <a16:creationId xmlns:a16="http://schemas.microsoft.com/office/drawing/2014/main" id="{348E954D-2815-436D-BFB4-41ABC27451C9}"/>
+                <a16:creationId xmlns:a16="http://schemas.microsoft.com/office/drawing/2014/main" id="{1D663F95-E092-4D48-9106-C97E38526F86}"/>
               </a:ext>
             </a:extLst>
           </p:cNvPr>
@@ -3959,7 +6015,7 @@
             <a:pPr algn="l">
               <a:defRPr sz="1125" b="1">
                 <a:solidFill>
-                  <a:srgbClr val="092454"/>
+                  <a:srgbClr val="1C2E4A"/>
                 </a:solidFill>
                 <a:latin typeface="Helvetica Neue"/>
                 <a:ea typeface="Helvetica Neue"/>
@@ -3969,7 +6025,7 @@
             <a:r>
               <a:rPr sz="1125" b="1">
                 <a:solidFill>
-                  <a:srgbClr val="092454"/>
+                  <a:srgbClr val="1C2E4A"/>
                 </a:solidFill>
                 <a:latin typeface="Helvetica Neue"/>
                 <a:ea typeface="Helvetica Neue"/>
@@ -3985,7 +6041,7 @@
           <p:cNvPr id="10" name="">
             <a:extLst xmlns:a="http://schemas.openxmlformats.org/drawingml/2006/main">
               <a:ext uri="{FF2B5EF4-FFF2-40B4-BE49-F238E27FC236}">
-                <a16:creationId xmlns:a16="http://schemas.microsoft.com/office/drawing/2014/main" id="{A49F57C1-DFA1-4AF3-B14F-2B96B4EFD6C9}"/>
+                <a16:creationId xmlns:a16="http://schemas.microsoft.com/office/drawing/2014/main" id="{5C5F0E01-E926-41AA-B384-F2FBF08FE8BD}"/>
               </a:ext>
             </a:extLst>
           </p:cNvPr>
@@ -4016,7 +6072,7 @@
             <a:pPr algn="l">
               <a:defRPr sz="2400" b="1">
                 <a:solidFill>
-                  <a:srgbClr val="092454"/>
+                  <a:srgbClr val="1C2E4A"/>
                 </a:solidFill>
                 <a:latin typeface="Helvetica Neue"/>
                 <a:ea typeface="Helvetica Neue"/>
@@ -4026,7 +6082,7 @@
             <a:r>
               <a:rPr sz="2400" b="1">
                 <a:solidFill>
-                  <a:srgbClr val="092454"/>
+                  <a:srgbClr val="1C2E4A"/>
                 </a:solidFill>
                 <a:latin typeface="Helvetica Neue"/>
                 <a:ea typeface="Helvetica Neue"/>
@@ -4042,7 +6098,7 @@
           <p:cNvPr id="11" name="">
             <a:extLst xmlns:a="http://schemas.openxmlformats.org/drawingml/2006/main">
               <a:ext uri="{FF2B5EF4-FFF2-40B4-BE49-F238E27FC236}">
-                <a16:creationId xmlns:a16="http://schemas.microsoft.com/office/drawing/2014/main" id="{ECFF8E61-2B9E-4969-BB07-BDF85B191587}"/>
+                <a16:creationId xmlns:a16="http://schemas.microsoft.com/office/drawing/2014/main" id="{46E94767-F884-4B16-A354-EA7DF1226151}"/>
               </a:ext>
             </a:extLst>
           </p:cNvPr>
@@ -4073,7 +6129,7 @@
             <a:pPr algn="l">
               <a:defRPr sz="1650" b="0">
                 <a:solidFill>
-                  <a:srgbClr val="092454"/>
+                  <a:srgbClr val="1C2E4A"/>
                 </a:solidFill>
                 <a:latin typeface="Helvetica Neue"/>
                 <a:ea typeface="Helvetica Neue"/>
@@ -4083,7 +6139,7 @@
             <a:r>
               <a:rPr sz="1650" b="0">
                 <a:solidFill>
-                  <a:srgbClr val="092454"/>
+                  <a:srgbClr val="1C2E4A"/>
                 </a:solidFill>
                 <a:latin typeface="Helvetica Neue"/>
                 <a:ea typeface="Helvetica Neue"/>
@@ -4099,7 +6155,7 @@
           <p:cNvPr id="12" name="">
             <a:extLst xmlns:a="http://schemas.openxmlformats.org/drawingml/2006/main">
               <a:ext uri="{FF2B5EF4-FFF2-40B4-BE49-F238E27FC236}">
-                <a16:creationId xmlns:a16="http://schemas.microsoft.com/office/drawing/2014/main" id="{30DBCBB1-A46C-4721-94B9-D40739DC39EC}"/>
+                <a16:creationId xmlns:a16="http://schemas.microsoft.com/office/drawing/2014/main" id="{1ECE0E95-4C3F-4BF4-903B-216D4A6F992D}"/>
               </a:ext>
             </a:extLst>
           </p:cNvPr>
@@ -4117,7 +6173,7 @@
             <a:avLst/>
           </a:prstGeom>
           <a:solidFill xmlns:a="http://schemas.openxmlformats.org/drawingml/2006/main">
-            <a:srgbClr val="D8E5F2"/>
+            <a:srgbClr val="BDC4D4"/>
           </a:solidFill>
           <a:ln xmlns:a="http://schemas.openxmlformats.org/drawingml/2006/main" w="0">
             <a:noFill/>
@@ -4129,7 +6185,7 @@
           <p:cNvPr id="13" name="">
             <a:extLst xmlns:a="http://schemas.openxmlformats.org/drawingml/2006/main">
               <a:ext uri="{FF2B5EF4-FFF2-40B4-BE49-F238E27FC236}">
-                <a16:creationId xmlns:a16="http://schemas.microsoft.com/office/drawing/2014/main" id="{AE6B3BC6-D27C-4C75-AFE1-994F18E8FB2D}"/>
+                <a16:creationId xmlns:a16="http://schemas.microsoft.com/office/drawing/2014/main" id="{A15F1744-A539-4CFC-96A1-5B204EC289D0}"/>
               </a:ext>
             </a:extLst>
           </p:cNvPr>
@@ -4160,7 +6216,7 @@
             <a:pPr algn="l">
               <a:defRPr sz="750" b="0">
                 <a:solidFill>
-                  <a:srgbClr val="61718A"/>
+                  <a:srgbClr val="52677D"/>
                 </a:solidFill>
                 <a:latin typeface="Helvetica Neue"/>
                 <a:ea typeface="Helvetica Neue"/>
@@ -4170,7 +6226,7 @@
             <a:r>
               <a:rPr sz="750" b="0">
                 <a:solidFill>
-                  <a:srgbClr val="61718A"/>
+                  <a:srgbClr val="52677D"/>
                 </a:solidFill>
                 <a:latin typeface="Helvetica Neue"/>
                 <a:ea typeface="Helvetica Neue"/>
@@ -4186,7 +6242,7 @@
           <p:cNvPr id="14" name="">
             <a:extLst xmlns:a="http://schemas.openxmlformats.org/drawingml/2006/main">
               <a:ext uri="{FF2B5EF4-FFF2-40B4-BE49-F238E27FC236}">
-                <a16:creationId xmlns:a16="http://schemas.microsoft.com/office/drawing/2014/main" id="{D3A89BA7-8998-4D43-8218-50C6874D27CC}"/>
+                <a16:creationId xmlns:a16="http://schemas.microsoft.com/office/drawing/2014/main" id="{A9258BA6-C881-4AFA-8249-FFD922E160AB}"/>
               </a:ext>
             </a:extLst>
           </p:cNvPr>
@@ -4217,7 +6273,7 @@
             <a:pPr algn="r">
               <a:defRPr sz="825" b="1">
                 <a:solidFill>
-                  <a:srgbClr val="2563EB"/>
+                  <a:srgbClr val="52677D"/>
                 </a:solidFill>
                 <a:latin typeface="Helvetica Neue"/>
                 <a:ea typeface="Helvetica Neue"/>
@@ -4227,7 +6283,7 @@
             <a:r>
               <a:rPr sz="825" b="1">
                 <a:solidFill>
-                  <a:srgbClr val="2563EB"/>
+                  <a:srgbClr val="52677D"/>
                 </a:solidFill>
                 <a:latin typeface="Helvetica Neue"/>
                 <a:ea typeface="Helvetica Neue"/>
@@ -4241,7 +6297,7 @@
     </p:spTree>
     <p:extLst>
       <p:ext uri="{BB962C8B-B14F-4D97-AF65-F5344CB8AC3E}">
-        <p14:creationId xmlns:p14="http://schemas.microsoft.com/office/powerpoint/2010/main" val="1194748250"/>
+        <p14:creationId xmlns:p14="http://schemas.microsoft.com/office/powerpoint/2010/main" val="1361356044"/>
       </p:ext>
     </p:extLst>
   </p:cSld>
@@ -4254,7 +6310,7 @@
     <p:bg>
       <p:bgPr>
         <a:solidFill xmlns:a="http://schemas.openxmlformats.org/drawingml/2006/main">
-          <a:srgbClr val="EEF7FF"/>
+          <a:srgbClr val="D1CFC9"/>
         </a:solidFill>
       </p:bgPr>
     </p:bg>
@@ -4272,7 +6328,7 @@
           <p:cNvPr id="25" name="">
             <a:extLst xmlns:a="http://schemas.openxmlformats.org/drawingml/2006/main">
               <a:ext uri="{FF2B5EF4-FFF2-40B4-BE49-F238E27FC236}">
-                <a16:creationId xmlns:a16="http://schemas.microsoft.com/office/drawing/2014/main" id="{D29FD895-34D9-4454-9A00-777DADF2AB0D}"/>
+                <a16:creationId xmlns:a16="http://schemas.microsoft.com/office/drawing/2014/main" id="{90A595C2-B14A-486C-9A1F-C9E1ACD0FDEE}"/>
               </a:ext>
             </a:extLst>
           </p:cNvPr>
@@ -4303,7 +6359,7 @@
             <a:pPr algn="l">
               <a:defRPr sz="1125" b="1">
                 <a:solidFill>
-                  <a:srgbClr val="2563EB"/>
+                  <a:srgbClr val="52677D"/>
                 </a:solidFill>
                 <a:latin typeface="Helvetica Neue"/>
                 <a:ea typeface="Helvetica Neue"/>
@@ -4313,7 +6369,7 @@
             <a:r>
               <a:rPr sz="1125" b="1">
                 <a:solidFill>
-                  <a:srgbClr val="2563EB"/>
+                  <a:srgbClr val="52677D"/>
                 </a:solidFill>
                 <a:latin typeface="Helvetica Neue"/>
                 <a:ea typeface="Helvetica Neue"/>
@@ -4329,7 +6385,7 @@
           <p:cNvPr id="2" name="">
             <a:extLst xmlns:a="http://schemas.openxmlformats.org/drawingml/2006/main">
               <a:ext uri="{FF2B5EF4-FFF2-40B4-BE49-F238E27FC236}">
-                <a16:creationId xmlns:a16="http://schemas.microsoft.com/office/drawing/2014/main" id="{A9959EEE-ADAA-46F2-B0FD-618757837020}"/>
+                <a16:creationId xmlns:a16="http://schemas.microsoft.com/office/drawing/2014/main" id="{79D5A171-041C-4CB2-8DE7-071968ABCF06}"/>
               </a:ext>
             </a:extLst>
           </p:cNvPr>
@@ -4360,7 +6416,7 @@
             <a:pPr algn="l">
               <a:defRPr sz="2850" b="1">
                 <a:solidFill>
-                  <a:srgbClr val="092454"/>
+                  <a:srgbClr val="1C2E4A"/>
                 </a:solidFill>
                 <a:latin typeface="Helvetica Neue"/>
                 <a:ea typeface="Helvetica Neue"/>
@@ -4370,7 +6426,7 @@
             <a:r>
               <a:rPr sz="2850" b="1">
                 <a:solidFill>
-                  <a:srgbClr val="092454"/>
+                  <a:srgbClr val="1C2E4A"/>
                 </a:solidFill>
                 <a:latin typeface="Helvetica Neue"/>
                 <a:ea typeface="Helvetica Neue"/>
@@ -4386,7 +6442,7 @@
           <p:cNvPr id="3" name="">
             <a:extLst xmlns:a="http://schemas.openxmlformats.org/drawingml/2006/main">
               <a:ext uri="{FF2B5EF4-FFF2-40B4-BE49-F238E27FC236}">
-                <a16:creationId xmlns:a16="http://schemas.microsoft.com/office/drawing/2014/main" id="{B6FEE7D7-E771-4EE7-9CF4-EBF33D0455B9}"/>
+                <a16:creationId xmlns:a16="http://schemas.microsoft.com/office/drawing/2014/main" id="{3ED23674-095A-473D-B0DF-D159FFF72BD2}"/>
               </a:ext>
             </a:extLst>
           </p:cNvPr>
@@ -4417,7 +6473,7 @@
             <a:pPr algn="l">
               <a:defRPr sz="1425" b="0">
                 <a:solidFill>
-                  <a:srgbClr val="61718A"/>
+                  <a:srgbClr val="52677D"/>
                 </a:solidFill>
                 <a:latin typeface="Helvetica Neue"/>
                 <a:ea typeface="Helvetica Neue"/>
@@ -4427,7 +6483,7 @@
             <a:r>
               <a:rPr sz="1425" b="0">
                 <a:solidFill>
-                  <a:srgbClr val="61718A"/>
+                  <a:srgbClr val="52677D"/>
                 </a:solidFill>
                 <a:latin typeface="Helvetica Neue"/>
                 <a:ea typeface="Helvetica Neue"/>
@@ -4443,7 +6499,7 @@
           <p:cNvPr id="4" name="">
             <a:extLst xmlns:a="http://schemas.openxmlformats.org/drawingml/2006/main">
               <a:ext uri="{FF2B5EF4-FFF2-40B4-BE49-F238E27FC236}">
-                <a16:creationId xmlns:a16="http://schemas.microsoft.com/office/drawing/2014/main" id="{FEE31D1A-B0AF-4AC6-A34E-64A85056244F}"/>
+                <a16:creationId xmlns:a16="http://schemas.microsoft.com/office/drawing/2014/main" id="{A332D885-2453-49C3-8921-73AE442A7C12}"/>
               </a:ext>
             </a:extLst>
           </p:cNvPr>
@@ -4474,7 +6530,7 @@
             <a:pPr algn="l">
               <a:defRPr sz="1200" b="1">
                 <a:solidFill>
-                  <a:srgbClr val="2563EB"/>
+                  <a:srgbClr val="52677D"/>
                 </a:solidFill>
                 <a:latin typeface="Helvetica Neue"/>
                 <a:ea typeface="Helvetica Neue"/>
@@ -4484,7 +6540,7 @@
             <a:r>
               <a:rPr sz="1200" b="1">
                 <a:solidFill>
-                  <a:srgbClr val="2563EB"/>
+                  <a:srgbClr val="52677D"/>
                 </a:solidFill>
                 <a:latin typeface="Helvetica Neue"/>
                 <a:ea typeface="Helvetica Neue"/>
@@ -4500,7 +6556,7 @@
           <p:cNvPr id="5" name="">
             <a:extLst xmlns:a="http://schemas.openxmlformats.org/drawingml/2006/main">
               <a:ext uri="{FF2B5EF4-FFF2-40B4-BE49-F238E27FC236}">
-                <a16:creationId xmlns:a16="http://schemas.microsoft.com/office/drawing/2014/main" id="{E03B8E65-12F6-48E9-9BAF-17475D4F62BD}"/>
+                <a16:creationId xmlns:a16="http://schemas.microsoft.com/office/drawing/2014/main" id="{18F457B1-BC84-43CB-B289-12B258D0B757}"/>
               </a:ext>
             </a:extLst>
           </p:cNvPr>
@@ -4531,7 +6587,7 @@
             <a:pPr algn="l">
               <a:defRPr sz="1275" b="1">
                 <a:solidFill>
-                  <a:srgbClr val="092454"/>
+                  <a:srgbClr val="1C2E4A"/>
                 </a:solidFill>
                 <a:latin typeface="Helvetica Neue"/>
                 <a:ea typeface="Helvetica Neue"/>
@@ -4541,7 +6597,7 @@
             <a:r>
               <a:rPr sz="1275" b="1">
                 <a:solidFill>
-                  <a:srgbClr val="092454"/>
+                  <a:srgbClr val="1C2E4A"/>
                 </a:solidFill>
                 <a:latin typeface="Helvetica Neue"/>
                 <a:ea typeface="Helvetica Neue"/>
@@ -4557,7 +6613,7 @@
           <p:cNvPr id="6" name="">
             <a:extLst xmlns:a="http://schemas.openxmlformats.org/drawingml/2006/main">
               <a:ext uri="{FF2B5EF4-FFF2-40B4-BE49-F238E27FC236}">
-                <a16:creationId xmlns:a16="http://schemas.microsoft.com/office/drawing/2014/main" id="{13900D59-359E-4619-A85D-9058BD88C951}"/>
+                <a16:creationId xmlns:a16="http://schemas.microsoft.com/office/drawing/2014/main" id="{C13E533F-0DA6-480B-9EA5-C77156D914DE}"/>
               </a:ext>
             </a:extLst>
           </p:cNvPr>
@@ -4588,7 +6644,7 @@
             <a:pPr algn="l">
               <a:defRPr sz="900" b="0">
                 <a:solidFill>
-                  <a:srgbClr val="61718A"/>
+                  <a:srgbClr val="52677D"/>
                 </a:solidFill>
                 <a:latin typeface="Helvetica Neue"/>
                 <a:ea typeface="Helvetica Neue"/>
@@ -4598,7 +6654,7 @@
             <a:r>
               <a:rPr sz="900" b="0">
                 <a:solidFill>
-                  <a:srgbClr val="61718A"/>
+                  <a:srgbClr val="52677D"/>
                 </a:solidFill>
                 <a:latin typeface="Helvetica Neue"/>
                 <a:ea typeface="Helvetica Neue"/>
@@ -4614,7 +6670,7 @@
           <p:cNvPr id="7" name="">
             <a:extLst xmlns:a="http://schemas.openxmlformats.org/drawingml/2006/main">
               <a:ext uri="{FF2B5EF4-FFF2-40B4-BE49-F238E27FC236}">
-                <a16:creationId xmlns:a16="http://schemas.microsoft.com/office/drawing/2014/main" id="{793D4C89-C5FD-4C86-B163-E2E28BD6CB71}"/>
+                <a16:creationId xmlns:a16="http://schemas.microsoft.com/office/drawing/2014/main" id="{F613EC30-8742-4453-9E4B-8C2BC1F7497C}"/>
               </a:ext>
             </a:extLst>
           </p:cNvPr>
@@ -4645,7 +6701,7 @@
             <a:pPr algn="l">
               <a:defRPr sz="1200" b="1">
                 <a:solidFill>
-                  <a:srgbClr val="2563EB"/>
+                  <a:srgbClr val="52677D"/>
                 </a:solidFill>
                 <a:latin typeface="Helvetica Neue"/>
                 <a:ea typeface="Helvetica Neue"/>
@@ -4655,7 +6711,7 @@
             <a:r>
               <a:rPr sz="1200" b="1">
                 <a:solidFill>
-                  <a:srgbClr val="2563EB"/>
+                  <a:srgbClr val="52677D"/>
                 </a:solidFill>
                 <a:latin typeface="Helvetica Neue"/>
                 <a:ea typeface="Helvetica Neue"/>
@@ -4671,7 +6727,7 @@
           <p:cNvPr id="8" name="">
             <a:extLst xmlns:a="http://schemas.openxmlformats.org/drawingml/2006/main">
               <a:ext uri="{FF2B5EF4-FFF2-40B4-BE49-F238E27FC236}">
-                <a16:creationId xmlns:a16="http://schemas.microsoft.com/office/drawing/2014/main" id="{E91DBEAD-14C4-4B7C-9E25-439CA0A451F6}"/>
+                <a16:creationId xmlns:a16="http://schemas.microsoft.com/office/drawing/2014/main" id="{CE5C23C0-D810-4330-926C-9347F3EE24B5}"/>
               </a:ext>
             </a:extLst>
           </p:cNvPr>
@@ -4702,7 +6758,7 @@
             <a:pPr algn="l">
               <a:defRPr sz="1275" b="1">
                 <a:solidFill>
-                  <a:srgbClr val="092454"/>
+                  <a:srgbClr val="1C2E4A"/>
                 </a:solidFill>
                 <a:latin typeface="Helvetica Neue"/>
                 <a:ea typeface="Helvetica Neue"/>
@@ -4712,7 +6768,7 @@
             <a:r>
               <a:rPr sz="1275" b="1">
                 <a:solidFill>
-                  <a:srgbClr val="092454"/>
+                  <a:srgbClr val="1C2E4A"/>
                 </a:solidFill>
                 <a:latin typeface="Helvetica Neue"/>
                 <a:ea typeface="Helvetica Neue"/>
@@ -4728,7 +6784,7 @@
           <p:cNvPr id="9" name="">
             <a:extLst xmlns:a="http://schemas.openxmlformats.org/drawingml/2006/main">
               <a:ext uri="{FF2B5EF4-FFF2-40B4-BE49-F238E27FC236}">
-                <a16:creationId xmlns:a16="http://schemas.microsoft.com/office/drawing/2014/main" id="{E3645BDE-FBB3-48CE-BB10-2DDF8A6840C6}"/>
+                <a16:creationId xmlns:a16="http://schemas.microsoft.com/office/drawing/2014/main" id="{1C458A01-20D5-4983-A84D-A55DBC0F1AA9}"/>
               </a:ext>
             </a:extLst>
           </p:cNvPr>
@@ -4759,7 +6815,7 @@
             <a:pPr algn="l">
               <a:defRPr sz="900" b="0">
                 <a:solidFill>
-                  <a:srgbClr val="61718A"/>
+                  <a:srgbClr val="52677D"/>
                 </a:solidFill>
                 <a:latin typeface="Helvetica Neue"/>
                 <a:ea typeface="Helvetica Neue"/>
@@ -4769,7 +6825,7 @@
             <a:r>
               <a:rPr sz="900" b="0">
                 <a:solidFill>
-                  <a:srgbClr val="61718A"/>
+                  <a:srgbClr val="52677D"/>
                 </a:solidFill>
                 <a:latin typeface="Helvetica Neue"/>
                 <a:ea typeface="Helvetica Neue"/>
@@ -4785,7 +6841,7 @@
           <p:cNvPr id="10" name="">
             <a:extLst xmlns:a="http://schemas.openxmlformats.org/drawingml/2006/main">
               <a:ext uri="{FF2B5EF4-FFF2-40B4-BE49-F238E27FC236}">
-                <a16:creationId xmlns:a16="http://schemas.microsoft.com/office/drawing/2014/main" id="{2CF51EB4-25A6-4AE9-A7CB-DF6EFE97692A}"/>
+                <a16:creationId xmlns:a16="http://schemas.microsoft.com/office/drawing/2014/main" id="{51CB8CBA-6A93-473E-A848-B2382315E7E5}"/>
               </a:ext>
             </a:extLst>
           </p:cNvPr>
@@ -4816,7 +6872,7 @@
             <a:pPr algn="l">
               <a:defRPr sz="1200" b="1">
                 <a:solidFill>
-                  <a:srgbClr val="2563EB"/>
+                  <a:srgbClr val="52677D"/>
                 </a:solidFill>
                 <a:latin typeface="Helvetica Neue"/>
                 <a:ea typeface="Helvetica Neue"/>
@@ -4826,7 +6882,7 @@
             <a:r>
               <a:rPr sz="1200" b="1">
                 <a:solidFill>
-                  <a:srgbClr val="2563EB"/>
+                  <a:srgbClr val="52677D"/>
                 </a:solidFill>
                 <a:latin typeface="Helvetica Neue"/>
                 <a:ea typeface="Helvetica Neue"/>
@@ -4842,7 +6898,7 @@
           <p:cNvPr id="11" name="">
             <a:extLst xmlns:a="http://schemas.openxmlformats.org/drawingml/2006/main">
               <a:ext uri="{FF2B5EF4-FFF2-40B4-BE49-F238E27FC236}">
-                <a16:creationId xmlns:a16="http://schemas.microsoft.com/office/drawing/2014/main" id="{1140A5B2-3F6D-4D3C-9450-D447D1B6D140}"/>
+                <a16:creationId xmlns:a16="http://schemas.microsoft.com/office/drawing/2014/main" id="{15F96D33-0164-41F1-A300-E630E064E3AE}"/>
               </a:ext>
             </a:extLst>
           </p:cNvPr>
@@ -4873,7 +6929,7 @@
             <a:pPr algn="l">
               <a:defRPr sz="1275" b="1">
                 <a:solidFill>
-                  <a:srgbClr val="092454"/>
+                  <a:srgbClr val="1C2E4A"/>
                 </a:solidFill>
                 <a:latin typeface="Helvetica Neue"/>
                 <a:ea typeface="Helvetica Neue"/>
@@ -4883,7 +6939,7 @@
             <a:r>
               <a:rPr sz="1275" b="1">
                 <a:solidFill>
-                  <a:srgbClr val="092454"/>
+                  <a:srgbClr val="1C2E4A"/>
                 </a:solidFill>
                 <a:latin typeface="Helvetica Neue"/>
                 <a:ea typeface="Helvetica Neue"/>
@@ -4899,7 +6955,7 @@
           <p:cNvPr id="12" name="">
             <a:extLst xmlns:a="http://schemas.openxmlformats.org/drawingml/2006/main">
               <a:ext uri="{FF2B5EF4-FFF2-40B4-BE49-F238E27FC236}">
-                <a16:creationId xmlns:a16="http://schemas.microsoft.com/office/drawing/2014/main" id="{988D76EA-63FB-4F71-AE3B-A061B51705E5}"/>
+                <a16:creationId xmlns:a16="http://schemas.microsoft.com/office/drawing/2014/main" id="{49DB2E84-2D42-46C7-BE98-D0927F513F44}"/>
               </a:ext>
             </a:extLst>
           </p:cNvPr>
@@ -4930,7 +6986,7 @@
             <a:pPr algn="l">
               <a:defRPr sz="900" b="0">
                 <a:solidFill>
-                  <a:srgbClr val="61718A"/>
+                  <a:srgbClr val="52677D"/>
                 </a:solidFill>
                 <a:latin typeface="Helvetica Neue"/>
                 <a:ea typeface="Helvetica Neue"/>
@@ -4940,7 +6996,7 @@
             <a:r>
               <a:rPr sz="900" b="0">
                 <a:solidFill>
-                  <a:srgbClr val="61718A"/>
+                  <a:srgbClr val="52677D"/>
                 </a:solidFill>
                 <a:latin typeface="Helvetica Neue"/>
                 <a:ea typeface="Helvetica Neue"/>
@@ -4956,7 +7012,7 @@
           <p:cNvPr id="13" name="">
             <a:extLst xmlns:a="http://schemas.openxmlformats.org/drawingml/2006/main">
               <a:ext uri="{FF2B5EF4-FFF2-40B4-BE49-F238E27FC236}">
-                <a16:creationId xmlns:a16="http://schemas.microsoft.com/office/drawing/2014/main" id="{ED0E09B3-9138-4CBF-8314-4A0FE3A92492}"/>
+                <a16:creationId xmlns:a16="http://schemas.microsoft.com/office/drawing/2014/main" id="{A5CFAB41-7CBE-4725-8728-1E2CA637D79F}"/>
               </a:ext>
             </a:extLst>
           </p:cNvPr>
@@ -4987,7 +7043,7 @@
             <a:pPr algn="l">
               <a:defRPr sz="1200" b="1">
                 <a:solidFill>
-                  <a:srgbClr val="2563EB"/>
+                  <a:srgbClr val="52677D"/>
                 </a:solidFill>
                 <a:latin typeface="Helvetica Neue"/>
                 <a:ea typeface="Helvetica Neue"/>
@@ -4997,7 +7053,7 @@
             <a:r>
               <a:rPr sz="1200" b="1">
                 <a:solidFill>
-                  <a:srgbClr val="2563EB"/>
+                  <a:srgbClr val="52677D"/>
                 </a:solidFill>
                 <a:latin typeface="Helvetica Neue"/>
                 <a:ea typeface="Helvetica Neue"/>
@@ -5013,7 +7069,7 @@
           <p:cNvPr id="14" name="">
             <a:extLst xmlns:a="http://schemas.openxmlformats.org/drawingml/2006/main">
               <a:ext uri="{FF2B5EF4-FFF2-40B4-BE49-F238E27FC236}">
-                <a16:creationId xmlns:a16="http://schemas.microsoft.com/office/drawing/2014/main" id="{784C4B70-7721-4F34-B033-31B7056D0BA5}"/>
+                <a16:creationId xmlns:a16="http://schemas.microsoft.com/office/drawing/2014/main" id="{D3E9BC5A-C259-4941-BE79-5E1EDAA3279D}"/>
               </a:ext>
             </a:extLst>
           </p:cNvPr>
@@ -5044,7 +7100,7 @@
             <a:pPr algn="l">
               <a:defRPr sz="1275" b="1">
                 <a:solidFill>
-                  <a:srgbClr val="092454"/>
+                  <a:srgbClr val="1C2E4A"/>
                 </a:solidFill>
                 <a:latin typeface="Helvetica Neue"/>
                 <a:ea typeface="Helvetica Neue"/>
@@ -5054,7 +7110,7 @@
             <a:r>
               <a:rPr sz="1275" b="1">
                 <a:solidFill>
-                  <a:srgbClr val="092454"/>
+                  <a:srgbClr val="1C2E4A"/>
                 </a:solidFill>
                 <a:latin typeface="Helvetica Neue"/>
                 <a:ea typeface="Helvetica Neue"/>
@@ -5070,7 +7126,7 @@
           <p:cNvPr id="15" name="">
             <a:extLst xmlns:a="http://schemas.openxmlformats.org/drawingml/2006/main">
               <a:ext uri="{FF2B5EF4-FFF2-40B4-BE49-F238E27FC236}">
-                <a16:creationId xmlns:a16="http://schemas.microsoft.com/office/drawing/2014/main" id="{3E174E50-B8C2-4720-9DD8-29D905FCBA4F}"/>
+                <a16:creationId xmlns:a16="http://schemas.microsoft.com/office/drawing/2014/main" id="{04FE4389-4F96-48F1-B176-BC95FA0B1A0A}"/>
               </a:ext>
             </a:extLst>
           </p:cNvPr>
@@ -5101,7 +7157,7 @@
             <a:pPr algn="l">
               <a:defRPr sz="900" b="0">
                 <a:solidFill>
-                  <a:srgbClr val="61718A"/>
+                  <a:srgbClr val="52677D"/>
                 </a:solidFill>
                 <a:latin typeface="Helvetica Neue"/>
                 <a:ea typeface="Helvetica Neue"/>
@@ -5111,7 +7167,7 @@
             <a:r>
               <a:rPr sz="900" b="0">
                 <a:solidFill>
-                  <a:srgbClr val="61718A"/>
+                  <a:srgbClr val="52677D"/>
                 </a:solidFill>
                 <a:latin typeface="Helvetica Neue"/>
                 <a:ea typeface="Helvetica Neue"/>
@@ -5127,7 +7183,7 @@
           <p:cNvPr id="16" name="">
             <a:extLst xmlns:a="http://schemas.openxmlformats.org/drawingml/2006/main">
               <a:ext uri="{FF2B5EF4-FFF2-40B4-BE49-F238E27FC236}">
-                <a16:creationId xmlns:a16="http://schemas.microsoft.com/office/drawing/2014/main" id="{AC0071E9-5F67-4A80-95C3-39DBFFBC60EB}"/>
+                <a16:creationId xmlns:a16="http://schemas.microsoft.com/office/drawing/2014/main" id="{7CC1C0BE-441A-49F8-98B5-7F2F0D36D907}"/>
               </a:ext>
             </a:extLst>
           </p:cNvPr>
@@ -5158,7 +7214,7 @@
             <a:pPr algn="l">
               <a:defRPr sz="1200" b="1">
                 <a:solidFill>
-                  <a:srgbClr val="2563EB"/>
+                  <a:srgbClr val="52677D"/>
                 </a:solidFill>
                 <a:latin typeface="Helvetica Neue"/>
                 <a:ea typeface="Helvetica Neue"/>
@@ -5168,7 +7224,7 @@
             <a:r>
               <a:rPr sz="1200" b="1">
                 <a:solidFill>
-                  <a:srgbClr val="2563EB"/>
+                  <a:srgbClr val="52677D"/>
                 </a:solidFill>
                 <a:latin typeface="Helvetica Neue"/>
                 <a:ea typeface="Helvetica Neue"/>
@@ -5184,7 +7240,7 @@
           <p:cNvPr id="17" name="">
             <a:extLst xmlns:a="http://schemas.openxmlformats.org/drawingml/2006/main">
               <a:ext uri="{FF2B5EF4-FFF2-40B4-BE49-F238E27FC236}">
-                <a16:creationId xmlns:a16="http://schemas.microsoft.com/office/drawing/2014/main" id="{856EFE89-898A-4441-9584-DC40C53B43A8}"/>
+                <a16:creationId xmlns:a16="http://schemas.microsoft.com/office/drawing/2014/main" id="{D7FF9C8B-8DCF-487C-A961-DB8443C76C4C}"/>
               </a:ext>
             </a:extLst>
           </p:cNvPr>
@@ -5215,7 +7271,7 @@
             <a:pPr algn="l">
               <a:defRPr sz="1275" b="1">
                 <a:solidFill>
-                  <a:srgbClr val="092454"/>
+                  <a:srgbClr val="1C2E4A"/>
                 </a:solidFill>
                 <a:latin typeface="Helvetica Neue"/>
                 <a:ea typeface="Helvetica Neue"/>
@@ -5225,7 +7281,7 @@
             <a:r>
               <a:rPr sz="1275" b="1">
                 <a:solidFill>
-                  <a:srgbClr val="092454"/>
+                  <a:srgbClr val="1C2E4A"/>
                 </a:solidFill>
                 <a:latin typeface="Helvetica Neue"/>
                 <a:ea typeface="Helvetica Neue"/>
@@ -5241,7 +7297,7 @@
           <p:cNvPr id="18" name="">
             <a:extLst xmlns:a="http://schemas.openxmlformats.org/drawingml/2006/main">
               <a:ext uri="{FF2B5EF4-FFF2-40B4-BE49-F238E27FC236}">
-                <a16:creationId xmlns:a16="http://schemas.microsoft.com/office/drawing/2014/main" id="{AD4182B1-ED48-43CF-BCD3-53254AD5A4AE}"/>
+                <a16:creationId xmlns:a16="http://schemas.microsoft.com/office/drawing/2014/main" id="{E4D55A03-9CFA-4611-BE97-D1D3EF5D4925}"/>
               </a:ext>
             </a:extLst>
           </p:cNvPr>
@@ -5272,7 +7328,7 @@
             <a:pPr algn="l">
               <a:defRPr sz="900" b="0">
                 <a:solidFill>
-                  <a:srgbClr val="61718A"/>
+                  <a:srgbClr val="52677D"/>
                 </a:solidFill>
                 <a:latin typeface="Helvetica Neue"/>
                 <a:ea typeface="Helvetica Neue"/>
@@ -5282,7 +7338,7 @@
             <a:r>
               <a:rPr sz="900" b="0">
                 <a:solidFill>
-                  <a:srgbClr val="61718A"/>
+                  <a:srgbClr val="52677D"/>
                 </a:solidFill>
                 <a:latin typeface="Helvetica Neue"/>
                 <a:ea typeface="Helvetica Neue"/>
@@ -5298,7 +7354,7 @@
           <p:cNvPr id="19" name="">
             <a:extLst xmlns:a="http://schemas.openxmlformats.org/drawingml/2006/main">
               <a:ext uri="{FF2B5EF4-FFF2-40B4-BE49-F238E27FC236}">
-                <a16:creationId xmlns:a16="http://schemas.microsoft.com/office/drawing/2014/main" id="{710321AB-ADC5-485A-B1AA-56FD771E813A}"/>
+                <a16:creationId xmlns:a16="http://schemas.microsoft.com/office/drawing/2014/main" id="{2E4DF62B-8792-426F-A35B-00C69A2ECC19}"/>
               </a:ext>
             </a:extLst>
           </p:cNvPr>
@@ -5329,7 +7385,7 @@
             <a:pPr algn="l">
               <a:defRPr sz="1200" b="1">
                 <a:solidFill>
-                  <a:srgbClr val="2563EB"/>
+                  <a:srgbClr val="52677D"/>
                 </a:solidFill>
                 <a:latin typeface="Helvetica Neue"/>
                 <a:ea typeface="Helvetica Neue"/>
@@ -5339,7 +7395,7 @@
             <a:r>
               <a:rPr sz="1200" b="1">
                 <a:solidFill>
-                  <a:srgbClr val="2563EB"/>
+                  <a:srgbClr val="52677D"/>
                 </a:solidFill>
                 <a:latin typeface="Helvetica Neue"/>
                 <a:ea typeface="Helvetica Neue"/>
@@ -5355,7 +7411,7 @@
           <p:cNvPr id="20" name="">
             <a:extLst xmlns:a="http://schemas.openxmlformats.org/drawingml/2006/main">
               <a:ext uri="{FF2B5EF4-FFF2-40B4-BE49-F238E27FC236}">
-                <a16:creationId xmlns:a16="http://schemas.microsoft.com/office/drawing/2014/main" id="{EBA464AF-B5CC-4A86-BCD4-3B374A5E30CF}"/>
+                <a16:creationId xmlns:a16="http://schemas.microsoft.com/office/drawing/2014/main" id="{9FA10E93-446E-4A5E-941F-55286B46CD74}"/>
               </a:ext>
             </a:extLst>
           </p:cNvPr>
@@ -5386,7 +7442,7 @@
             <a:pPr algn="l">
               <a:defRPr sz="1275" b="1">
                 <a:solidFill>
-                  <a:srgbClr val="092454"/>
+                  <a:srgbClr val="1C2E4A"/>
                 </a:solidFill>
                 <a:latin typeface="Helvetica Neue"/>
                 <a:ea typeface="Helvetica Neue"/>
@@ -5396,7 +7452,7 @@
             <a:r>
               <a:rPr sz="1275" b="1">
                 <a:solidFill>
-                  <a:srgbClr val="092454"/>
+                  <a:srgbClr val="1C2E4A"/>
                 </a:solidFill>
                 <a:latin typeface="Helvetica Neue"/>
                 <a:ea typeface="Helvetica Neue"/>
@@ -5412,7 +7468,7 @@
           <p:cNvPr id="21" name="">
             <a:extLst xmlns:a="http://schemas.openxmlformats.org/drawingml/2006/main">
               <a:ext uri="{FF2B5EF4-FFF2-40B4-BE49-F238E27FC236}">
-                <a16:creationId xmlns:a16="http://schemas.microsoft.com/office/drawing/2014/main" id="{E6604D78-1BB9-417E-9440-3C1732C60C22}"/>
+                <a16:creationId xmlns:a16="http://schemas.microsoft.com/office/drawing/2014/main" id="{718FF5A5-A027-47A4-A914-E4B264B1D2B2}"/>
               </a:ext>
             </a:extLst>
           </p:cNvPr>
@@ -5443,7 +7499,7 @@
             <a:pPr algn="l">
               <a:defRPr sz="900" b="0">
                 <a:solidFill>
-                  <a:srgbClr val="61718A"/>
+                  <a:srgbClr val="52677D"/>
                 </a:solidFill>
                 <a:latin typeface="Helvetica Neue"/>
                 <a:ea typeface="Helvetica Neue"/>
@@ -5453,7 +7509,7 @@
             <a:r>
               <a:rPr sz="900" b="0">
                 <a:solidFill>
-                  <a:srgbClr val="61718A"/>
+                  <a:srgbClr val="52677D"/>
                 </a:solidFill>
                 <a:latin typeface="Helvetica Neue"/>
                 <a:ea typeface="Helvetica Neue"/>
@@ -5469,7 +7525,7 @@
           <p:cNvPr id="22" name="">
             <a:extLst xmlns:a="http://schemas.openxmlformats.org/drawingml/2006/main">
               <a:ext uri="{FF2B5EF4-FFF2-40B4-BE49-F238E27FC236}">
-                <a16:creationId xmlns:a16="http://schemas.microsoft.com/office/drawing/2014/main" id="{821BB0CF-CC56-4635-A86F-D55EC09E8667}"/>
+                <a16:creationId xmlns:a16="http://schemas.microsoft.com/office/drawing/2014/main" id="{9E14B667-879D-4A95-A071-15739BD75CD4}"/>
               </a:ext>
             </a:extLst>
           </p:cNvPr>
@@ -5487,7 +7543,7 @@
             <a:avLst/>
           </a:prstGeom>
           <a:solidFill xmlns:a="http://schemas.openxmlformats.org/drawingml/2006/main">
-            <a:srgbClr val="D8E5F2"/>
+            <a:srgbClr val="BDC4D4"/>
           </a:solidFill>
           <a:ln xmlns:a="http://schemas.openxmlformats.org/drawingml/2006/main" w="0">
             <a:noFill/>
@@ -5499,7 +7555,7 @@
           <p:cNvPr id="23" name="">
             <a:extLst xmlns:a="http://schemas.openxmlformats.org/drawingml/2006/main">
               <a:ext uri="{FF2B5EF4-FFF2-40B4-BE49-F238E27FC236}">
-                <a16:creationId xmlns:a16="http://schemas.microsoft.com/office/drawing/2014/main" id="{B00D27C1-58FE-42F1-B3D2-F77A78B3C509}"/>
+                <a16:creationId xmlns:a16="http://schemas.microsoft.com/office/drawing/2014/main" id="{FF788019-F8B1-4F72-8704-AE6ABC69AD09}"/>
               </a:ext>
             </a:extLst>
           </p:cNvPr>
@@ -5530,7 +7586,7 @@
             <a:pPr algn="l">
               <a:defRPr sz="750" b="0">
                 <a:solidFill>
-                  <a:srgbClr val="61718A"/>
+                  <a:srgbClr val="52677D"/>
                 </a:solidFill>
                 <a:latin typeface="Helvetica Neue"/>
                 <a:ea typeface="Helvetica Neue"/>
@@ -5540,7 +7596,7 @@
             <a:r>
               <a:rPr sz="750" b="0">
                 <a:solidFill>
-                  <a:srgbClr val="61718A"/>
+                  <a:srgbClr val="52677D"/>
                 </a:solidFill>
                 <a:latin typeface="Helvetica Neue"/>
                 <a:ea typeface="Helvetica Neue"/>
@@ -5556,7 +7612,7 @@
           <p:cNvPr id="24" name="">
             <a:extLst xmlns:a="http://schemas.openxmlformats.org/drawingml/2006/main">
               <a:ext uri="{FF2B5EF4-FFF2-40B4-BE49-F238E27FC236}">
-                <a16:creationId xmlns:a16="http://schemas.microsoft.com/office/drawing/2014/main" id="{DDFD4E14-6D20-463A-8052-D6A3E402B6BE}"/>
+                <a16:creationId xmlns:a16="http://schemas.microsoft.com/office/drawing/2014/main" id="{8057444A-662D-4DC6-B0E4-E5F70B48C0F0}"/>
               </a:ext>
             </a:extLst>
           </p:cNvPr>
@@ -5587,7 +7643,7 @@
             <a:pPr algn="r">
               <a:defRPr sz="825" b="1">
                 <a:solidFill>
-                  <a:srgbClr val="2563EB"/>
+                  <a:srgbClr val="52677D"/>
                 </a:solidFill>
                 <a:latin typeface="Helvetica Neue"/>
                 <a:ea typeface="Helvetica Neue"/>
@@ -5597,7 +7653,7 @@
             <a:r>
               <a:rPr sz="825" b="1">
                 <a:solidFill>
-                  <a:srgbClr val="2563EB"/>
+                  <a:srgbClr val="52677D"/>
                 </a:solidFill>
                 <a:latin typeface="Helvetica Neue"/>
                 <a:ea typeface="Helvetica Neue"/>
@@ -5611,7 +7667,7 @@
     </p:spTree>
     <p:extLst>
       <p:ext uri="{BB962C8B-B14F-4D97-AF65-F5344CB8AC3E}">
-        <p14:creationId xmlns:p14="http://schemas.microsoft.com/office/powerpoint/2010/main" val="277567698"/>
+        <p14:creationId xmlns:p14="http://schemas.microsoft.com/office/powerpoint/2010/main" val="1010405351"/>
       </p:ext>
     </p:extLst>
   </p:cSld>
@@ -5624,7 +7680,7 @@
     <p:bg>
       <p:bgPr>
         <a:solidFill xmlns:a="http://schemas.openxmlformats.org/drawingml/2006/main">
-          <a:srgbClr val="061A3A"/>
+          <a:srgbClr val="0F1A2B"/>
         </a:solidFill>
       </p:bgPr>
     </p:bg>
@@ -5642,7 +7698,7 @@
           <p:cNvPr id="10" name="">
             <a:extLst xmlns:a="http://schemas.openxmlformats.org/drawingml/2006/main">
               <a:ext uri="{FF2B5EF4-FFF2-40B4-BE49-F238E27FC236}">
-                <a16:creationId xmlns:a16="http://schemas.microsoft.com/office/drawing/2014/main" id="{51A523C1-559E-493F-AB43-4CCB7C7E293E}"/>
+                <a16:creationId xmlns:a16="http://schemas.microsoft.com/office/drawing/2014/main" id="{5B5F6C44-9443-484D-94F3-A1727368F688}"/>
               </a:ext>
             </a:extLst>
           </p:cNvPr>
@@ -5673,7 +7729,7 @@
             <a:pPr algn="l">
               <a:defRPr sz="1125" b="1">
                 <a:solidFill>
-                  <a:srgbClr val="FFD43B"/>
+                  <a:srgbClr val="D1CFC9"/>
                 </a:solidFill>
                 <a:latin typeface="Helvetica Neue"/>
                 <a:ea typeface="Helvetica Neue"/>
@@ -5683,7 +7739,7 @@
             <a:r>
               <a:rPr sz="1125" b="1">
                 <a:solidFill>
-                  <a:srgbClr val="FFD43B"/>
+                  <a:srgbClr val="D1CFC9"/>
                 </a:solidFill>
                 <a:latin typeface="Helvetica Neue"/>
                 <a:ea typeface="Helvetica Neue"/>
@@ -5699,7 +7755,7 @@
           <p:cNvPr id="2" name="">
             <a:extLst xmlns:a="http://schemas.openxmlformats.org/drawingml/2006/main">
               <a:ext uri="{FF2B5EF4-FFF2-40B4-BE49-F238E27FC236}">
-                <a16:creationId xmlns:a16="http://schemas.microsoft.com/office/drawing/2014/main" id="{1E869503-D108-4BD4-8131-90175525C633}"/>
+                <a16:creationId xmlns:a16="http://schemas.microsoft.com/office/drawing/2014/main" id="{C6A810E4-F45D-4EA0-BAC4-F66D792C577D}"/>
               </a:ext>
             </a:extLst>
           </p:cNvPr>
@@ -5756,7 +7812,7 @@
           <p:cNvPr id="3" name="">
             <a:extLst xmlns:a="http://schemas.openxmlformats.org/drawingml/2006/main">
               <a:ext uri="{FF2B5EF4-FFF2-40B4-BE49-F238E27FC236}">
-                <a16:creationId xmlns:a16="http://schemas.microsoft.com/office/drawing/2014/main" id="{1C533EEA-4CF7-4704-A6EE-7282C1029300}"/>
+                <a16:creationId xmlns:a16="http://schemas.microsoft.com/office/drawing/2014/main" id="{319217E6-116E-4119-9A46-F102AD4B0AD6}"/>
               </a:ext>
             </a:extLst>
           </p:cNvPr>
@@ -5787,7 +7843,7 @@
             <a:pPr algn="l">
               <a:defRPr sz="8700" b="1">
                 <a:solidFill>
-                  <a:srgbClr val="FFD43B"/>
+                  <a:srgbClr val="D1CFC9"/>
                 </a:solidFill>
                 <a:latin typeface="Helvetica Neue"/>
                 <a:ea typeface="Helvetica Neue"/>
@@ -5797,7 +7853,7 @@
             <a:r>
               <a:rPr sz="8700" b="1">
                 <a:solidFill>
-                  <a:srgbClr val="FFD43B"/>
+                  <a:srgbClr val="D1CFC9"/>
                 </a:solidFill>
                 <a:latin typeface="Helvetica Neue"/>
                 <a:ea typeface="Helvetica Neue"/>
@@ -5813,7 +7869,7 @@
           <p:cNvPr id="4" name="">
             <a:extLst xmlns:a="http://schemas.openxmlformats.org/drawingml/2006/main">
               <a:ext uri="{FF2B5EF4-FFF2-40B4-BE49-F238E27FC236}">
-                <a16:creationId xmlns:a16="http://schemas.microsoft.com/office/drawing/2014/main" id="{65B9A6A3-3B20-41C9-A7FF-88767E1125D8}"/>
+                <a16:creationId xmlns:a16="http://schemas.microsoft.com/office/drawing/2014/main" id="{07485A3B-DB5B-49D5-8B80-03D16C66F6C7}"/>
               </a:ext>
             </a:extLst>
           </p:cNvPr>
@@ -5870,7 +7926,7 @@
           <p:cNvPr id="5" name="">
             <a:extLst xmlns:a="http://schemas.openxmlformats.org/drawingml/2006/main">
               <a:ext uri="{FF2B5EF4-FFF2-40B4-BE49-F238E27FC236}">
-                <a16:creationId xmlns:a16="http://schemas.microsoft.com/office/drawing/2014/main" id="{3912D1DB-53FB-47D0-B5D6-38EB883BE41A}"/>
+                <a16:creationId xmlns:a16="http://schemas.microsoft.com/office/drawing/2014/main" id="{E8BCEEBD-16B2-474C-936C-CC5B96C74B7E}"/>
               </a:ext>
             </a:extLst>
           </p:cNvPr>
@@ -5888,7 +7944,7 @@
             <a:avLst/>
           </a:prstGeom>
           <a:solidFill xmlns:a="http://schemas.openxmlformats.org/drawingml/2006/main">
-            <a:srgbClr val="31507E"/>
+            <a:srgbClr val="52677D"/>
           </a:solidFill>
           <a:ln xmlns:a="http://schemas.openxmlformats.org/drawingml/2006/main" w="0">
             <a:noFill/>
@@ -5900,7 +7956,7 @@
           <p:cNvPr id="6" name="">
             <a:extLst xmlns:a="http://schemas.openxmlformats.org/drawingml/2006/main">
               <a:ext uri="{FF2B5EF4-FFF2-40B4-BE49-F238E27FC236}">
-                <a16:creationId xmlns:a16="http://schemas.microsoft.com/office/drawing/2014/main" id="{C4655C84-883D-4235-B2E8-44CA0D61C134}"/>
+                <a16:creationId xmlns:a16="http://schemas.microsoft.com/office/drawing/2014/main" id="{515B87D5-6023-403A-BC5A-DD171ACB69A3}"/>
               </a:ext>
             </a:extLst>
           </p:cNvPr>
@@ -5931,7 +7987,7 @@
             <a:pPr algn="l">
               <a:defRPr sz="1800" b="0">
                 <a:solidFill>
-                  <a:srgbClr val="BFE6FF"/>
+                  <a:srgbClr val="BDC4D4"/>
                 </a:solidFill>
                 <a:latin typeface="Helvetica Neue"/>
                 <a:ea typeface="Helvetica Neue"/>
@@ -5941,7 +7997,7 @@
             <a:r>
               <a:rPr sz="1800" b="0">
                 <a:solidFill>
-                  <a:srgbClr val="BFE6FF"/>
+                  <a:srgbClr val="BDC4D4"/>
                 </a:solidFill>
                 <a:latin typeface="Helvetica Neue"/>
                 <a:ea typeface="Helvetica Neue"/>
@@ -5957,7 +8013,7 @@
           <p:cNvPr id="7" name="">
             <a:extLst xmlns:a="http://schemas.openxmlformats.org/drawingml/2006/main">
               <a:ext uri="{FF2B5EF4-FFF2-40B4-BE49-F238E27FC236}">
-                <a16:creationId xmlns:a16="http://schemas.microsoft.com/office/drawing/2014/main" id="{889E9E7B-0A30-4F84-9C45-3DEE2BD64357}"/>
+                <a16:creationId xmlns:a16="http://schemas.microsoft.com/office/drawing/2014/main" id="{239291AF-8FDC-4792-9AEF-E436ECF56457}"/>
               </a:ext>
             </a:extLst>
           </p:cNvPr>
@@ -5975,7 +8031,7 @@
             <a:avLst/>
           </a:prstGeom>
           <a:solidFill xmlns:a="http://schemas.openxmlformats.org/drawingml/2006/main">
-            <a:srgbClr val="31507E"/>
+            <a:srgbClr val="52677D"/>
           </a:solidFill>
           <a:ln xmlns:a="http://schemas.openxmlformats.org/drawingml/2006/main" w="0">
             <a:noFill/>
@@ -5987,7 +8043,7 @@
           <p:cNvPr id="8" name="">
             <a:extLst xmlns:a="http://schemas.openxmlformats.org/drawingml/2006/main">
               <a:ext uri="{FF2B5EF4-FFF2-40B4-BE49-F238E27FC236}">
-                <a16:creationId xmlns:a16="http://schemas.microsoft.com/office/drawing/2014/main" id="{3C822856-C31B-4866-9967-B4876033540F}"/>
+                <a16:creationId xmlns:a16="http://schemas.microsoft.com/office/drawing/2014/main" id="{5BB62DDE-5797-4196-B32D-FD42A7786556}"/>
               </a:ext>
             </a:extLst>
           </p:cNvPr>
@@ -6018,7 +8074,7 @@
             <a:pPr algn="l">
               <a:defRPr sz="750" b="0">
                 <a:solidFill>
-                  <a:srgbClr val="BFE6FF"/>
+                  <a:srgbClr val="BDC4D4"/>
                 </a:solidFill>
                 <a:latin typeface="Helvetica Neue"/>
                 <a:ea typeface="Helvetica Neue"/>
@@ -6028,7 +8084,7 @@
             <a:r>
               <a:rPr sz="750" b="0">
                 <a:solidFill>
-                  <a:srgbClr val="BFE6FF"/>
+                  <a:srgbClr val="BDC4D4"/>
                 </a:solidFill>
                 <a:latin typeface="Helvetica Neue"/>
                 <a:ea typeface="Helvetica Neue"/>
@@ -6044,7 +8100,7 @@
           <p:cNvPr id="9" name="">
             <a:extLst xmlns:a="http://schemas.openxmlformats.org/drawingml/2006/main">
               <a:ext uri="{FF2B5EF4-FFF2-40B4-BE49-F238E27FC236}">
-                <a16:creationId xmlns:a16="http://schemas.microsoft.com/office/drawing/2014/main" id="{123A0B7A-915A-4AEE-9FC0-DFA899C9C3D3}"/>
+                <a16:creationId xmlns:a16="http://schemas.microsoft.com/office/drawing/2014/main" id="{DC650C17-0C71-4107-A82B-6A659C723657}"/>
               </a:ext>
             </a:extLst>
           </p:cNvPr>
@@ -6075,7 +8131,7 @@
             <a:pPr algn="r">
               <a:defRPr sz="825" b="1">
                 <a:solidFill>
-                  <a:srgbClr val="FFD43B"/>
+                  <a:srgbClr val="D1CFC9"/>
                 </a:solidFill>
                 <a:latin typeface="Helvetica Neue"/>
                 <a:ea typeface="Helvetica Neue"/>
@@ -6085,7 +8141,7 @@
             <a:r>
               <a:rPr sz="825" b="1">
                 <a:solidFill>
-                  <a:srgbClr val="FFD43B"/>
+                  <a:srgbClr val="D1CFC9"/>
                 </a:solidFill>
                 <a:latin typeface="Helvetica Neue"/>
                 <a:ea typeface="Helvetica Neue"/>
@@ -6099,7 +8155,7 @@
     </p:spTree>
     <p:extLst>
       <p:ext uri="{BB962C8B-B14F-4D97-AF65-F5344CB8AC3E}">
-        <p14:creationId xmlns:p14="http://schemas.microsoft.com/office/powerpoint/2010/main" val="1538217344"/>
+        <p14:creationId xmlns:p14="http://schemas.microsoft.com/office/powerpoint/2010/main" val="208014187"/>
       </p:ext>
     </p:extLst>
   </p:cSld>
@@ -6130,7 +8186,7 @@
           <p:cNvPr id="24" name="">
             <a:extLst xmlns:a="http://schemas.openxmlformats.org/drawingml/2006/main">
               <a:ext uri="{FF2B5EF4-FFF2-40B4-BE49-F238E27FC236}">
-                <a16:creationId xmlns:a16="http://schemas.microsoft.com/office/drawing/2014/main" id="{75297F3B-6364-4C4D-B8F1-A4D95D8937D0}"/>
+                <a16:creationId xmlns:a16="http://schemas.microsoft.com/office/drawing/2014/main" id="{A0C386DF-BA89-409B-B12D-D7916E9E8A18}"/>
               </a:ext>
             </a:extLst>
           </p:cNvPr>
@@ -6161,7 +8217,7 @@
             <a:pPr algn="l">
               <a:defRPr sz="1125" b="1">
                 <a:solidFill>
-                  <a:srgbClr val="2563EB"/>
+                  <a:srgbClr val="52677D"/>
                 </a:solidFill>
                 <a:latin typeface="Helvetica Neue"/>
                 <a:ea typeface="Helvetica Neue"/>
@@ -6171,7 +8227,7 @@
             <a:r>
               <a:rPr sz="1125" b="1">
                 <a:solidFill>
-                  <a:srgbClr val="2563EB"/>
+                  <a:srgbClr val="52677D"/>
                 </a:solidFill>
                 <a:latin typeface="Helvetica Neue"/>
                 <a:ea typeface="Helvetica Neue"/>
@@ -6187,7 +8243,7 @@
           <p:cNvPr id="2" name="">
             <a:extLst xmlns:a="http://schemas.openxmlformats.org/drawingml/2006/main">
               <a:ext uri="{FF2B5EF4-FFF2-40B4-BE49-F238E27FC236}">
-                <a16:creationId xmlns:a16="http://schemas.microsoft.com/office/drawing/2014/main" id="{E81E7072-526B-4FA5-B527-99DB1315812E}"/>
+                <a16:creationId xmlns:a16="http://schemas.microsoft.com/office/drawing/2014/main" id="{C93DE360-48A3-46FE-BD91-5033E9964248}"/>
               </a:ext>
             </a:extLst>
           </p:cNvPr>
@@ -6218,7 +8274,7 @@
             <a:pPr algn="l">
               <a:defRPr sz="2850" b="1">
                 <a:solidFill>
-                  <a:srgbClr val="092454"/>
+                  <a:srgbClr val="1C2E4A"/>
                 </a:solidFill>
                 <a:latin typeface="Helvetica Neue"/>
                 <a:ea typeface="Helvetica Neue"/>
@@ -6228,7 +8284,7 @@
             <a:r>
               <a:rPr sz="2850" b="1">
                 <a:solidFill>
-                  <a:srgbClr val="092454"/>
+                  <a:srgbClr val="1C2E4A"/>
                 </a:solidFill>
                 <a:latin typeface="Helvetica Neue"/>
                 <a:ea typeface="Helvetica Neue"/>
@@ -6244,7 +8300,7 @@
           <p:cNvPr id="3" name="">
             <a:extLst xmlns:a="http://schemas.openxmlformats.org/drawingml/2006/main">
               <a:ext uri="{FF2B5EF4-FFF2-40B4-BE49-F238E27FC236}">
-                <a16:creationId xmlns:a16="http://schemas.microsoft.com/office/drawing/2014/main" id="{70B419B8-5FDB-4E23-8404-B567843CF358}"/>
+                <a16:creationId xmlns:a16="http://schemas.microsoft.com/office/drawing/2014/main" id="{7D4D05F3-6AED-4C2B-8325-C129310B4165}"/>
               </a:ext>
             </a:extLst>
           </p:cNvPr>
@@ -6275,7 +8331,7 @@
             <a:pPr algn="l">
               <a:defRPr sz="1425" b="0">
                 <a:solidFill>
-                  <a:srgbClr val="61718A"/>
+                  <a:srgbClr val="52677D"/>
                 </a:solidFill>
                 <a:latin typeface="Helvetica Neue"/>
                 <a:ea typeface="Helvetica Neue"/>
@@ -6285,7 +8341,7 @@
             <a:r>
               <a:rPr sz="1425" b="0">
                 <a:solidFill>
-                  <a:srgbClr val="61718A"/>
+                  <a:srgbClr val="52677D"/>
                 </a:solidFill>
                 <a:latin typeface="Helvetica Neue"/>
                 <a:ea typeface="Helvetica Neue"/>
@@ -6301,7 +8357,7 @@
           <p:cNvPr id="4" name="">
             <a:extLst xmlns:a="http://schemas.openxmlformats.org/drawingml/2006/main">
               <a:ext uri="{FF2B5EF4-FFF2-40B4-BE49-F238E27FC236}">
-                <a16:creationId xmlns:a16="http://schemas.microsoft.com/office/drawing/2014/main" id="{D5132EAC-4F09-409E-A60F-084636AB6A12}"/>
+                <a16:creationId xmlns:a16="http://schemas.microsoft.com/office/drawing/2014/main" id="{F6E795C6-1A04-4A7A-B4B7-822E44D126A9}"/>
               </a:ext>
             </a:extLst>
           </p:cNvPr>
@@ -6321,7 +8377,7 @@
             </a:avLst>
           </a:prstGeom>
           <a:solidFill xmlns:a="http://schemas.openxmlformats.org/drawingml/2006/main">
-            <a:srgbClr val="D8E5F2"/>
+            <a:srgbClr val="BDC4D4"/>
           </a:solidFill>
           <a:ln xmlns:a="http://schemas.openxmlformats.org/drawingml/2006/main" w="0">
             <a:noFill/>
@@ -6333,7 +8389,7 @@
           <p:cNvPr id="5" name="">
             <a:extLst xmlns:a="http://schemas.openxmlformats.org/drawingml/2006/main">
               <a:ext uri="{FF2B5EF4-FFF2-40B4-BE49-F238E27FC236}">
-                <a16:creationId xmlns:a16="http://schemas.microsoft.com/office/drawing/2014/main" id="{1244ADA6-BD9D-4C2D-A89C-97F124448AE2}"/>
+                <a16:creationId xmlns:a16="http://schemas.microsoft.com/office/drawing/2014/main" id="{A2AACA72-978E-4AB2-877C-8B8BE3C384F0}"/>
               </a:ext>
             </a:extLst>
           </p:cNvPr>
@@ -6351,7 +8407,7 @@
             <a:avLst/>
           </a:prstGeom>
           <a:solidFill xmlns:a="http://schemas.openxmlformats.org/drawingml/2006/main">
-            <a:srgbClr val="2563EB"/>
+            <a:srgbClr val="52677D"/>
           </a:solidFill>
           <a:ln xmlns:a="http://schemas.openxmlformats.org/drawingml/2006/main" w="0">
             <a:noFill/>
@@ -6363,7 +8419,7 @@
           <p:cNvPr id="6" name="">
             <a:extLst xmlns:a="http://schemas.openxmlformats.org/drawingml/2006/main">
               <a:ext uri="{FF2B5EF4-FFF2-40B4-BE49-F238E27FC236}">
-                <a16:creationId xmlns:a16="http://schemas.microsoft.com/office/drawing/2014/main" id="{45ABEA99-1F0B-4CD7-91FC-9F3FE89195D4}"/>
+                <a16:creationId xmlns:a16="http://schemas.microsoft.com/office/drawing/2014/main" id="{99A6CE84-ADE2-4FF9-9834-FC8FA7957EE1}"/>
               </a:ext>
             </a:extLst>
           </p:cNvPr>
@@ -6420,7 +8476,7 @@
           <p:cNvPr id="7" name="">
             <a:extLst xmlns:a="http://schemas.openxmlformats.org/drawingml/2006/main">
               <a:ext uri="{FF2B5EF4-FFF2-40B4-BE49-F238E27FC236}">
-                <a16:creationId xmlns:a16="http://schemas.microsoft.com/office/drawing/2014/main" id="{5FD285C9-D1FE-4483-883D-9123BF306C52}"/>
+                <a16:creationId xmlns:a16="http://schemas.microsoft.com/office/drawing/2014/main" id="{54D9AF1F-F97D-426E-AB9B-7BA8ADBFE791}"/>
               </a:ext>
             </a:extLst>
           </p:cNvPr>
@@ -6451,7 +8507,7 @@
             <a:pPr algn="ctr">
               <a:defRPr sz="1350" b="1">
                 <a:solidFill>
-                  <a:srgbClr val="2563EB"/>
+                  <a:srgbClr val="52677D"/>
                 </a:solidFill>
                 <a:latin typeface="Helvetica Neue"/>
                 <a:ea typeface="Helvetica Neue"/>
@@ -6461,7 +8517,7 @@
             <a:r>
               <a:rPr sz="1350" b="1">
                 <a:solidFill>
-                  <a:srgbClr val="2563EB"/>
+                  <a:srgbClr val="52677D"/>
                 </a:solidFill>
                 <a:latin typeface="Helvetica Neue"/>
                 <a:ea typeface="Helvetica Neue"/>
@@ -6477,7 +8533,7 @@
           <p:cNvPr id="8" name="">
             <a:extLst xmlns:a="http://schemas.openxmlformats.org/drawingml/2006/main">
               <a:ext uri="{FF2B5EF4-FFF2-40B4-BE49-F238E27FC236}">
-                <a16:creationId xmlns:a16="http://schemas.microsoft.com/office/drawing/2014/main" id="{95ADC420-0C10-45AE-BDEE-B66A45AFD823}"/>
+                <a16:creationId xmlns:a16="http://schemas.microsoft.com/office/drawing/2014/main" id="{2E74EEB6-4A94-4D8A-AA9F-C85803462F17}"/>
               </a:ext>
             </a:extLst>
           </p:cNvPr>
@@ -6508,7 +8564,7 @@
             <a:pPr algn="ctr">
               <a:defRPr sz="1275" b="0">
                 <a:solidFill>
-                  <a:srgbClr val="61718A"/>
+                  <a:srgbClr val="52677D"/>
                 </a:solidFill>
                 <a:latin typeface="Helvetica Neue"/>
                 <a:ea typeface="Helvetica Neue"/>
@@ -6518,7 +8574,7 @@
             <a:r>
               <a:rPr sz="1275" b="0">
                 <a:solidFill>
-                  <a:srgbClr val="61718A"/>
+                  <a:srgbClr val="52677D"/>
                 </a:solidFill>
                 <a:latin typeface="Helvetica Neue"/>
                 <a:ea typeface="Helvetica Neue"/>
@@ -6534,7 +8590,7 @@
           <p:cNvPr id="9" name="">
             <a:extLst xmlns:a="http://schemas.openxmlformats.org/drawingml/2006/main">
               <a:ext uri="{FF2B5EF4-FFF2-40B4-BE49-F238E27FC236}">
-                <a16:creationId xmlns:a16="http://schemas.microsoft.com/office/drawing/2014/main" id="{BFC47EFE-F641-4B31-9588-93576583F91D}"/>
+                <a16:creationId xmlns:a16="http://schemas.microsoft.com/office/drawing/2014/main" id="{BED40064-7785-4213-BFAB-A46D57A78084}"/>
               </a:ext>
             </a:extLst>
           </p:cNvPr>
@@ -6552,7 +8608,7 @@
             <a:avLst/>
           </a:prstGeom>
           <a:solidFill xmlns:a="http://schemas.openxmlformats.org/drawingml/2006/main">
-            <a:srgbClr val="FF7C70"/>
+            <a:srgbClr val="52677D"/>
           </a:solidFill>
           <a:ln xmlns:a="http://schemas.openxmlformats.org/drawingml/2006/main" w="0">
             <a:noFill/>
@@ -6564,7 +8620,7 @@
           <p:cNvPr id="10" name="">
             <a:extLst xmlns:a="http://schemas.openxmlformats.org/drawingml/2006/main">
               <a:ext uri="{FF2B5EF4-FFF2-40B4-BE49-F238E27FC236}">
-                <a16:creationId xmlns:a16="http://schemas.microsoft.com/office/drawing/2014/main" id="{ECE6736E-1618-4144-AC41-6D6BD00D3D91}"/>
+                <a16:creationId xmlns:a16="http://schemas.microsoft.com/office/drawing/2014/main" id="{FCFE5328-C009-461E-8324-FEA94E00CEC5}"/>
               </a:ext>
             </a:extLst>
           </p:cNvPr>
@@ -6621,7 +8677,7 @@
           <p:cNvPr id="11" name="">
             <a:extLst xmlns:a="http://schemas.openxmlformats.org/drawingml/2006/main">
               <a:ext uri="{FF2B5EF4-FFF2-40B4-BE49-F238E27FC236}">
-                <a16:creationId xmlns:a16="http://schemas.microsoft.com/office/drawing/2014/main" id="{F714BB5B-A041-4D92-B130-ED93D52E949E}"/>
+                <a16:creationId xmlns:a16="http://schemas.microsoft.com/office/drawing/2014/main" id="{7C8F293B-6B62-4A32-BE00-A2ED3622005D}"/>
               </a:ext>
             </a:extLst>
           </p:cNvPr>
@@ -6652,7 +8708,7 @@
             <a:pPr algn="ctr">
               <a:defRPr sz="1350" b="1">
                 <a:solidFill>
-                  <a:srgbClr val="FF7C70"/>
+                  <a:srgbClr val="52677D"/>
                 </a:solidFill>
                 <a:latin typeface="Helvetica Neue"/>
                 <a:ea typeface="Helvetica Neue"/>
@@ -6662,7 +8718,7 @@
             <a:r>
               <a:rPr sz="1350" b="1">
                 <a:solidFill>
-                  <a:srgbClr val="FF7C70"/>
+                  <a:srgbClr val="52677D"/>
                 </a:solidFill>
                 <a:latin typeface="Helvetica Neue"/>
                 <a:ea typeface="Helvetica Neue"/>
@@ -6678,7 +8734,7 @@
           <p:cNvPr id="12" name="">
             <a:extLst xmlns:a="http://schemas.openxmlformats.org/drawingml/2006/main">
               <a:ext uri="{FF2B5EF4-FFF2-40B4-BE49-F238E27FC236}">
-                <a16:creationId xmlns:a16="http://schemas.microsoft.com/office/drawing/2014/main" id="{B49381D1-DFAD-4137-A6E6-C1EAB7AD18A9}"/>
+                <a16:creationId xmlns:a16="http://schemas.microsoft.com/office/drawing/2014/main" id="{7E19CC91-5774-4217-A28F-141E76143685}"/>
               </a:ext>
             </a:extLst>
           </p:cNvPr>
@@ -6709,7 +8765,7 @@
             <a:pPr algn="ctr">
               <a:defRPr sz="1275" b="0">
                 <a:solidFill>
-                  <a:srgbClr val="61718A"/>
+                  <a:srgbClr val="52677D"/>
                 </a:solidFill>
                 <a:latin typeface="Helvetica Neue"/>
                 <a:ea typeface="Helvetica Neue"/>
@@ -6719,7 +8775,7 @@
             <a:r>
               <a:rPr sz="1275" b="0">
                 <a:solidFill>
-                  <a:srgbClr val="61718A"/>
+                  <a:srgbClr val="52677D"/>
                 </a:solidFill>
                 <a:latin typeface="Helvetica Neue"/>
                 <a:ea typeface="Helvetica Neue"/>
@@ -6735,7 +8791,7 @@
           <p:cNvPr id="13" name="">
             <a:extLst xmlns:a="http://schemas.openxmlformats.org/drawingml/2006/main">
               <a:ext uri="{FF2B5EF4-FFF2-40B4-BE49-F238E27FC236}">
-                <a16:creationId xmlns:a16="http://schemas.microsoft.com/office/drawing/2014/main" id="{80336F41-C4E7-42C3-83F8-C715034CE075}"/>
+                <a16:creationId xmlns:a16="http://schemas.microsoft.com/office/drawing/2014/main" id="{6A834B9F-F74E-450A-A677-C02A015EFF6D}"/>
               </a:ext>
             </a:extLst>
           </p:cNvPr>
@@ -6753,7 +8809,7 @@
             <a:avLst/>
           </a:prstGeom>
           <a:solidFill xmlns:a="http://schemas.openxmlformats.org/drawingml/2006/main">
-            <a:srgbClr val="092454"/>
+            <a:srgbClr val="1C2E4A"/>
           </a:solidFill>
           <a:ln xmlns:a="http://schemas.openxmlformats.org/drawingml/2006/main" w="0">
             <a:noFill/>
@@ -6765,7 +8821,7 @@
           <p:cNvPr id="14" name="">
             <a:extLst xmlns:a="http://schemas.openxmlformats.org/drawingml/2006/main">
               <a:ext uri="{FF2B5EF4-FFF2-40B4-BE49-F238E27FC236}">
-                <a16:creationId xmlns:a16="http://schemas.microsoft.com/office/drawing/2014/main" id="{30149AA6-CAF0-400F-9308-A9F04044784A}"/>
+                <a16:creationId xmlns:a16="http://schemas.microsoft.com/office/drawing/2014/main" id="{D843EA9F-A939-4D53-82DB-A813B3855A2A}"/>
               </a:ext>
             </a:extLst>
           </p:cNvPr>
@@ -6822,7 +8878,7 @@
           <p:cNvPr id="15" name="">
             <a:extLst xmlns:a="http://schemas.openxmlformats.org/drawingml/2006/main">
               <a:ext uri="{FF2B5EF4-FFF2-40B4-BE49-F238E27FC236}">
-                <a16:creationId xmlns:a16="http://schemas.microsoft.com/office/drawing/2014/main" id="{2A956379-08D9-413F-AC6A-EF5CE78FFCF8}"/>
+                <a16:creationId xmlns:a16="http://schemas.microsoft.com/office/drawing/2014/main" id="{F518B94A-D3F9-4E0F-AC26-9D4FBE62AA5C}"/>
               </a:ext>
             </a:extLst>
           </p:cNvPr>
@@ -6853,7 +8909,7 @@
             <a:pPr algn="ctr">
               <a:defRPr sz="1350" b="1">
                 <a:solidFill>
-                  <a:srgbClr val="092454"/>
+                  <a:srgbClr val="1C2E4A"/>
                 </a:solidFill>
                 <a:latin typeface="Helvetica Neue"/>
                 <a:ea typeface="Helvetica Neue"/>
@@ -6863,7 +8919,7 @@
             <a:r>
               <a:rPr sz="1350" b="1">
                 <a:solidFill>
-                  <a:srgbClr val="092454"/>
+                  <a:srgbClr val="1C2E4A"/>
                 </a:solidFill>
                 <a:latin typeface="Helvetica Neue"/>
                 <a:ea typeface="Helvetica Neue"/>
@@ -6879,7 +8935,7 @@
           <p:cNvPr id="16" name="">
             <a:extLst xmlns:a="http://schemas.openxmlformats.org/drawingml/2006/main">
               <a:ext uri="{FF2B5EF4-FFF2-40B4-BE49-F238E27FC236}">
-                <a16:creationId xmlns:a16="http://schemas.microsoft.com/office/drawing/2014/main" id="{FC8F189A-966C-4EED-B26D-D9B6EFAD574E}"/>
+                <a16:creationId xmlns:a16="http://schemas.microsoft.com/office/drawing/2014/main" id="{73886E53-1438-4987-B65D-78DA4820CF03}"/>
               </a:ext>
             </a:extLst>
           </p:cNvPr>
@@ -6910,7 +8966,7 @@
             <a:pPr algn="ctr">
               <a:defRPr sz="1275" b="0">
                 <a:solidFill>
-                  <a:srgbClr val="61718A"/>
+                  <a:srgbClr val="52677D"/>
                 </a:solidFill>
                 <a:latin typeface="Helvetica Neue"/>
                 <a:ea typeface="Helvetica Neue"/>
@@ -6920,7 +8976,7 @@
             <a:r>
               <a:rPr sz="1275" b="0">
                 <a:solidFill>
-                  <a:srgbClr val="61718A"/>
+                  <a:srgbClr val="52677D"/>
                 </a:solidFill>
                 <a:latin typeface="Helvetica Neue"/>
                 <a:ea typeface="Helvetica Neue"/>
@@ -6936,7 +8992,7 @@
           <p:cNvPr id="17" name="">
             <a:extLst xmlns:a="http://schemas.openxmlformats.org/drawingml/2006/main">
               <a:ext uri="{FF2B5EF4-FFF2-40B4-BE49-F238E27FC236}">
-                <a16:creationId xmlns:a16="http://schemas.microsoft.com/office/drawing/2014/main" id="{BD87B112-1B7B-4EBD-9CBA-23AD4CFB0F08}"/>
+                <a16:creationId xmlns:a16="http://schemas.microsoft.com/office/drawing/2014/main" id="{CD64F379-6F8E-491A-822B-E3930C74868D}"/>
               </a:ext>
             </a:extLst>
           </p:cNvPr>
@@ -6954,7 +9010,7 @@
             <a:avLst/>
           </a:prstGeom>
           <a:solidFill xmlns:a="http://schemas.openxmlformats.org/drawingml/2006/main">
-            <a:srgbClr val="00A7A0"/>
+            <a:srgbClr val="52677D"/>
           </a:solidFill>
           <a:ln xmlns:a="http://schemas.openxmlformats.org/drawingml/2006/main" w="0">
             <a:noFill/>
@@ -6966,7 +9022,7 @@
           <p:cNvPr id="18" name="">
             <a:extLst xmlns:a="http://schemas.openxmlformats.org/drawingml/2006/main">
               <a:ext uri="{FF2B5EF4-FFF2-40B4-BE49-F238E27FC236}">
-                <a16:creationId xmlns:a16="http://schemas.microsoft.com/office/drawing/2014/main" id="{2FCE7D46-D2A8-4EF9-B226-615C7D516513}"/>
+                <a16:creationId xmlns:a16="http://schemas.microsoft.com/office/drawing/2014/main" id="{60305F90-2DC2-4107-9150-00DEEFA7F9FF}"/>
               </a:ext>
             </a:extLst>
           </p:cNvPr>
@@ -7023,7 +9079,7 @@
           <p:cNvPr id="19" name="">
             <a:extLst xmlns:a="http://schemas.openxmlformats.org/drawingml/2006/main">
               <a:ext uri="{FF2B5EF4-FFF2-40B4-BE49-F238E27FC236}">
-                <a16:creationId xmlns:a16="http://schemas.microsoft.com/office/drawing/2014/main" id="{F0C6C922-809D-48F4-9917-24021ABA02B0}"/>
+                <a16:creationId xmlns:a16="http://schemas.microsoft.com/office/drawing/2014/main" id="{319744F8-868C-4A11-B247-134285EE323E}"/>
               </a:ext>
             </a:extLst>
           </p:cNvPr>
@@ -7054,7 +9110,7 @@
             <a:pPr algn="ctr">
               <a:defRPr sz="1350" b="1">
                 <a:solidFill>
-                  <a:srgbClr val="00A7A0"/>
+                  <a:srgbClr val="52677D"/>
                 </a:solidFill>
                 <a:latin typeface="Helvetica Neue"/>
                 <a:ea typeface="Helvetica Neue"/>
@@ -7064,7 +9120,7 @@
             <a:r>
               <a:rPr sz="1350" b="1">
                 <a:solidFill>
-                  <a:srgbClr val="00A7A0"/>
+                  <a:srgbClr val="52677D"/>
                 </a:solidFill>
                 <a:latin typeface="Helvetica Neue"/>
                 <a:ea typeface="Helvetica Neue"/>
@@ -7080,7 +9136,7 @@
           <p:cNvPr id="20" name="">
             <a:extLst xmlns:a="http://schemas.openxmlformats.org/drawingml/2006/main">
               <a:ext uri="{FF2B5EF4-FFF2-40B4-BE49-F238E27FC236}">
-                <a16:creationId xmlns:a16="http://schemas.microsoft.com/office/drawing/2014/main" id="{77A0F52B-8CC4-4D63-9C21-5DD01B114674}"/>
+                <a16:creationId xmlns:a16="http://schemas.microsoft.com/office/drawing/2014/main" id="{18727505-0F1D-457D-83FB-C56FA5EA0437}"/>
               </a:ext>
             </a:extLst>
           </p:cNvPr>
@@ -7111,7 +9167,7 @@
             <a:pPr algn="ctr">
               <a:defRPr sz="1275" b="0">
                 <a:solidFill>
-                  <a:srgbClr val="61718A"/>
+                  <a:srgbClr val="52677D"/>
                 </a:solidFill>
                 <a:latin typeface="Helvetica Neue"/>
                 <a:ea typeface="Helvetica Neue"/>
@@ -7121,7 +9177,7 @@
             <a:r>
               <a:rPr sz="1275" b="0">
                 <a:solidFill>
-                  <a:srgbClr val="61718A"/>
+                  <a:srgbClr val="52677D"/>
                 </a:solidFill>
                 <a:latin typeface="Helvetica Neue"/>
                 <a:ea typeface="Helvetica Neue"/>
@@ -7137,7 +9193,7 @@
           <p:cNvPr id="21" name="">
             <a:extLst xmlns:a="http://schemas.openxmlformats.org/drawingml/2006/main">
               <a:ext uri="{FF2B5EF4-FFF2-40B4-BE49-F238E27FC236}">
-                <a16:creationId xmlns:a16="http://schemas.microsoft.com/office/drawing/2014/main" id="{286B42EF-9F83-49F1-AB8A-F23E5C9DB778}"/>
+                <a16:creationId xmlns:a16="http://schemas.microsoft.com/office/drawing/2014/main" id="{11A85548-4D04-40AE-8085-66C78DC24B1E}"/>
               </a:ext>
             </a:extLst>
           </p:cNvPr>
@@ -7155,7 +9211,7 @@
             <a:avLst/>
           </a:prstGeom>
           <a:solidFill xmlns:a="http://schemas.openxmlformats.org/drawingml/2006/main">
-            <a:srgbClr val="D8E5F2"/>
+            <a:srgbClr val="BDC4D4"/>
           </a:solidFill>
           <a:ln xmlns:a="http://schemas.openxmlformats.org/drawingml/2006/main" w="0">
             <a:noFill/>
@@ -7167,7 +9223,7 @@
           <p:cNvPr id="22" name="">
             <a:extLst xmlns:a="http://schemas.openxmlformats.org/drawingml/2006/main">
               <a:ext uri="{FF2B5EF4-FFF2-40B4-BE49-F238E27FC236}">
-                <a16:creationId xmlns:a16="http://schemas.microsoft.com/office/drawing/2014/main" id="{4C185F46-36EB-4FFF-BC90-22DE4F0CDD11}"/>
+                <a16:creationId xmlns:a16="http://schemas.microsoft.com/office/drawing/2014/main" id="{A753C4ED-2355-47F5-92C7-40AF9D5B4A30}"/>
               </a:ext>
             </a:extLst>
           </p:cNvPr>
@@ -7198,7 +9254,7 @@
             <a:pPr algn="l">
               <a:defRPr sz="750" b="0">
                 <a:solidFill>
-                  <a:srgbClr val="61718A"/>
+                  <a:srgbClr val="52677D"/>
                 </a:solidFill>
                 <a:latin typeface="Helvetica Neue"/>
                 <a:ea typeface="Helvetica Neue"/>
@@ -7208,7 +9264,7 @@
             <a:r>
               <a:rPr sz="750" b="0">
                 <a:solidFill>
-                  <a:srgbClr val="61718A"/>
+                  <a:srgbClr val="52677D"/>
                 </a:solidFill>
                 <a:latin typeface="Helvetica Neue"/>
                 <a:ea typeface="Helvetica Neue"/>
@@ -7224,7 +9280,7 @@
           <p:cNvPr id="23" name="">
             <a:extLst xmlns:a="http://schemas.openxmlformats.org/drawingml/2006/main">
               <a:ext uri="{FF2B5EF4-FFF2-40B4-BE49-F238E27FC236}">
-                <a16:creationId xmlns:a16="http://schemas.microsoft.com/office/drawing/2014/main" id="{575EF71C-70E7-4B09-9BE9-25021F4FCC0D}"/>
+                <a16:creationId xmlns:a16="http://schemas.microsoft.com/office/drawing/2014/main" id="{EFADC64E-3BAD-45D9-A059-5E37FD770379}"/>
               </a:ext>
             </a:extLst>
           </p:cNvPr>
@@ -7255,7 +9311,7 @@
             <a:pPr algn="r">
               <a:defRPr sz="825" b="1">
                 <a:solidFill>
-                  <a:srgbClr val="2563EB"/>
+                  <a:srgbClr val="52677D"/>
                 </a:solidFill>
                 <a:latin typeface="Helvetica Neue"/>
                 <a:ea typeface="Helvetica Neue"/>
@@ -7265,7 +9321,7 @@
             <a:r>
               <a:rPr sz="825" b="1">
                 <a:solidFill>
-                  <a:srgbClr val="2563EB"/>
+                  <a:srgbClr val="52677D"/>
                 </a:solidFill>
                 <a:latin typeface="Helvetica Neue"/>
                 <a:ea typeface="Helvetica Neue"/>
@@ -7279,7 +9335,7 @@
     </p:spTree>
     <p:extLst>
       <p:ext uri="{BB962C8B-B14F-4D97-AF65-F5344CB8AC3E}">
-        <p14:creationId xmlns:p14="http://schemas.microsoft.com/office/powerpoint/2010/main" val="1973225893"/>
+        <p14:creationId xmlns:p14="http://schemas.microsoft.com/office/powerpoint/2010/main" val="422560268"/>
       </p:ext>
     </p:extLst>
   </p:cSld>
@@ -7310,7 +9366,7 @@
           <p:cNvPr id="24" name="">
             <a:extLst xmlns:a="http://schemas.openxmlformats.org/drawingml/2006/main">
               <a:ext uri="{FF2B5EF4-FFF2-40B4-BE49-F238E27FC236}">
-                <a16:creationId xmlns:a16="http://schemas.microsoft.com/office/drawing/2014/main" id="{F7D527A0-F524-4206-B692-29883EF65F50}"/>
+                <a16:creationId xmlns:a16="http://schemas.microsoft.com/office/drawing/2014/main" id="{E93C0E53-A26F-4124-8205-6A1EF844D6B1}"/>
               </a:ext>
             </a:extLst>
           </p:cNvPr>
@@ -7328,7 +9384,7 @@
             <a:avLst/>
           </a:prstGeom>
           <a:solidFill xmlns:a="http://schemas.openxmlformats.org/drawingml/2006/main">
-            <a:srgbClr val="2563EB"/>
+            <a:srgbClr val="1C2E4A"/>
           </a:solidFill>
           <a:ln xmlns:a="http://schemas.openxmlformats.org/drawingml/2006/main" w="0">
             <a:noFill/>
@@ -7340,7 +9396,7 @@
           <p:cNvPr id="2" name="">
             <a:extLst xmlns:a="http://schemas.openxmlformats.org/drawingml/2006/main">
               <a:ext uri="{FF2B5EF4-FFF2-40B4-BE49-F238E27FC236}">
-                <a16:creationId xmlns:a16="http://schemas.microsoft.com/office/drawing/2014/main" id="{E28D4B94-42ED-4F69-83A0-C23AD49C82BC}"/>
+                <a16:creationId xmlns:a16="http://schemas.microsoft.com/office/drawing/2014/main" id="{5A964DEE-DF60-43B3-9276-956D32445B1F}"/>
               </a:ext>
             </a:extLst>
           </p:cNvPr>
@@ -7371,7 +9427,7 @@
             <a:pPr algn="l">
               <a:defRPr sz="1125" b="1">
                 <a:solidFill>
-                  <a:srgbClr val="2563EB"/>
+                  <a:srgbClr val="52677D"/>
                 </a:solidFill>
                 <a:latin typeface="Helvetica Neue"/>
                 <a:ea typeface="Helvetica Neue"/>
@@ -7381,7 +9437,7 @@
             <a:r>
               <a:rPr sz="1125" b="1">
                 <a:solidFill>
-                  <a:srgbClr val="2563EB"/>
+                  <a:srgbClr val="52677D"/>
                 </a:solidFill>
                 <a:latin typeface="Helvetica Neue"/>
                 <a:ea typeface="Helvetica Neue"/>
@@ -7397,7 +9453,7 @@
           <p:cNvPr id="3" name="">
             <a:extLst xmlns:a="http://schemas.openxmlformats.org/drawingml/2006/main">
               <a:ext uri="{FF2B5EF4-FFF2-40B4-BE49-F238E27FC236}">
-                <a16:creationId xmlns:a16="http://schemas.microsoft.com/office/drawing/2014/main" id="{0B23801B-C3D1-4019-96C8-07D2EF359362}"/>
+                <a16:creationId xmlns:a16="http://schemas.microsoft.com/office/drawing/2014/main" id="{748D8337-88EC-4740-BC1A-DF06863DB84B}"/>
               </a:ext>
             </a:extLst>
           </p:cNvPr>
@@ -7417,7 +9473,7 @@
             </a:avLst>
           </a:prstGeom>
           <a:solidFill xmlns:a="http://schemas.openxmlformats.org/drawingml/2006/main">
-            <a:srgbClr val="FFD43B"/>
+            <a:srgbClr val="D1CFC9"/>
           </a:solidFill>
           <a:ln xmlns:a="http://schemas.openxmlformats.org/drawingml/2006/main" w="0">
             <a:noFill/>
@@ -7429,7 +9485,7 @@
           <p:cNvPr id="4" name="">
             <a:extLst xmlns:a="http://schemas.openxmlformats.org/drawingml/2006/main">
               <a:ext uri="{FF2B5EF4-FFF2-40B4-BE49-F238E27FC236}">
-                <a16:creationId xmlns:a16="http://schemas.microsoft.com/office/drawing/2014/main" id="{32A23E58-4155-4BCB-B9B1-14BAAED413E9}"/>
+                <a16:creationId xmlns:a16="http://schemas.microsoft.com/office/drawing/2014/main" id="{C9457D2F-9B17-45F6-8453-561A31A9A0A3}"/>
               </a:ext>
             </a:extLst>
           </p:cNvPr>
@@ -7460,7 +9516,7 @@
             <a:pPr algn="ctr">
               <a:defRPr sz="1275" b="1">
                 <a:solidFill>
-                  <a:srgbClr val="092454"/>
+                  <a:srgbClr val="1C2E4A"/>
                 </a:solidFill>
                 <a:latin typeface="Helvetica Neue"/>
                 <a:ea typeface="Helvetica Neue"/>
@@ -7470,7 +9526,7 @@
             <a:r>
               <a:rPr sz="1275" b="1">
                 <a:solidFill>
-                  <a:srgbClr val="092454"/>
+                  <a:srgbClr val="1C2E4A"/>
                 </a:solidFill>
                 <a:latin typeface="Helvetica Neue"/>
                 <a:ea typeface="Helvetica Neue"/>
@@ -7486,7 +9542,7 @@
           <p:cNvPr id="5" name="">
             <a:extLst xmlns:a="http://schemas.openxmlformats.org/drawingml/2006/main">
               <a:ext uri="{FF2B5EF4-FFF2-40B4-BE49-F238E27FC236}">
-                <a16:creationId xmlns:a16="http://schemas.microsoft.com/office/drawing/2014/main" id="{DE8C3CFF-485A-47BA-94DB-ED6093888753}"/>
+                <a16:creationId xmlns:a16="http://schemas.microsoft.com/office/drawing/2014/main" id="{FFB0B770-F73B-42B8-83CD-1CC5291819A5}"/>
               </a:ext>
             </a:extLst>
           </p:cNvPr>
@@ -7517,7 +9573,7 @@
             <a:pPr algn="l">
               <a:defRPr sz="2850" b="1">
                 <a:solidFill>
-                  <a:srgbClr val="092454"/>
+                  <a:srgbClr val="1C2E4A"/>
                 </a:solidFill>
                 <a:latin typeface="Helvetica Neue"/>
                 <a:ea typeface="Helvetica Neue"/>
@@ -7527,7 +9583,7 @@
             <a:r>
               <a:rPr sz="2850" b="1">
                 <a:solidFill>
-                  <a:srgbClr val="092454"/>
+                  <a:srgbClr val="1C2E4A"/>
                 </a:solidFill>
                 <a:latin typeface="Helvetica Neue"/>
                 <a:ea typeface="Helvetica Neue"/>
@@ -7543,7 +9599,7 @@
           <p:cNvPr id="6" name="">
             <a:extLst xmlns:a="http://schemas.openxmlformats.org/drawingml/2006/main">
               <a:ext uri="{FF2B5EF4-FFF2-40B4-BE49-F238E27FC236}">
-                <a16:creationId xmlns:a16="http://schemas.microsoft.com/office/drawing/2014/main" id="{C20753A9-A5A1-4E62-B16B-104FC3259E52}"/>
+                <a16:creationId xmlns:a16="http://schemas.microsoft.com/office/drawing/2014/main" id="{E355BA36-DEBA-4623-BBF5-F66E299BC1A6}"/>
               </a:ext>
             </a:extLst>
           </p:cNvPr>
@@ -7563,7 +9619,7 @@
             </a:avLst>
           </a:prstGeom>
           <a:solidFill xmlns:a="http://schemas.openxmlformats.org/drawingml/2006/main">
-            <a:srgbClr val="EEF7FF"/>
+            <a:srgbClr val="D1CFC9"/>
           </a:solidFill>
           <a:ln xmlns:a="http://schemas.openxmlformats.org/drawingml/2006/main" w="0">
             <a:noFill/>
@@ -7575,7 +9631,7 @@
           <p:cNvPr id="7" name="">
             <a:extLst xmlns:a="http://schemas.openxmlformats.org/drawingml/2006/main">
               <a:ext uri="{FF2B5EF4-FFF2-40B4-BE49-F238E27FC236}">
-                <a16:creationId xmlns:a16="http://schemas.microsoft.com/office/drawing/2014/main" id="{CD67603D-29A1-4229-B334-5DD98FD3B8D0}"/>
+                <a16:creationId xmlns:a16="http://schemas.microsoft.com/office/drawing/2014/main" id="{087F95CD-E5B2-4ECC-AC37-B0112300271A}"/>
               </a:ext>
             </a:extLst>
           </p:cNvPr>
@@ -7606,7 +9662,7 @@
             <a:pPr algn="ctr">
               <a:defRPr sz="1350" b="1">
                 <a:solidFill>
-                  <a:srgbClr val="2563EB"/>
+                  <a:srgbClr val="52677D"/>
                 </a:solidFill>
                 <a:latin typeface="Helvetica Neue"/>
                 <a:ea typeface="Helvetica Neue"/>
@@ -7616,7 +9672,7 @@
             <a:r>
               <a:rPr sz="1350" b="1">
                 <a:solidFill>
-                  <a:srgbClr val="2563EB"/>
+                  <a:srgbClr val="52677D"/>
                 </a:solidFill>
                 <a:latin typeface="Helvetica Neue"/>
                 <a:ea typeface="Helvetica Neue"/>
@@ -7632,7 +9688,7 @@
           <p:cNvPr id="8" name="">
             <a:extLst xmlns:a="http://schemas.openxmlformats.org/drawingml/2006/main">
               <a:ext uri="{FF2B5EF4-FFF2-40B4-BE49-F238E27FC236}">
-                <a16:creationId xmlns:a16="http://schemas.microsoft.com/office/drawing/2014/main" id="{03475D8F-10EB-4C00-98C5-A4F1EAE49365}"/>
+                <a16:creationId xmlns:a16="http://schemas.microsoft.com/office/drawing/2014/main" id="{4F86BD88-ED60-4F6C-9240-8C497684D624}"/>
               </a:ext>
             </a:extLst>
           </p:cNvPr>
@@ -7663,7 +9719,7 @@
             <a:pPr algn="l">
               <a:defRPr sz="1575" b="0">
                 <a:solidFill>
-                  <a:srgbClr val="10213D"/>
+                  <a:srgbClr val="0F1A2B"/>
                 </a:solidFill>
                 <a:latin typeface="Helvetica Neue"/>
                 <a:ea typeface="Helvetica Neue"/>
@@ -7673,7 +9729,7 @@
             <a:r>
               <a:rPr sz="1575" b="0">
                 <a:solidFill>
-                  <a:srgbClr val="10213D"/>
+                  <a:srgbClr val="0F1A2B"/>
                 </a:solidFill>
                 <a:latin typeface="Helvetica Neue"/>
                 <a:ea typeface="Helvetica Neue"/>
@@ -7689,7 +9745,7 @@
           <p:cNvPr id="9" name="">
             <a:extLst xmlns:a="http://schemas.openxmlformats.org/drawingml/2006/main">
               <a:ext uri="{FF2B5EF4-FFF2-40B4-BE49-F238E27FC236}">
-                <a16:creationId xmlns:a16="http://schemas.microsoft.com/office/drawing/2014/main" id="{2A5EACFA-95DD-47B5-B60F-982267AC7C9C}"/>
+                <a16:creationId xmlns:a16="http://schemas.microsoft.com/office/drawing/2014/main" id="{516C5F4A-FA88-4A64-B9C7-216C90358D72}"/>
               </a:ext>
             </a:extLst>
           </p:cNvPr>
@@ -7709,7 +9765,7 @@
             </a:avLst>
           </a:prstGeom>
           <a:solidFill xmlns:a="http://schemas.openxmlformats.org/drawingml/2006/main">
-            <a:srgbClr val="EEF7FF"/>
+            <a:srgbClr val="D1CFC9"/>
           </a:solidFill>
           <a:ln xmlns:a="http://schemas.openxmlformats.org/drawingml/2006/main" w="0">
             <a:noFill/>
@@ -7721,7 +9777,7 @@
           <p:cNvPr id="10" name="">
             <a:extLst xmlns:a="http://schemas.openxmlformats.org/drawingml/2006/main">
               <a:ext uri="{FF2B5EF4-FFF2-40B4-BE49-F238E27FC236}">
-                <a16:creationId xmlns:a16="http://schemas.microsoft.com/office/drawing/2014/main" id="{268766B8-3BEA-46C0-8EBB-A3C31F6B5D9D}"/>
+                <a16:creationId xmlns:a16="http://schemas.microsoft.com/office/drawing/2014/main" id="{02D4A173-1D84-4EB3-9ED9-78501F4C2ADD}"/>
               </a:ext>
             </a:extLst>
           </p:cNvPr>
@@ -7752,7 +9808,7 @@
             <a:pPr algn="ctr">
               <a:defRPr sz="1350" b="1">
                 <a:solidFill>
-                  <a:srgbClr val="2563EB"/>
+                  <a:srgbClr val="52677D"/>
                 </a:solidFill>
                 <a:latin typeface="Helvetica Neue"/>
                 <a:ea typeface="Helvetica Neue"/>
@@ -7762,7 +9818,7 @@
             <a:r>
               <a:rPr sz="1350" b="1">
                 <a:solidFill>
-                  <a:srgbClr val="2563EB"/>
+                  <a:srgbClr val="52677D"/>
                 </a:solidFill>
                 <a:latin typeface="Helvetica Neue"/>
                 <a:ea typeface="Helvetica Neue"/>
@@ -7778,7 +9834,7 @@
           <p:cNvPr id="11" name="">
             <a:extLst xmlns:a="http://schemas.openxmlformats.org/drawingml/2006/main">
               <a:ext uri="{FF2B5EF4-FFF2-40B4-BE49-F238E27FC236}">
-                <a16:creationId xmlns:a16="http://schemas.microsoft.com/office/drawing/2014/main" id="{476BF78C-7C54-47D2-874D-438DE9F04586}"/>
+                <a16:creationId xmlns:a16="http://schemas.microsoft.com/office/drawing/2014/main" id="{39047238-EE21-49DB-B7C2-9A8FE8CF6C2B}"/>
               </a:ext>
             </a:extLst>
           </p:cNvPr>
@@ -7809,7 +9865,7 @@
             <a:pPr algn="l">
               <a:defRPr sz="1575" b="0">
                 <a:solidFill>
-                  <a:srgbClr val="10213D"/>
+                  <a:srgbClr val="0F1A2B"/>
                 </a:solidFill>
                 <a:latin typeface="Helvetica Neue"/>
                 <a:ea typeface="Helvetica Neue"/>
@@ -7819,7 +9875,7 @@
             <a:r>
               <a:rPr sz="1575" b="0">
                 <a:solidFill>
-                  <a:srgbClr val="10213D"/>
+                  <a:srgbClr val="0F1A2B"/>
                 </a:solidFill>
                 <a:latin typeface="Helvetica Neue"/>
                 <a:ea typeface="Helvetica Neue"/>
@@ -7835,7 +9891,7 @@
           <p:cNvPr id="12" name="">
             <a:extLst xmlns:a="http://schemas.openxmlformats.org/drawingml/2006/main">
               <a:ext uri="{FF2B5EF4-FFF2-40B4-BE49-F238E27FC236}">
-                <a16:creationId xmlns:a16="http://schemas.microsoft.com/office/drawing/2014/main" id="{67593C48-7DFD-49E0-B525-431AC3CF72BB}"/>
+                <a16:creationId xmlns:a16="http://schemas.microsoft.com/office/drawing/2014/main" id="{2B863819-9A2B-4B77-A32C-2D35D67C6B92}"/>
               </a:ext>
             </a:extLst>
           </p:cNvPr>
@@ -7855,7 +9911,7 @@
             </a:avLst>
           </a:prstGeom>
           <a:solidFill xmlns:a="http://schemas.openxmlformats.org/drawingml/2006/main">
-            <a:srgbClr val="EEF7FF"/>
+            <a:srgbClr val="D1CFC9"/>
           </a:solidFill>
           <a:ln xmlns:a="http://schemas.openxmlformats.org/drawingml/2006/main" w="0">
             <a:noFill/>
@@ -7867,7 +9923,7 @@
           <p:cNvPr id="13" name="">
             <a:extLst xmlns:a="http://schemas.openxmlformats.org/drawingml/2006/main">
               <a:ext uri="{FF2B5EF4-FFF2-40B4-BE49-F238E27FC236}">
-                <a16:creationId xmlns:a16="http://schemas.microsoft.com/office/drawing/2014/main" id="{7B77BEEE-36E7-4DF8-9A12-B640ACF3E3F7}"/>
+                <a16:creationId xmlns:a16="http://schemas.microsoft.com/office/drawing/2014/main" id="{701AF57E-E20A-4CAC-ACEE-6DA0A1D7A46D}"/>
               </a:ext>
             </a:extLst>
           </p:cNvPr>
@@ -7898,7 +9954,7 @@
             <a:pPr algn="ctr">
               <a:defRPr sz="1350" b="1">
                 <a:solidFill>
-                  <a:srgbClr val="2563EB"/>
+                  <a:srgbClr val="52677D"/>
                 </a:solidFill>
                 <a:latin typeface="Helvetica Neue"/>
                 <a:ea typeface="Helvetica Neue"/>
@@ -7908,7 +9964,7 @@
             <a:r>
               <a:rPr sz="1350" b="1">
                 <a:solidFill>
-                  <a:srgbClr val="2563EB"/>
+                  <a:srgbClr val="52677D"/>
                 </a:solidFill>
                 <a:latin typeface="Helvetica Neue"/>
                 <a:ea typeface="Helvetica Neue"/>
@@ -7924,7 +9980,7 @@
           <p:cNvPr id="14" name="">
             <a:extLst xmlns:a="http://schemas.openxmlformats.org/drawingml/2006/main">
               <a:ext uri="{FF2B5EF4-FFF2-40B4-BE49-F238E27FC236}">
-                <a16:creationId xmlns:a16="http://schemas.microsoft.com/office/drawing/2014/main" id="{54934DA7-0A18-429B-8A07-9C160112CF39}"/>
+                <a16:creationId xmlns:a16="http://schemas.microsoft.com/office/drawing/2014/main" id="{6DC9AB5C-3E51-467D-9580-107295DA4777}"/>
               </a:ext>
             </a:extLst>
           </p:cNvPr>
@@ -7955,7 +10011,7 @@
             <a:pPr algn="l">
               <a:defRPr sz="1575" b="0">
                 <a:solidFill>
-                  <a:srgbClr val="10213D"/>
+                  <a:srgbClr val="0F1A2B"/>
                 </a:solidFill>
                 <a:latin typeface="Helvetica Neue"/>
                 <a:ea typeface="Helvetica Neue"/>
@@ -7965,7 +10021,7 @@
             <a:r>
               <a:rPr sz="1575" b="0">
                 <a:solidFill>
-                  <a:srgbClr val="10213D"/>
+                  <a:srgbClr val="0F1A2B"/>
                 </a:solidFill>
                 <a:latin typeface="Helvetica Neue"/>
                 <a:ea typeface="Helvetica Neue"/>
@@ -7981,7 +10037,7 @@
           <p:cNvPr id="15" name="">
             <a:extLst xmlns:a="http://schemas.openxmlformats.org/drawingml/2006/main">
               <a:ext uri="{FF2B5EF4-FFF2-40B4-BE49-F238E27FC236}">
-                <a16:creationId xmlns:a16="http://schemas.microsoft.com/office/drawing/2014/main" id="{D3D80F55-C172-4BB6-9AEE-88A11ADE03BE}"/>
+                <a16:creationId xmlns:a16="http://schemas.microsoft.com/office/drawing/2014/main" id="{4D735A3C-4B6D-4BDE-904D-F83C487E49B8}"/>
               </a:ext>
             </a:extLst>
           </p:cNvPr>
@@ -8001,7 +10057,7 @@
             </a:avLst>
           </a:prstGeom>
           <a:solidFill xmlns:a="http://schemas.openxmlformats.org/drawingml/2006/main">
-            <a:srgbClr val="EEF7FF"/>
+            <a:srgbClr val="D1CFC9"/>
           </a:solidFill>
           <a:ln xmlns:a="http://schemas.openxmlformats.org/drawingml/2006/main" w="0">
             <a:noFill/>
@@ -8013,7 +10069,7 @@
           <p:cNvPr id="16" name="">
             <a:extLst xmlns:a="http://schemas.openxmlformats.org/drawingml/2006/main">
               <a:ext uri="{FF2B5EF4-FFF2-40B4-BE49-F238E27FC236}">
-                <a16:creationId xmlns:a16="http://schemas.microsoft.com/office/drawing/2014/main" id="{3F60CD4A-A326-4B6C-851A-3014467F3AB0}"/>
+                <a16:creationId xmlns:a16="http://schemas.microsoft.com/office/drawing/2014/main" id="{EE9FE73B-7D8A-47CA-9F48-D23180007303}"/>
               </a:ext>
             </a:extLst>
           </p:cNvPr>
@@ -8044,7 +10100,7 @@
             <a:pPr algn="l">
               <a:defRPr sz="1125" b="0">
                 <a:solidFill>
-                  <a:srgbClr val="092454"/>
+                  <a:srgbClr val="1C2E4A"/>
                 </a:solidFill>
                 <a:latin typeface="Helvetica Neue"/>
                 <a:ea typeface="Helvetica Neue"/>
@@ -8054,7 +10110,7 @@
             <a:r>
               <a:rPr sz="1125" b="0">
                 <a:solidFill>
-                  <a:srgbClr val="092454"/>
+                  <a:srgbClr val="1C2E4A"/>
                 </a:solidFill>
                 <a:latin typeface="Helvetica Neue"/>
                 <a:ea typeface="Helvetica Neue"/>
@@ -8070,7 +10126,7 @@
           <p:cNvPr id="17" name="">
             <a:extLst xmlns:a="http://schemas.openxmlformats.org/drawingml/2006/main">
               <a:ext uri="{FF2B5EF4-FFF2-40B4-BE49-F238E27FC236}">
-                <a16:creationId xmlns:a16="http://schemas.microsoft.com/office/drawing/2014/main" id="{1D4A51ED-BCEF-4627-90AD-BA17867A99D2}"/>
+                <a16:creationId xmlns:a16="http://schemas.microsoft.com/office/drawing/2014/main" id="{71D5CBA7-0ED7-4CCE-8773-83B595D9C228}"/>
               </a:ext>
             </a:extLst>
           </p:cNvPr>
@@ -8090,7 +10146,7 @@
             </a:avLst>
           </a:prstGeom>
           <a:solidFill xmlns:a="http://schemas.openxmlformats.org/drawingml/2006/main">
-            <a:srgbClr val="092454"/>
+            <a:srgbClr val="1C2E4A"/>
           </a:solidFill>
           <a:ln xmlns:a="http://schemas.openxmlformats.org/drawingml/2006/main" w="0">
             <a:noFill/>
@@ -8102,7 +10158,7 @@
           <p:cNvPr id="18" name="">
             <a:extLst xmlns:a="http://schemas.openxmlformats.org/drawingml/2006/main">
               <a:ext uri="{FF2B5EF4-FFF2-40B4-BE49-F238E27FC236}">
-                <a16:creationId xmlns:a16="http://schemas.microsoft.com/office/drawing/2014/main" id="{6086AAA1-A738-4288-8BE7-91C3286CF972}"/>
+                <a16:creationId xmlns:a16="http://schemas.microsoft.com/office/drawing/2014/main" id="{D09927E4-0592-4F17-BD5A-A7C13EC65374}"/>
               </a:ext>
             </a:extLst>
           </p:cNvPr>
@@ -8133,7 +10189,7 @@
             <a:pPr algn="l">
               <a:defRPr sz="1050" b="1">
                 <a:solidFill>
-                  <a:srgbClr val="FFD43B"/>
+                  <a:srgbClr val="D1CFC9"/>
                 </a:solidFill>
                 <a:latin typeface="Helvetica Neue"/>
                 <a:ea typeface="Helvetica Neue"/>
@@ -8143,7 +10199,7 @@
             <a:r>
               <a:rPr sz="1050" b="1">
                 <a:solidFill>
-                  <a:srgbClr val="FFD43B"/>
+                  <a:srgbClr val="D1CFC9"/>
                 </a:solidFill>
                 <a:latin typeface="Helvetica Neue"/>
                 <a:ea typeface="Helvetica Neue"/>
@@ -8159,7 +10215,7 @@
           <p:cNvPr id="19" name="">
             <a:extLst xmlns:a="http://schemas.openxmlformats.org/drawingml/2006/main">
               <a:ext uri="{FF2B5EF4-FFF2-40B4-BE49-F238E27FC236}">
-                <a16:creationId xmlns:a16="http://schemas.microsoft.com/office/drawing/2014/main" id="{E3593713-BB1B-488E-A037-E42723352C86}"/>
+                <a16:creationId xmlns:a16="http://schemas.microsoft.com/office/drawing/2014/main" id="{46764AE8-DD01-4734-B8AF-62AED80359C3}"/>
               </a:ext>
             </a:extLst>
           </p:cNvPr>
@@ -8216,7 +10272,7 @@
           <p:cNvPr id="20" name="">
             <a:extLst xmlns:a="http://schemas.openxmlformats.org/drawingml/2006/main">
               <a:ext uri="{FF2B5EF4-FFF2-40B4-BE49-F238E27FC236}">
-                <a16:creationId xmlns:a16="http://schemas.microsoft.com/office/drawing/2014/main" id="{DECF3B2C-7F03-48D1-8709-F16B0D839FED}"/>
+                <a16:creationId xmlns:a16="http://schemas.microsoft.com/office/drawing/2014/main" id="{C55E2551-EE4E-4C1F-AFC1-A0A4A3002062}"/>
               </a:ext>
             </a:extLst>
           </p:cNvPr>
@@ -8247,7 +10303,7 @@
             <a:pPr algn="l">
               <a:defRPr sz="1125" b="0">
                 <a:solidFill>
-                  <a:srgbClr val="BFE6FF"/>
+                  <a:srgbClr val="BDC4D4"/>
                 </a:solidFill>
                 <a:latin typeface="Helvetica Neue"/>
                 <a:ea typeface="Helvetica Neue"/>
@@ -8257,7 +10313,7 @@
             <a:r>
               <a:rPr sz="1125" b="0">
                 <a:solidFill>
-                  <a:srgbClr val="BFE6FF"/>
+                  <a:srgbClr val="BDC4D4"/>
                 </a:solidFill>
                 <a:latin typeface="Helvetica Neue"/>
                 <a:ea typeface="Helvetica Neue"/>
@@ -8273,7 +10329,7 @@
           <p:cNvPr id="21" name="">
             <a:extLst xmlns:a="http://schemas.openxmlformats.org/drawingml/2006/main">
               <a:ext uri="{FF2B5EF4-FFF2-40B4-BE49-F238E27FC236}">
-                <a16:creationId xmlns:a16="http://schemas.microsoft.com/office/drawing/2014/main" id="{24B264BE-1029-439C-9446-ACC825D01859}"/>
+                <a16:creationId xmlns:a16="http://schemas.microsoft.com/office/drawing/2014/main" id="{D4AD9CB7-7F78-4EAC-8C47-679950ABB54B}"/>
               </a:ext>
             </a:extLst>
           </p:cNvPr>
@@ -8291,7 +10347,7 @@
             <a:avLst/>
           </a:prstGeom>
           <a:solidFill xmlns:a="http://schemas.openxmlformats.org/drawingml/2006/main">
-            <a:srgbClr val="D8E5F2"/>
+            <a:srgbClr val="BDC4D4"/>
           </a:solidFill>
           <a:ln xmlns:a="http://schemas.openxmlformats.org/drawingml/2006/main" w="0">
             <a:noFill/>
@@ -8303,7 +10359,7 @@
           <p:cNvPr id="22" name="">
             <a:extLst xmlns:a="http://schemas.openxmlformats.org/drawingml/2006/main">
               <a:ext uri="{FF2B5EF4-FFF2-40B4-BE49-F238E27FC236}">
-                <a16:creationId xmlns:a16="http://schemas.microsoft.com/office/drawing/2014/main" id="{5BA364A5-CAC3-4893-ADA8-646FBFDB0C7C}"/>
+                <a16:creationId xmlns:a16="http://schemas.microsoft.com/office/drawing/2014/main" id="{E83FE819-E6F5-4FB7-9705-5DFD77E53CB0}"/>
               </a:ext>
             </a:extLst>
           </p:cNvPr>
@@ -8334,7 +10390,7 @@
             <a:pPr algn="l">
               <a:defRPr sz="750" b="0">
                 <a:solidFill>
-                  <a:srgbClr val="61718A"/>
+                  <a:srgbClr val="52677D"/>
                 </a:solidFill>
                 <a:latin typeface="Helvetica Neue"/>
                 <a:ea typeface="Helvetica Neue"/>
@@ -8344,7 +10400,7 @@
             <a:r>
               <a:rPr sz="750" b="0">
                 <a:solidFill>
-                  <a:srgbClr val="61718A"/>
+                  <a:srgbClr val="52677D"/>
                 </a:solidFill>
                 <a:latin typeface="Helvetica Neue"/>
                 <a:ea typeface="Helvetica Neue"/>
@@ -8360,7 +10416,7 @@
           <p:cNvPr id="23" name="">
             <a:extLst xmlns:a="http://schemas.openxmlformats.org/drawingml/2006/main">
               <a:ext uri="{FF2B5EF4-FFF2-40B4-BE49-F238E27FC236}">
-                <a16:creationId xmlns:a16="http://schemas.microsoft.com/office/drawing/2014/main" id="{C96A1CFD-A4F1-4950-ACCE-A19191A023A0}"/>
+                <a16:creationId xmlns:a16="http://schemas.microsoft.com/office/drawing/2014/main" id="{3438A89B-EDAB-4B56-AA8C-CE5A0D8390B5}"/>
               </a:ext>
             </a:extLst>
           </p:cNvPr>
@@ -8391,7 +10447,7 @@
             <a:pPr algn="r">
               <a:defRPr sz="825" b="1">
                 <a:solidFill>
-                  <a:srgbClr val="2563EB"/>
+                  <a:srgbClr val="52677D"/>
                 </a:solidFill>
                 <a:latin typeface="Helvetica Neue"/>
                 <a:ea typeface="Helvetica Neue"/>
@@ -8401,7 +10457,7 @@
             <a:r>
               <a:rPr sz="825" b="1">
                 <a:solidFill>
-                  <a:srgbClr val="2563EB"/>
+                  <a:srgbClr val="52677D"/>
                 </a:solidFill>
                 <a:latin typeface="Helvetica Neue"/>
                 <a:ea typeface="Helvetica Neue"/>
@@ -8415,7 +10471,7 @@
     </p:spTree>
     <p:extLst>
       <p:ext uri="{BB962C8B-B14F-4D97-AF65-F5344CB8AC3E}">
-        <p14:creationId xmlns:p14="http://schemas.microsoft.com/office/powerpoint/2010/main" val="111430509"/>
+        <p14:creationId xmlns:p14="http://schemas.microsoft.com/office/powerpoint/2010/main" val="1409426828"/>
       </p:ext>
     </p:extLst>
   </p:cSld>
@@ -8446,7 +10502,7 @@
           <p:cNvPr id="24" name="">
             <a:extLst xmlns:a="http://schemas.openxmlformats.org/drawingml/2006/main">
               <a:ext uri="{FF2B5EF4-FFF2-40B4-BE49-F238E27FC236}">
-                <a16:creationId xmlns:a16="http://schemas.microsoft.com/office/drawing/2014/main" id="{EE149FE7-7E0D-45EF-BF52-1026EAE1CFF9}"/>
+                <a16:creationId xmlns:a16="http://schemas.microsoft.com/office/drawing/2014/main" id="{F4A2781F-F36F-4751-88DD-1C19E5173411}"/>
               </a:ext>
             </a:extLst>
           </p:cNvPr>
@@ -8464,7 +10520,7 @@
             <a:avLst/>
           </a:prstGeom>
           <a:solidFill xmlns:a="http://schemas.openxmlformats.org/drawingml/2006/main">
-            <a:srgbClr val="FF7C70"/>
+            <a:srgbClr val="1C2E4A"/>
           </a:solidFill>
           <a:ln xmlns:a="http://schemas.openxmlformats.org/drawingml/2006/main" w="0">
             <a:noFill/>
@@ -8476,7 +10532,7 @@
           <p:cNvPr id="2" name="">
             <a:extLst xmlns:a="http://schemas.openxmlformats.org/drawingml/2006/main">
               <a:ext uri="{FF2B5EF4-FFF2-40B4-BE49-F238E27FC236}">
-                <a16:creationId xmlns:a16="http://schemas.microsoft.com/office/drawing/2014/main" id="{FF5D76B7-420A-4F07-BE1D-0F2FDB5227FB}"/>
+                <a16:creationId xmlns:a16="http://schemas.microsoft.com/office/drawing/2014/main" id="{3FE58321-B698-4B52-BFC5-2831A73D2A72}"/>
               </a:ext>
             </a:extLst>
           </p:cNvPr>
@@ -8507,7 +10563,7 @@
             <a:pPr algn="l">
               <a:defRPr sz="1125" b="1">
                 <a:solidFill>
-                  <a:srgbClr val="2563EB"/>
+                  <a:srgbClr val="52677D"/>
                 </a:solidFill>
                 <a:latin typeface="Helvetica Neue"/>
                 <a:ea typeface="Helvetica Neue"/>
@@ -8517,7 +10573,7 @@
             <a:r>
               <a:rPr sz="1125" b="1">
                 <a:solidFill>
-                  <a:srgbClr val="2563EB"/>
+                  <a:srgbClr val="52677D"/>
                 </a:solidFill>
                 <a:latin typeface="Helvetica Neue"/>
                 <a:ea typeface="Helvetica Neue"/>
@@ -8533,7 +10589,7 @@
           <p:cNvPr id="3" name="">
             <a:extLst xmlns:a="http://schemas.openxmlformats.org/drawingml/2006/main">
               <a:ext uri="{FF2B5EF4-FFF2-40B4-BE49-F238E27FC236}">
-                <a16:creationId xmlns:a16="http://schemas.microsoft.com/office/drawing/2014/main" id="{EEBB64FC-2F72-4D1B-9F2D-AA91B44EA9A5}"/>
+                <a16:creationId xmlns:a16="http://schemas.microsoft.com/office/drawing/2014/main" id="{C7A0CD9A-D60D-49EC-9B2B-3D8FF21368A5}"/>
               </a:ext>
             </a:extLst>
           </p:cNvPr>
@@ -8553,7 +10609,7 @@
             </a:avLst>
           </a:prstGeom>
           <a:solidFill xmlns:a="http://schemas.openxmlformats.org/drawingml/2006/main">
-            <a:srgbClr val="FFD43B"/>
+            <a:srgbClr val="D1CFC9"/>
           </a:solidFill>
           <a:ln xmlns:a="http://schemas.openxmlformats.org/drawingml/2006/main" w="0">
             <a:noFill/>
@@ -8565,7 +10621,7 @@
           <p:cNvPr id="4" name="">
             <a:extLst xmlns:a="http://schemas.openxmlformats.org/drawingml/2006/main">
               <a:ext uri="{FF2B5EF4-FFF2-40B4-BE49-F238E27FC236}">
-                <a16:creationId xmlns:a16="http://schemas.microsoft.com/office/drawing/2014/main" id="{BA91F377-513B-413F-9FC4-BFE27DC8190A}"/>
+                <a16:creationId xmlns:a16="http://schemas.microsoft.com/office/drawing/2014/main" id="{C887ED3B-6D0C-4F0F-BA60-AB6674B245E4}"/>
               </a:ext>
             </a:extLst>
           </p:cNvPr>
@@ -8596,7 +10652,7 @@
             <a:pPr algn="ctr">
               <a:defRPr sz="1275" b="1">
                 <a:solidFill>
-                  <a:srgbClr val="092454"/>
+                  <a:srgbClr val="1C2E4A"/>
                 </a:solidFill>
                 <a:latin typeface="Helvetica Neue"/>
                 <a:ea typeface="Helvetica Neue"/>
@@ -8606,7 +10662,7 @@
             <a:r>
               <a:rPr sz="1275" b="1">
                 <a:solidFill>
-                  <a:srgbClr val="092454"/>
+                  <a:srgbClr val="1C2E4A"/>
                 </a:solidFill>
                 <a:latin typeface="Helvetica Neue"/>
                 <a:ea typeface="Helvetica Neue"/>
@@ -8622,7 +10678,7 @@
           <p:cNvPr id="5" name="">
             <a:extLst xmlns:a="http://schemas.openxmlformats.org/drawingml/2006/main">
               <a:ext uri="{FF2B5EF4-FFF2-40B4-BE49-F238E27FC236}">
-                <a16:creationId xmlns:a16="http://schemas.microsoft.com/office/drawing/2014/main" id="{D6AC5415-A011-4AD9-BAAA-B2FDF13FBDAA}"/>
+                <a16:creationId xmlns:a16="http://schemas.microsoft.com/office/drawing/2014/main" id="{44EC39F9-B10B-4E67-87A8-423C828DC6AD}"/>
               </a:ext>
             </a:extLst>
           </p:cNvPr>
@@ -8653,7 +10709,7 @@
             <a:pPr algn="l">
               <a:defRPr sz="2850" b="1">
                 <a:solidFill>
-                  <a:srgbClr val="092454"/>
+                  <a:srgbClr val="1C2E4A"/>
                 </a:solidFill>
                 <a:latin typeface="Helvetica Neue"/>
                 <a:ea typeface="Helvetica Neue"/>
@@ -8663,7 +10719,7 @@
             <a:r>
               <a:rPr sz="2850" b="1">
                 <a:solidFill>
-                  <a:srgbClr val="092454"/>
+                  <a:srgbClr val="1C2E4A"/>
                 </a:solidFill>
                 <a:latin typeface="Helvetica Neue"/>
                 <a:ea typeface="Helvetica Neue"/>
@@ -8679,7 +10735,7 @@
           <p:cNvPr id="6" name="">
             <a:extLst xmlns:a="http://schemas.openxmlformats.org/drawingml/2006/main">
               <a:ext uri="{FF2B5EF4-FFF2-40B4-BE49-F238E27FC236}">
-                <a16:creationId xmlns:a16="http://schemas.microsoft.com/office/drawing/2014/main" id="{FB16CD2E-1670-4BC7-81CE-BA27A502F981}"/>
+                <a16:creationId xmlns:a16="http://schemas.microsoft.com/office/drawing/2014/main" id="{36FF0198-048A-4A23-AFFA-F02CAE094FAB}"/>
               </a:ext>
             </a:extLst>
           </p:cNvPr>
@@ -8699,7 +10755,7 @@
             </a:avLst>
           </a:prstGeom>
           <a:solidFill xmlns:a="http://schemas.openxmlformats.org/drawingml/2006/main">
-            <a:srgbClr val="EEF7FF"/>
+            <a:srgbClr val="D1CFC9"/>
           </a:solidFill>
           <a:ln xmlns:a="http://schemas.openxmlformats.org/drawingml/2006/main" w="0">
             <a:noFill/>
@@ -8711,7 +10767,7 @@
           <p:cNvPr id="7" name="">
             <a:extLst xmlns:a="http://schemas.openxmlformats.org/drawingml/2006/main">
               <a:ext uri="{FF2B5EF4-FFF2-40B4-BE49-F238E27FC236}">
-                <a16:creationId xmlns:a16="http://schemas.microsoft.com/office/drawing/2014/main" id="{3EB0FD3F-D3ED-4238-BEA7-B2D3ABDFF5EF}"/>
+                <a16:creationId xmlns:a16="http://schemas.microsoft.com/office/drawing/2014/main" id="{0BE67F16-E556-42D2-A8E3-B6D8CDA193DB}"/>
               </a:ext>
             </a:extLst>
           </p:cNvPr>
@@ -8742,7 +10798,7 @@
             <a:pPr algn="ctr">
               <a:defRPr sz="1350" b="1">
                 <a:solidFill>
-                  <a:srgbClr val="2563EB"/>
+                  <a:srgbClr val="52677D"/>
                 </a:solidFill>
                 <a:latin typeface="Helvetica Neue"/>
                 <a:ea typeface="Helvetica Neue"/>
@@ -8752,7 +10808,7 @@
             <a:r>
               <a:rPr sz="1350" b="1">
                 <a:solidFill>
-                  <a:srgbClr val="2563EB"/>
+                  <a:srgbClr val="52677D"/>
                 </a:solidFill>
                 <a:latin typeface="Helvetica Neue"/>
                 <a:ea typeface="Helvetica Neue"/>
@@ -8768,7 +10824,7 @@
           <p:cNvPr id="8" name="">
             <a:extLst xmlns:a="http://schemas.openxmlformats.org/drawingml/2006/main">
               <a:ext uri="{FF2B5EF4-FFF2-40B4-BE49-F238E27FC236}">
-                <a16:creationId xmlns:a16="http://schemas.microsoft.com/office/drawing/2014/main" id="{59D73293-B77D-481A-BE13-895C8CD4802F}"/>
+                <a16:creationId xmlns:a16="http://schemas.microsoft.com/office/drawing/2014/main" id="{3DA9FFB2-DA9E-4666-BBFE-1A6D11AB80A9}"/>
               </a:ext>
             </a:extLst>
           </p:cNvPr>
@@ -8799,7 +10855,7 @@
             <a:pPr algn="l">
               <a:defRPr sz="1575" b="0">
                 <a:solidFill>
-                  <a:srgbClr val="10213D"/>
+                  <a:srgbClr val="0F1A2B"/>
                 </a:solidFill>
                 <a:latin typeface="Helvetica Neue"/>
                 <a:ea typeface="Helvetica Neue"/>
@@ -8809,7 +10865,7 @@
             <a:r>
               <a:rPr sz="1575" b="0">
                 <a:solidFill>
-                  <a:srgbClr val="10213D"/>
+                  <a:srgbClr val="0F1A2B"/>
                 </a:solidFill>
                 <a:latin typeface="Helvetica Neue"/>
                 <a:ea typeface="Helvetica Neue"/>
@@ -8825,7 +10881,7 @@
           <p:cNvPr id="9" name="">
             <a:extLst xmlns:a="http://schemas.openxmlformats.org/drawingml/2006/main">
               <a:ext uri="{FF2B5EF4-FFF2-40B4-BE49-F238E27FC236}">
-                <a16:creationId xmlns:a16="http://schemas.microsoft.com/office/drawing/2014/main" id="{573E4A4A-903D-4ADC-A766-06D0C107BD4C}"/>
+                <a16:creationId xmlns:a16="http://schemas.microsoft.com/office/drawing/2014/main" id="{0F914C7F-20C2-425B-B3B0-AE5DACF03882}"/>
               </a:ext>
             </a:extLst>
           </p:cNvPr>
@@ -8845,7 +10901,7 @@
             </a:avLst>
           </a:prstGeom>
           <a:solidFill xmlns:a="http://schemas.openxmlformats.org/drawingml/2006/main">
-            <a:srgbClr val="EEF7FF"/>
+            <a:srgbClr val="D1CFC9"/>
           </a:solidFill>
           <a:ln xmlns:a="http://schemas.openxmlformats.org/drawingml/2006/main" w="0">
             <a:noFill/>
@@ -8857,7 +10913,7 @@
           <p:cNvPr id="10" name="">
             <a:extLst xmlns:a="http://schemas.openxmlformats.org/drawingml/2006/main">
               <a:ext uri="{FF2B5EF4-FFF2-40B4-BE49-F238E27FC236}">
-                <a16:creationId xmlns:a16="http://schemas.microsoft.com/office/drawing/2014/main" id="{AFBD259F-C185-42D7-BD9A-1EC7BBEE7E29}"/>
+                <a16:creationId xmlns:a16="http://schemas.microsoft.com/office/drawing/2014/main" id="{96255070-96B2-47D3-8090-035AB82A40D2}"/>
               </a:ext>
             </a:extLst>
           </p:cNvPr>
@@ -8888,7 +10944,7 @@
             <a:pPr algn="ctr">
               <a:defRPr sz="1350" b="1">
                 <a:solidFill>
-                  <a:srgbClr val="2563EB"/>
+                  <a:srgbClr val="52677D"/>
                 </a:solidFill>
                 <a:latin typeface="Helvetica Neue"/>
                 <a:ea typeface="Helvetica Neue"/>
@@ -8898,7 +10954,7 @@
             <a:r>
               <a:rPr sz="1350" b="1">
                 <a:solidFill>
-                  <a:srgbClr val="2563EB"/>
+                  <a:srgbClr val="52677D"/>
                 </a:solidFill>
                 <a:latin typeface="Helvetica Neue"/>
                 <a:ea typeface="Helvetica Neue"/>
@@ -8914,7 +10970,7 @@
           <p:cNvPr id="11" name="">
             <a:extLst xmlns:a="http://schemas.openxmlformats.org/drawingml/2006/main">
               <a:ext uri="{FF2B5EF4-FFF2-40B4-BE49-F238E27FC236}">
-                <a16:creationId xmlns:a16="http://schemas.microsoft.com/office/drawing/2014/main" id="{EAFFD274-C61A-4BC1-AC81-52611714E45C}"/>
+                <a16:creationId xmlns:a16="http://schemas.microsoft.com/office/drawing/2014/main" id="{66C7933F-9588-41CF-91D5-E25C055C334F}"/>
               </a:ext>
             </a:extLst>
           </p:cNvPr>
@@ -8945,7 +11001,7 @@
             <a:pPr algn="l">
               <a:defRPr sz="1575" b="0">
                 <a:solidFill>
-                  <a:srgbClr val="10213D"/>
+                  <a:srgbClr val="0F1A2B"/>
                 </a:solidFill>
                 <a:latin typeface="Helvetica Neue"/>
                 <a:ea typeface="Helvetica Neue"/>
@@ -8955,7 +11011,7 @@
             <a:r>
               <a:rPr sz="1575" b="0">
                 <a:solidFill>
-                  <a:srgbClr val="10213D"/>
+                  <a:srgbClr val="0F1A2B"/>
                 </a:solidFill>
                 <a:latin typeface="Helvetica Neue"/>
                 <a:ea typeface="Helvetica Neue"/>
@@ -8971,7 +11027,7 @@
           <p:cNvPr id="12" name="">
             <a:extLst xmlns:a="http://schemas.openxmlformats.org/drawingml/2006/main">
               <a:ext uri="{FF2B5EF4-FFF2-40B4-BE49-F238E27FC236}">
-                <a16:creationId xmlns:a16="http://schemas.microsoft.com/office/drawing/2014/main" id="{11B8000A-5C55-40D6-9BEB-9277D2BD2174}"/>
+                <a16:creationId xmlns:a16="http://schemas.microsoft.com/office/drawing/2014/main" id="{1A3AFD71-848E-4358-8EF7-7260A3FB9B1E}"/>
               </a:ext>
             </a:extLst>
           </p:cNvPr>
@@ -8991,7 +11047,7 @@
             </a:avLst>
           </a:prstGeom>
           <a:solidFill xmlns:a="http://schemas.openxmlformats.org/drawingml/2006/main">
-            <a:srgbClr val="EEF7FF"/>
+            <a:srgbClr val="D1CFC9"/>
           </a:solidFill>
           <a:ln xmlns:a="http://schemas.openxmlformats.org/drawingml/2006/main" w="0">
             <a:noFill/>
@@ -9003,7 +11059,7 @@
           <p:cNvPr id="13" name="">
             <a:extLst xmlns:a="http://schemas.openxmlformats.org/drawingml/2006/main">
               <a:ext uri="{FF2B5EF4-FFF2-40B4-BE49-F238E27FC236}">
-                <a16:creationId xmlns:a16="http://schemas.microsoft.com/office/drawing/2014/main" id="{0787DCAE-ED73-4276-BC16-6BEEC270B099}"/>
+                <a16:creationId xmlns:a16="http://schemas.microsoft.com/office/drawing/2014/main" id="{8926517F-2521-4DB7-864E-B94EE96790DE}"/>
               </a:ext>
             </a:extLst>
           </p:cNvPr>
@@ -9034,7 +11090,7 @@
             <a:pPr algn="ctr">
               <a:defRPr sz="1350" b="1">
                 <a:solidFill>
-                  <a:srgbClr val="2563EB"/>
+                  <a:srgbClr val="52677D"/>
                 </a:solidFill>
                 <a:latin typeface="Helvetica Neue"/>
                 <a:ea typeface="Helvetica Neue"/>
@@ -9044,7 +11100,7 @@
             <a:r>
               <a:rPr sz="1350" b="1">
                 <a:solidFill>
-                  <a:srgbClr val="2563EB"/>
+                  <a:srgbClr val="52677D"/>
                 </a:solidFill>
                 <a:latin typeface="Helvetica Neue"/>
                 <a:ea typeface="Helvetica Neue"/>
@@ -9060,7 +11116,7 @@
           <p:cNvPr id="14" name="">
             <a:extLst xmlns:a="http://schemas.openxmlformats.org/drawingml/2006/main">
               <a:ext uri="{FF2B5EF4-FFF2-40B4-BE49-F238E27FC236}">
-                <a16:creationId xmlns:a16="http://schemas.microsoft.com/office/drawing/2014/main" id="{B21D6CF6-2050-4775-B9F0-5F5342BA460D}"/>
+                <a16:creationId xmlns:a16="http://schemas.microsoft.com/office/drawing/2014/main" id="{2A7EC5F5-8B8F-46D2-BFBF-208D0C40D914}"/>
               </a:ext>
             </a:extLst>
           </p:cNvPr>
@@ -9091,7 +11147,7 @@
             <a:pPr algn="l">
               <a:defRPr sz="1575" b="0">
                 <a:solidFill>
-                  <a:srgbClr val="10213D"/>
+                  <a:srgbClr val="0F1A2B"/>
                 </a:solidFill>
                 <a:latin typeface="Helvetica Neue"/>
                 <a:ea typeface="Helvetica Neue"/>
@@ -9101,7 +11157,7 @@
             <a:r>
               <a:rPr sz="1575" b="0">
                 <a:solidFill>
-                  <a:srgbClr val="10213D"/>
+                  <a:srgbClr val="0F1A2B"/>
                 </a:solidFill>
                 <a:latin typeface="Helvetica Neue"/>
                 <a:ea typeface="Helvetica Neue"/>
@@ -9117,7 +11173,7 @@
           <p:cNvPr id="15" name="">
             <a:extLst xmlns:a="http://schemas.openxmlformats.org/drawingml/2006/main">
               <a:ext uri="{FF2B5EF4-FFF2-40B4-BE49-F238E27FC236}">
-                <a16:creationId xmlns:a16="http://schemas.microsoft.com/office/drawing/2014/main" id="{6EF5D7D6-7501-46E5-9950-E4B8BC6BF0D5}"/>
+                <a16:creationId xmlns:a16="http://schemas.microsoft.com/office/drawing/2014/main" id="{DF50E79B-5F25-4AE1-81DD-5DDB73645FAA}"/>
               </a:ext>
             </a:extLst>
           </p:cNvPr>
@@ -9137,7 +11193,7 @@
             </a:avLst>
           </a:prstGeom>
           <a:solidFill xmlns:a="http://schemas.openxmlformats.org/drawingml/2006/main">
-            <a:srgbClr val="EEF7FF"/>
+            <a:srgbClr val="D1CFC9"/>
           </a:solidFill>
           <a:ln xmlns:a="http://schemas.openxmlformats.org/drawingml/2006/main" w="0">
             <a:noFill/>
@@ -9149,7 +11205,7 @@
           <p:cNvPr id="16" name="">
             <a:extLst xmlns:a="http://schemas.openxmlformats.org/drawingml/2006/main">
               <a:ext uri="{FF2B5EF4-FFF2-40B4-BE49-F238E27FC236}">
-                <a16:creationId xmlns:a16="http://schemas.microsoft.com/office/drawing/2014/main" id="{0DAF2B2D-BF35-4021-8738-6588189D2A99}"/>
+                <a16:creationId xmlns:a16="http://schemas.microsoft.com/office/drawing/2014/main" id="{46B98743-A055-4C83-9C04-A7F4F7073657}"/>
               </a:ext>
             </a:extLst>
           </p:cNvPr>
@@ -9180,7 +11236,7 @@
             <a:pPr algn="l">
               <a:defRPr sz="1125" b="0">
                 <a:solidFill>
-                  <a:srgbClr val="092454"/>
+                  <a:srgbClr val="1C2E4A"/>
                 </a:solidFill>
                 <a:latin typeface="Helvetica Neue"/>
                 <a:ea typeface="Helvetica Neue"/>
@@ -9190,7 +11246,7 @@
             <a:r>
               <a:rPr sz="1125" b="0">
                 <a:solidFill>
-                  <a:srgbClr val="092454"/>
+                  <a:srgbClr val="1C2E4A"/>
                 </a:solidFill>
                 <a:latin typeface="Helvetica Neue"/>
                 <a:ea typeface="Helvetica Neue"/>
@@ -9206,7 +11262,7 @@
           <p:cNvPr id="17" name="">
             <a:extLst xmlns:a="http://schemas.openxmlformats.org/drawingml/2006/main">
               <a:ext uri="{FF2B5EF4-FFF2-40B4-BE49-F238E27FC236}">
-                <a16:creationId xmlns:a16="http://schemas.microsoft.com/office/drawing/2014/main" id="{EB6F9E80-291E-4C5A-81E1-58F1461B066F}"/>
+                <a16:creationId xmlns:a16="http://schemas.microsoft.com/office/drawing/2014/main" id="{F71F0F36-47A3-4976-836A-4ABED8EC3F9D}"/>
               </a:ext>
             </a:extLst>
           </p:cNvPr>
@@ -9226,7 +11282,7 @@
             </a:avLst>
           </a:prstGeom>
           <a:solidFill xmlns:a="http://schemas.openxmlformats.org/drawingml/2006/main">
-            <a:srgbClr val="092454"/>
+            <a:srgbClr val="1C2E4A"/>
           </a:solidFill>
           <a:ln xmlns:a="http://schemas.openxmlformats.org/drawingml/2006/main" w="0">
             <a:noFill/>
@@ -9238,7 +11294,7 @@
           <p:cNvPr id="18" name="">
             <a:extLst xmlns:a="http://schemas.openxmlformats.org/drawingml/2006/main">
               <a:ext uri="{FF2B5EF4-FFF2-40B4-BE49-F238E27FC236}">
-                <a16:creationId xmlns:a16="http://schemas.microsoft.com/office/drawing/2014/main" id="{373D72EB-30F5-4EF8-83A4-75256D0FE01B}"/>
+                <a16:creationId xmlns:a16="http://schemas.microsoft.com/office/drawing/2014/main" id="{26134CA9-DB0A-46E4-945C-CE27DFC6FE17}"/>
               </a:ext>
             </a:extLst>
           </p:cNvPr>
@@ -9269,7 +11325,7 @@
             <a:pPr algn="l">
               <a:defRPr sz="1050" b="1">
                 <a:solidFill>
-                  <a:srgbClr val="FFD43B"/>
+                  <a:srgbClr val="D1CFC9"/>
                 </a:solidFill>
                 <a:latin typeface="Helvetica Neue"/>
                 <a:ea typeface="Helvetica Neue"/>
@@ -9279,7 +11335,7 @@
             <a:r>
               <a:rPr sz="1050" b="1">
                 <a:solidFill>
-                  <a:srgbClr val="FFD43B"/>
+                  <a:srgbClr val="D1CFC9"/>
                 </a:solidFill>
                 <a:latin typeface="Helvetica Neue"/>
                 <a:ea typeface="Helvetica Neue"/>
@@ -9295,7 +11351,7 @@
           <p:cNvPr id="19" name="">
             <a:extLst xmlns:a="http://schemas.openxmlformats.org/drawingml/2006/main">
               <a:ext uri="{FF2B5EF4-FFF2-40B4-BE49-F238E27FC236}">
-                <a16:creationId xmlns:a16="http://schemas.microsoft.com/office/drawing/2014/main" id="{FC64CE8E-3329-48CE-AFE7-1DC5A8FDDD6F}"/>
+                <a16:creationId xmlns:a16="http://schemas.microsoft.com/office/drawing/2014/main" id="{EF1C1C18-1034-4937-96CB-56480827AC92}"/>
               </a:ext>
             </a:extLst>
           </p:cNvPr>
@@ -9352,7 +11408,7 @@
           <p:cNvPr id="20" name="">
             <a:extLst xmlns:a="http://schemas.openxmlformats.org/drawingml/2006/main">
               <a:ext uri="{FF2B5EF4-FFF2-40B4-BE49-F238E27FC236}">
-                <a16:creationId xmlns:a16="http://schemas.microsoft.com/office/drawing/2014/main" id="{AF424C2B-6F5D-42D6-9F57-E5704D33D9BA}"/>
+                <a16:creationId xmlns:a16="http://schemas.microsoft.com/office/drawing/2014/main" id="{37613FEC-CC3A-43D3-A5C8-6A76CC71E578}"/>
               </a:ext>
             </a:extLst>
           </p:cNvPr>
@@ -9383,7 +11439,7 @@
             <a:pPr algn="l">
               <a:defRPr sz="1125" b="0">
                 <a:solidFill>
-                  <a:srgbClr val="BFE6FF"/>
+                  <a:srgbClr val="BDC4D4"/>
                 </a:solidFill>
                 <a:latin typeface="Helvetica Neue"/>
                 <a:ea typeface="Helvetica Neue"/>
@@ -9393,7 +11449,7 @@
             <a:r>
               <a:rPr sz="1125" b="0">
                 <a:solidFill>
-                  <a:srgbClr val="BFE6FF"/>
+                  <a:srgbClr val="BDC4D4"/>
                 </a:solidFill>
                 <a:latin typeface="Helvetica Neue"/>
                 <a:ea typeface="Helvetica Neue"/>
@@ -9409,7 +11465,7 @@
           <p:cNvPr id="21" name="">
             <a:extLst xmlns:a="http://schemas.openxmlformats.org/drawingml/2006/main">
               <a:ext uri="{FF2B5EF4-FFF2-40B4-BE49-F238E27FC236}">
-                <a16:creationId xmlns:a16="http://schemas.microsoft.com/office/drawing/2014/main" id="{6B33AA7D-DCC3-4060-812D-C5B12C87A459}"/>
+                <a16:creationId xmlns:a16="http://schemas.microsoft.com/office/drawing/2014/main" id="{22574AC3-1334-42DB-916D-7CFFB994040F}"/>
               </a:ext>
             </a:extLst>
           </p:cNvPr>
@@ -9427,7 +11483,7 @@
             <a:avLst/>
           </a:prstGeom>
           <a:solidFill xmlns:a="http://schemas.openxmlformats.org/drawingml/2006/main">
-            <a:srgbClr val="D8E5F2"/>
+            <a:srgbClr val="BDC4D4"/>
           </a:solidFill>
           <a:ln xmlns:a="http://schemas.openxmlformats.org/drawingml/2006/main" w="0">
             <a:noFill/>
@@ -9439,7 +11495,7 @@
           <p:cNvPr id="22" name="">
             <a:extLst xmlns:a="http://schemas.openxmlformats.org/drawingml/2006/main">
               <a:ext uri="{FF2B5EF4-FFF2-40B4-BE49-F238E27FC236}">
-                <a16:creationId xmlns:a16="http://schemas.microsoft.com/office/drawing/2014/main" id="{ECB1AC9B-603D-40D7-BCED-0F26108912E5}"/>
+                <a16:creationId xmlns:a16="http://schemas.microsoft.com/office/drawing/2014/main" id="{56CED8C4-27CB-42CA-A2CD-DA24C808F7B2}"/>
               </a:ext>
             </a:extLst>
           </p:cNvPr>
@@ -9470,7 +11526,7 @@
             <a:pPr algn="l">
               <a:defRPr sz="750" b="0">
                 <a:solidFill>
-                  <a:srgbClr val="61718A"/>
+                  <a:srgbClr val="52677D"/>
                 </a:solidFill>
                 <a:latin typeface="Helvetica Neue"/>
                 <a:ea typeface="Helvetica Neue"/>
@@ -9480,7 +11536,7 @@
             <a:r>
               <a:rPr sz="750" b="0">
                 <a:solidFill>
-                  <a:srgbClr val="61718A"/>
+                  <a:srgbClr val="52677D"/>
                 </a:solidFill>
                 <a:latin typeface="Helvetica Neue"/>
                 <a:ea typeface="Helvetica Neue"/>
@@ -9496,7 +11552,7 @@
           <p:cNvPr id="23" name="">
             <a:extLst xmlns:a="http://schemas.openxmlformats.org/drawingml/2006/main">
               <a:ext uri="{FF2B5EF4-FFF2-40B4-BE49-F238E27FC236}">
-                <a16:creationId xmlns:a16="http://schemas.microsoft.com/office/drawing/2014/main" id="{F3DD542E-CFDA-4ACD-81D9-63A43965036E}"/>
+                <a16:creationId xmlns:a16="http://schemas.microsoft.com/office/drawing/2014/main" id="{91DE1002-0F1B-47AF-9A9A-51CA12A21F17}"/>
               </a:ext>
             </a:extLst>
           </p:cNvPr>
@@ -9527,7 +11583,7 @@
             <a:pPr algn="r">
               <a:defRPr sz="825" b="1">
                 <a:solidFill>
-                  <a:srgbClr val="2563EB"/>
+                  <a:srgbClr val="52677D"/>
                 </a:solidFill>
                 <a:latin typeface="Helvetica Neue"/>
                 <a:ea typeface="Helvetica Neue"/>
@@ -9537,7 +11593,7 @@
             <a:r>
               <a:rPr sz="825" b="1">
                 <a:solidFill>
-                  <a:srgbClr val="2563EB"/>
+                  <a:srgbClr val="52677D"/>
                 </a:solidFill>
                 <a:latin typeface="Helvetica Neue"/>
                 <a:ea typeface="Helvetica Neue"/>
@@ -9551,7 +11607,7 @@
     </p:spTree>
     <p:extLst>
       <p:ext uri="{BB962C8B-B14F-4D97-AF65-F5344CB8AC3E}">
-        <p14:creationId xmlns:p14="http://schemas.microsoft.com/office/powerpoint/2010/main" val="1550952556"/>
+        <p14:creationId xmlns:p14="http://schemas.microsoft.com/office/powerpoint/2010/main" val="1795114334"/>
       </p:ext>
     </p:extLst>
   </p:cSld>
@@ -9582,7 +11638,7 @@
           <p:cNvPr id="24" name="">
             <a:extLst xmlns:a="http://schemas.openxmlformats.org/drawingml/2006/main">
               <a:ext uri="{FF2B5EF4-FFF2-40B4-BE49-F238E27FC236}">
-                <a16:creationId xmlns:a16="http://schemas.microsoft.com/office/drawing/2014/main" id="{D4C7AB7E-CDBC-4D7B-9DF8-B6B2F439B464}"/>
+                <a16:creationId xmlns:a16="http://schemas.microsoft.com/office/drawing/2014/main" id="{5CF29D3E-BFA6-4587-ADEF-F37332577278}"/>
               </a:ext>
             </a:extLst>
           </p:cNvPr>
@@ -9600,7 +11656,7 @@
             <a:avLst/>
           </a:prstGeom>
           <a:solidFill xmlns:a="http://schemas.openxmlformats.org/drawingml/2006/main">
-            <a:srgbClr val="092454"/>
+            <a:srgbClr val="1C2E4A"/>
           </a:solidFill>
           <a:ln xmlns:a="http://schemas.openxmlformats.org/drawingml/2006/main" w="0">
             <a:noFill/>
@@ -9612,7 +11668,7 @@
           <p:cNvPr id="2" name="">
             <a:extLst xmlns:a="http://schemas.openxmlformats.org/drawingml/2006/main">
               <a:ext uri="{FF2B5EF4-FFF2-40B4-BE49-F238E27FC236}">
-                <a16:creationId xmlns:a16="http://schemas.microsoft.com/office/drawing/2014/main" id="{1427DCDE-0897-499A-9156-C2EAC4FFC941}"/>
+                <a16:creationId xmlns:a16="http://schemas.microsoft.com/office/drawing/2014/main" id="{18966D65-1DE3-43EF-8BA4-090A0C1C797F}"/>
               </a:ext>
             </a:extLst>
           </p:cNvPr>
@@ -9643,7 +11699,7 @@
             <a:pPr algn="l">
               <a:defRPr sz="1125" b="1">
                 <a:solidFill>
-                  <a:srgbClr val="2563EB"/>
+                  <a:srgbClr val="52677D"/>
                 </a:solidFill>
                 <a:latin typeface="Helvetica Neue"/>
                 <a:ea typeface="Helvetica Neue"/>
@@ -9653,7 +11709,7 @@
             <a:r>
               <a:rPr sz="1125" b="1">
                 <a:solidFill>
-                  <a:srgbClr val="2563EB"/>
+                  <a:srgbClr val="52677D"/>
                 </a:solidFill>
                 <a:latin typeface="Helvetica Neue"/>
                 <a:ea typeface="Helvetica Neue"/>
@@ -9669,7 +11725,7 @@
           <p:cNvPr id="3" name="">
             <a:extLst xmlns:a="http://schemas.openxmlformats.org/drawingml/2006/main">
               <a:ext uri="{FF2B5EF4-FFF2-40B4-BE49-F238E27FC236}">
-                <a16:creationId xmlns:a16="http://schemas.microsoft.com/office/drawing/2014/main" id="{286CB3D8-890C-4648-9DC8-59E4716224DC}"/>
+                <a16:creationId xmlns:a16="http://schemas.microsoft.com/office/drawing/2014/main" id="{CAADF5A4-6CD1-4847-8008-CDFDE375D1B1}"/>
               </a:ext>
             </a:extLst>
           </p:cNvPr>
@@ -9689,7 +11745,7 @@
             </a:avLst>
           </a:prstGeom>
           <a:solidFill xmlns:a="http://schemas.openxmlformats.org/drawingml/2006/main">
-            <a:srgbClr val="FFD43B"/>
+            <a:srgbClr val="D1CFC9"/>
           </a:solidFill>
           <a:ln xmlns:a="http://schemas.openxmlformats.org/drawingml/2006/main" w="0">
             <a:noFill/>
@@ -9701,7 +11757,7 @@
           <p:cNvPr id="4" name="">
             <a:extLst xmlns:a="http://schemas.openxmlformats.org/drawingml/2006/main">
               <a:ext uri="{FF2B5EF4-FFF2-40B4-BE49-F238E27FC236}">
-                <a16:creationId xmlns:a16="http://schemas.microsoft.com/office/drawing/2014/main" id="{2F939B0F-6F12-4ED2-ADAE-90E81E8AD814}"/>
+                <a16:creationId xmlns:a16="http://schemas.microsoft.com/office/drawing/2014/main" id="{31A6740C-D5E6-44F5-ADBF-44467B203C0A}"/>
               </a:ext>
             </a:extLst>
           </p:cNvPr>
@@ -9732,7 +11788,7 @@
             <a:pPr algn="ctr">
               <a:defRPr sz="1275" b="1">
                 <a:solidFill>
-                  <a:srgbClr val="092454"/>
+                  <a:srgbClr val="1C2E4A"/>
                 </a:solidFill>
                 <a:latin typeface="Helvetica Neue"/>
                 <a:ea typeface="Helvetica Neue"/>
@@ -9742,7 +11798,7 @@
             <a:r>
               <a:rPr sz="1275" b="1">
                 <a:solidFill>
-                  <a:srgbClr val="092454"/>
+                  <a:srgbClr val="1C2E4A"/>
                 </a:solidFill>
                 <a:latin typeface="Helvetica Neue"/>
                 <a:ea typeface="Helvetica Neue"/>
@@ -9758,7 +11814,7 @@
           <p:cNvPr id="5" name="">
             <a:extLst xmlns:a="http://schemas.openxmlformats.org/drawingml/2006/main">
               <a:ext uri="{FF2B5EF4-FFF2-40B4-BE49-F238E27FC236}">
-                <a16:creationId xmlns:a16="http://schemas.microsoft.com/office/drawing/2014/main" id="{A41F8EA0-1E00-40A6-9F86-4FA503BC6C66}"/>
+                <a16:creationId xmlns:a16="http://schemas.microsoft.com/office/drawing/2014/main" id="{D0810AA4-79F3-4D42-973E-0B87ABD20A9A}"/>
               </a:ext>
             </a:extLst>
           </p:cNvPr>
@@ -9789,7 +11845,7 @@
             <a:pPr algn="l">
               <a:defRPr sz="2550" b="1">
                 <a:solidFill>
-                  <a:srgbClr val="092454"/>
+                  <a:srgbClr val="1C2E4A"/>
                 </a:solidFill>
                 <a:latin typeface="Helvetica Neue"/>
                 <a:ea typeface="Helvetica Neue"/>
@@ -9799,7 +11855,7 @@
             <a:r>
               <a:rPr sz="2550" b="1">
                 <a:solidFill>
-                  <a:srgbClr val="092454"/>
+                  <a:srgbClr val="1C2E4A"/>
                 </a:solidFill>
                 <a:latin typeface="Helvetica Neue"/>
                 <a:ea typeface="Helvetica Neue"/>
@@ -9815,7 +11871,7 @@
           <p:cNvPr id="6" name="">
             <a:extLst xmlns:a="http://schemas.openxmlformats.org/drawingml/2006/main">
               <a:ext uri="{FF2B5EF4-FFF2-40B4-BE49-F238E27FC236}">
-                <a16:creationId xmlns:a16="http://schemas.microsoft.com/office/drawing/2014/main" id="{A4F6481E-6996-47AF-A446-4D710C681BD1}"/>
+                <a16:creationId xmlns:a16="http://schemas.microsoft.com/office/drawing/2014/main" id="{5B583D1F-BA4C-4B76-BFC4-1BD9C5D4CDCB}"/>
               </a:ext>
             </a:extLst>
           </p:cNvPr>
@@ -9835,7 +11891,7 @@
             </a:avLst>
           </a:prstGeom>
           <a:solidFill xmlns:a="http://schemas.openxmlformats.org/drawingml/2006/main">
-            <a:srgbClr val="EEF7FF"/>
+            <a:srgbClr val="D1CFC9"/>
           </a:solidFill>
           <a:ln xmlns:a="http://schemas.openxmlformats.org/drawingml/2006/main" w="0">
             <a:noFill/>
@@ -9847,7 +11903,7 @@
           <p:cNvPr id="7" name="">
             <a:extLst xmlns:a="http://schemas.openxmlformats.org/drawingml/2006/main">
               <a:ext uri="{FF2B5EF4-FFF2-40B4-BE49-F238E27FC236}">
-                <a16:creationId xmlns:a16="http://schemas.microsoft.com/office/drawing/2014/main" id="{F5D66694-3D6A-4AEA-B815-C442B5565A8B}"/>
+                <a16:creationId xmlns:a16="http://schemas.microsoft.com/office/drawing/2014/main" id="{9FF91DD7-3E8E-4234-9AE4-EF0B4B3ADABA}"/>
               </a:ext>
             </a:extLst>
           </p:cNvPr>
@@ -9878,7 +11934,7 @@
             <a:pPr algn="ctr">
               <a:defRPr sz="1350" b="1">
                 <a:solidFill>
-                  <a:srgbClr val="2563EB"/>
+                  <a:srgbClr val="52677D"/>
                 </a:solidFill>
                 <a:latin typeface="Helvetica Neue"/>
                 <a:ea typeface="Helvetica Neue"/>
@@ -9888,7 +11944,7 @@
             <a:r>
               <a:rPr sz="1350" b="1">
                 <a:solidFill>
-                  <a:srgbClr val="2563EB"/>
+                  <a:srgbClr val="52677D"/>
                 </a:solidFill>
                 <a:latin typeface="Helvetica Neue"/>
                 <a:ea typeface="Helvetica Neue"/>
@@ -9904,7 +11960,7 @@
           <p:cNvPr id="8" name="">
             <a:extLst xmlns:a="http://schemas.openxmlformats.org/drawingml/2006/main">
               <a:ext uri="{FF2B5EF4-FFF2-40B4-BE49-F238E27FC236}">
-                <a16:creationId xmlns:a16="http://schemas.microsoft.com/office/drawing/2014/main" id="{52C20810-677A-49ED-A5DC-77399F2301B6}"/>
+                <a16:creationId xmlns:a16="http://schemas.microsoft.com/office/drawing/2014/main" id="{B51DA8B4-2C02-4FD7-A65A-CD3D7E6B7088}"/>
               </a:ext>
             </a:extLst>
           </p:cNvPr>
@@ -9935,7 +11991,7 @@
             <a:pPr algn="l">
               <a:defRPr sz="1575" b="0">
                 <a:solidFill>
-                  <a:srgbClr val="10213D"/>
+                  <a:srgbClr val="0F1A2B"/>
                 </a:solidFill>
                 <a:latin typeface="Helvetica Neue"/>
                 <a:ea typeface="Helvetica Neue"/>
@@ -9945,7 +12001,7 @@
             <a:r>
               <a:rPr sz="1575" b="0">
                 <a:solidFill>
-                  <a:srgbClr val="10213D"/>
+                  <a:srgbClr val="0F1A2B"/>
                 </a:solidFill>
                 <a:latin typeface="Helvetica Neue"/>
                 <a:ea typeface="Helvetica Neue"/>
@@ -9961,7 +12017,7 @@
           <p:cNvPr id="9" name="">
             <a:extLst xmlns:a="http://schemas.openxmlformats.org/drawingml/2006/main">
               <a:ext uri="{FF2B5EF4-FFF2-40B4-BE49-F238E27FC236}">
-                <a16:creationId xmlns:a16="http://schemas.microsoft.com/office/drawing/2014/main" id="{F0562AB8-DADF-4FD6-B1B3-0173ED69F59A}"/>
+                <a16:creationId xmlns:a16="http://schemas.microsoft.com/office/drawing/2014/main" id="{8E2AD451-6B0C-42E0-98BB-3032D33B9901}"/>
               </a:ext>
             </a:extLst>
           </p:cNvPr>
@@ -9981,7 +12037,7 @@
             </a:avLst>
           </a:prstGeom>
           <a:solidFill xmlns:a="http://schemas.openxmlformats.org/drawingml/2006/main">
-            <a:srgbClr val="EEF7FF"/>
+            <a:srgbClr val="D1CFC9"/>
           </a:solidFill>
           <a:ln xmlns:a="http://schemas.openxmlformats.org/drawingml/2006/main" w="0">
             <a:noFill/>
@@ -9993,7 +12049,7 @@
           <p:cNvPr id="10" name="">
             <a:extLst xmlns:a="http://schemas.openxmlformats.org/drawingml/2006/main">
               <a:ext uri="{FF2B5EF4-FFF2-40B4-BE49-F238E27FC236}">
-                <a16:creationId xmlns:a16="http://schemas.microsoft.com/office/drawing/2014/main" id="{BD09B1E9-2B7A-4E55-AEB0-6EA208F4F91D}"/>
+                <a16:creationId xmlns:a16="http://schemas.microsoft.com/office/drawing/2014/main" id="{F9D18172-3E2C-4C42-B3E0-237A29A5E8C6}"/>
               </a:ext>
             </a:extLst>
           </p:cNvPr>
@@ -10024,7 +12080,7 @@
             <a:pPr algn="ctr">
               <a:defRPr sz="1350" b="1">
                 <a:solidFill>
-                  <a:srgbClr val="2563EB"/>
+                  <a:srgbClr val="52677D"/>
                 </a:solidFill>
                 <a:latin typeface="Helvetica Neue"/>
                 <a:ea typeface="Helvetica Neue"/>
@@ -10034,7 +12090,7 @@
             <a:r>
               <a:rPr sz="1350" b="1">
                 <a:solidFill>
-                  <a:srgbClr val="2563EB"/>
+                  <a:srgbClr val="52677D"/>
                 </a:solidFill>
                 <a:latin typeface="Helvetica Neue"/>
                 <a:ea typeface="Helvetica Neue"/>
@@ -10050,7 +12106,7 @@
           <p:cNvPr id="11" name="">
             <a:extLst xmlns:a="http://schemas.openxmlformats.org/drawingml/2006/main">
               <a:ext uri="{FF2B5EF4-FFF2-40B4-BE49-F238E27FC236}">
-                <a16:creationId xmlns:a16="http://schemas.microsoft.com/office/drawing/2014/main" id="{0C2D211A-FDDC-4857-8172-58E0B87273E5}"/>
+                <a16:creationId xmlns:a16="http://schemas.microsoft.com/office/drawing/2014/main" id="{3D116973-D81D-49F6-A0B5-A75DD711AEBC}"/>
               </a:ext>
             </a:extLst>
           </p:cNvPr>
@@ -10081,7 +12137,7 @@
             <a:pPr algn="l">
               <a:defRPr sz="1575" b="0">
                 <a:solidFill>
-                  <a:srgbClr val="10213D"/>
+                  <a:srgbClr val="0F1A2B"/>
                 </a:solidFill>
                 <a:latin typeface="Helvetica Neue"/>
                 <a:ea typeface="Helvetica Neue"/>
@@ -10091,7 +12147,7 @@
             <a:r>
               <a:rPr sz="1575" b="0">
                 <a:solidFill>
-                  <a:srgbClr val="10213D"/>
+                  <a:srgbClr val="0F1A2B"/>
                 </a:solidFill>
                 <a:latin typeface="Helvetica Neue"/>
                 <a:ea typeface="Helvetica Neue"/>
@@ -10107,7 +12163,7 @@
           <p:cNvPr id="12" name="">
             <a:extLst xmlns:a="http://schemas.openxmlformats.org/drawingml/2006/main">
               <a:ext uri="{FF2B5EF4-FFF2-40B4-BE49-F238E27FC236}">
-                <a16:creationId xmlns:a16="http://schemas.microsoft.com/office/drawing/2014/main" id="{86EAF072-4A32-4365-BED0-68F0E7CC831B}"/>
+                <a16:creationId xmlns:a16="http://schemas.microsoft.com/office/drawing/2014/main" id="{9A7E6B2E-21B8-4EEF-B4A0-2DD561105A31}"/>
               </a:ext>
             </a:extLst>
           </p:cNvPr>
@@ -10127,7 +12183,7 @@
             </a:avLst>
           </a:prstGeom>
           <a:solidFill xmlns:a="http://schemas.openxmlformats.org/drawingml/2006/main">
-            <a:srgbClr val="EEF7FF"/>
+            <a:srgbClr val="D1CFC9"/>
           </a:solidFill>
           <a:ln xmlns:a="http://schemas.openxmlformats.org/drawingml/2006/main" w="0">
             <a:noFill/>
@@ -10139,7 +12195,7 @@
           <p:cNvPr id="13" name="">
             <a:extLst xmlns:a="http://schemas.openxmlformats.org/drawingml/2006/main">
               <a:ext uri="{FF2B5EF4-FFF2-40B4-BE49-F238E27FC236}">
-                <a16:creationId xmlns:a16="http://schemas.microsoft.com/office/drawing/2014/main" id="{EC6DCB12-E748-4E23-A081-31863984A456}"/>
+                <a16:creationId xmlns:a16="http://schemas.microsoft.com/office/drawing/2014/main" id="{667A2273-8C8B-46FC-B22C-D474D75ED1F1}"/>
               </a:ext>
             </a:extLst>
           </p:cNvPr>
@@ -10170,7 +12226,7 @@
             <a:pPr algn="ctr">
               <a:defRPr sz="1350" b="1">
                 <a:solidFill>
-                  <a:srgbClr val="2563EB"/>
+                  <a:srgbClr val="52677D"/>
                 </a:solidFill>
                 <a:latin typeface="Helvetica Neue"/>
                 <a:ea typeface="Helvetica Neue"/>
@@ -10180,7 +12236,7 @@
             <a:r>
               <a:rPr sz="1350" b="1">
                 <a:solidFill>
-                  <a:srgbClr val="2563EB"/>
+                  <a:srgbClr val="52677D"/>
                 </a:solidFill>
                 <a:latin typeface="Helvetica Neue"/>
                 <a:ea typeface="Helvetica Neue"/>
@@ -10196,7 +12252,7 @@
           <p:cNvPr id="14" name="">
             <a:extLst xmlns:a="http://schemas.openxmlformats.org/drawingml/2006/main">
               <a:ext uri="{FF2B5EF4-FFF2-40B4-BE49-F238E27FC236}">
-                <a16:creationId xmlns:a16="http://schemas.microsoft.com/office/drawing/2014/main" id="{523F4345-928F-49FA-A308-6450F8F90705}"/>
+                <a16:creationId xmlns:a16="http://schemas.microsoft.com/office/drawing/2014/main" id="{46956641-23A7-4FE5-ABBE-1FAE51E96CE9}"/>
               </a:ext>
             </a:extLst>
           </p:cNvPr>
@@ -10227,7 +12283,7 @@
             <a:pPr algn="l">
               <a:defRPr sz="1575" b="0">
                 <a:solidFill>
-                  <a:srgbClr val="10213D"/>
+                  <a:srgbClr val="0F1A2B"/>
                 </a:solidFill>
                 <a:latin typeface="Helvetica Neue"/>
                 <a:ea typeface="Helvetica Neue"/>
@@ -10237,7 +12293,7 @@
             <a:r>
               <a:rPr sz="1575" b="0">
                 <a:solidFill>
-                  <a:srgbClr val="10213D"/>
+                  <a:srgbClr val="0F1A2B"/>
                 </a:solidFill>
                 <a:latin typeface="Helvetica Neue"/>
                 <a:ea typeface="Helvetica Neue"/>
@@ -10253,7 +12309,7 @@
           <p:cNvPr id="15" name="">
             <a:extLst xmlns:a="http://schemas.openxmlformats.org/drawingml/2006/main">
               <a:ext uri="{FF2B5EF4-FFF2-40B4-BE49-F238E27FC236}">
-                <a16:creationId xmlns:a16="http://schemas.microsoft.com/office/drawing/2014/main" id="{696EB675-2C30-4AF1-8845-C3D0CAD2869E}"/>
+                <a16:creationId xmlns:a16="http://schemas.microsoft.com/office/drawing/2014/main" id="{7176F898-CE9C-49FF-963A-2F48BBF619C3}"/>
               </a:ext>
             </a:extLst>
           </p:cNvPr>
@@ -10273,7 +12329,7 @@
             </a:avLst>
           </a:prstGeom>
           <a:solidFill xmlns:a="http://schemas.openxmlformats.org/drawingml/2006/main">
-            <a:srgbClr val="EEF7FF"/>
+            <a:srgbClr val="D1CFC9"/>
           </a:solidFill>
           <a:ln xmlns:a="http://schemas.openxmlformats.org/drawingml/2006/main" w="0">
             <a:noFill/>
@@ -10285,7 +12341,7 @@
           <p:cNvPr id="16" name="">
             <a:extLst xmlns:a="http://schemas.openxmlformats.org/drawingml/2006/main">
               <a:ext uri="{FF2B5EF4-FFF2-40B4-BE49-F238E27FC236}">
-                <a16:creationId xmlns:a16="http://schemas.microsoft.com/office/drawing/2014/main" id="{5FFD9048-0EC0-4DA8-AC88-F47BD04BF72A}"/>
+                <a16:creationId xmlns:a16="http://schemas.microsoft.com/office/drawing/2014/main" id="{DEA1EB4E-F74D-481D-9D46-64534B08288A}"/>
               </a:ext>
             </a:extLst>
           </p:cNvPr>
@@ -10316,7 +12372,7 @@
             <a:pPr algn="l">
               <a:defRPr sz="1125" b="0">
                 <a:solidFill>
-                  <a:srgbClr val="092454"/>
+                  <a:srgbClr val="1C2E4A"/>
                 </a:solidFill>
                 <a:latin typeface="Helvetica Neue"/>
                 <a:ea typeface="Helvetica Neue"/>
@@ -10326,7 +12382,7 @@
             <a:r>
               <a:rPr sz="1125" b="0">
                 <a:solidFill>
-                  <a:srgbClr val="092454"/>
+                  <a:srgbClr val="1C2E4A"/>
                 </a:solidFill>
                 <a:latin typeface="Helvetica Neue"/>
                 <a:ea typeface="Helvetica Neue"/>
@@ -10342,7 +12398,7 @@
           <p:cNvPr id="17" name="">
             <a:extLst xmlns:a="http://schemas.openxmlformats.org/drawingml/2006/main">
               <a:ext uri="{FF2B5EF4-FFF2-40B4-BE49-F238E27FC236}">
-                <a16:creationId xmlns:a16="http://schemas.microsoft.com/office/drawing/2014/main" id="{7D17A145-DEE4-4E6C-A8A4-B13F4B8421EF}"/>
+                <a16:creationId xmlns:a16="http://schemas.microsoft.com/office/drawing/2014/main" id="{F4F79E08-3523-49E3-8E85-EC66EEA5C453}"/>
               </a:ext>
             </a:extLst>
           </p:cNvPr>
@@ -10362,7 +12418,7 @@
             </a:avLst>
           </a:prstGeom>
           <a:solidFill xmlns:a="http://schemas.openxmlformats.org/drawingml/2006/main">
-            <a:srgbClr val="092454"/>
+            <a:srgbClr val="1C2E4A"/>
           </a:solidFill>
           <a:ln xmlns:a="http://schemas.openxmlformats.org/drawingml/2006/main" w="0">
             <a:noFill/>
@@ -10374,7 +12430,7 @@
           <p:cNvPr id="18" name="">
             <a:extLst xmlns:a="http://schemas.openxmlformats.org/drawingml/2006/main">
               <a:ext uri="{FF2B5EF4-FFF2-40B4-BE49-F238E27FC236}">
-                <a16:creationId xmlns:a16="http://schemas.microsoft.com/office/drawing/2014/main" id="{8220AE9D-43FE-43DD-9075-28C7ED5E1C83}"/>
+                <a16:creationId xmlns:a16="http://schemas.microsoft.com/office/drawing/2014/main" id="{0C18C7D5-DD9C-48BB-B05A-6845D89243DE}"/>
               </a:ext>
             </a:extLst>
           </p:cNvPr>
@@ -10405,7 +12461,7 @@
             <a:pPr algn="l">
               <a:defRPr sz="1050" b="1">
                 <a:solidFill>
-                  <a:srgbClr val="FFD43B"/>
+                  <a:srgbClr val="D1CFC9"/>
                 </a:solidFill>
                 <a:latin typeface="Helvetica Neue"/>
                 <a:ea typeface="Helvetica Neue"/>
@@ -10415,7 +12471,7 @@
             <a:r>
               <a:rPr sz="1050" b="1">
                 <a:solidFill>
-                  <a:srgbClr val="FFD43B"/>
+                  <a:srgbClr val="D1CFC9"/>
                 </a:solidFill>
                 <a:latin typeface="Helvetica Neue"/>
                 <a:ea typeface="Helvetica Neue"/>
@@ -10431,7 +12487,7 @@
           <p:cNvPr id="19" name="">
             <a:extLst xmlns:a="http://schemas.openxmlformats.org/drawingml/2006/main">
               <a:ext uri="{FF2B5EF4-FFF2-40B4-BE49-F238E27FC236}">
-                <a16:creationId xmlns:a16="http://schemas.microsoft.com/office/drawing/2014/main" id="{DB40AD90-5036-4D2E-994B-C9D52550B07D}"/>
+                <a16:creationId xmlns:a16="http://schemas.microsoft.com/office/drawing/2014/main" id="{2F3EC2F0-A560-45FD-B449-9F13070DA40E}"/>
               </a:ext>
             </a:extLst>
           </p:cNvPr>
@@ -10488,7 +12544,7 @@
           <p:cNvPr id="20" name="">
             <a:extLst xmlns:a="http://schemas.openxmlformats.org/drawingml/2006/main">
               <a:ext uri="{FF2B5EF4-FFF2-40B4-BE49-F238E27FC236}">
-                <a16:creationId xmlns:a16="http://schemas.microsoft.com/office/drawing/2014/main" id="{E88E0468-AC86-4AFD-B419-CF687EF54024}"/>
+                <a16:creationId xmlns:a16="http://schemas.microsoft.com/office/drawing/2014/main" id="{D03D1E9C-B8B3-4077-B74F-EC1454432F02}"/>
               </a:ext>
             </a:extLst>
           </p:cNvPr>
@@ -10519,7 +12575,7 @@
             <a:pPr algn="l">
               <a:defRPr sz="1125" b="0">
                 <a:solidFill>
-                  <a:srgbClr val="BFE6FF"/>
+                  <a:srgbClr val="BDC4D4"/>
                 </a:solidFill>
                 <a:latin typeface="Helvetica Neue"/>
                 <a:ea typeface="Helvetica Neue"/>
@@ -10529,7 +12585,7 @@
             <a:r>
               <a:rPr sz="1125" b="0">
                 <a:solidFill>
-                  <a:srgbClr val="BFE6FF"/>
+                  <a:srgbClr val="BDC4D4"/>
                 </a:solidFill>
                 <a:latin typeface="Helvetica Neue"/>
                 <a:ea typeface="Helvetica Neue"/>
@@ -10545,7 +12601,7 @@
           <p:cNvPr id="21" name="">
             <a:extLst xmlns:a="http://schemas.openxmlformats.org/drawingml/2006/main">
               <a:ext uri="{FF2B5EF4-FFF2-40B4-BE49-F238E27FC236}">
-                <a16:creationId xmlns:a16="http://schemas.microsoft.com/office/drawing/2014/main" id="{583FE989-6625-4C53-AA92-9EAA555AC500}"/>
+                <a16:creationId xmlns:a16="http://schemas.microsoft.com/office/drawing/2014/main" id="{45B89753-00D5-4CC8-A8D0-F25A0E94AEB2}"/>
               </a:ext>
             </a:extLst>
           </p:cNvPr>
@@ -10563,7 +12619,7 @@
             <a:avLst/>
           </a:prstGeom>
           <a:solidFill xmlns:a="http://schemas.openxmlformats.org/drawingml/2006/main">
-            <a:srgbClr val="D8E5F2"/>
+            <a:srgbClr val="BDC4D4"/>
           </a:solidFill>
           <a:ln xmlns:a="http://schemas.openxmlformats.org/drawingml/2006/main" w="0">
             <a:noFill/>
@@ -10575,7 +12631,7 @@
           <p:cNvPr id="22" name="">
             <a:extLst xmlns:a="http://schemas.openxmlformats.org/drawingml/2006/main">
               <a:ext uri="{FF2B5EF4-FFF2-40B4-BE49-F238E27FC236}">
-                <a16:creationId xmlns:a16="http://schemas.microsoft.com/office/drawing/2014/main" id="{27663958-975A-49DD-98C3-74A8B2133375}"/>
+                <a16:creationId xmlns:a16="http://schemas.microsoft.com/office/drawing/2014/main" id="{31E3D92C-FDF4-4064-8F0E-D58ED1BCA464}"/>
               </a:ext>
             </a:extLst>
           </p:cNvPr>
@@ -10606,7 +12662,7 @@
             <a:pPr algn="l">
               <a:defRPr sz="750" b="0">
                 <a:solidFill>
-                  <a:srgbClr val="61718A"/>
+                  <a:srgbClr val="52677D"/>
                 </a:solidFill>
                 <a:latin typeface="Helvetica Neue"/>
                 <a:ea typeface="Helvetica Neue"/>
@@ -10616,7 +12672,7 @@
             <a:r>
               <a:rPr sz="750" b="0">
                 <a:solidFill>
-                  <a:srgbClr val="61718A"/>
+                  <a:srgbClr val="52677D"/>
                 </a:solidFill>
                 <a:latin typeface="Helvetica Neue"/>
                 <a:ea typeface="Helvetica Neue"/>
@@ -10632,7 +12688,7 @@
           <p:cNvPr id="23" name="">
             <a:extLst xmlns:a="http://schemas.openxmlformats.org/drawingml/2006/main">
               <a:ext uri="{FF2B5EF4-FFF2-40B4-BE49-F238E27FC236}">
-                <a16:creationId xmlns:a16="http://schemas.microsoft.com/office/drawing/2014/main" id="{5F0A5E90-0C79-4813-9943-68E0E714F72B}"/>
+                <a16:creationId xmlns:a16="http://schemas.microsoft.com/office/drawing/2014/main" id="{45457AC5-9114-4B3E-B0B1-98F1C215DF80}"/>
               </a:ext>
             </a:extLst>
           </p:cNvPr>
@@ -10663,7 +12719,7 @@
             <a:pPr algn="r">
               <a:defRPr sz="825" b="1">
                 <a:solidFill>
-                  <a:srgbClr val="2563EB"/>
+                  <a:srgbClr val="52677D"/>
                 </a:solidFill>
                 <a:latin typeface="Helvetica Neue"/>
                 <a:ea typeface="Helvetica Neue"/>
@@ -10673,7 +12729,7 @@
             <a:r>
               <a:rPr sz="825" b="1">
                 <a:solidFill>
-                  <a:srgbClr val="2563EB"/>
+                  <a:srgbClr val="52677D"/>
                 </a:solidFill>
                 <a:latin typeface="Helvetica Neue"/>
                 <a:ea typeface="Helvetica Neue"/>
@@ -10687,7 +12743,7 @@
     </p:spTree>
     <p:extLst>
       <p:ext uri="{BB962C8B-B14F-4D97-AF65-F5344CB8AC3E}">
-        <p14:creationId xmlns:p14="http://schemas.microsoft.com/office/powerpoint/2010/main" val="1782824276"/>
+        <p14:creationId xmlns:p14="http://schemas.microsoft.com/office/powerpoint/2010/main" val="1254972455"/>
       </p:ext>
     </p:extLst>
   </p:cSld>
@@ -10718,7 +12774,7 @@
           <p:cNvPr id="24" name="">
             <a:extLst xmlns:a="http://schemas.openxmlformats.org/drawingml/2006/main">
               <a:ext uri="{FF2B5EF4-FFF2-40B4-BE49-F238E27FC236}">
-                <a16:creationId xmlns:a16="http://schemas.microsoft.com/office/drawing/2014/main" id="{C651D810-9E29-49FB-A568-A02ED0893DF1}"/>
+                <a16:creationId xmlns:a16="http://schemas.microsoft.com/office/drawing/2014/main" id="{56118C00-0F2A-46E3-9656-8698EDDB81A9}"/>
               </a:ext>
             </a:extLst>
           </p:cNvPr>
@@ -10736,7 +12792,7 @@
             <a:avLst/>
           </a:prstGeom>
           <a:solidFill xmlns:a="http://schemas.openxmlformats.org/drawingml/2006/main">
-            <a:srgbClr val="00A7A0"/>
+            <a:srgbClr val="1C2E4A"/>
           </a:solidFill>
           <a:ln xmlns:a="http://schemas.openxmlformats.org/drawingml/2006/main" w="0">
             <a:noFill/>
@@ -10748,7 +12804,7 @@
           <p:cNvPr id="2" name="">
             <a:extLst xmlns:a="http://schemas.openxmlformats.org/drawingml/2006/main">
               <a:ext uri="{FF2B5EF4-FFF2-40B4-BE49-F238E27FC236}">
-                <a16:creationId xmlns:a16="http://schemas.microsoft.com/office/drawing/2014/main" id="{F978B3CE-B7BC-4434-948D-AF3A636AABFB}"/>
+                <a16:creationId xmlns:a16="http://schemas.microsoft.com/office/drawing/2014/main" id="{B5F8F998-1E17-4546-8FAD-840E8E6EEF5B}"/>
               </a:ext>
             </a:extLst>
           </p:cNvPr>
@@ -10779,7 +12835,7 @@
             <a:pPr algn="l">
               <a:defRPr sz="1125" b="1">
                 <a:solidFill>
-                  <a:srgbClr val="2563EB"/>
+                  <a:srgbClr val="52677D"/>
                 </a:solidFill>
                 <a:latin typeface="Helvetica Neue"/>
                 <a:ea typeface="Helvetica Neue"/>
@@ -10789,7 +12845,7 @@
             <a:r>
               <a:rPr sz="1125" b="1">
                 <a:solidFill>
-                  <a:srgbClr val="2563EB"/>
+                  <a:srgbClr val="52677D"/>
                 </a:solidFill>
                 <a:latin typeface="Helvetica Neue"/>
                 <a:ea typeface="Helvetica Neue"/>
@@ -10805,7 +12861,7 @@
           <p:cNvPr id="3" name="">
             <a:extLst xmlns:a="http://schemas.openxmlformats.org/drawingml/2006/main">
               <a:ext uri="{FF2B5EF4-FFF2-40B4-BE49-F238E27FC236}">
-                <a16:creationId xmlns:a16="http://schemas.microsoft.com/office/drawing/2014/main" id="{1666A303-FC1E-4C08-A6CD-C6A6090CEB3A}"/>
+                <a16:creationId xmlns:a16="http://schemas.microsoft.com/office/drawing/2014/main" id="{A4AE2AED-4256-4DBE-8EEF-09FB7620D26D}"/>
               </a:ext>
             </a:extLst>
           </p:cNvPr>
@@ -10825,7 +12881,7 @@
             </a:avLst>
           </a:prstGeom>
           <a:solidFill xmlns:a="http://schemas.openxmlformats.org/drawingml/2006/main">
-            <a:srgbClr val="FFD43B"/>
+            <a:srgbClr val="D1CFC9"/>
           </a:solidFill>
           <a:ln xmlns:a="http://schemas.openxmlformats.org/drawingml/2006/main" w="0">
             <a:noFill/>
@@ -10837,7 +12893,7 @@
           <p:cNvPr id="4" name="">
             <a:extLst xmlns:a="http://schemas.openxmlformats.org/drawingml/2006/main">
               <a:ext uri="{FF2B5EF4-FFF2-40B4-BE49-F238E27FC236}">
-                <a16:creationId xmlns:a16="http://schemas.microsoft.com/office/drawing/2014/main" id="{70424219-CDEB-4A1C-B021-8CABF72FC580}"/>
+                <a16:creationId xmlns:a16="http://schemas.microsoft.com/office/drawing/2014/main" id="{3A87A19B-211C-4248-B07A-A3F2F2FBD504}"/>
               </a:ext>
             </a:extLst>
           </p:cNvPr>
@@ -10868,7 +12924,7 @@
             <a:pPr algn="ctr">
               <a:defRPr sz="1275" b="1">
                 <a:solidFill>
-                  <a:srgbClr val="092454"/>
+                  <a:srgbClr val="1C2E4A"/>
                 </a:solidFill>
                 <a:latin typeface="Helvetica Neue"/>
                 <a:ea typeface="Helvetica Neue"/>
@@ -10878,7 +12934,7 @@
             <a:r>
               <a:rPr sz="1275" b="1">
                 <a:solidFill>
-                  <a:srgbClr val="092454"/>
+                  <a:srgbClr val="1C2E4A"/>
                 </a:solidFill>
                 <a:latin typeface="Helvetica Neue"/>
                 <a:ea typeface="Helvetica Neue"/>
@@ -10894,7 +12950,7 @@
           <p:cNvPr id="5" name="">
             <a:extLst xmlns:a="http://schemas.openxmlformats.org/drawingml/2006/main">
               <a:ext uri="{FF2B5EF4-FFF2-40B4-BE49-F238E27FC236}">
-                <a16:creationId xmlns:a16="http://schemas.microsoft.com/office/drawing/2014/main" id="{F2BBFE4C-8AA4-4216-A1FC-FD31B7F3473B}"/>
+                <a16:creationId xmlns:a16="http://schemas.microsoft.com/office/drawing/2014/main" id="{C703265E-AC1B-4E10-AD69-FD848AF96AF5}"/>
               </a:ext>
             </a:extLst>
           </p:cNvPr>
@@ -10925,7 +12981,7 @@
             <a:pPr algn="l">
               <a:defRPr sz="2850" b="1">
                 <a:solidFill>
-                  <a:srgbClr val="092454"/>
+                  <a:srgbClr val="1C2E4A"/>
                 </a:solidFill>
                 <a:latin typeface="Helvetica Neue"/>
                 <a:ea typeface="Helvetica Neue"/>
@@ -10935,7 +12991,7 @@
             <a:r>
               <a:rPr sz="2850" b="1">
                 <a:solidFill>
-                  <a:srgbClr val="092454"/>
+                  <a:srgbClr val="1C2E4A"/>
                 </a:solidFill>
                 <a:latin typeface="Helvetica Neue"/>
                 <a:ea typeface="Helvetica Neue"/>
@@ -10951,7 +13007,7 @@
           <p:cNvPr id="6" name="">
             <a:extLst xmlns:a="http://schemas.openxmlformats.org/drawingml/2006/main">
               <a:ext uri="{FF2B5EF4-FFF2-40B4-BE49-F238E27FC236}">
-                <a16:creationId xmlns:a16="http://schemas.microsoft.com/office/drawing/2014/main" id="{1A444D48-D78F-4F0C-A298-041CE0BDF6CF}"/>
+                <a16:creationId xmlns:a16="http://schemas.microsoft.com/office/drawing/2014/main" id="{0F304C32-DC1E-451B-AAC5-305DCCABDE31}"/>
               </a:ext>
             </a:extLst>
           </p:cNvPr>
@@ -10971,7 +13027,7 @@
             </a:avLst>
           </a:prstGeom>
           <a:solidFill xmlns:a="http://schemas.openxmlformats.org/drawingml/2006/main">
-            <a:srgbClr val="EEF7FF"/>
+            <a:srgbClr val="D1CFC9"/>
           </a:solidFill>
           <a:ln xmlns:a="http://schemas.openxmlformats.org/drawingml/2006/main" w="0">
             <a:noFill/>
@@ -10983,7 +13039,7 @@
           <p:cNvPr id="7" name="">
             <a:extLst xmlns:a="http://schemas.openxmlformats.org/drawingml/2006/main">
               <a:ext uri="{FF2B5EF4-FFF2-40B4-BE49-F238E27FC236}">
-                <a16:creationId xmlns:a16="http://schemas.microsoft.com/office/drawing/2014/main" id="{E4901F67-E7E5-4CB2-B1D8-A217E14568E7}"/>
+                <a16:creationId xmlns:a16="http://schemas.microsoft.com/office/drawing/2014/main" id="{BA3FB799-18A1-4546-8A69-FEFFBAD2E520}"/>
               </a:ext>
             </a:extLst>
           </p:cNvPr>
@@ -11014,7 +13070,7 @@
             <a:pPr algn="ctr">
               <a:defRPr sz="1350" b="1">
                 <a:solidFill>
-                  <a:srgbClr val="2563EB"/>
+                  <a:srgbClr val="52677D"/>
                 </a:solidFill>
                 <a:latin typeface="Helvetica Neue"/>
                 <a:ea typeface="Helvetica Neue"/>
@@ -11024,7 +13080,7 @@
             <a:r>
               <a:rPr sz="1350" b="1">
                 <a:solidFill>
-                  <a:srgbClr val="2563EB"/>
+                  <a:srgbClr val="52677D"/>
                 </a:solidFill>
                 <a:latin typeface="Helvetica Neue"/>
                 <a:ea typeface="Helvetica Neue"/>
@@ -11040,7 +13096,7 @@
           <p:cNvPr id="8" name="">
             <a:extLst xmlns:a="http://schemas.openxmlformats.org/drawingml/2006/main">
               <a:ext uri="{FF2B5EF4-FFF2-40B4-BE49-F238E27FC236}">
-                <a16:creationId xmlns:a16="http://schemas.microsoft.com/office/drawing/2014/main" id="{AACA1227-619B-43D3-9143-27176DE54D19}"/>
+                <a16:creationId xmlns:a16="http://schemas.microsoft.com/office/drawing/2014/main" id="{11F8C3AC-B487-4AA3-A421-8A2485850F1E}"/>
               </a:ext>
             </a:extLst>
           </p:cNvPr>
@@ -11071,7 +13127,7 @@
             <a:pPr algn="l">
               <a:defRPr sz="1575" b="0">
                 <a:solidFill>
-                  <a:srgbClr val="10213D"/>
+                  <a:srgbClr val="0F1A2B"/>
                 </a:solidFill>
                 <a:latin typeface="Helvetica Neue"/>
                 <a:ea typeface="Helvetica Neue"/>
@@ -11081,7 +13137,7 @@
             <a:r>
               <a:rPr sz="1575" b="0">
                 <a:solidFill>
-                  <a:srgbClr val="10213D"/>
+                  <a:srgbClr val="0F1A2B"/>
                 </a:solidFill>
                 <a:latin typeface="Helvetica Neue"/>
                 <a:ea typeface="Helvetica Neue"/>
@@ -11097,7 +13153,7 @@
           <p:cNvPr id="9" name="">
             <a:extLst xmlns:a="http://schemas.openxmlformats.org/drawingml/2006/main">
               <a:ext uri="{FF2B5EF4-FFF2-40B4-BE49-F238E27FC236}">
-                <a16:creationId xmlns:a16="http://schemas.microsoft.com/office/drawing/2014/main" id="{C3F1638F-C40A-4EE5-9EBE-424C79B67D3E}"/>
+                <a16:creationId xmlns:a16="http://schemas.microsoft.com/office/drawing/2014/main" id="{0219D2E8-E399-4FBB-BF47-8BE50D662129}"/>
               </a:ext>
             </a:extLst>
           </p:cNvPr>
@@ -11117,7 +13173,7 @@
             </a:avLst>
           </a:prstGeom>
           <a:solidFill xmlns:a="http://schemas.openxmlformats.org/drawingml/2006/main">
-            <a:srgbClr val="EEF7FF"/>
+            <a:srgbClr val="D1CFC9"/>
           </a:solidFill>
           <a:ln xmlns:a="http://schemas.openxmlformats.org/drawingml/2006/main" w="0">
             <a:noFill/>
@@ -11129,7 +13185,7 @@
           <p:cNvPr id="10" name="">
             <a:extLst xmlns:a="http://schemas.openxmlformats.org/drawingml/2006/main">
               <a:ext uri="{FF2B5EF4-FFF2-40B4-BE49-F238E27FC236}">
-                <a16:creationId xmlns:a16="http://schemas.microsoft.com/office/drawing/2014/main" id="{E835417B-1E5C-43FB-816C-19806E8D1C90}"/>
+                <a16:creationId xmlns:a16="http://schemas.microsoft.com/office/drawing/2014/main" id="{087E3C95-3750-4E68-8CEA-7603A8696AFE}"/>
               </a:ext>
             </a:extLst>
           </p:cNvPr>
@@ -11160,7 +13216,7 @@
             <a:pPr algn="ctr">
               <a:defRPr sz="1350" b="1">
                 <a:solidFill>
-                  <a:srgbClr val="2563EB"/>
+                  <a:srgbClr val="52677D"/>
                 </a:solidFill>
                 <a:latin typeface="Helvetica Neue"/>
                 <a:ea typeface="Helvetica Neue"/>
@@ -11170,7 +13226,7 @@
             <a:r>
               <a:rPr sz="1350" b="1">
                 <a:solidFill>
-                  <a:srgbClr val="2563EB"/>
+                  <a:srgbClr val="52677D"/>
                 </a:solidFill>
                 <a:latin typeface="Helvetica Neue"/>
                 <a:ea typeface="Helvetica Neue"/>
@@ -11186,7 +13242,7 @@
           <p:cNvPr id="11" name="">
             <a:extLst xmlns:a="http://schemas.openxmlformats.org/drawingml/2006/main">
               <a:ext uri="{FF2B5EF4-FFF2-40B4-BE49-F238E27FC236}">
-                <a16:creationId xmlns:a16="http://schemas.microsoft.com/office/drawing/2014/main" id="{172872E0-8756-4E9E-B653-5A2E3722544F}"/>
+                <a16:creationId xmlns:a16="http://schemas.microsoft.com/office/drawing/2014/main" id="{31DA8799-74D5-4B55-868E-EAFAAD005DF2}"/>
               </a:ext>
             </a:extLst>
           </p:cNvPr>
@@ -11217,7 +13273,7 @@
             <a:pPr algn="l">
               <a:defRPr sz="1575" b="0">
                 <a:solidFill>
-                  <a:srgbClr val="10213D"/>
+                  <a:srgbClr val="0F1A2B"/>
                 </a:solidFill>
                 <a:latin typeface="Helvetica Neue"/>
                 <a:ea typeface="Helvetica Neue"/>
@@ -11227,7 +13283,7 @@
             <a:r>
               <a:rPr sz="1575" b="0">
                 <a:solidFill>
-                  <a:srgbClr val="10213D"/>
+                  <a:srgbClr val="0F1A2B"/>
                 </a:solidFill>
                 <a:latin typeface="Helvetica Neue"/>
                 <a:ea typeface="Helvetica Neue"/>
@@ -11243,7 +13299,7 @@
           <p:cNvPr id="12" name="">
             <a:extLst xmlns:a="http://schemas.openxmlformats.org/drawingml/2006/main">
               <a:ext uri="{FF2B5EF4-FFF2-40B4-BE49-F238E27FC236}">
-                <a16:creationId xmlns:a16="http://schemas.microsoft.com/office/drawing/2014/main" id="{8D20D19F-0857-4446-92E2-2653B572EFE6}"/>
+                <a16:creationId xmlns:a16="http://schemas.microsoft.com/office/drawing/2014/main" id="{7260F99C-1BCE-4883-9894-A2B4A9525076}"/>
               </a:ext>
             </a:extLst>
           </p:cNvPr>
@@ -11263,7 +13319,7 @@
             </a:avLst>
           </a:prstGeom>
           <a:solidFill xmlns:a="http://schemas.openxmlformats.org/drawingml/2006/main">
-            <a:srgbClr val="EEF7FF"/>
+            <a:srgbClr val="D1CFC9"/>
           </a:solidFill>
           <a:ln xmlns:a="http://schemas.openxmlformats.org/drawingml/2006/main" w="0">
             <a:noFill/>
@@ -11275,7 +13331,7 @@
           <p:cNvPr id="13" name="">
             <a:extLst xmlns:a="http://schemas.openxmlformats.org/drawingml/2006/main">
               <a:ext uri="{FF2B5EF4-FFF2-40B4-BE49-F238E27FC236}">
-                <a16:creationId xmlns:a16="http://schemas.microsoft.com/office/drawing/2014/main" id="{F97E594C-E47B-4ECA-B44F-C545EC86BCCB}"/>
+                <a16:creationId xmlns:a16="http://schemas.microsoft.com/office/drawing/2014/main" id="{886DC27C-06B4-4E76-9828-B908FE2D2C7B}"/>
               </a:ext>
             </a:extLst>
           </p:cNvPr>
@@ -11306,7 +13362,7 @@
             <a:pPr algn="ctr">
               <a:defRPr sz="1350" b="1">
                 <a:solidFill>
-                  <a:srgbClr val="2563EB"/>
+                  <a:srgbClr val="52677D"/>
                 </a:solidFill>
                 <a:latin typeface="Helvetica Neue"/>
                 <a:ea typeface="Helvetica Neue"/>
@@ -11316,7 +13372,7 @@
             <a:r>
               <a:rPr sz="1350" b="1">
                 <a:solidFill>
-                  <a:srgbClr val="2563EB"/>
+                  <a:srgbClr val="52677D"/>
                 </a:solidFill>
                 <a:latin typeface="Helvetica Neue"/>
                 <a:ea typeface="Helvetica Neue"/>
@@ -11332,7 +13388,7 @@
           <p:cNvPr id="14" name="">
             <a:extLst xmlns:a="http://schemas.openxmlformats.org/drawingml/2006/main">
               <a:ext uri="{FF2B5EF4-FFF2-40B4-BE49-F238E27FC236}">
-                <a16:creationId xmlns:a16="http://schemas.microsoft.com/office/drawing/2014/main" id="{A46A514A-C52E-4426-8927-720A7EFCB03D}"/>
+                <a16:creationId xmlns:a16="http://schemas.microsoft.com/office/drawing/2014/main" id="{81C3CF39-7C87-4173-8ADF-8C41B12404F1}"/>
               </a:ext>
             </a:extLst>
           </p:cNvPr>
@@ -11363,7 +13419,7 @@
             <a:pPr algn="l">
               <a:defRPr sz="1575" b="0">
                 <a:solidFill>
-                  <a:srgbClr val="10213D"/>
+                  <a:srgbClr val="0F1A2B"/>
                 </a:solidFill>
                 <a:latin typeface="Helvetica Neue"/>
                 <a:ea typeface="Helvetica Neue"/>
@@ -11373,7 +13429,7 @@
             <a:r>
               <a:rPr sz="1575" b="0">
                 <a:solidFill>
-                  <a:srgbClr val="10213D"/>
+                  <a:srgbClr val="0F1A2B"/>
                 </a:solidFill>
                 <a:latin typeface="Helvetica Neue"/>
                 <a:ea typeface="Helvetica Neue"/>
@@ -11389,7 +13445,7 @@
           <p:cNvPr id="15" name="">
             <a:extLst xmlns:a="http://schemas.openxmlformats.org/drawingml/2006/main">
               <a:ext uri="{FF2B5EF4-FFF2-40B4-BE49-F238E27FC236}">
-                <a16:creationId xmlns:a16="http://schemas.microsoft.com/office/drawing/2014/main" id="{155FA4CA-C11A-4EA6-90F3-AD6C65E0E9D6}"/>
+                <a16:creationId xmlns:a16="http://schemas.microsoft.com/office/drawing/2014/main" id="{50731AB5-B94F-4687-BC76-79DC6E15ED4D}"/>
               </a:ext>
             </a:extLst>
           </p:cNvPr>
@@ -11409,7 +13465,7 @@
             </a:avLst>
           </a:prstGeom>
           <a:solidFill xmlns:a="http://schemas.openxmlformats.org/drawingml/2006/main">
-            <a:srgbClr val="EEF7FF"/>
+            <a:srgbClr val="D1CFC9"/>
           </a:solidFill>
           <a:ln xmlns:a="http://schemas.openxmlformats.org/drawingml/2006/main" w="0">
             <a:noFill/>
@@ -11421,7 +13477,7 @@
           <p:cNvPr id="16" name="">
             <a:extLst xmlns:a="http://schemas.openxmlformats.org/drawingml/2006/main">
               <a:ext uri="{FF2B5EF4-FFF2-40B4-BE49-F238E27FC236}">
-                <a16:creationId xmlns:a16="http://schemas.microsoft.com/office/drawing/2014/main" id="{CCBCA23C-11E1-4595-8DC5-515C156B8DDB}"/>
+                <a16:creationId xmlns:a16="http://schemas.microsoft.com/office/drawing/2014/main" id="{B45573EC-7228-4D43-87AA-2B8D6A5173BC}"/>
               </a:ext>
             </a:extLst>
           </p:cNvPr>
@@ -11452,7 +13508,7 @@
             <a:pPr algn="l">
               <a:defRPr sz="1125" b="0">
                 <a:solidFill>
-                  <a:srgbClr val="092454"/>
+                  <a:srgbClr val="1C2E4A"/>
                 </a:solidFill>
                 <a:latin typeface="Helvetica Neue"/>
                 <a:ea typeface="Helvetica Neue"/>
@@ -11462,7 +13518,7 @@
             <a:r>
               <a:rPr sz="1125" b="0">
                 <a:solidFill>
-                  <a:srgbClr val="092454"/>
+                  <a:srgbClr val="1C2E4A"/>
                 </a:solidFill>
                 <a:latin typeface="Helvetica Neue"/>
                 <a:ea typeface="Helvetica Neue"/>
@@ -11478,7 +13534,7 @@
           <p:cNvPr id="17" name="">
             <a:extLst xmlns:a="http://schemas.openxmlformats.org/drawingml/2006/main">
               <a:ext uri="{FF2B5EF4-FFF2-40B4-BE49-F238E27FC236}">
-                <a16:creationId xmlns:a16="http://schemas.microsoft.com/office/drawing/2014/main" id="{1C828B32-DE3D-48DE-8497-4CC84A67E2BA}"/>
+                <a16:creationId xmlns:a16="http://schemas.microsoft.com/office/drawing/2014/main" id="{3C2394B2-BE2B-41EE-8C90-46B22727B628}"/>
               </a:ext>
             </a:extLst>
           </p:cNvPr>
@@ -11498,7 +13554,7 @@
             </a:avLst>
           </a:prstGeom>
           <a:solidFill xmlns:a="http://schemas.openxmlformats.org/drawingml/2006/main">
-            <a:srgbClr val="092454"/>
+            <a:srgbClr val="1C2E4A"/>
           </a:solidFill>
           <a:ln xmlns:a="http://schemas.openxmlformats.org/drawingml/2006/main" w="0">
             <a:noFill/>
@@ -11510,7 +13566,7 @@
           <p:cNvPr id="18" name="">
             <a:extLst xmlns:a="http://schemas.openxmlformats.org/drawingml/2006/main">
               <a:ext uri="{FF2B5EF4-FFF2-40B4-BE49-F238E27FC236}">
-                <a16:creationId xmlns:a16="http://schemas.microsoft.com/office/drawing/2014/main" id="{A8FD77B2-DF97-413C-984E-1E02754F008C}"/>
+                <a16:creationId xmlns:a16="http://schemas.microsoft.com/office/drawing/2014/main" id="{D8EC826F-2296-41D4-A2CB-B36D952887F5}"/>
               </a:ext>
             </a:extLst>
           </p:cNvPr>
@@ -11541,7 +13597,7 @@
             <a:pPr algn="l">
               <a:defRPr sz="1050" b="1">
                 <a:solidFill>
-                  <a:srgbClr val="FFD43B"/>
+                  <a:srgbClr val="D1CFC9"/>
                 </a:solidFill>
                 <a:latin typeface="Helvetica Neue"/>
                 <a:ea typeface="Helvetica Neue"/>
@@ -11551,7 +13607,7 @@
             <a:r>
               <a:rPr sz="1050" b="1">
                 <a:solidFill>
-                  <a:srgbClr val="FFD43B"/>
+                  <a:srgbClr val="D1CFC9"/>
                 </a:solidFill>
                 <a:latin typeface="Helvetica Neue"/>
                 <a:ea typeface="Helvetica Neue"/>
@@ -11567,7 +13623,7 @@
           <p:cNvPr id="19" name="">
             <a:extLst xmlns:a="http://schemas.openxmlformats.org/drawingml/2006/main">
               <a:ext uri="{FF2B5EF4-FFF2-40B4-BE49-F238E27FC236}">
-                <a16:creationId xmlns:a16="http://schemas.microsoft.com/office/drawing/2014/main" id="{3967EF01-9B46-4CC9-A91D-0A67DF69C28C}"/>
+                <a16:creationId xmlns:a16="http://schemas.microsoft.com/office/drawing/2014/main" id="{E9D2ED4A-335D-4AE7-91BD-48712CEE2C07}"/>
               </a:ext>
             </a:extLst>
           </p:cNvPr>
@@ -11624,7 +13680,7 @@
           <p:cNvPr id="20" name="">
             <a:extLst xmlns:a="http://schemas.openxmlformats.org/drawingml/2006/main">
               <a:ext uri="{FF2B5EF4-FFF2-40B4-BE49-F238E27FC236}">
-                <a16:creationId xmlns:a16="http://schemas.microsoft.com/office/drawing/2014/main" id="{3FC84ED8-2359-4C75-B8EA-070B1FB4383B}"/>
+                <a16:creationId xmlns:a16="http://schemas.microsoft.com/office/drawing/2014/main" id="{1DFFBB7F-29AD-4B11-B019-7E4708DF8910}"/>
               </a:ext>
             </a:extLst>
           </p:cNvPr>
@@ -11655,7 +13711,7 @@
             <a:pPr algn="l">
               <a:defRPr sz="1125" b="0">
                 <a:solidFill>
-                  <a:srgbClr val="BFE6FF"/>
+                  <a:srgbClr val="BDC4D4"/>
                 </a:solidFill>
                 <a:latin typeface="Helvetica Neue"/>
                 <a:ea typeface="Helvetica Neue"/>
@@ -11665,7 +13721,7 @@
             <a:r>
               <a:rPr sz="1125" b="0">
                 <a:solidFill>
-                  <a:srgbClr val="BFE6FF"/>
+                  <a:srgbClr val="BDC4D4"/>
                 </a:solidFill>
                 <a:latin typeface="Helvetica Neue"/>
                 <a:ea typeface="Helvetica Neue"/>
@@ -11681,7 +13737,7 @@
           <p:cNvPr id="21" name="">
             <a:extLst xmlns:a="http://schemas.openxmlformats.org/drawingml/2006/main">
               <a:ext uri="{FF2B5EF4-FFF2-40B4-BE49-F238E27FC236}">
-                <a16:creationId xmlns:a16="http://schemas.microsoft.com/office/drawing/2014/main" id="{711AE92C-D6D9-42CD-A7A9-4DBE86A7AEDD}"/>
+                <a16:creationId xmlns:a16="http://schemas.microsoft.com/office/drawing/2014/main" id="{E5F02842-96A2-4BE3-9B53-8D36040B41F9}"/>
               </a:ext>
             </a:extLst>
           </p:cNvPr>
@@ -11699,7 +13755,7 @@
             <a:avLst/>
           </a:prstGeom>
           <a:solidFill xmlns:a="http://schemas.openxmlformats.org/drawingml/2006/main">
-            <a:srgbClr val="D8E5F2"/>
+            <a:srgbClr val="BDC4D4"/>
           </a:solidFill>
           <a:ln xmlns:a="http://schemas.openxmlformats.org/drawingml/2006/main" w="0">
             <a:noFill/>
@@ -11711,7 +13767,7 @@
           <p:cNvPr id="22" name="">
             <a:extLst xmlns:a="http://schemas.openxmlformats.org/drawingml/2006/main">
               <a:ext uri="{FF2B5EF4-FFF2-40B4-BE49-F238E27FC236}">
-                <a16:creationId xmlns:a16="http://schemas.microsoft.com/office/drawing/2014/main" id="{E3D146FC-F587-442D-8C39-43CC73E95BFE}"/>
+                <a16:creationId xmlns:a16="http://schemas.microsoft.com/office/drawing/2014/main" id="{8FBAF394-F3F7-43FC-9C27-D9AA96C05C38}"/>
               </a:ext>
             </a:extLst>
           </p:cNvPr>
@@ -11742,7 +13798,7 @@
             <a:pPr algn="l">
               <a:defRPr sz="750" b="0">
                 <a:solidFill>
-                  <a:srgbClr val="61718A"/>
+                  <a:srgbClr val="52677D"/>
                 </a:solidFill>
                 <a:latin typeface="Helvetica Neue"/>
                 <a:ea typeface="Helvetica Neue"/>
@@ -11752,7 +13808,7 @@
             <a:r>
               <a:rPr sz="750" b="0">
                 <a:solidFill>
-                  <a:srgbClr val="61718A"/>
+                  <a:srgbClr val="52677D"/>
                 </a:solidFill>
                 <a:latin typeface="Helvetica Neue"/>
                 <a:ea typeface="Helvetica Neue"/>
@@ -11768,7 +13824,7 @@
           <p:cNvPr id="23" name="">
             <a:extLst xmlns:a="http://schemas.openxmlformats.org/drawingml/2006/main">
               <a:ext uri="{FF2B5EF4-FFF2-40B4-BE49-F238E27FC236}">
-                <a16:creationId xmlns:a16="http://schemas.microsoft.com/office/drawing/2014/main" id="{B0A0816C-E3F7-4D6D-9DDA-3F2956B416C2}"/>
+                <a16:creationId xmlns:a16="http://schemas.microsoft.com/office/drawing/2014/main" id="{F40DDBF6-F943-4269-BBA0-D78E57F215DA}"/>
               </a:ext>
             </a:extLst>
           </p:cNvPr>
@@ -11799,7 +13855,7 @@
             <a:pPr algn="r">
               <a:defRPr sz="825" b="1">
                 <a:solidFill>
-                  <a:srgbClr val="2563EB"/>
+                  <a:srgbClr val="52677D"/>
                 </a:solidFill>
                 <a:latin typeface="Helvetica Neue"/>
                 <a:ea typeface="Helvetica Neue"/>
@@ -11809,7 +13865,7 @@
             <a:r>
               <a:rPr sz="825" b="1">
                 <a:solidFill>
-                  <a:srgbClr val="2563EB"/>
+                  <a:srgbClr val="52677D"/>
                 </a:solidFill>
                 <a:latin typeface="Helvetica Neue"/>
                 <a:ea typeface="Helvetica Neue"/>
@@ -11823,7 +13879,7 @@
     </p:spTree>
     <p:extLst>
       <p:ext uri="{BB962C8B-B14F-4D97-AF65-F5344CB8AC3E}">
-        <p14:creationId xmlns:p14="http://schemas.microsoft.com/office/powerpoint/2010/main" val="732958907"/>
+        <p14:creationId xmlns:p14="http://schemas.microsoft.com/office/powerpoint/2010/main" val="1585649458"/>
       </p:ext>
     </p:extLst>
   </p:cSld>
@@ -11854,7 +13910,7 @@
           <p:cNvPr id="24" name="">
             <a:extLst xmlns:a="http://schemas.openxmlformats.org/drawingml/2006/main">
               <a:ext uri="{FF2B5EF4-FFF2-40B4-BE49-F238E27FC236}">
-                <a16:creationId xmlns:a16="http://schemas.microsoft.com/office/drawing/2014/main" id="{483385EC-1F29-4FD7-B19A-CAE846BEF5D7}"/>
+                <a16:creationId xmlns:a16="http://schemas.microsoft.com/office/drawing/2014/main" id="{ACFC5B75-37AE-4171-8B03-89FE82227309}"/>
               </a:ext>
             </a:extLst>
           </p:cNvPr>
@@ -11872,7 +13928,7 @@
             <a:avLst/>
           </a:prstGeom>
           <a:solidFill xmlns:a="http://schemas.openxmlformats.org/drawingml/2006/main">
-            <a:srgbClr val="6C5CE7"/>
+            <a:srgbClr val="1C2E4A"/>
           </a:solidFill>
           <a:ln xmlns:a="http://schemas.openxmlformats.org/drawingml/2006/main" w="0">
             <a:noFill/>
@@ -11884,7 +13940,7 @@
           <p:cNvPr id="2" name="">
             <a:extLst xmlns:a="http://schemas.openxmlformats.org/drawingml/2006/main">
               <a:ext uri="{FF2B5EF4-FFF2-40B4-BE49-F238E27FC236}">
-                <a16:creationId xmlns:a16="http://schemas.microsoft.com/office/drawing/2014/main" id="{318507EB-3154-44DB-8F8F-6BBE96854DEE}"/>
+                <a16:creationId xmlns:a16="http://schemas.microsoft.com/office/drawing/2014/main" id="{E6D997EF-C227-4B4C-B709-116515209137}"/>
               </a:ext>
             </a:extLst>
           </p:cNvPr>
@@ -11915,7 +13971,7 @@
             <a:pPr algn="l">
               <a:defRPr sz="1125" b="1">
                 <a:solidFill>
-                  <a:srgbClr val="2563EB"/>
+                  <a:srgbClr val="52677D"/>
                 </a:solidFill>
                 <a:latin typeface="Helvetica Neue"/>
                 <a:ea typeface="Helvetica Neue"/>
@@ -11925,7 +13981,7 @@
             <a:r>
               <a:rPr sz="1125" b="1">
                 <a:solidFill>
-                  <a:srgbClr val="2563EB"/>
+                  <a:srgbClr val="52677D"/>
                 </a:solidFill>
                 <a:latin typeface="Helvetica Neue"/>
                 <a:ea typeface="Helvetica Neue"/>
@@ -11941,7 +13997,7 @@
           <p:cNvPr id="3" name="">
             <a:extLst xmlns:a="http://schemas.openxmlformats.org/drawingml/2006/main">
               <a:ext uri="{FF2B5EF4-FFF2-40B4-BE49-F238E27FC236}">
-                <a16:creationId xmlns:a16="http://schemas.microsoft.com/office/drawing/2014/main" id="{C30C1A61-96C5-45AF-9758-E99852E362D3}"/>
+                <a16:creationId xmlns:a16="http://schemas.microsoft.com/office/drawing/2014/main" id="{A693E52F-737D-4251-89C5-CEE560C9F3BA}"/>
               </a:ext>
             </a:extLst>
           </p:cNvPr>
@@ -11961,7 +14017,7 @@
             </a:avLst>
           </a:prstGeom>
           <a:solidFill xmlns:a="http://schemas.openxmlformats.org/drawingml/2006/main">
-            <a:srgbClr val="FFD43B"/>
+            <a:srgbClr val="D1CFC9"/>
           </a:solidFill>
           <a:ln xmlns:a="http://schemas.openxmlformats.org/drawingml/2006/main" w="0">
             <a:noFill/>
@@ -11973,7 +14029,7 @@
           <p:cNvPr id="4" name="">
             <a:extLst xmlns:a="http://schemas.openxmlformats.org/drawingml/2006/main">
               <a:ext uri="{FF2B5EF4-FFF2-40B4-BE49-F238E27FC236}">
-                <a16:creationId xmlns:a16="http://schemas.microsoft.com/office/drawing/2014/main" id="{F3889708-6272-45FF-AC8A-F2ED70469AE2}"/>
+                <a16:creationId xmlns:a16="http://schemas.microsoft.com/office/drawing/2014/main" id="{1FBA32FA-3375-44DD-A7F3-3CE08BFBDF64}"/>
               </a:ext>
             </a:extLst>
           </p:cNvPr>
@@ -12004,7 +14060,7 @@
             <a:pPr algn="ctr">
               <a:defRPr sz="1275" b="1">
                 <a:solidFill>
-                  <a:srgbClr val="092454"/>
+                  <a:srgbClr val="1C2E4A"/>
                 </a:solidFill>
                 <a:latin typeface="Helvetica Neue"/>
                 <a:ea typeface="Helvetica Neue"/>
@@ -12014,7 +14070,7 @@
             <a:r>
               <a:rPr sz="1275" b="1">
                 <a:solidFill>
-                  <a:srgbClr val="092454"/>
+                  <a:srgbClr val="1C2E4A"/>
                 </a:solidFill>
                 <a:latin typeface="Helvetica Neue"/>
                 <a:ea typeface="Helvetica Neue"/>
@@ -12030,7 +14086,7 @@
           <p:cNvPr id="5" name="">
             <a:extLst xmlns:a="http://schemas.openxmlformats.org/drawingml/2006/main">
               <a:ext uri="{FF2B5EF4-FFF2-40B4-BE49-F238E27FC236}">
-                <a16:creationId xmlns:a16="http://schemas.microsoft.com/office/drawing/2014/main" id="{AEC7B5B4-AA14-472A-8FF5-64CD71B7E0C2}"/>
+                <a16:creationId xmlns:a16="http://schemas.microsoft.com/office/drawing/2014/main" id="{8333B044-1214-43A3-919D-9DE4C7337A79}"/>
               </a:ext>
             </a:extLst>
           </p:cNvPr>
@@ -12061,7 +14117,7 @@
             <a:pPr algn="l">
               <a:defRPr sz="2550" b="1">
                 <a:solidFill>
-                  <a:srgbClr val="092454"/>
+                  <a:srgbClr val="1C2E4A"/>
                 </a:solidFill>
                 <a:latin typeface="Helvetica Neue"/>
                 <a:ea typeface="Helvetica Neue"/>
@@ -12071,7 +14127,7 @@
             <a:r>
               <a:rPr sz="2550" b="1">
                 <a:solidFill>
-                  <a:srgbClr val="092454"/>
+                  <a:srgbClr val="1C2E4A"/>
                 </a:solidFill>
                 <a:latin typeface="Helvetica Neue"/>
                 <a:ea typeface="Helvetica Neue"/>
@@ -12087,7 +14143,7 @@
           <p:cNvPr id="6" name="">
             <a:extLst xmlns:a="http://schemas.openxmlformats.org/drawingml/2006/main">
               <a:ext uri="{FF2B5EF4-FFF2-40B4-BE49-F238E27FC236}">
-                <a16:creationId xmlns:a16="http://schemas.microsoft.com/office/drawing/2014/main" id="{FC826CCE-84E4-4D4F-8044-CC8B7420240A}"/>
+                <a16:creationId xmlns:a16="http://schemas.microsoft.com/office/drawing/2014/main" id="{1D0B4846-FDB7-46D3-B0AD-F5BF950A3B4C}"/>
               </a:ext>
             </a:extLst>
           </p:cNvPr>
@@ -12107,7 +14163,7 @@
             </a:avLst>
           </a:prstGeom>
           <a:solidFill xmlns:a="http://schemas.openxmlformats.org/drawingml/2006/main">
-            <a:srgbClr val="EEF7FF"/>
+            <a:srgbClr val="D1CFC9"/>
           </a:solidFill>
           <a:ln xmlns:a="http://schemas.openxmlformats.org/drawingml/2006/main" w="0">
             <a:noFill/>
@@ -12119,7 +14175,7 @@
           <p:cNvPr id="7" name="">
             <a:extLst xmlns:a="http://schemas.openxmlformats.org/drawingml/2006/main">
               <a:ext uri="{FF2B5EF4-FFF2-40B4-BE49-F238E27FC236}">
-                <a16:creationId xmlns:a16="http://schemas.microsoft.com/office/drawing/2014/main" id="{C28254CD-2F8C-471A-9045-F657BF1FE5DA}"/>
+                <a16:creationId xmlns:a16="http://schemas.microsoft.com/office/drawing/2014/main" id="{D92021D2-3763-4BB4-8739-858FBD0BF579}"/>
               </a:ext>
             </a:extLst>
           </p:cNvPr>
@@ -12150,7 +14206,7 @@
             <a:pPr algn="ctr">
               <a:defRPr sz="1350" b="1">
                 <a:solidFill>
-                  <a:srgbClr val="2563EB"/>
+                  <a:srgbClr val="52677D"/>
                 </a:solidFill>
                 <a:latin typeface="Helvetica Neue"/>
                 <a:ea typeface="Helvetica Neue"/>
@@ -12160,7 +14216,7 @@
             <a:r>
               <a:rPr sz="1350" b="1">
                 <a:solidFill>
-                  <a:srgbClr val="2563EB"/>
+                  <a:srgbClr val="52677D"/>
                 </a:solidFill>
                 <a:latin typeface="Helvetica Neue"/>
                 <a:ea typeface="Helvetica Neue"/>
@@ -12176,7 +14232,7 @@
           <p:cNvPr id="8" name="">
             <a:extLst xmlns:a="http://schemas.openxmlformats.org/drawingml/2006/main">
               <a:ext uri="{FF2B5EF4-FFF2-40B4-BE49-F238E27FC236}">
-                <a16:creationId xmlns:a16="http://schemas.microsoft.com/office/drawing/2014/main" id="{C001653C-B630-470F-B519-7CDC6DDD4861}"/>
+                <a16:creationId xmlns:a16="http://schemas.microsoft.com/office/drawing/2014/main" id="{679D54B4-CFE3-4758-8BEA-8D5285D26691}"/>
               </a:ext>
             </a:extLst>
           </p:cNvPr>
@@ -12207,7 +14263,7 @@
             <a:pPr algn="l">
               <a:defRPr sz="1575" b="0">
                 <a:solidFill>
-                  <a:srgbClr val="10213D"/>
+                  <a:srgbClr val="0F1A2B"/>
                 </a:solidFill>
                 <a:latin typeface="Helvetica Neue"/>
                 <a:ea typeface="Helvetica Neue"/>
@@ -12217,7 +14273,7 @@
             <a:r>
               <a:rPr sz="1575" b="0">
                 <a:solidFill>
-                  <a:srgbClr val="10213D"/>
+                  <a:srgbClr val="0F1A2B"/>
                 </a:solidFill>
                 <a:latin typeface="Helvetica Neue"/>
                 <a:ea typeface="Helvetica Neue"/>
@@ -12233,7 +14289,7 @@
           <p:cNvPr id="9" name="">
             <a:extLst xmlns:a="http://schemas.openxmlformats.org/drawingml/2006/main">
               <a:ext uri="{FF2B5EF4-FFF2-40B4-BE49-F238E27FC236}">
-                <a16:creationId xmlns:a16="http://schemas.microsoft.com/office/drawing/2014/main" id="{C479CAA5-FF19-4017-B915-733A3FFAC124}"/>
+                <a16:creationId xmlns:a16="http://schemas.microsoft.com/office/drawing/2014/main" id="{8A02BC24-6DF2-47C9-AE5F-12AC1E96D4B2}"/>
               </a:ext>
             </a:extLst>
           </p:cNvPr>
@@ -12253,7 +14309,7 @@
             </a:avLst>
           </a:prstGeom>
           <a:solidFill xmlns:a="http://schemas.openxmlformats.org/drawingml/2006/main">
-            <a:srgbClr val="EEF7FF"/>
+            <a:srgbClr val="D1CFC9"/>
           </a:solidFill>
           <a:ln xmlns:a="http://schemas.openxmlformats.org/drawingml/2006/main" w="0">
             <a:noFill/>
@@ -12265,7 +14321,7 @@
           <p:cNvPr id="10" name="">
             <a:extLst xmlns:a="http://schemas.openxmlformats.org/drawingml/2006/main">
               <a:ext uri="{FF2B5EF4-FFF2-40B4-BE49-F238E27FC236}">
-                <a16:creationId xmlns:a16="http://schemas.microsoft.com/office/drawing/2014/main" id="{DE913685-AF2C-450D-A5E3-3BEF286C9349}"/>
+                <a16:creationId xmlns:a16="http://schemas.microsoft.com/office/drawing/2014/main" id="{342E804E-48A1-42B6-8E3A-12F5EA6D57FC}"/>
               </a:ext>
             </a:extLst>
           </p:cNvPr>
@@ -12296,7 +14352,7 @@
             <a:pPr algn="ctr">
               <a:defRPr sz="1350" b="1">
                 <a:solidFill>
-                  <a:srgbClr val="2563EB"/>
+                  <a:srgbClr val="52677D"/>
                 </a:solidFill>
                 <a:latin typeface="Helvetica Neue"/>
                 <a:ea typeface="Helvetica Neue"/>
@@ -12306,7 +14362,7 @@
             <a:r>
               <a:rPr sz="1350" b="1">
                 <a:solidFill>
-                  <a:srgbClr val="2563EB"/>
+                  <a:srgbClr val="52677D"/>
                 </a:solidFill>
                 <a:latin typeface="Helvetica Neue"/>
                 <a:ea typeface="Helvetica Neue"/>
@@ -12322,7 +14378,7 @@
           <p:cNvPr id="11" name="">
             <a:extLst xmlns:a="http://schemas.openxmlformats.org/drawingml/2006/main">
               <a:ext uri="{FF2B5EF4-FFF2-40B4-BE49-F238E27FC236}">
-                <a16:creationId xmlns:a16="http://schemas.microsoft.com/office/drawing/2014/main" id="{9071F067-2D49-435E-B84A-E1B1C26F04D4}"/>
+                <a16:creationId xmlns:a16="http://schemas.microsoft.com/office/drawing/2014/main" id="{DFC8FB72-D9EA-4C39-843C-26D380FA803E}"/>
               </a:ext>
             </a:extLst>
           </p:cNvPr>
@@ -12353,7 +14409,7 @@
             <a:pPr algn="l">
               <a:defRPr sz="1575" b="0">
                 <a:solidFill>
-                  <a:srgbClr val="10213D"/>
+                  <a:srgbClr val="0F1A2B"/>
                 </a:solidFill>
                 <a:latin typeface="Helvetica Neue"/>
                 <a:ea typeface="Helvetica Neue"/>
@@ -12363,7 +14419,7 @@
             <a:r>
               <a:rPr sz="1575" b="0">
                 <a:solidFill>
-                  <a:srgbClr val="10213D"/>
+                  <a:srgbClr val="0F1A2B"/>
                 </a:solidFill>
                 <a:latin typeface="Helvetica Neue"/>
                 <a:ea typeface="Helvetica Neue"/>
@@ -12379,7 +14435,7 @@
           <p:cNvPr id="12" name="">
             <a:extLst xmlns:a="http://schemas.openxmlformats.org/drawingml/2006/main">
               <a:ext uri="{FF2B5EF4-FFF2-40B4-BE49-F238E27FC236}">
-                <a16:creationId xmlns:a16="http://schemas.microsoft.com/office/drawing/2014/main" id="{0A1CD047-7597-4E34-8A67-C53F8AFCF071}"/>
+                <a16:creationId xmlns:a16="http://schemas.microsoft.com/office/drawing/2014/main" id="{7D121F6E-D5BB-48A9-B1ED-C6E8FACAB844}"/>
               </a:ext>
             </a:extLst>
           </p:cNvPr>
@@ -12399,7 +14455,7 @@
             </a:avLst>
           </a:prstGeom>
           <a:solidFill xmlns:a="http://schemas.openxmlformats.org/drawingml/2006/main">
-            <a:srgbClr val="EEF7FF"/>
+            <a:srgbClr val="D1CFC9"/>
           </a:solidFill>
           <a:ln xmlns:a="http://schemas.openxmlformats.org/drawingml/2006/main" w="0">
             <a:noFill/>
@@ -12411,7 +14467,7 @@
           <p:cNvPr id="13" name="">
             <a:extLst xmlns:a="http://schemas.openxmlformats.org/drawingml/2006/main">
               <a:ext uri="{FF2B5EF4-FFF2-40B4-BE49-F238E27FC236}">
-                <a16:creationId xmlns:a16="http://schemas.microsoft.com/office/drawing/2014/main" id="{9669D0AE-C8D7-41EB-AEDE-AD4044152756}"/>
+                <a16:creationId xmlns:a16="http://schemas.microsoft.com/office/drawing/2014/main" id="{8E38DFED-77E9-4EFE-8770-BEF809742AA3}"/>
               </a:ext>
             </a:extLst>
           </p:cNvPr>
@@ -12442,7 +14498,7 @@
             <a:pPr algn="ctr">
               <a:defRPr sz="1350" b="1">
                 <a:solidFill>
-                  <a:srgbClr val="2563EB"/>
+                  <a:srgbClr val="52677D"/>
                 </a:solidFill>
                 <a:latin typeface="Helvetica Neue"/>
                 <a:ea typeface="Helvetica Neue"/>
@@ -12452,7 +14508,7 @@
             <a:r>
               <a:rPr sz="1350" b="1">
                 <a:solidFill>
-                  <a:srgbClr val="2563EB"/>
+                  <a:srgbClr val="52677D"/>
                 </a:solidFill>
                 <a:latin typeface="Helvetica Neue"/>
                 <a:ea typeface="Helvetica Neue"/>
@@ -12468,7 +14524,7 @@
           <p:cNvPr id="14" name="">
             <a:extLst xmlns:a="http://schemas.openxmlformats.org/drawingml/2006/main">
               <a:ext uri="{FF2B5EF4-FFF2-40B4-BE49-F238E27FC236}">
-                <a16:creationId xmlns:a16="http://schemas.microsoft.com/office/drawing/2014/main" id="{CE1EA8C6-F987-4173-A93E-81E8E7CDFA37}"/>
+                <a16:creationId xmlns:a16="http://schemas.microsoft.com/office/drawing/2014/main" id="{97BEBA94-0C01-43CE-9507-84F53038F6B9}"/>
               </a:ext>
             </a:extLst>
           </p:cNvPr>
@@ -12499,7 +14555,7 @@
             <a:pPr algn="l">
               <a:defRPr sz="1575" b="0">
                 <a:solidFill>
-                  <a:srgbClr val="10213D"/>
+                  <a:srgbClr val="0F1A2B"/>
                 </a:solidFill>
                 <a:latin typeface="Helvetica Neue"/>
                 <a:ea typeface="Helvetica Neue"/>
@@ -12509,7 +14565,7 @@
             <a:r>
               <a:rPr sz="1575" b="0">
                 <a:solidFill>
-                  <a:srgbClr val="10213D"/>
+                  <a:srgbClr val="0F1A2B"/>
                 </a:solidFill>
                 <a:latin typeface="Helvetica Neue"/>
                 <a:ea typeface="Helvetica Neue"/>
@@ -12525,7 +14581,7 @@
           <p:cNvPr id="15" name="">
             <a:extLst xmlns:a="http://schemas.openxmlformats.org/drawingml/2006/main">
               <a:ext uri="{FF2B5EF4-FFF2-40B4-BE49-F238E27FC236}">
-                <a16:creationId xmlns:a16="http://schemas.microsoft.com/office/drawing/2014/main" id="{B5AAD884-452C-43B8-B98F-CEA0E05257E2}"/>
+                <a16:creationId xmlns:a16="http://schemas.microsoft.com/office/drawing/2014/main" id="{E6E05D43-C0E9-4AE9-883F-EA2633A5EEDE}"/>
               </a:ext>
             </a:extLst>
           </p:cNvPr>
@@ -12545,7 +14601,7 @@
             </a:avLst>
           </a:prstGeom>
           <a:solidFill xmlns:a="http://schemas.openxmlformats.org/drawingml/2006/main">
-            <a:srgbClr val="EEF7FF"/>
+            <a:srgbClr val="D1CFC9"/>
           </a:solidFill>
           <a:ln xmlns:a="http://schemas.openxmlformats.org/drawingml/2006/main" w="0">
             <a:noFill/>
@@ -12557,7 +14613,7 @@
           <p:cNvPr id="16" name="">
             <a:extLst xmlns:a="http://schemas.openxmlformats.org/drawingml/2006/main">
               <a:ext uri="{FF2B5EF4-FFF2-40B4-BE49-F238E27FC236}">
-                <a16:creationId xmlns:a16="http://schemas.microsoft.com/office/drawing/2014/main" id="{39FA17D4-3349-42DA-B1B0-462EE2B81B93}"/>
+                <a16:creationId xmlns:a16="http://schemas.microsoft.com/office/drawing/2014/main" id="{E7D1E6B6-BEA8-4012-983A-47AEF4E46D76}"/>
               </a:ext>
             </a:extLst>
           </p:cNvPr>
@@ -12588,7 +14644,7 @@
             <a:pPr algn="l">
               <a:defRPr sz="1125" b="0">
                 <a:solidFill>
-                  <a:srgbClr val="092454"/>
+                  <a:srgbClr val="1C2E4A"/>
                 </a:solidFill>
                 <a:latin typeface="Helvetica Neue"/>
                 <a:ea typeface="Helvetica Neue"/>
@@ -12598,7 +14654,7 @@
             <a:r>
               <a:rPr sz="1125" b="0">
                 <a:solidFill>
-                  <a:srgbClr val="092454"/>
+                  <a:srgbClr val="1C2E4A"/>
                 </a:solidFill>
                 <a:latin typeface="Helvetica Neue"/>
                 <a:ea typeface="Helvetica Neue"/>
@@ -12614,7 +14670,7 @@
           <p:cNvPr id="17" name="">
             <a:extLst xmlns:a="http://schemas.openxmlformats.org/drawingml/2006/main">
               <a:ext uri="{FF2B5EF4-FFF2-40B4-BE49-F238E27FC236}">
-                <a16:creationId xmlns:a16="http://schemas.microsoft.com/office/drawing/2014/main" id="{7C6C907F-4884-4FF3-A026-1137229C66FF}"/>
+                <a16:creationId xmlns:a16="http://schemas.microsoft.com/office/drawing/2014/main" id="{8AF03CE9-783F-4225-B60D-4C4554A311B9}"/>
               </a:ext>
             </a:extLst>
           </p:cNvPr>
@@ -12634,7 +14690,7 @@
             </a:avLst>
           </a:prstGeom>
           <a:solidFill xmlns:a="http://schemas.openxmlformats.org/drawingml/2006/main">
-            <a:srgbClr val="092454"/>
+            <a:srgbClr val="1C2E4A"/>
           </a:solidFill>
           <a:ln xmlns:a="http://schemas.openxmlformats.org/drawingml/2006/main" w="0">
             <a:noFill/>
@@ -12646,7 +14702,7 @@
           <p:cNvPr id="18" name="">
             <a:extLst xmlns:a="http://schemas.openxmlformats.org/drawingml/2006/main">
               <a:ext uri="{FF2B5EF4-FFF2-40B4-BE49-F238E27FC236}">
-                <a16:creationId xmlns:a16="http://schemas.microsoft.com/office/drawing/2014/main" id="{1B41F251-E926-4288-AFF8-763A6C857882}"/>
+                <a16:creationId xmlns:a16="http://schemas.microsoft.com/office/drawing/2014/main" id="{33D073A5-4F0B-4088-A3FB-4EE20F4E287A}"/>
               </a:ext>
             </a:extLst>
           </p:cNvPr>
@@ -12677,7 +14733,7 @@
             <a:pPr algn="l">
               <a:defRPr sz="1050" b="1">
                 <a:solidFill>
-                  <a:srgbClr val="FFD43B"/>
+                  <a:srgbClr val="D1CFC9"/>
                 </a:solidFill>
                 <a:latin typeface="Helvetica Neue"/>
                 <a:ea typeface="Helvetica Neue"/>
@@ -12687,7 +14743,7 @@
             <a:r>
               <a:rPr sz="1050" b="1">
                 <a:solidFill>
-                  <a:srgbClr val="FFD43B"/>
+                  <a:srgbClr val="D1CFC9"/>
                 </a:solidFill>
                 <a:latin typeface="Helvetica Neue"/>
                 <a:ea typeface="Helvetica Neue"/>
@@ -12703,7 +14759,7 @@
           <p:cNvPr id="19" name="">
             <a:extLst xmlns:a="http://schemas.openxmlformats.org/drawingml/2006/main">
               <a:ext uri="{FF2B5EF4-FFF2-40B4-BE49-F238E27FC236}">
-                <a16:creationId xmlns:a16="http://schemas.microsoft.com/office/drawing/2014/main" id="{0C74EF3D-E771-42CF-B393-294A662BF105}"/>
+                <a16:creationId xmlns:a16="http://schemas.microsoft.com/office/drawing/2014/main" id="{DB01C556-2197-4DED-913B-4A6A564843B6}"/>
               </a:ext>
             </a:extLst>
           </p:cNvPr>
@@ -12760,7 +14816,7 @@
           <p:cNvPr id="20" name="">
             <a:extLst xmlns:a="http://schemas.openxmlformats.org/drawingml/2006/main">
               <a:ext uri="{FF2B5EF4-FFF2-40B4-BE49-F238E27FC236}">
-                <a16:creationId xmlns:a16="http://schemas.microsoft.com/office/drawing/2014/main" id="{565009EE-6D13-4D2D-BE6A-049A70D79E7E}"/>
+                <a16:creationId xmlns:a16="http://schemas.microsoft.com/office/drawing/2014/main" id="{DCD73ABB-78AE-4904-BE01-C16884A7B5F0}"/>
               </a:ext>
             </a:extLst>
           </p:cNvPr>
@@ -12791,7 +14847,7 @@
             <a:pPr algn="l">
               <a:defRPr sz="1125" b="0">
                 <a:solidFill>
-                  <a:srgbClr val="BFE6FF"/>
+                  <a:srgbClr val="BDC4D4"/>
                 </a:solidFill>
                 <a:latin typeface="Helvetica Neue"/>
                 <a:ea typeface="Helvetica Neue"/>
@@ -12801,7 +14857,7 @@
             <a:r>
               <a:rPr sz="1125" b="0">
                 <a:solidFill>
-                  <a:srgbClr val="BFE6FF"/>
+                  <a:srgbClr val="BDC4D4"/>
                 </a:solidFill>
                 <a:latin typeface="Helvetica Neue"/>
                 <a:ea typeface="Helvetica Neue"/>
@@ -12817,7 +14873,7 @@
           <p:cNvPr id="21" name="">
             <a:extLst xmlns:a="http://schemas.openxmlformats.org/drawingml/2006/main">
               <a:ext uri="{FF2B5EF4-FFF2-40B4-BE49-F238E27FC236}">
-                <a16:creationId xmlns:a16="http://schemas.microsoft.com/office/drawing/2014/main" id="{1A9EB595-7C75-4AB9-A3EB-828C62265253}"/>
+                <a16:creationId xmlns:a16="http://schemas.microsoft.com/office/drawing/2014/main" id="{9535FC9C-7468-457C-81DF-9E073B94AB95}"/>
               </a:ext>
             </a:extLst>
           </p:cNvPr>
@@ -12835,7 +14891,7 @@
             <a:avLst/>
           </a:prstGeom>
           <a:solidFill xmlns:a="http://schemas.openxmlformats.org/drawingml/2006/main">
-            <a:srgbClr val="D8E5F2"/>
+            <a:srgbClr val="BDC4D4"/>
           </a:solidFill>
           <a:ln xmlns:a="http://schemas.openxmlformats.org/drawingml/2006/main" w="0">
             <a:noFill/>
@@ -12847,7 +14903,7 @@
           <p:cNvPr id="22" name="">
             <a:extLst xmlns:a="http://schemas.openxmlformats.org/drawingml/2006/main">
               <a:ext uri="{FF2B5EF4-FFF2-40B4-BE49-F238E27FC236}">
-                <a16:creationId xmlns:a16="http://schemas.microsoft.com/office/drawing/2014/main" id="{8E36849F-7A28-4697-B5F5-A90AC7E5795E}"/>
+                <a16:creationId xmlns:a16="http://schemas.microsoft.com/office/drawing/2014/main" id="{07B90414-BF92-4AA9-AC97-E69AEE34F785}"/>
               </a:ext>
             </a:extLst>
           </p:cNvPr>
@@ -12878,7 +14934,7 @@
             <a:pPr algn="l">
               <a:defRPr sz="750" b="0">
                 <a:solidFill>
-                  <a:srgbClr val="61718A"/>
+                  <a:srgbClr val="52677D"/>
                 </a:solidFill>
                 <a:latin typeface="Helvetica Neue"/>
                 <a:ea typeface="Helvetica Neue"/>
@@ -12888,7 +14944,7 @@
             <a:r>
               <a:rPr sz="750" b="0">
                 <a:solidFill>
-                  <a:srgbClr val="61718A"/>
+                  <a:srgbClr val="52677D"/>
                 </a:solidFill>
                 <a:latin typeface="Helvetica Neue"/>
                 <a:ea typeface="Helvetica Neue"/>
@@ -12904,7 +14960,7 @@
           <p:cNvPr id="23" name="">
             <a:extLst xmlns:a="http://schemas.openxmlformats.org/drawingml/2006/main">
               <a:ext uri="{FF2B5EF4-FFF2-40B4-BE49-F238E27FC236}">
-                <a16:creationId xmlns:a16="http://schemas.microsoft.com/office/drawing/2014/main" id="{6700FBAA-F42C-43E6-8AED-76F80D0EBBAB}"/>
+                <a16:creationId xmlns:a16="http://schemas.microsoft.com/office/drawing/2014/main" id="{FD73EE4E-978B-419E-AB07-9FA5043C132E}"/>
               </a:ext>
             </a:extLst>
           </p:cNvPr>
@@ -12935,7 +14991,7 @@
             <a:pPr algn="r">
               <a:defRPr sz="825" b="1">
                 <a:solidFill>
-                  <a:srgbClr val="2563EB"/>
+                  <a:srgbClr val="52677D"/>
                 </a:solidFill>
                 <a:latin typeface="Helvetica Neue"/>
                 <a:ea typeface="Helvetica Neue"/>
@@ -12945,7 +15001,7 @@
             <a:r>
               <a:rPr sz="825" b="1">
                 <a:solidFill>
-                  <a:srgbClr val="2563EB"/>
+                  <a:srgbClr val="52677D"/>
                 </a:solidFill>
                 <a:latin typeface="Helvetica Neue"/>
                 <a:ea typeface="Helvetica Neue"/>
@@ -12959,7 +15015,7 @@
     </p:spTree>
     <p:extLst>
       <p:ext uri="{BB962C8B-B14F-4D97-AF65-F5344CB8AC3E}">
-        <p14:creationId xmlns:p14="http://schemas.microsoft.com/office/powerpoint/2010/main" val="862033931"/>
+        <p14:creationId xmlns:p14="http://schemas.microsoft.com/office/powerpoint/2010/main" val="384628489"/>
       </p:ext>
     </p:extLst>
   </p:cSld>
@@ -12990,7 +15046,7 @@
           <p:cNvPr id="27" name="">
             <a:extLst xmlns:a="http://schemas.openxmlformats.org/drawingml/2006/main">
               <a:ext uri="{FF2B5EF4-FFF2-40B4-BE49-F238E27FC236}">
-                <a16:creationId xmlns:a16="http://schemas.microsoft.com/office/drawing/2014/main" id="{432CC14E-19B9-4F1C-9C7B-030BCDBADDB8}"/>
+                <a16:creationId xmlns:a16="http://schemas.microsoft.com/office/drawing/2014/main" id="{959B7291-73F7-4D0A-AA2F-806C201E8737}"/>
               </a:ext>
             </a:extLst>
           </p:cNvPr>
@@ -13021,7 +15077,7 @@
             <a:pPr algn="l">
               <a:defRPr sz="1125" b="1">
                 <a:solidFill>
-                  <a:srgbClr val="2563EB"/>
+                  <a:srgbClr val="52677D"/>
                 </a:solidFill>
                 <a:latin typeface="Helvetica Neue"/>
                 <a:ea typeface="Helvetica Neue"/>
@@ -13031,7 +15087,7 @@
             <a:r>
               <a:rPr sz="1125" b="1">
                 <a:solidFill>
-                  <a:srgbClr val="2563EB"/>
+                  <a:srgbClr val="52677D"/>
                 </a:solidFill>
                 <a:latin typeface="Helvetica Neue"/>
                 <a:ea typeface="Helvetica Neue"/>
@@ -13047,7 +15103,7 @@
           <p:cNvPr id="2" name="">
             <a:extLst xmlns:a="http://schemas.openxmlformats.org/drawingml/2006/main">
               <a:ext uri="{FF2B5EF4-FFF2-40B4-BE49-F238E27FC236}">
-                <a16:creationId xmlns:a16="http://schemas.microsoft.com/office/drawing/2014/main" id="{DC01AAFF-0E12-4C9C-A8E3-DCF9013D78B3}"/>
+                <a16:creationId xmlns:a16="http://schemas.microsoft.com/office/drawing/2014/main" id="{C408B00E-DBA6-4E73-BC35-333BB15100F8}"/>
               </a:ext>
             </a:extLst>
           </p:cNvPr>
@@ -13078,7 +15134,7 @@
             <a:pPr algn="l">
               <a:defRPr sz="2850" b="1">
                 <a:solidFill>
-                  <a:srgbClr val="092454"/>
+                  <a:srgbClr val="1C2E4A"/>
                 </a:solidFill>
                 <a:latin typeface="Helvetica Neue"/>
                 <a:ea typeface="Helvetica Neue"/>
@@ -13088,7 +15144,7 @@
             <a:r>
               <a:rPr sz="2850" b="1">
                 <a:solidFill>
-                  <a:srgbClr val="092454"/>
+                  <a:srgbClr val="1C2E4A"/>
                 </a:solidFill>
                 <a:latin typeface="Helvetica Neue"/>
                 <a:ea typeface="Helvetica Neue"/>
@@ -13104,7 +15160,7 @@
           <p:cNvPr id="3" name="">
             <a:extLst xmlns:a="http://schemas.openxmlformats.org/drawingml/2006/main">
               <a:ext uri="{FF2B5EF4-FFF2-40B4-BE49-F238E27FC236}">
-                <a16:creationId xmlns:a16="http://schemas.microsoft.com/office/drawing/2014/main" id="{28298CA3-DDB1-4849-A8BC-36639221899A}"/>
+                <a16:creationId xmlns:a16="http://schemas.microsoft.com/office/drawing/2014/main" id="{FB90341F-3306-49F6-AA59-96E2BB047963}"/>
               </a:ext>
             </a:extLst>
           </p:cNvPr>
@@ -13135,7 +15191,7 @@
             <a:pPr algn="l">
               <a:defRPr sz="1425" b="0">
                 <a:solidFill>
-                  <a:srgbClr val="61718A"/>
+                  <a:srgbClr val="52677D"/>
                 </a:solidFill>
                 <a:latin typeface="Helvetica Neue"/>
                 <a:ea typeface="Helvetica Neue"/>
@@ -13145,7 +15201,7 @@
             <a:r>
               <a:rPr sz="1425" b="0">
                 <a:solidFill>
-                  <a:srgbClr val="61718A"/>
+                  <a:srgbClr val="52677D"/>
                 </a:solidFill>
                 <a:latin typeface="Helvetica Neue"/>
                 <a:ea typeface="Helvetica Neue"/>
@@ -13161,7 +15217,7 @@
           <p:cNvPr id="4" name="">
             <a:extLst xmlns:a="http://schemas.openxmlformats.org/drawingml/2006/main">
               <a:ext uri="{FF2B5EF4-FFF2-40B4-BE49-F238E27FC236}">
-                <a16:creationId xmlns:a16="http://schemas.microsoft.com/office/drawing/2014/main" id="{4C371417-D799-47ED-8D00-DF22F445E8B4}"/>
+                <a16:creationId xmlns:a16="http://schemas.microsoft.com/office/drawing/2014/main" id="{709F5E09-6E1A-46D8-ACB8-362C2E0597AC}"/>
               </a:ext>
             </a:extLst>
           </p:cNvPr>
@@ -13181,7 +15237,7 @@
             </a:avLst>
           </a:prstGeom>
           <a:solidFill xmlns:a="http://schemas.openxmlformats.org/drawingml/2006/main">
-            <a:srgbClr val="EEF7FF"/>
+            <a:srgbClr val="D1CFC9"/>
           </a:solidFill>
           <a:ln xmlns:a="http://schemas.openxmlformats.org/drawingml/2006/main" w="0">
             <a:noFill/>
@@ -13193,7 +15249,7 @@
           <p:cNvPr id="5" name="">
             <a:extLst xmlns:a="http://schemas.openxmlformats.org/drawingml/2006/main">
               <a:ext uri="{FF2B5EF4-FFF2-40B4-BE49-F238E27FC236}">
-                <a16:creationId xmlns:a16="http://schemas.microsoft.com/office/drawing/2014/main" id="{5955BAC7-57E7-415F-8923-3212973AF244}"/>
+                <a16:creationId xmlns:a16="http://schemas.microsoft.com/office/drawing/2014/main" id="{063545C5-8E28-4624-9E0E-6C7E85150610}"/>
               </a:ext>
             </a:extLst>
           </p:cNvPr>
@@ -13224,7 +15280,7 @@
             <a:pPr algn="l">
               <a:defRPr sz="1350" b="1">
                 <a:solidFill>
-                  <a:srgbClr val="2563EB"/>
+                  <a:srgbClr val="52677D"/>
                 </a:solidFill>
                 <a:latin typeface="Helvetica Neue"/>
                 <a:ea typeface="Helvetica Neue"/>
@@ -13234,7 +15290,7 @@
             <a:r>
               <a:rPr sz="1350" b="1">
                 <a:solidFill>
-                  <a:srgbClr val="2563EB"/>
+                  <a:srgbClr val="52677D"/>
                 </a:solidFill>
                 <a:latin typeface="Helvetica Neue"/>
                 <a:ea typeface="Helvetica Neue"/>
@@ -13250,7 +15306,7 @@
           <p:cNvPr id="6" name="">
             <a:extLst xmlns:a="http://schemas.openxmlformats.org/drawingml/2006/main">
               <a:ext uri="{FF2B5EF4-FFF2-40B4-BE49-F238E27FC236}">
-                <a16:creationId xmlns:a16="http://schemas.microsoft.com/office/drawing/2014/main" id="{5798D787-C5EE-4E12-A391-9276670F7529}"/>
+                <a16:creationId xmlns:a16="http://schemas.microsoft.com/office/drawing/2014/main" id="{66514747-4876-42E4-9737-BBCE738AA31E}"/>
               </a:ext>
             </a:extLst>
           </p:cNvPr>
@@ -13281,7 +15337,7 @@
             <a:pPr algn="l">
               <a:defRPr sz="1425" b="0">
                 <a:solidFill>
-                  <a:srgbClr val="10213D"/>
+                  <a:srgbClr val="0F1A2B"/>
                 </a:solidFill>
                 <a:latin typeface="Helvetica Neue"/>
                 <a:ea typeface="Helvetica Neue"/>
@@ -13291,7 +15347,7 @@
             <a:r>
               <a:rPr sz="1425" b="0">
                 <a:solidFill>
-                  <a:srgbClr val="10213D"/>
+                  <a:srgbClr val="0F1A2B"/>
                 </a:solidFill>
                 <a:latin typeface="Helvetica Neue"/>
                 <a:ea typeface="Helvetica Neue"/>
@@ -13307,7 +15363,7 @@
           <p:cNvPr id="7" name="">
             <a:extLst xmlns:a="http://schemas.openxmlformats.org/drawingml/2006/main">
               <a:ext uri="{FF2B5EF4-FFF2-40B4-BE49-F238E27FC236}">
-                <a16:creationId xmlns:a16="http://schemas.microsoft.com/office/drawing/2014/main" id="{A6C6C945-9D28-4E9C-BC21-0BF27B771C83}"/>
+                <a16:creationId xmlns:a16="http://schemas.microsoft.com/office/drawing/2014/main" id="{845E709D-2DC7-47B7-A142-C26C0A9F8A31}"/>
               </a:ext>
             </a:extLst>
           </p:cNvPr>
@@ -13327,7 +15383,7 @@
             </a:avLst>
           </a:prstGeom>
           <a:solidFill xmlns:a="http://schemas.openxmlformats.org/drawingml/2006/main">
-            <a:srgbClr val="EEF7FF"/>
+            <a:srgbClr val="D1CFC9"/>
           </a:solidFill>
           <a:ln xmlns:a="http://schemas.openxmlformats.org/drawingml/2006/main" w="0">
             <a:noFill/>
@@ -13339,7 +15395,7 @@
           <p:cNvPr id="8" name="">
             <a:extLst xmlns:a="http://schemas.openxmlformats.org/drawingml/2006/main">
               <a:ext uri="{FF2B5EF4-FFF2-40B4-BE49-F238E27FC236}">
-                <a16:creationId xmlns:a16="http://schemas.microsoft.com/office/drawing/2014/main" id="{C4EFAC1C-9218-49FB-BCF3-6A565DFE4409}"/>
+                <a16:creationId xmlns:a16="http://schemas.microsoft.com/office/drawing/2014/main" id="{4CFAACFC-33DB-4881-B11B-59C09257E32B}"/>
               </a:ext>
             </a:extLst>
           </p:cNvPr>
@@ -13370,7 +15426,7 @@
             <a:pPr algn="l">
               <a:defRPr sz="1350" b="1">
                 <a:solidFill>
-                  <a:srgbClr val="2563EB"/>
+                  <a:srgbClr val="52677D"/>
                 </a:solidFill>
                 <a:latin typeface="Helvetica Neue"/>
                 <a:ea typeface="Helvetica Neue"/>
@@ -13380,7 +15436,7 @@
             <a:r>
               <a:rPr sz="1350" b="1">
                 <a:solidFill>
-                  <a:srgbClr val="2563EB"/>
+                  <a:srgbClr val="52677D"/>
                 </a:solidFill>
                 <a:latin typeface="Helvetica Neue"/>
                 <a:ea typeface="Helvetica Neue"/>
@@ -13396,7 +15452,7 @@
           <p:cNvPr id="9" name="">
             <a:extLst xmlns:a="http://schemas.openxmlformats.org/drawingml/2006/main">
               <a:ext uri="{FF2B5EF4-FFF2-40B4-BE49-F238E27FC236}">
-                <a16:creationId xmlns:a16="http://schemas.microsoft.com/office/drawing/2014/main" id="{36DEF5E6-7290-46FA-89C3-9D1EED6B6014}"/>
+                <a16:creationId xmlns:a16="http://schemas.microsoft.com/office/drawing/2014/main" id="{6EAAA1E3-799C-4457-91CB-819901E8A103}"/>
               </a:ext>
             </a:extLst>
           </p:cNvPr>
@@ -13427,7 +15483,7 @@
             <a:pPr algn="l">
               <a:defRPr sz="1425" b="0">
                 <a:solidFill>
-                  <a:srgbClr val="10213D"/>
+                  <a:srgbClr val="0F1A2B"/>
                 </a:solidFill>
                 <a:latin typeface="Helvetica Neue"/>
                 <a:ea typeface="Helvetica Neue"/>
@@ -13437,7 +15493,7 @@
             <a:r>
               <a:rPr sz="1425" b="0">
                 <a:solidFill>
-                  <a:srgbClr val="10213D"/>
+                  <a:srgbClr val="0F1A2B"/>
                 </a:solidFill>
                 <a:latin typeface="Helvetica Neue"/>
                 <a:ea typeface="Helvetica Neue"/>
@@ -13453,7 +15509,7 @@
           <p:cNvPr id="10" name="">
             <a:extLst xmlns:a="http://schemas.openxmlformats.org/drawingml/2006/main">
               <a:ext uri="{FF2B5EF4-FFF2-40B4-BE49-F238E27FC236}">
-                <a16:creationId xmlns:a16="http://schemas.microsoft.com/office/drawing/2014/main" id="{A03472D6-D638-4A54-B550-B9B09CE4533C}"/>
+                <a16:creationId xmlns:a16="http://schemas.microsoft.com/office/drawing/2014/main" id="{59114A56-CA82-4392-B5B9-55CE21FB2299}"/>
               </a:ext>
             </a:extLst>
           </p:cNvPr>
@@ -13473,7 +15529,7 @@
             </a:avLst>
           </a:prstGeom>
           <a:solidFill xmlns:a="http://schemas.openxmlformats.org/drawingml/2006/main">
-            <a:srgbClr val="EEF7FF"/>
+            <a:srgbClr val="D1CFC9"/>
           </a:solidFill>
           <a:ln xmlns:a="http://schemas.openxmlformats.org/drawingml/2006/main" w="0">
             <a:noFill/>
@@ -13485,7 +15541,7 @@
           <p:cNvPr id="11" name="">
             <a:extLst xmlns:a="http://schemas.openxmlformats.org/drawingml/2006/main">
               <a:ext uri="{FF2B5EF4-FFF2-40B4-BE49-F238E27FC236}">
-                <a16:creationId xmlns:a16="http://schemas.microsoft.com/office/drawing/2014/main" id="{A678D741-578A-475E-BF38-82005D78AD1D}"/>
+                <a16:creationId xmlns:a16="http://schemas.microsoft.com/office/drawing/2014/main" id="{D17B0295-2634-45F0-89D6-5E8ABA2E0CA8}"/>
               </a:ext>
             </a:extLst>
           </p:cNvPr>
@@ -13516,7 +15572,7 @@
             <a:pPr algn="l">
               <a:defRPr sz="1350" b="1">
                 <a:solidFill>
-                  <a:srgbClr val="2563EB"/>
+                  <a:srgbClr val="52677D"/>
                 </a:solidFill>
                 <a:latin typeface="Helvetica Neue"/>
                 <a:ea typeface="Helvetica Neue"/>
@@ -13526,7 +15582,7 @@
             <a:r>
               <a:rPr sz="1350" b="1">
                 <a:solidFill>
-                  <a:srgbClr val="2563EB"/>
+                  <a:srgbClr val="52677D"/>
                 </a:solidFill>
                 <a:latin typeface="Helvetica Neue"/>
                 <a:ea typeface="Helvetica Neue"/>
@@ -13542,7 +15598,7 @@
           <p:cNvPr id="12" name="">
             <a:extLst xmlns:a="http://schemas.openxmlformats.org/drawingml/2006/main">
               <a:ext uri="{FF2B5EF4-FFF2-40B4-BE49-F238E27FC236}">
-                <a16:creationId xmlns:a16="http://schemas.microsoft.com/office/drawing/2014/main" id="{125BC033-C443-491B-B2C3-CF245F0C38D3}"/>
+                <a16:creationId xmlns:a16="http://schemas.microsoft.com/office/drawing/2014/main" id="{1D7B2E47-C37C-40D8-822D-10DC46DFF9D5}"/>
               </a:ext>
             </a:extLst>
           </p:cNvPr>
@@ -13573,7 +15629,7 @@
             <a:pPr algn="l">
               <a:defRPr sz="1425" b="0">
                 <a:solidFill>
-                  <a:srgbClr val="10213D"/>
+                  <a:srgbClr val="0F1A2B"/>
                 </a:solidFill>
                 <a:latin typeface="Helvetica Neue"/>
                 <a:ea typeface="Helvetica Neue"/>
@@ -13583,7 +15639,7 @@
             <a:r>
               <a:rPr sz="1425" b="0">
                 <a:solidFill>
-                  <a:srgbClr val="10213D"/>
+                  <a:srgbClr val="0F1A2B"/>
                 </a:solidFill>
                 <a:latin typeface="Helvetica Neue"/>
                 <a:ea typeface="Helvetica Neue"/>
@@ -13599,7 +15655,7 @@
           <p:cNvPr id="13" name="">
             <a:extLst xmlns:a="http://schemas.openxmlformats.org/drawingml/2006/main">
               <a:ext uri="{FF2B5EF4-FFF2-40B4-BE49-F238E27FC236}">
-                <a16:creationId xmlns:a16="http://schemas.microsoft.com/office/drawing/2014/main" id="{EC221843-02AC-4C0F-891E-97672CAFCE86}"/>
+                <a16:creationId xmlns:a16="http://schemas.microsoft.com/office/drawing/2014/main" id="{E9A7C2A8-7A0C-4F03-A21B-96DBDF115A22}"/>
               </a:ext>
             </a:extLst>
           </p:cNvPr>
@@ -13619,7 +15675,7 @@
             </a:avLst>
           </a:prstGeom>
           <a:solidFill xmlns:a="http://schemas.openxmlformats.org/drawingml/2006/main">
-            <a:srgbClr val="EEF7FF"/>
+            <a:srgbClr val="D1CFC9"/>
           </a:solidFill>
           <a:ln xmlns:a="http://schemas.openxmlformats.org/drawingml/2006/main" w="0">
             <a:noFill/>
@@ -13631,7 +15687,7 @@
           <p:cNvPr id="14" name="">
             <a:extLst xmlns:a="http://schemas.openxmlformats.org/drawingml/2006/main">
               <a:ext uri="{FF2B5EF4-FFF2-40B4-BE49-F238E27FC236}">
-                <a16:creationId xmlns:a16="http://schemas.microsoft.com/office/drawing/2014/main" id="{A74465B8-5228-4736-964B-583023FA8DA0}"/>
+                <a16:creationId xmlns:a16="http://schemas.microsoft.com/office/drawing/2014/main" id="{82BE225B-DB74-4E68-A17A-D27FCE29B0B3}"/>
               </a:ext>
             </a:extLst>
           </p:cNvPr>
@@ -13662,7 +15718,7 @@
             <a:pPr algn="l">
               <a:defRPr sz="1350" b="1">
                 <a:solidFill>
-                  <a:srgbClr val="2563EB"/>
+                  <a:srgbClr val="52677D"/>
                 </a:solidFill>
                 <a:latin typeface="Helvetica Neue"/>
                 <a:ea typeface="Helvetica Neue"/>
@@ -13672,7 +15728,7 @@
             <a:r>
               <a:rPr sz="1350" b="1">
                 <a:solidFill>
-                  <a:srgbClr val="2563EB"/>
+                  <a:srgbClr val="52677D"/>
                 </a:solidFill>
                 <a:latin typeface="Helvetica Neue"/>
                 <a:ea typeface="Helvetica Neue"/>
@@ -13688,7 +15744,7 @@
           <p:cNvPr id="15" name="">
             <a:extLst xmlns:a="http://schemas.openxmlformats.org/drawingml/2006/main">
               <a:ext uri="{FF2B5EF4-FFF2-40B4-BE49-F238E27FC236}">
-                <a16:creationId xmlns:a16="http://schemas.microsoft.com/office/drawing/2014/main" id="{A78DFE55-27B9-42CB-A392-D5EB4D8A5011}"/>
+                <a16:creationId xmlns:a16="http://schemas.microsoft.com/office/drawing/2014/main" id="{4C83DB18-4778-4B3A-B9AF-E81988128355}"/>
               </a:ext>
             </a:extLst>
           </p:cNvPr>
@@ -13719,7 +15775,7 @@
             <a:pPr algn="l">
               <a:defRPr sz="1425" b="0">
                 <a:solidFill>
-                  <a:srgbClr val="10213D"/>
+                  <a:srgbClr val="0F1A2B"/>
                 </a:solidFill>
                 <a:latin typeface="Helvetica Neue"/>
                 <a:ea typeface="Helvetica Neue"/>
@@ -13729,7 +15785,7 @@
             <a:r>
               <a:rPr sz="1425" b="0">
                 <a:solidFill>
-                  <a:srgbClr val="10213D"/>
+                  <a:srgbClr val="0F1A2B"/>
                 </a:solidFill>
                 <a:latin typeface="Helvetica Neue"/>
                 <a:ea typeface="Helvetica Neue"/>
@@ -13745,7 +15801,7 @@
           <p:cNvPr id="16" name="">
             <a:extLst xmlns:a="http://schemas.openxmlformats.org/drawingml/2006/main">
               <a:ext uri="{FF2B5EF4-FFF2-40B4-BE49-F238E27FC236}">
-                <a16:creationId xmlns:a16="http://schemas.microsoft.com/office/drawing/2014/main" id="{A013183C-FD9F-48AB-BD94-70C9191EDD0D}"/>
+                <a16:creationId xmlns:a16="http://schemas.microsoft.com/office/drawing/2014/main" id="{42AED331-6AAC-4A07-B2DE-E31DF209E003}"/>
               </a:ext>
             </a:extLst>
           </p:cNvPr>
@@ -13765,7 +15821,7 @@
             </a:avLst>
           </a:prstGeom>
           <a:solidFill xmlns:a="http://schemas.openxmlformats.org/drawingml/2006/main">
-            <a:srgbClr val="EEF7FF"/>
+            <a:srgbClr val="D1CFC9"/>
           </a:solidFill>
           <a:ln xmlns:a="http://schemas.openxmlformats.org/drawingml/2006/main" w="0">
             <a:noFill/>
@@ -13777,7 +15833,7 @@
           <p:cNvPr id="17" name="">
             <a:extLst xmlns:a="http://schemas.openxmlformats.org/drawingml/2006/main">
               <a:ext uri="{FF2B5EF4-FFF2-40B4-BE49-F238E27FC236}">
-                <a16:creationId xmlns:a16="http://schemas.microsoft.com/office/drawing/2014/main" id="{9A61D363-E985-49D2-A7F1-70B8FDE2670E}"/>
+                <a16:creationId xmlns:a16="http://schemas.microsoft.com/office/drawing/2014/main" id="{F8BB8512-E0AB-4D62-A245-D939184F9326}"/>
               </a:ext>
             </a:extLst>
           </p:cNvPr>
@@ -13808,7 +15864,7 @@
             <a:pPr algn="l">
               <a:defRPr sz="1350" b="1">
                 <a:solidFill>
-                  <a:srgbClr val="2563EB"/>
+                  <a:srgbClr val="52677D"/>
                 </a:solidFill>
                 <a:latin typeface="Helvetica Neue"/>
                 <a:ea typeface="Helvetica Neue"/>
@@ -13818,7 +15874,7 @@
             <a:r>
               <a:rPr sz="1350" b="1">
                 <a:solidFill>
-                  <a:srgbClr val="2563EB"/>
+                  <a:srgbClr val="52677D"/>
                 </a:solidFill>
                 <a:latin typeface="Helvetica Neue"/>
                 <a:ea typeface="Helvetica Neue"/>
@@ -13834,7 +15890,7 @@
           <p:cNvPr id="18" name="">
             <a:extLst xmlns:a="http://schemas.openxmlformats.org/drawingml/2006/main">
               <a:ext uri="{FF2B5EF4-FFF2-40B4-BE49-F238E27FC236}">
-                <a16:creationId xmlns:a16="http://schemas.microsoft.com/office/drawing/2014/main" id="{AFCA2E75-1A5F-4FF4-9B9C-183C4B3B18B6}"/>
+                <a16:creationId xmlns:a16="http://schemas.microsoft.com/office/drawing/2014/main" id="{0F354B3D-789C-4357-B393-2466F241B3E3}"/>
               </a:ext>
             </a:extLst>
           </p:cNvPr>
@@ -13865,7 +15921,7 @@
             <a:pPr algn="l">
               <a:defRPr sz="1425" b="0">
                 <a:solidFill>
-                  <a:srgbClr val="10213D"/>
+                  <a:srgbClr val="0F1A2B"/>
                 </a:solidFill>
                 <a:latin typeface="Helvetica Neue"/>
                 <a:ea typeface="Helvetica Neue"/>
@@ -13875,7 +15931,7 @@
             <a:r>
               <a:rPr sz="1425" b="0">
                 <a:solidFill>
-                  <a:srgbClr val="10213D"/>
+                  <a:srgbClr val="0F1A2B"/>
                 </a:solidFill>
                 <a:latin typeface="Helvetica Neue"/>
                 <a:ea typeface="Helvetica Neue"/>
@@ -13891,7 +15947,7 @@
           <p:cNvPr id="19" name="">
             <a:extLst xmlns:a="http://schemas.openxmlformats.org/drawingml/2006/main">
               <a:ext uri="{FF2B5EF4-FFF2-40B4-BE49-F238E27FC236}">
-                <a16:creationId xmlns:a16="http://schemas.microsoft.com/office/drawing/2014/main" id="{4E8AC01B-CC68-4FBD-ACA1-3056A36DBE15}"/>
+                <a16:creationId xmlns:a16="http://schemas.microsoft.com/office/drawing/2014/main" id="{7D181CD7-EDFA-4B88-8B92-F05A4E1CE757}"/>
               </a:ext>
             </a:extLst>
           </p:cNvPr>
@@ -13911,7 +15967,7 @@
             </a:avLst>
           </a:prstGeom>
           <a:solidFill xmlns:a="http://schemas.openxmlformats.org/drawingml/2006/main">
-            <a:srgbClr val="EEF7FF"/>
+            <a:srgbClr val="D1CFC9"/>
           </a:solidFill>
           <a:ln xmlns:a="http://schemas.openxmlformats.org/drawingml/2006/main" w="0">
             <a:noFill/>
@@ -13923,7 +15979,7 @@
           <p:cNvPr id="20" name="">
             <a:extLst xmlns:a="http://schemas.openxmlformats.org/drawingml/2006/main">
               <a:ext uri="{FF2B5EF4-FFF2-40B4-BE49-F238E27FC236}">
-                <a16:creationId xmlns:a16="http://schemas.microsoft.com/office/drawing/2014/main" id="{B5E91F26-92B6-4B01-B84C-1F39B5478C8F}"/>
+                <a16:creationId xmlns:a16="http://schemas.microsoft.com/office/drawing/2014/main" id="{D91D1EDC-C4DF-41B2-B865-F103E54432B7}"/>
               </a:ext>
             </a:extLst>
           </p:cNvPr>
@@ -13954,7 +16010,7 @@
             <a:pPr algn="l">
               <a:defRPr sz="1350" b="1">
                 <a:solidFill>
-                  <a:srgbClr val="2563EB"/>
+                  <a:srgbClr val="52677D"/>
                 </a:solidFill>
                 <a:latin typeface="Helvetica Neue"/>
                 <a:ea typeface="Helvetica Neue"/>
@@ -13964,7 +16020,7 @@
             <a:r>
               <a:rPr sz="1350" b="1">
                 <a:solidFill>
-                  <a:srgbClr val="2563EB"/>
+                  <a:srgbClr val="52677D"/>
                 </a:solidFill>
                 <a:latin typeface="Helvetica Neue"/>
                 <a:ea typeface="Helvetica Neue"/>
@@ -13980,7 +16036,7 @@
           <p:cNvPr id="21" name="">
             <a:extLst xmlns:a="http://schemas.openxmlformats.org/drawingml/2006/main">
               <a:ext uri="{FF2B5EF4-FFF2-40B4-BE49-F238E27FC236}">
-                <a16:creationId xmlns:a16="http://schemas.microsoft.com/office/drawing/2014/main" id="{3EC95E0E-0276-43D0-9382-BE48A53F4499}"/>
+                <a16:creationId xmlns:a16="http://schemas.microsoft.com/office/drawing/2014/main" id="{2171722E-0DF4-449E-A047-04901C036CE8}"/>
               </a:ext>
             </a:extLst>
           </p:cNvPr>
@@ -14011,7 +16067,7 @@
             <a:pPr algn="l">
               <a:defRPr sz="1425" b="0">
                 <a:solidFill>
-                  <a:srgbClr val="10213D"/>
+                  <a:srgbClr val="0F1A2B"/>
                 </a:solidFill>
                 <a:latin typeface="Helvetica Neue"/>
                 <a:ea typeface="Helvetica Neue"/>
@@ -14021,7 +16077,7 @@
             <a:r>
               <a:rPr sz="1425" b="0">
                 <a:solidFill>
-                  <a:srgbClr val="10213D"/>
+                  <a:srgbClr val="0F1A2B"/>
                 </a:solidFill>
                 <a:latin typeface="Helvetica Neue"/>
                 <a:ea typeface="Helvetica Neue"/>
@@ -14037,7 +16093,7 @@
           <p:cNvPr id="22" name="">
             <a:extLst xmlns:a="http://schemas.openxmlformats.org/drawingml/2006/main">
               <a:ext uri="{FF2B5EF4-FFF2-40B4-BE49-F238E27FC236}">
-                <a16:creationId xmlns:a16="http://schemas.microsoft.com/office/drawing/2014/main" id="{BECB7A6C-8E87-4953-AC6E-20FA42660077}"/>
+                <a16:creationId xmlns:a16="http://schemas.microsoft.com/office/drawing/2014/main" id="{C12167E0-5F89-4A69-B9C9-9727DD82B941}"/>
               </a:ext>
             </a:extLst>
           </p:cNvPr>
@@ -14057,7 +16113,7 @@
             </a:avLst>
           </a:prstGeom>
           <a:solidFill xmlns:a="http://schemas.openxmlformats.org/drawingml/2006/main">
-            <a:srgbClr val="EEF7FF"/>
+            <a:srgbClr val="D1CFC9"/>
           </a:solidFill>
           <a:ln xmlns:a="http://schemas.openxmlformats.org/drawingml/2006/main" w="0">
             <a:noFill/>
@@ -14069,7 +16125,7 @@
           <p:cNvPr id="23" name="">
             <a:extLst xmlns:a="http://schemas.openxmlformats.org/drawingml/2006/main">
               <a:ext uri="{FF2B5EF4-FFF2-40B4-BE49-F238E27FC236}">
-                <a16:creationId xmlns:a16="http://schemas.microsoft.com/office/drawing/2014/main" id="{1FF67796-2194-4E55-B68B-67CF2B5534D6}"/>
+                <a16:creationId xmlns:a16="http://schemas.microsoft.com/office/drawing/2014/main" id="{A6013985-8E75-4665-A4D8-81423D83A455}"/>
               </a:ext>
             </a:extLst>
           </p:cNvPr>
@@ -14100,7 +16156,7 @@
             <a:pPr algn="l">
               <a:defRPr sz="1350" b="0">
                 <a:solidFill>
-                  <a:srgbClr val="092454"/>
+                  <a:srgbClr val="1C2E4A"/>
                 </a:solidFill>
                 <a:latin typeface="Helvetica Neue"/>
                 <a:ea typeface="Helvetica Neue"/>
@@ -14110,7 +16166,7 @@
             <a:r>
               <a:rPr sz="1350" b="0">
                 <a:solidFill>
-                  <a:srgbClr val="092454"/>
+                  <a:srgbClr val="1C2E4A"/>
                 </a:solidFill>
                 <a:latin typeface="Helvetica Neue"/>
                 <a:ea typeface="Helvetica Neue"/>
@@ -14126,7 +16182,7 @@
           <p:cNvPr id="24" name="">
             <a:extLst xmlns:a="http://schemas.openxmlformats.org/drawingml/2006/main">
               <a:ext uri="{FF2B5EF4-FFF2-40B4-BE49-F238E27FC236}">
-                <a16:creationId xmlns:a16="http://schemas.microsoft.com/office/drawing/2014/main" id="{9047C101-4E91-483A-9A23-35F3F07CF67C}"/>
+                <a16:creationId xmlns:a16="http://schemas.microsoft.com/office/drawing/2014/main" id="{8353EDEE-F88A-4269-9A4D-77BBDAF72486}"/>
               </a:ext>
             </a:extLst>
           </p:cNvPr>
@@ -14144,7 +16200,7 @@
             <a:avLst/>
           </a:prstGeom>
           <a:solidFill xmlns:a="http://schemas.openxmlformats.org/drawingml/2006/main">
-            <a:srgbClr val="D8E5F2"/>
+            <a:srgbClr val="BDC4D4"/>
           </a:solidFill>
           <a:ln xmlns:a="http://schemas.openxmlformats.org/drawingml/2006/main" w="0">
             <a:noFill/>
@@ -14156,7 +16212,7 @@
           <p:cNvPr id="25" name="">
             <a:extLst xmlns:a="http://schemas.openxmlformats.org/drawingml/2006/main">
               <a:ext uri="{FF2B5EF4-FFF2-40B4-BE49-F238E27FC236}">
-                <a16:creationId xmlns:a16="http://schemas.microsoft.com/office/drawing/2014/main" id="{9E685B44-578D-4C6C-A52D-09A364AD6B7A}"/>
+                <a16:creationId xmlns:a16="http://schemas.microsoft.com/office/drawing/2014/main" id="{39183C8A-0B6E-4E75-BADB-B348356D4DED}"/>
               </a:ext>
             </a:extLst>
           </p:cNvPr>
@@ -14187,7 +16243,7 @@
             <a:pPr algn="l">
               <a:defRPr sz="750" b="0">
                 <a:solidFill>
-                  <a:srgbClr val="61718A"/>
+                  <a:srgbClr val="52677D"/>
                 </a:solidFill>
                 <a:latin typeface="Helvetica Neue"/>
                 <a:ea typeface="Helvetica Neue"/>
@@ -14197,7 +16253,7 @@
             <a:r>
               <a:rPr sz="750" b="0">
                 <a:solidFill>
-                  <a:srgbClr val="61718A"/>
+                  <a:srgbClr val="52677D"/>
                 </a:solidFill>
                 <a:latin typeface="Helvetica Neue"/>
                 <a:ea typeface="Helvetica Neue"/>
@@ -14213,7 +16269,7 @@
           <p:cNvPr id="26" name="">
             <a:extLst xmlns:a="http://schemas.openxmlformats.org/drawingml/2006/main">
               <a:ext uri="{FF2B5EF4-FFF2-40B4-BE49-F238E27FC236}">
-                <a16:creationId xmlns:a16="http://schemas.microsoft.com/office/drawing/2014/main" id="{4B35B072-3BC5-4E46-9998-C195BEFFE58A}"/>
+                <a16:creationId xmlns:a16="http://schemas.microsoft.com/office/drawing/2014/main" id="{69E37390-987E-4405-9E16-0CF4E7605BB3}"/>
               </a:ext>
             </a:extLst>
           </p:cNvPr>
@@ -14244,7 +16300,7 @@
             <a:pPr algn="r">
               <a:defRPr sz="825" b="1">
                 <a:solidFill>
-                  <a:srgbClr val="2563EB"/>
+                  <a:srgbClr val="52677D"/>
                 </a:solidFill>
                 <a:latin typeface="Helvetica Neue"/>
                 <a:ea typeface="Helvetica Neue"/>
@@ -14254,7 +16310,7 @@
             <a:r>
               <a:rPr sz="825" b="1">
                 <a:solidFill>
-                  <a:srgbClr val="2563EB"/>
+                  <a:srgbClr val="52677D"/>
                 </a:solidFill>
                 <a:latin typeface="Helvetica Neue"/>
                 <a:ea typeface="Helvetica Neue"/>
@@ -14268,7 +16324,7 @@
     </p:spTree>
     <p:extLst>
       <p:ext uri="{BB962C8B-B14F-4D97-AF65-F5344CB8AC3E}">
-        <p14:creationId xmlns:p14="http://schemas.microsoft.com/office/powerpoint/2010/main" val="1791978313"/>
+        <p14:creationId xmlns:p14="http://schemas.microsoft.com/office/powerpoint/2010/main" val="1331390481"/>
       </p:ext>
     </p:extLst>
   </p:cSld>
